--- a/Презентация/Итоговая защита/4 AeroMonitor.pptx
+++ b/Презентация/Итоговая защита/4 AeroMonitor.pptx
@@ -7,13 +7,12 @@
   </p:sldMasterIdLst>
   <p:sldIdLst>
     <p:sldId id="256" r:id="rId3"/>
-    <p:sldId id="257" r:id="rId4"/>
-    <p:sldId id="258" r:id="rId5"/>
-    <p:sldId id="262" r:id="rId6"/>
-    <p:sldId id="279" r:id="rId7"/>
-    <p:sldId id="265" r:id="rId8"/>
-    <p:sldId id="278" r:id="rId9"/>
-    <p:sldId id="280" r:id="rId10"/>
+    <p:sldId id="280" r:id="rId4"/>
+    <p:sldId id="279" r:id="rId5"/>
+    <p:sldId id="287" r:id="rId6"/>
+    <p:sldId id="286" r:id="rId7"/>
+    <p:sldId id="285" r:id="rId8"/>
+    <p:sldId id="283" r:id="rId9"/>
   </p:sldIdLst>
   <p:sldSz cx="12192000" cy="6858000"/>
   <p:notesSz cx="6858000" cy="9144000"/>
@@ -113,9 +112,24 @@
     </a:lvl9pPr>
   </p:defaultTextStyle>
   <p:extLst>
+    <p:ext uri="{521415D9-36F7-43E2-AB2F-B90AF26B5E84}">
+      <p14:sectionLst xmlns:p14="http://schemas.microsoft.com/office/powerpoint/2010/main">
+        <p14:section name="Раздел по умолчанию" id="{B2546C11-D457-469F-B42D-1D8F5D6888A9}">
+          <p14:sldIdLst>
+            <p14:sldId id="256"/>
+            <p14:sldId id="280"/>
+            <p14:sldId id="279"/>
+            <p14:sldId id="287"/>
+            <p14:sldId id="286"/>
+            <p14:sldId id="285"/>
+            <p14:sldId id="283"/>
+          </p14:sldIdLst>
+        </p14:section>
+      </p14:sectionLst>
+    </p:ext>
     <p:ext uri="{EFAFB233-063F-42B5-8137-9DF3F51BA10A}">
       <p15:sldGuideLst xmlns:p15="http://schemas.microsoft.com/office/powerpoint/2012/main">
-        <p15:guide id="1" orient="horz" pos="1003" userDrawn="1">
+        <p15:guide id="1" orient="horz" pos="777" userDrawn="1">
           <p15:clr>
             <a:srgbClr val="A4A3A4"/>
           </p15:clr>
@@ -5724,8 +5738,8 @@
         </p:nvSpPr>
         <p:spPr>
           <a:xfrm>
-            <a:off x="384040" y="2776374"/>
-            <a:ext cx="4841103" cy="942771"/>
+            <a:off x="384040" y="2776375"/>
+            <a:ext cx="4841103" cy="409320"/>
           </a:xfrm>
           <a:prstGeom prst="rect">
             <a:avLst/>
@@ -5746,15 +5760,6 @@
               <a:t>Прототип интеллектуальной системы контроля качества воздуха для больших зданий</a:t>
             </a:r>
           </a:p>
-          <a:p>
-            <a:endParaRPr lang="en-US" sz="1600" dirty="0"/>
-          </a:p>
-          <a:p>
-            <a:r>
-              <a:rPr lang="ru-RU" sz="1600" b="1" i="1" dirty="0"/>
-              <a:t>Итоги 3 спринта</a:t>
-            </a:r>
-          </a:p>
         </p:txBody>
       </p:sp>
       <p:cxnSp>
@@ -5765,7 +5770,7 @@
         </p:nvCxnSpPr>
         <p:spPr>
           <a:xfrm>
-            <a:off x="384040" y="3788525"/>
+            <a:off x="384040" y="3524756"/>
             <a:ext cx="4710474" cy="0"/>
           </a:xfrm>
           <a:prstGeom prst="straightConnector1">
@@ -5803,6 +5808,233 @@
           </a:ln>
         </p:spPr>
       </p:pic>
+      <p:sp>
+        <p:nvSpPr>
+          <p:cNvPr id="6" name="TextBox 5">
+            <a:extLst>
+              <a:ext uri="{FF2B5EF4-FFF2-40B4-BE49-F238E27FC236}">
+                <a16:creationId xmlns:a16="http://schemas.microsoft.com/office/drawing/2014/main" id="{FC85D806-9C5D-64EC-0D4D-7A9F2BA23C37}"/>
+              </a:ext>
+            </a:extLst>
+          </p:cNvPr>
+          <p:cNvSpPr txBox="1"/>
+          <p:nvPr/>
+        </p:nvSpPr>
+        <p:spPr>
+          <a:xfrm>
+            <a:off x="384041" y="3863818"/>
+            <a:ext cx="4743606" cy="2031325"/>
+          </a:xfrm>
+          <a:prstGeom prst="rect">
+            <a:avLst/>
+          </a:prstGeom>
+          <a:noFill/>
+        </p:spPr>
+        <p:txBody>
+          <a:bodyPr wrap="none" rtlCol="0">
+            <a:spAutoFit/>
+          </a:bodyPr>
+          <a:lstStyle/>
+          <a:p>
+            <a:r>
+              <a:rPr lang="ru-RU" b="1" dirty="0">
+                <a:latin typeface="Consolas" panose="020B0609020204030204" pitchFamily="49" charset="0"/>
+              </a:rPr>
+              <a:t>Команда</a:t>
+            </a:r>
+            <a:r>
+              <a:rPr lang="en-US" b="1" dirty="0">
+                <a:latin typeface="Consolas" panose="020B0609020204030204" pitchFamily="49" charset="0"/>
+              </a:rPr>
+              <a:t> 13</a:t>
+            </a:r>
+            <a:endParaRPr lang="ru-RU" dirty="0">
+              <a:latin typeface="Consolas" panose="020B0609020204030204" pitchFamily="49" charset="0"/>
+            </a:endParaRPr>
+          </a:p>
+          <a:p>
+            <a:r>
+              <a:rPr lang="ru-RU" dirty="0">
+                <a:latin typeface="Consolas" panose="020B0609020204030204" pitchFamily="49" charset="0"/>
+              </a:rPr>
+              <a:t>1. Харлов Максим @maksimkharlovv</a:t>
+            </a:r>
+          </a:p>
+          <a:p>
+            <a:r>
+              <a:rPr lang="ru-RU" dirty="0">
+                <a:latin typeface="Consolas" panose="020B0609020204030204" pitchFamily="49" charset="0"/>
+              </a:rPr>
+              <a:t>2. </a:t>
+            </a:r>
+            <a:r>
+              <a:rPr lang="ru-RU" dirty="0" err="1">
+                <a:latin typeface="Consolas" panose="020B0609020204030204" pitchFamily="49" charset="0"/>
+              </a:rPr>
+              <a:t>Лещишин</a:t>
+            </a:r>
+            <a:r>
+              <a:rPr lang="ru-RU" dirty="0">
+                <a:latin typeface="Consolas" panose="020B0609020204030204" pitchFamily="49" charset="0"/>
+              </a:rPr>
+              <a:t> Роман @Roman36519</a:t>
+            </a:r>
+          </a:p>
+          <a:p>
+            <a:r>
+              <a:rPr lang="ru-RU" dirty="0">
+                <a:latin typeface="Consolas" panose="020B0609020204030204" pitchFamily="49" charset="0"/>
+              </a:rPr>
+              <a:t>3. Неустроев Илья @NeustroevIL</a:t>
+            </a:r>
+          </a:p>
+          <a:p>
+            <a:r>
+              <a:rPr lang="ru-RU" dirty="0">
+                <a:latin typeface="Consolas" panose="020B0609020204030204" pitchFamily="49" charset="0"/>
+              </a:rPr>
+              <a:t>4. </a:t>
+            </a:r>
+            <a:r>
+              <a:rPr lang="ru-RU" dirty="0" err="1">
+                <a:latin typeface="Consolas" panose="020B0609020204030204" pitchFamily="49" charset="0"/>
+              </a:rPr>
+              <a:t>Cавельев</a:t>
+            </a:r>
+            <a:r>
+              <a:rPr lang="ru-RU" dirty="0">
+                <a:latin typeface="Consolas" panose="020B0609020204030204" pitchFamily="49" charset="0"/>
+              </a:rPr>
+              <a:t> Денис @DenisSavelev2025</a:t>
+            </a:r>
+            <a:endParaRPr lang="en-US" dirty="0">
+              <a:latin typeface="Consolas" panose="020B0609020204030204" pitchFamily="49" charset="0"/>
+            </a:endParaRPr>
+          </a:p>
+          <a:p>
+            <a:r>
+              <a:rPr lang="ru-RU" dirty="0">
+                <a:latin typeface="Consolas" panose="020B0609020204030204" pitchFamily="49" charset="0"/>
+              </a:rPr>
+              <a:t>5. </a:t>
+            </a:r>
+            <a:r>
+              <a:rPr lang="ru-RU" dirty="0" err="1">
+                <a:latin typeface="Consolas" panose="020B0609020204030204" pitchFamily="49" charset="0"/>
+              </a:rPr>
+              <a:t>Метиекам</a:t>
+            </a:r>
+            <a:r>
+              <a:rPr lang="ru-RU" dirty="0">
+                <a:latin typeface="Consolas" panose="020B0609020204030204" pitchFamily="49" charset="0"/>
+              </a:rPr>
+              <a:t> </a:t>
+            </a:r>
+            <a:r>
+              <a:rPr lang="ru-RU" dirty="0" err="1">
+                <a:latin typeface="Consolas" panose="020B0609020204030204" pitchFamily="49" charset="0"/>
+              </a:rPr>
+              <a:t>Коаье</a:t>
+            </a:r>
+            <a:r>
+              <a:rPr lang="ru-RU" dirty="0">
+                <a:latin typeface="Consolas" panose="020B0609020204030204" pitchFamily="49" charset="0"/>
+              </a:rPr>
+              <a:t> </a:t>
+            </a:r>
+            <a:r>
+              <a:rPr lang="ru-RU" dirty="0" err="1">
+                <a:latin typeface="Consolas" panose="020B0609020204030204" pitchFamily="49" charset="0"/>
+              </a:rPr>
+              <a:t>Мануэль</a:t>
+            </a:r>
+            <a:r>
+              <a:rPr lang="ru-RU" dirty="0">
+                <a:latin typeface="Consolas" panose="020B0609020204030204" pitchFamily="49" charset="0"/>
+              </a:rPr>
+              <a:t> </a:t>
+            </a:r>
+            <a:r>
+              <a:rPr lang="ru-RU" dirty="0" err="1">
+                <a:latin typeface="Consolas" panose="020B0609020204030204" pitchFamily="49" charset="0"/>
+              </a:rPr>
+              <a:t>Патрисия</a:t>
+            </a:r>
+            <a:endParaRPr lang="ru-RU" dirty="0">
+              <a:latin typeface="Consolas" panose="020B0609020204030204" pitchFamily="49" charset="0"/>
+            </a:endParaRPr>
+          </a:p>
+          <a:p>
+            <a:endParaRPr lang="ru-RU" dirty="0">
+              <a:latin typeface="Consolas" panose="020B0609020204030204" pitchFamily="49" charset="0"/>
+            </a:endParaRPr>
+          </a:p>
+        </p:txBody>
+      </p:sp>
+      <p:sp>
+        <p:nvSpPr>
+          <p:cNvPr id="7" name="TextBox 6">
+            <a:extLst>
+              <a:ext uri="{FF2B5EF4-FFF2-40B4-BE49-F238E27FC236}">
+                <a16:creationId xmlns:a16="http://schemas.microsoft.com/office/drawing/2014/main" id="{8FADBA66-CB68-0276-8050-5DDD5CF0BE2B}"/>
+              </a:ext>
+            </a:extLst>
+          </p:cNvPr>
+          <p:cNvSpPr txBox="1"/>
+          <p:nvPr/>
+        </p:nvSpPr>
+        <p:spPr>
+          <a:xfrm>
+            <a:off x="384040" y="5522333"/>
+            <a:ext cx="4445135" cy="923330"/>
+          </a:xfrm>
+          <a:prstGeom prst="rect">
+            <a:avLst/>
+          </a:prstGeom>
+          <a:noFill/>
+        </p:spPr>
+        <p:txBody>
+          <a:bodyPr wrap="square" rtlCol="0">
+            <a:spAutoFit/>
+          </a:bodyPr>
+          <a:lstStyle/>
+          <a:p>
+            <a:r>
+              <a:rPr lang="en-US" b="1" dirty="0" err="1">
+                <a:latin typeface="Consolas" panose="020B0609020204030204" pitchFamily="49" charset="0"/>
+              </a:rPr>
+              <a:t>github</a:t>
+            </a:r>
+            <a:r>
+              <a:rPr lang="ru-RU" b="1" dirty="0">
+                <a:latin typeface="Consolas" panose="020B0609020204030204" pitchFamily="49" charset="0"/>
+              </a:rPr>
+              <a:t>:</a:t>
+            </a:r>
+          </a:p>
+          <a:p>
+            <a:r>
+              <a:rPr lang="en-US" dirty="0">
+                <a:solidFill>
+                  <a:schemeClr val="bg1">
+                    <a:lumMod val="25000"/>
+                  </a:schemeClr>
+                </a:solidFill>
+                <a:latin typeface="Consolas" panose="020B0609020204030204" pitchFamily="49" charset="0"/>
+              </a:rPr>
+              <a:t>https://github.com/IlyyaNeustroev/airQuality</a:t>
+            </a:r>
+            <a:endParaRPr lang="ru-RU" dirty="0">
+              <a:solidFill>
+                <a:schemeClr val="bg1">
+                  <a:lumMod val="25000"/>
+                </a:schemeClr>
+              </a:solidFill>
+              <a:latin typeface="Consolas" panose="020B0609020204030204" pitchFamily="49" charset="0"/>
+            </a:endParaRPr>
+          </a:p>
+        </p:txBody>
+      </p:sp>
     </p:spTree>
   </p:cSld>
   <p:clrMapOvr>
@@ -5830,18 +6062,16 @@
       </p:grpSpPr>
       <p:sp>
         <p:nvSpPr>
-          <p:cNvPr id="67" name="PlaceHolder 1"/>
-          <p:cNvSpPr>
-            <a:spLocks noGrp="1"/>
+          <p:cNvPr id="11" name="Заголовок 1"/>
+          <p:cNvSpPr txBox="1">
+            <a:spLocks/>
           </p:cNvSpPr>
-          <p:nvPr>
-            <p:ph type="title"/>
-          </p:nvPr>
+          <p:nvPr/>
         </p:nvSpPr>
         <p:spPr>
           <a:xfrm>
-            <a:off x="371475" y="897463"/>
-            <a:ext cx="7714800" cy="694800"/>
+            <a:off x="361950" y="491681"/>
+            <a:ext cx="8573314" cy="741807"/>
           </a:xfrm>
           <a:prstGeom prst="rect">
             <a:avLst/>
@@ -5852,53 +6082,48 @@
           </a:ln>
         </p:spPr>
         <p:txBody>
-          <a:bodyPr lIns="91440" tIns="91440" rIns="91440" bIns="91440" anchor="t">
-            <a:normAutofit fontScale="90000"/>
+          <a:bodyPr lIns="91440" tIns="91440" rIns="91440" bIns="91440" anchor="b">
+            <a:noAutofit/>
           </a:bodyPr>
-          <a:lstStyle/>
+          <a:lstStyle>
+            <a:lvl1pPr indent="0" algn="l" defTabSz="914378" rtl="0" eaLnBrk="1" latinLnBrk="0" hangingPunct="1">
+              <a:lnSpc>
+                <a:spcPct val="90000"/>
+              </a:lnSpc>
+              <a:spcBef>
+                <a:spcPct val="0"/>
+              </a:spcBef>
+              <a:buNone/>
+              <a:defRPr sz="4400" kern="1200">
+                <a:solidFill>
+                  <a:schemeClr val="tx1"/>
+                </a:solidFill>
+                <a:latin typeface="+mj-lt"/>
+                <a:ea typeface="+mj-ea"/>
+                <a:cs typeface="+mj-cs"/>
+              </a:defRPr>
+            </a:lvl1pPr>
+          </a:lstStyle>
           <a:p>
-            <a:pPr>
-              <a:lnSpc>
-                <a:spcPct val="100000"/>
-              </a:lnSpc>
-              <a:tabLst>
-                <a:tab pos="0" algn="l"/>
-              </a:tabLst>
-            </a:pPr>
-            <a:r>
-              <a:rPr lang="ru-RU" sz="4000" b="1" dirty="0">
-                <a:solidFill>
-                  <a:schemeClr val="dk1"/>
-                </a:solidFill>
+            <a:r>
+              <a:rPr lang="ru-RU" sz="3600" b="1" dirty="0">
                 <a:latin typeface="Outfit"/>
               </a:rPr>
-              <a:t>Команда 13</a:t>
-            </a:r>
-            <a:endParaRPr lang="fr-FR" sz="4000" dirty="0">
-              <a:solidFill>
-                <a:schemeClr val="dk1"/>
-              </a:solidFill>
-              <a:latin typeface="Arial"/>
-            </a:endParaRPr>
+              <a:t>Решение бизнес задачи</a:t>
+            </a:r>
           </a:p>
         </p:txBody>
       </p:sp>
       <p:sp>
         <p:nvSpPr>
-          <p:cNvPr id="5" name="TextBox 4">
-            <a:extLst>
-              <a:ext uri="{FF2B5EF4-FFF2-40B4-BE49-F238E27FC236}">
-                <a16:creationId xmlns:a16="http://schemas.microsoft.com/office/drawing/2014/main" id="{FC85D806-9C5D-64EC-0D4D-7A9F2BA23C37}"/>
-              </a:ext>
-            </a:extLst>
-          </p:cNvPr>
+          <p:cNvPr id="13" name="TextBox 12"/>
           <p:cNvSpPr txBox="1"/>
           <p:nvPr/>
         </p:nvSpPr>
         <p:spPr>
           <a:xfrm>
-            <a:off x="5309389" y="1839037"/>
-            <a:ext cx="4870244" cy="2031325"/>
+            <a:off x="613854" y="3002690"/>
+            <a:ext cx="10996096" cy="923330"/>
           </a:xfrm>
           <a:prstGeom prst="rect">
             <a:avLst/>
@@ -5906,130 +6131,152 @@
           <a:noFill/>
         </p:spPr>
         <p:txBody>
-          <a:bodyPr wrap="none" rtlCol="0">
+          <a:bodyPr wrap="square" rtlCol="0">
             <a:spAutoFit/>
           </a:bodyPr>
           <a:lstStyle/>
           <a:p>
+            <a:pPr algn="just"/>
             <a:r>
               <a:rPr lang="ru-RU" b="1" dirty="0">
                 <a:latin typeface="Consolas" panose="020B0609020204030204" pitchFamily="49" charset="0"/>
+                <a:ea typeface="Tahoma" panose="020B0604030504040204" pitchFamily="34" charset="0"/>
+                <a:cs typeface="Tahoma" panose="020B0604030504040204" pitchFamily="34" charset="0"/>
               </a:rPr>
-              <a:t>Список команды</a:t>
-            </a:r>
-            <a:endParaRPr lang="ru-RU" dirty="0">
-              <a:latin typeface="Consolas" panose="020B0609020204030204" pitchFamily="49" charset="0"/>
-            </a:endParaRPr>
+              <a:t>Ключевой принцип:</a:t>
+            </a:r>
           </a:p>
           <a:p>
-            <a:r>
-              <a:rPr lang="ru-RU" dirty="0">
-                <a:latin typeface="Consolas" panose="020B0609020204030204" pitchFamily="49" charset="0"/>
-              </a:rPr>
-              <a:t>1.   Харлов Максим @maksimkharlovv</a:t>
-            </a:r>
-          </a:p>
-          <a:p>
-            <a:r>
-              <a:rPr lang="ru-RU" dirty="0">
-                <a:latin typeface="Consolas" panose="020B0609020204030204" pitchFamily="49" charset="0"/>
-              </a:rPr>
-              <a:t>2.   </a:t>
-            </a:r>
-            <a:r>
-              <a:rPr lang="ru-RU" dirty="0" err="1">
-                <a:latin typeface="Consolas" panose="020B0609020204030204" pitchFamily="49" charset="0"/>
-              </a:rPr>
-              <a:t>Лещишин</a:t>
-            </a:r>
-            <a:r>
-              <a:rPr lang="ru-RU" dirty="0">
-                <a:latin typeface="Consolas" panose="020B0609020204030204" pitchFamily="49" charset="0"/>
-              </a:rPr>
-              <a:t> Роман @Roman36519</a:t>
-            </a:r>
-          </a:p>
-          <a:p>
-            <a:r>
-              <a:rPr lang="ru-RU" dirty="0">
-                <a:latin typeface="Consolas" panose="020B0609020204030204" pitchFamily="49" charset="0"/>
-              </a:rPr>
-              <a:t>3.   Неустроев Илья @NeustroevIL</a:t>
-            </a:r>
-          </a:p>
-          <a:p>
-            <a:r>
-              <a:rPr lang="ru-RU" dirty="0">
-                <a:latin typeface="Consolas" panose="020B0609020204030204" pitchFamily="49" charset="0"/>
-              </a:rPr>
-              <a:t>4.   </a:t>
-            </a:r>
-            <a:r>
-              <a:rPr lang="ru-RU" dirty="0" err="1">
-                <a:latin typeface="Consolas" panose="020B0609020204030204" pitchFamily="49" charset="0"/>
-              </a:rPr>
-              <a:t>Cавельев</a:t>
-            </a:r>
-            <a:r>
-              <a:rPr lang="ru-RU" dirty="0">
-                <a:latin typeface="Consolas" panose="020B0609020204030204" pitchFamily="49" charset="0"/>
-              </a:rPr>
-              <a:t> Денис @DenisSavelev2025</a:t>
-            </a:r>
-          </a:p>
-          <a:p>
-            <a:r>
-              <a:rPr lang="ru-RU" dirty="0">
-                <a:latin typeface="Consolas" panose="020B0609020204030204" pitchFamily="49" charset="0"/>
-              </a:rPr>
-              <a:t>5.   </a:t>
-            </a:r>
-            <a:r>
-              <a:rPr lang="ru-RU" dirty="0" err="1">
-                <a:latin typeface="Consolas" panose="020B0609020204030204" pitchFamily="49" charset="0"/>
-              </a:rPr>
-              <a:t>Метиекам</a:t>
-            </a:r>
-            <a:r>
-              <a:rPr lang="ru-RU" dirty="0">
-                <a:latin typeface="Consolas" panose="020B0609020204030204" pitchFamily="49" charset="0"/>
-              </a:rPr>
-              <a:t> </a:t>
-            </a:r>
-            <a:r>
-              <a:rPr lang="ru-RU" dirty="0" err="1">
-                <a:latin typeface="Consolas" panose="020B0609020204030204" pitchFamily="49" charset="0"/>
-              </a:rPr>
-              <a:t>Коаье</a:t>
-            </a:r>
-            <a:r>
-              <a:rPr lang="ru-RU" dirty="0">
-                <a:latin typeface="Consolas" panose="020B0609020204030204" pitchFamily="49" charset="0"/>
-              </a:rPr>
-              <a:t> Мануэль Патрисия</a:t>
-            </a:r>
-          </a:p>
-          <a:p>
-            <a:endParaRPr lang="ru-RU" dirty="0"/>
+            <a:pPr algn="just"/>
+            <a:r>
+              <a:rPr lang="ru-RU" dirty="0"/>
+              <a:t>вентиляция включается только в той комнате, где реально ухудшилось качество воздуха, а не работает избыточно по всему зданию</a:t>
+            </a:r>
+            <a:endParaRPr lang="ru-RU" sz="1600" b="1" dirty="0">
+              <a:latin typeface="Consolas" panose="020B0609020204030204" pitchFamily="49" charset="0"/>
+              <a:ea typeface="Tahoma" panose="020B0604030504040204" pitchFamily="34" charset="0"/>
+              <a:cs typeface="Tahoma" panose="020B0604030504040204" pitchFamily="34" charset="0"/>
+            </a:endParaRPr>
           </a:p>
         </p:txBody>
       </p:sp>
+      <p:pic>
+        <p:nvPicPr>
+          <p:cNvPr id="2050" name="Picture 2" descr="Money growth - Free business and finance icons"/>
+          <p:cNvPicPr>
+            <a:picLocks noChangeAspect="1" noChangeArrowheads="1"/>
+          </p:cNvPicPr>
+          <p:nvPr/>
+        </p:nvPicPr>
+        <p:blipFill>
+          <a:blip r:embed="rId2" cstate="print">
+            <a:extLst>
+              <a:ext uri="{28A0092B-C50C-407E-A947-70E740481C1C}">
+                <a14:useLocalDpi xmlns:a14="http://schemas.microsoft.com/office/drawing/2010/main" val="0"/>
+              </a:ext>
+            </a:extLst>
+          </a:blip>
+          <a:srcRect/>
+          <a:stretch>
+            <a:fillRect/>
+          </a:stretch>
+        </p:blipFill>
+        <p:spPr bwMode="auto">
+          <a:xfrm>
+            <a:off x="11163527" y="247650"/>
+            <a:ext cx="771525" cy="771525"/>
+          </a:xfrm>
+          <a:prstGeom prst="rect">
+            <a:avLst/>
+          </a:prstGeom>
+          <a:noFill/>
+          <a:extLst>
+            <a:ext uri="{909E8E84-426E-40DD-AFC4-6F175D3DCCD1}">
+              <a14:hiddenFill xmlns:a14="http://schemas.microsoft.com/office/drawing/2010/main">
+                <a:solidFill>
+                  <a:srgbClr val="FFFFFF"/>
+                </a:solidFill>
+              </a14:hiddenFill>
+            </a:ext>
+          </a:extLst>
+        </p:spPr>
+      </p:pic>
+      <p:pic>
+        <p:nvPicPr>
+          <p:cNvPr id="2054" name="Picture 6" descr="201,249 Branch With Fresh Green Leaves Royalty-Free Images, Stock Photos &amp;  Pictures | Shutterstock"/>
+          <p:cNvPicPr>
+            <a:picLocks noChangeAspect="1" noChangeArrowheads="1"/>
+          </p:cNvPicPr>
+          <p:nvPr/>
+        </p:nvPicPr>
+        <p:blipFill>
+          <a:blip r:embed="rId3">
+            <a:extLst>
+              <a:ext uri="{BEBA8EAE-BF5A-486C-A8C5-ECC9F3942E4B}">
+                <a14:imgProps xmlns:a14="http://schemas.microsoft.com/office/drawing/2010/main">
+                  <a14:imgLayer r:embed="rId4">
+                    <a14:imgEffect>
+                      <a14:backgroundRemoval t="4178" b="100000" l="0" r="99500">
+                        <a14:foregroundMark x1="32167" y1="48564" x2="32167" y2="48564"/>
+                        <a14:foregroundMark x1="26667" y1="46736" x2="26667" y2="46736"/>
+                        <a14:foregroundMark x1="25167" y1="46475" x2="25167" y2="46475"/>
+                        <a14:foregroundMark x1="27333" y1="59269" x2="27333" y2="59269"/>
+                        <a14:foregroundMark x1="35333" y1="59791" x2="35333" y2="59791"/>
+                        <a14:foregroundMark x1="24500" y1="46214" x2="24500" y2="46214"/>
+                        <a14:foregroundMark x1="29667" y1="41514" x2="29667" y2="41514"/>
+                        <a14:foregroundMark x1="35667" y1="35509" x2="35667" y2="35509"/>
+                        <a14:foregroundMark x1="57333" y1="14360" x2="57333" y2="14360"/>
+                        <a14:foregroundMark x1="56500" y1="13316" x2="56500" y2="13316"/>
+                        <a14:foregroundMark x1="69500" y1="7572" x2="69500" y2="7572"/>
+                        <a14:foregroundMark x1="59500" y1="10705" x2="59500" y2="10705"/>
+                        <a14:foregroundMark x1="59500" y1="10183" x2="59500" y2="10183"/>
+                        <a14:foregroundMark x1="59500" y1="9922" x2="59500" y2="9922"/>
+                        <a14:foregroundMark x1="93500" y1="31332" x2="93500" y2="31332"/>
+                      </a14:backgroundRemoval>
+                    </a14:imgEffect>
+                  </a14:imgLayer>
+                </a14:imgProps>
+              </a:ext>
+              <a:ext uri="{28A0092B-C50C-407E-A947-70E740481C1C}">
+                <a14:useLocalDpi xmlns:a14="http://schemas.microsoft.com/office/drawing/2010/main" val="0"/>
+              </a:ext>
+            </a:extLst>
+          </a:blip>
+          <a:srcRect/>
+          <a:stretch>
+            <a:fillRect/>
+          </a:stretch>
+        </p:blipFill>
+        <p:spPr bwMode="auto">
+          <a:xfrm rot="20084581" flipH="1">
+            <a:off x="9443007" y="5362685"/>
+            <a:ext cx="2751496" cy="1756372"/>
+          </a:xfrm>
+          <a:prstGeom prst="rect">
+            <a:avLst/>
+          </a:prstGeom>
+          <a:noFill/>
+          <a:extLst>
+            <a:ext uri="{909E8E84-426E-40DD-AFC4-6F175D3DCCD1}">
+              <a14:hiddenFill xmlns:a14="http://schemas.microsoft.com/office/drawing/2010/main">
+                <a:solidFill>
+                  <a:srgbClr val="FFFFFF"/>
+                </a:solidFill>
+              </a14:hiddenFill>
+            </a:ext>
+          </a:extLst>
+        </p:spPr>
+      </p:pic>
       <p:sp>
         <p:nvSpPr>
-          <p:cNvPr id="6" name="TextBox 5">
-            <a:extLst>
-              <a:ext uri="{FF2B5EF4-FFF2-40B4-BE49-F238E27FC236}">
-                <a16:creationId xmlns:a16="http://schemas.microsoft.com/office/drawing/2014/main" id="{8FADBA66-CB68-0276-8050-5DDD5CF0BE2B}"/>
-              </a:ext>
-            </a:extLst>
-          </p:cNvPr>
+          <p:cNvPr id="43" name="TextBox 42"/>
           <p:cNvSpPr txBox="1"/>
           <p:nvPr/>
         </p:nvSpPr>
         <p:spPr>
           <a:xfrm>
-            <a:off x="5309388" y="3691844"/>
-            <a:ext cx="5756704" cy="646331"/>
+            <a:off x="6111902" y="1233487"/>
+            <a:ext cx="5450605" cy="1477328"/>
           </a:xfrm>
           <a:prstGeom prst="rect">
             <a:avLst/>
@@ -6037,57 +6284,102 @@
           <a:noFill/>
         </p:spPr>
         <p:txBody>
-          <a:bodyPr wrap="none" rtlCol="0">
+          <a:bodyPr wrap="square" rtlCol="0">
             <a:spAutoFit/>
           </a:bodyPr>
           <a:lstStyle/>
           <a:p>
-            <a:r>
-              <a:rPr lang="en-US" b="1" dirty="0" err="1">
-                <a:latin typeface="Consolas" panose="020B0609020204030204" pitchFamily="49" charset="0"/>
-              </a:rPr>
-              <a:t>github</a:t>
-            </a:r>
+            <a:pPr algn="just"/>
             <a:r>
               <a:rPr lang="ru-RU" b="1" dirty="0">
                 <a:latin typeface="Consolas" panose="020B0609020204030204" pitchFamily="49" charset="0"/>
+                <a:ea typeface="Tahoma" panose="020B0604030504040204" pitchFamily="34" charset="0"/>
+                <a:cs typeface="Tahoma" panose="020B0604030504040204" pitchFamily="34" charset="0"/>
               </a:rPr>
-              <a:t>:</a:t>
+              <a:t>Как стало:</a:t>
             </a:r>
           </a:p>
           <a:p>
-            <a:r>
-              <a:rPr lang="en-US" dirty="0">
-                <a:solidFill>
-                  <a:schemeClr val="bg1">
-                    <a:lumMod val="25000"/>
-                  </a:schemeClr>
-                </a:solidFill>
+            <a:pPr marL="285750" indent="-285750" algn="just">
+              <a:buFont typeface="Arial" panose="020B0604020202020204" pitchFamily="34" charset="0"/>
+              <a:buChar char="•"/>
+            </a:pPr>
+            <a:r>
+              <a:rPr lang="ru-RU" sz="1200" dirty="0"/>
+              <a:t>датчики в комнатах </a:t>
+            </a:r>
+          </a:p>
+          <a:p>
+            <a:pPr marL="285750" indent="-285750" algn="just">
+              <a:buFont typeface="Arial" panose="020B0604020202020204" pitchFamily="34" charset="0"/>
+              <a:buChar char="•"/>
+            </a:pPr>
+            <a:r>
+              <a:rPr lang="ru-RU" sz="1200" dirty="0"/>
+              <a:t>ML-модель </a:t>
+            </a:r>
+          </a:p>
+          <a:p>
+            <a:pPr marL="285750" indent="-285750" algn="just">
+              <a:buFont typeface="Arial" panose="020B0604020202020204" pitchFamily="34" charset="0"/>
+              <a:buChar char="•"/>
+            </a:pPr>
+            <a:r>
+              <a:rPr lang="ru-RU" sz="1200" dirty="0"/>
+              <a:t>локальное включение только там, где ухудшился воздух</a:t>
+            </a:r>
+          </a:p>
+          <a:p>
+            <a:pPr marL="285750" indent="-285750" algn="just">
+              <a:buFont typeface="Arial" panose="020B0604020202020204" pitchFamily="34" charset="0"/>
+              <a:buChar char="•"/>
+            </a:pPr>
+            <a:r>
+              <a:rPr lang="ru-RU" sz="1200" dirty="0"/>
+              <a:t>экономия энергии</a:t>
+            </a:r>
+          </a:p>
+          <a:p>
+            <a:pPr marL="285750" indent="-285750" algn="just">
+              <a:buFont typeface="Arial" panose="020B0604020202020204" pitchFamily="34" charset="0"/>
+              <a:buChar char="•"/>
+            </a:pPr>
+            <a:r>
+              <a:rPr lang="ru-RU" sz="1200" dirty="0"/>
+              <a:t>более комфортный микроклимат</a:t>
+            </a:r>
+          </a:p>
+          <a:p>
+            <a:pPr marL="285750" indent="-285750" algn="just">
+              <a:buFont typeface="Arial" panose="020B0604020202020204" pitchFamily="34" charset="0"/>
+              <a:buChar char="•"/>
+            </a:pPr>
+            <a:r>
+              <a:rPr lang="ru-RU" sz="1200" dirty="0">
                 <a:latin typeface="Consolas" panose="020B0609020204030204" pitchFamily="49" charset="0"/>
+                <a:ea typeface="Tahoma" panose="020B0604030504040204" pitchFamily="34" charset="0"/>
+                <a:cs typeface="Tahoma" panose="020B0604030504040204" pitchFamily="34" charset="0"/>
               </a:rPr>
-              <a:t>https://github.com/IlyyaNeustroev/airQuality</a:t>
-            </a:r>
-            <a:endParaRPr lang="ru-RU" dirty="0">
-              <a:solidFill>
-                <a:schemeClr val="bg1">
-                  <a:lumMod val="25000"/>
-                </a:schemeClr>
-              </a:solidFill>
+              <a:t>снижение износа оборудования</a:t>
+            </a:r>
+            <a:endParaRPr lang="ru-RU" sz="1100" dirty="0">
               <a:latin typeface="Consolas" panose="020B0609020204030204" pitchFamily="49" charset="0"/>
+              <a:ea typeface="Tahoma" panose="020B0604030504040204" pitchFamily="34" charset="0"/>
+              <a:cs typeface="Tahoma" panose="020B0604030504040204" pitchFamily="34" charset="0"/>
             </a:endParaRPr>
           </a:p>
         </p:txBody>
       </p:sp>
       <p:sp>
         <p:nvSpPr>
-          <p:cNvPr id="7" name="TextBox 6"/>
+          <p:cNvPr id="44" name="TextBox 43"/>
           <p:cNvSpPr txBox="1"/>
           <p:nvPr/>
         </p:nvSpPr>
         <p:spPr>
           <a:xfrm>
-            <a:off x="384040" y="6281420"/>
-            <a:ext cx="312906" cy="369332"/>
+            <a:off x="654129" y="1233487"/>
+            <a:ext cx="5450605" cy="1661993"/>
           </a:xfrm>
           <a:prstGeom prst="rect">
             <a:avLst/>
@@ -6095,19 +6387,452 @@
           <a:noFill/>
         </p:spPr>
         <p:txBody>
-          <a:bodyPr wrap="none" rtlCol="0">
+          <a:bodyPr wrap="square" rtlCol="0">
             <a:spAutoFit/>
           </a:bodyPr>
           <a:lstStyle/>
           <a:p>
-            <a:r>
-              <a:rPr lang="ru-RU" dirty="0"/>
-              <a:t>2</a:t>
-            </a:r>
+            <a:pPr algn="just"/>
+            <a:r>
+              <a:rPr lang="ru-RU" b="1" dirty="0">
+                <a:latin typeface="Consolas" panose="020B0609020204030204" pitchFamily="49" charset="0"/>
+                <a:ea typeface="Tahoma" panose="020B0604030504040204" pitchFamily="34" charset="0"/>
+                <a:cs typeface="Tahoma" panose="020B0604030504040204" pitchFamily="34" charset="0"/>
+              </a:rPr>
+              <a:t>Как было:</a:t>
+            </a:r>
+          </a:p>
+          <a:p>
+            <a:pPr marL="285750" indent="-285750" algn="just">
+              <a:buFont typeface="Arial" panose="020B0604020202020204" pitchFamily="34" charset="0"/>
+              <a:buChar char="•"/>
+            </a:pPr>
+            <a:r>
+              <a:rPr lang="ru-RU" sz="1200" dirty="0"/>
+              <a:t>централизованная вентиляция </a:t>
+            </a:r>
+          </a:p>
+          <a:p>
+            <a:pPr marL="285750" indent="-285750" algn="just">
+              <a:buFont typeface="Arial" panose="020B0604020202020204" pitchFamily="34" charset="0"/>
+              <a:buChar char="•"/>
+            </a:pPr>
+            <a:r>
+              <a:rPr lang="ru-RU" sz="1200" dirty="0"/>
+              <a:t>фиксированный режим </a:t>
+            </a:r>
+          </a:p>
+          <a:p>
+            <a:pPr marL="285750" indent="-285750" algn="just">
+              <a:buFont typeface="Arial" panose="020B0604020202020204" pitchFamily="34" charset="0"/>
+              <a:buChar char="•"/>
+            </a:pPr>
+            <a:r>
+              <a:rPr lang="ru-RU" sz="1200" dirty="0"/>
+              <a:t>лишний воздухообмен </a:t>
+            </a:r>
+          </a:p>
+          <a:p>
+            <a:pPr marL="285750" indent="-285750" algn="just">
+              <a:buFont typeface="Arial" panose="020B0604020202020204" pitchFamily="34" charset="0"/>
+              <a:buChar char="•"/>
+            </a:pPr>
+            <a:r>
+              <a:rPr lang="ru-RU" sz="1200" dirty="0"/>
+              <a:t>перерасход энергии </a:t>
+            </a:r>
+          </a:p>
+          <a:p>
+            <a:pPr marL="285750" indent="-285750" algn="just">
+              <a:buFont typeface="Arial" panose="020B0604020202020204" pitchFamily="34" charset="0"/>
+              <a:buChar char="•"/>
+            </a:pPr>
+            <a:r>
+              <a:rPr lang="ru-RU" sz="1200" dirty="0"/>
+              <a:t>шум </a:t>
+            </a:r>
+          </a:p>
+          <a:p>
+            <a:pPr marL="285750" indent="-285750" algn="just">
+              <a:buFont typeface="Arial" panose="020B0604020202020204" pitchFamily="34" charset="0"/>
+              <a:buChar char="•"/>
+            </a:pPr>
+            <a:r>
+              <a:rPr lang="ru-RU" sz="1200" dirty="0"/>
+              <a:t>сквозняки </a:t>
+            </a:r>
+          </a:p>
+          <a:p>
+            <a:pPr marL="285750" indent="-285750" algn="just">
+              <a:buFont typeface="Arial" panose="020B0604020202020204" pitchFamily="34" charset="0"/>
+              <a:buChar char="•"/>
+            </a:pPr>
+            <a:r>
+              <a:rPr lang="ru-RU" sz="1200" dirty="0"/>
+              <a:t>износ оборудования</a:t>
+            </a:r>
+            <a:endParaRPr lang="ru-RU" sz="1200" b="1" dirty="0">
+              <a:latin typeface="Consolas" panose="020B0609020204030204" pitchFamily="49" charset="0"/>
+              <a:ea typeface="Tahoma" panose="020B0604030504040204" pitchFamily="34" charset="0"/>
+              <a:cs typeface="Tahoma" panose="020B0604030504040204" pitchFamily="34" charset="0"/>
+            </a:endParaRPr>
+          </a:p>
+        </p:txBody>
+      </p:sp>
+      <p:pic>
+        <p:nvPicPr>
+          <p:cNvPr id="46" name="Picture 2" descr="Скачать бесплатно иконки на тему «Управляющая компания» в форматах PNG и SVG"/>
+          <p:cNvPicPr>
+            <a:picLocks noChangeAspect="1" noChangeArrowheads="1"/>
+          </p:cNvPicPr>
+          <p:nvPr/>
+        </p:nvPicPr>
+        <p:blipFill>
+          <a:blip r:embed="rId5" cstate="print">
+            <a:duotone>
+              <a:prstClr val="black"/>
+              <a:schemeClr val="accent6">
+                <a:tint val="45000"/>
+                <a:satMod val="400000"/>
+              </a:schemeClr>
+            </a:duotone>
+            <a:extLst>
+              <a:ext uri="{28A0092B-C50C-407E-A947-70E740481C1C}">
+                <a14:useLocalDpi xmlns:a14="http://schemas.microsoft.com/office/drawing/2010/main" val="0"/>
+              </a:ext>
+            </a:extLst>
+          </a:blip>
+          <a:srcRect/>
+          <a:stretch>
+            <a:fillRect/>
+          </a:stretch>
+        </p:blipFill>
+        <p:spPr bwMode="auto">
+          <a:xfrm>
+            <a:off x="1245270" y="4613537"/>
+            <a:ext cx="752752" cy="752752"/>
+          </a:xfrm>
+          <a:prstGeom prst="rect">
+            <a:avLst/>
+          </a:prstGeom>
+          <a:noFill/>
+          <a:extLst>
+            <a:ext uri="{909E8E84-426E-40DD-AFC4-6F175D3DCCD1}">
+              <a14:hiddenFill xmlns:a14="http://schemas.microsoft.com/office/drawing/2010/main">
+                <a:solidFill>
+                  <a:srgbClr val="FFFFFF"/>
+                </a:solidFill>
+              </a14:hiddenFill>
+            </a:ext>
+          </a:extLst>
+        </p:spPr>
+      </p:pic>
+      <p:pic>
+        <p:nvPicPr>
+          <p:cNvPr id="47" name="Picture 4" descr="Администрация – Бесплатные иконки: архитектура и город"/>
+          <p:cNvPicPr>
+            <a:picLocks noChangeAspect="1" noChangeArrowheads="1"/>
+          </p:cNvPicPr>
+          <p:nvPr/>
+        </p:nvPicPr>
+        <p:blipFill>
+          <a:blip r:embed="rId6" cstate="print">
+            <a:extLst>
+              <a:ext uri="{28A0092B-C50C-407E-A947-70E740481C1C}">
+                <a14:useLocalDpi xmlns:a14="http://schemas.microsoft.com/office/drawing/2010/main" val="0"/>
+              </a:ext>
+            </a:extLst>
+          </a:blip>
+          <a:srcRect/>
+          <a:stretch>
+            <a:fillRect/>
+          </a:stretch>
+        </p:blipFill>
+        <p:spPr bwMode="auto">
+          <a:xfrm>
+            <a:off x="4259923" y="4554499"/>
+            <a:ext cx="777367" cy="777367"/>
+          </a:xfrm>
+          <a:prstGeom prst="rect">
+            <a:avLst/>
+          </a:prstGeom>
+          <a:noFill/>
+          <a:extLst>
+            <a:ext uri="{909E8E84-426E-40DD-AFC4-6F175D3DCCD1}">
+              <a14:hiddenFill xmlns:a14="http://schemas.microsoft.com/office/drawing/2010/main">
+                <a:solidFill>
+                  <a:srgbClr val="FFFFFF"/>
+                </a:solidFill>
+              </a14:hiddenFill>
+            </a:ext>
+          </a:extLst>
+        </p:spPr>
+      </p:pic>
+      <p:pic>
+        <p:nvPicPr>
+          <p:cNvPr id="48" name="Picture 6" descr="Завод завод – Бесплатные иконки: промышленность"/>
+          <p:cNvPicPr>
+            <a:picLocks noChangeAspect="1" noChangeArrowheads="1"/>
+          </p:cNvPicPr>
+          <p:nvPr/>
+        </p:nvPicPr>
+        <p:blipFill>
+          <a:blip r:embed="rId7" cstate="print">
+            <a:duotone>
+              <a:prstClr val="black"/>
+              <a:srgbClr val="D9C3A5">
+                <a:tint val="50000"/>
+                <a:satMod val="180000"/>
+              </a:srgbClr>
+            </a:duotone>
+            <a:extLst>
+              <a:ext uri="{28A0092B-C50C-407E-A947-70E740481C1C}">
+                <a14:useLocalDpi xmlns:a14="http://schemas.microsoft.com/office/drawing/2010/main" val="0"/>
+              </a:ext>
+            </a:extLst>
+          </a:blip>
+          <a:srcRect/>
+          <a:stretch>
+            <a:fillRect/>
+          </a:stretch>
+        </p:blipFill>
+        <p:spPr bwMode="auto">
+          <a:xfrm>
+            <a:off x="7105385" y="4554499"/>
+            <a:ext cx="740088" cy="740088"/>
+          </a:xfrm>
+          <a:prstGeom prst="rect">
+            <a:avLst/>
+          </a:prstGeom>
+          <a:noFill/>
+          <a:extLst>
+            <a:ext uri="{909E8E84-426E-40DD-AFC4-6F175D3DCCD1}">
+              <a14:hiddenFill xmlns:a14="http://schemas.microsoft.com/office/drawing/2010/main">
+                <a:solidFill>
+                  <a:srgbClr val="FFFFFF"/>
+                </a:solidFill>
+              </a14:hiddenFill>
+            </a:ext>
+          </a:extLst>
+        </p:spPr>
+      </p:pic>
+      <p:pic>
+        <p:nvPicPr>
+          <p:cNvPr id="49" name="Picture 8" descr="Дата центр – Бесплатные иконки: компьютер"/>
+          <p:cNvPicPr>
+            <a:picLocks noChangeAspect="1" noChangeArrowheads="1"/>
+          </p:cNvPicPr>
+          <p:nvPr/>
+        </p:nvPicPr>
+        <p:blipFill>
+          <a:blip r:embed="rId8" cstate="print">
+            <a:extLst>
+              <a:ext uri="{28A0092B-C50C-407E-A947-70E740481C1C}">
+                <a14:useLocalDpi xmlns:a14="http://schemas.microsoft.com/office/drawing/2010/main" val="0"/>
+              </a:ext>
+            </a:extLst>
+          </a:blip>
+          <a:srcRect/>
+          <a:stretch>
+            <a:fillRect/>
+          </a:stretch>
+        </p:blipFill>
+        <p:spPr bwMode="auto">
+          <a:xfrm>
+            <a:off x="9844913" y="4554498"/>
+            <a:ext cx="777368" cy="777368"/>
+          </a:xfrm>
+          <a:prstGeom prst="rect">
+            <a:avLst/>
+          </a:prstGeom>
+          <a:noFill/>
+          <a:extLst>
+            <a:ext uri="{909E8E84-426E-40DD-AFC4-6F175D3DCCD1}">
+              <a14:hiddenFill xmlns:a14="http://schemas.microsoft.com/office/drawing/2010/main">
+                <a:solidFill>
+                  <a:srgbClr val="FFFFFF"/>
+                </a:solidFill>
+              </a14:hiddenFill>
+            </a:ext>
+          </a:extLst>
+        </p:spPr>
+      </p:pic>
+      <p:sp>
+        <p:nvSpPr>
+          <p:cNvPr id="50" name="TextBox 49"/>
+          <p:cNvSpPr txBox="1"/>
+          <p:nvPr/>
+        </p:nvSpPr>
+        <p:spPr>
+          <a:xfrm>
+            <a:off x="746124" y="5410847"/>
+            <a:ext cx="1751043" cy="584775"/>
+          </a:xfrm>
+          <a:prstGeom prst="rect">
+            <a:avLst/>
+          </a:prstGeom>
+          <a:noFill/>
+        </p:spPr>
+        <p:txBody>
+          <a:bodyPr wrap="square" rtlCol="0">
+            <a:spAutoFit/>
+          </a:bodyPr>
+          <a:lstStyle/>
+          <a:p>
+            <a:pPr algn="ctr"/>
+            <a:r>
+              <a:rPr lang="ru-RU" sz="1600" dirty="0">
+                <a:latin typeface="Tahoma" panose="020B0604030504040204" pitchFamily="34" charset="0"/>
+                <a:ea typeface="Tahoma" panose="020B0604030504040204" pitchFamily="34" charset="0"/>
+                <a:cs typeface="Tahoma" panose="020B0604030504040204" pitchFamily="34" charset="0"/>
+              </a:rPr>
+              <a:t>Коммерческая недвижимость</a:t>
+            </a:r>
+          </a:p>
+        </p:txBody>
+      </p:sp>
+      <p:sp>
+        <p:nvSpPr>
+          <p:cNvPr id="51" name="TextBox 50"/>
+          <p:cNvSpPr txBox="1"/>
+          <p:nvPr/>
+        </p:nvSpPr>
+        <p:spPr>
+          <a:xfrm>
+            <a:off x="3379431" y="5410847"/>
+            <a:ext cx="2532670" cy="584775"/>
+          </a:xfrm>
+          <a:prstGeom prst="rect">
+            <a:avLst/>
+          </a:prstGeom>
+          <a:noFill/>
+        </p:spPr>
+        <p:txBody>
+          <a:bodyPr wrap="square" rtlCol="0">
+            <a:spAutoFit/>
+          </a:bodyPr>
+          <a:lstStyle/>
+          <a:p>
+            <a:pPr algn="ctr"/>
+            <a:r>
+              <a:rPr lang="ru-RU" sz="1600" dirty="0">
+                <a:latin typeface="Tahoma" panose="020B0604030504040204" pitchFamily="34" charset="0"/>
+                <a:ea typeface="Tahoma" panose="020B0604030504040204" pitchFamily="34" charset="0"/>
+                <a:cs typeface="Tahoma" panose="020B0604030504040204" pitchFamily="34" charset="0"/>
+              </a:rPr>
+              <a:t>Административные и бюджетные здания</a:t>
+            </a:r>
+          </a:p>
+        </p:txBody>
+      </p:sp>
+      <p:sp>
+        <p:nvSpPr>
+          <p:cNvPr id="52" name="TextBox 51"/>
+          <p:cNvSpPr txBox="1"/>
+          <p:nvPr/>
+        </p:nvSpPr>
+        <p:spPr>
+          <a:xfrm>
+            <a:off x="6204634" y="5410846"/>
+            <a:ext cx="2532670" cy="584775"/>
+          </a:xfrm>
+          <a:prstGeom prst="rect">
+            <a:avLst/>
+          </a:prstGeom>
+          <a:noFill/>
+        </p:spPr>
+        <p:txBody>
+          <a:bodyPr wrap="square" rtlCol="0">
+            <a:spAutoFit/>
+          </a:bodyPr>
+          <a:lstStyle/>
+          <a:p>
+            <a:pPr algn="ctr"/>
+            <a:r>
+              <a:rPr lang="ru-RU" sz="1600" dirty="0">
+                <a:latin typeface="Tahoma" panose="020B0604030504040204" pitchFamily="34" charset="0"/>
+                <a:ea typeface="Tahoma" panose="020B0604030504040204" pitchFamily="34" charset="0"/>
+                <a:cs typeface="Tahoma" panose="020B0604030504040204" pitchFamily="34" charset="0"/>
+              </a:rPr>
+              <a:t>Промышленные предприятия</a:t>
+            </a:r>
+          </a:p>
+        </p:txBody>
+      </p:sp>
+      <p:sp>
+        <p:nvSpPr>
+          <p:cNvPr id="53" name="TextBox 52"/>
+          <p:cNvSpPr txBox="1"/>
+          <p:nvPr/>
+        </p:nvSpPr>
+        <p:spPr>
+          <a:xfrm>
+            <a:off x="8967262" y="5410846"/>
+            <a:ext cx="2532670" cy="338554"/>
+          </a:xfrm>
+          <a:prstGeom prst="rect">
+            <a:avLst/>
+          </a:prstGeom>
+          <a:noFill/>
+        </p:spPr>
+        <p:txBody>
+          <a:bodyPr wrap="square" rtlCol="0">
+            <a:spAutoFit/>
+          </a:bodyPr>
+          <a:lstStyle/>
+          <a:p>
+            <a:pPr algn="ctr"/>
+            <a:r>
+              <a:rPr lang="ru-RU" sz="1600" dirty="0">
+                <a:latin typeface="Tahoma" panose="020B0604030504040204" pitchFamily="34" charset="0"/>
+                <a:ea typeface="Tahoma" panose="020B0604030504040204" pitchFamily="34" charset="0"/>
+                <a:cs typeface="Tahoma" panose="020B0604030504040204" pitchFamily="34" charset="0"/>
+              </a:rPr>
+              <a:t>Дата-центры</a:t>
+            </a:r>
+          </a:p>
+        </p:txBody>
+      </p:sp>
+      <p:sp>
+        <p:nvSpPr>
+          <p:cNvPr id="2" name="Прямоугольник 1"/>
+          <p:cNvSpPr/>
+          <p:nvPr/>
+        </p:nvSpPr>
+        <p:spPr>
+          <a:xfrm>
+            <a:off x="613854" y="4081260"/>
+            <a:ext cx="6096000" cy="369332"/>
+          </a:xfrm>
+          <a:prstGeom prst="rect">
+            <a:avLst/>
+          </a:prstGeom>
+        </p:spPr>
+        <p:txBody>
+          <a:bodyPr>
+            <a:spAutoFit/>
+          </a:bodyPr>
+          <a:lstStyle/>
+          <a:p>
+            <a:r>
+              <a:rPr lang="ru-RU" b="1" dirty="0">
+                <a:latin typeface="Consolas" panose="020B0609020204030204" pitchFamily="49" charset="0"/>
+              </a:rPr>
+              <a:t>Целевая аудитория:</a:t>
+            </a:r>
+            <a:endParaRPr lang="ru-RU" b="1" i="0" dirty="0">
+              <a:effectLst/>
+              <a:latin typeface="Consolas" panose="020B0609020204030204" pitchFamily="49" charset="0"/>
+            </a:endParaRPr>
           </a:p>
         </p:txBody>
       </p:sp>
     </p:spTree>
+    <p:extLst>
+      <p:ext uri="{BB962C8B-B14F-4D97-AF65-F5344CB8AC3E}">
+        <p14:creationId xmlns:p14="http://schemas.microsoft.com/office/powerpoint/2010/main" val="3098083291"/>
+      </p:ext>
+    </p:extLst>
   </p:cSld>
   <p:clrMapOvr>
     <a:masterClrMapping/>
@@ -6134,158 +6859,7 @@
       </p:grpSpPr>
       <p:sp>
         <p:nvSpPr>
-          <p:cNvPr id="33" name="TextBox 32"/>
-          <p:cNvSpPr txBox="1"/>
-          <p:nvPr/>
-        </p:nvSpPr>
-        <p:spPr>
-          <a:xfrm>
-            <a:off x="4211368" y="3334718"/>
-            <a:ext cx="2415466" cy="369332"/>
-          </a:xfrm>
-          <a:prstGeom prst="rect">
-            <a:avLst/>
-          </a:prstGeom>
-          <a:noFill/>
-        </p:spPr>
-        <p:txBody>
-          <a:bodyPr wrap="square" rtlCol="0">
-            <a:spAutoFit/>
-          </a:bodyPr>
-          <a:lstStyle/>
-          <a:p>
-            <a:pPr algn="ctr"/>
-            <a:r>
-              <a:rPr lang="ru-RU" dirty="0">
-                <a:latin typeface="Tahoma" panose="020B0604030504040204" pitchFamily="34" charset="0"/>
-                <a:ea typeface="Tahoma" panose="020B0604030504040204" pitchFamily="34" charset="0"/>
-                <a:cs typeface="Tahoma" panose="020B0604030504040204" pitchFamily="34" charset="0"/>
-              </a:rPr>
-              <a:t>Отладка </a:t>
-            </a:r>
-            <a:r>
-              <a:rPr lang="en-US" dirty="0">
-                <a:latin typeface="Tahoma" panose="020B0604030504040204" pitchFamily="34" charset="0"/>
-                <a:ea typeface="Tahoma" panose="020B0604030504040204" pitchFamily="34" charset="0"/>
-                <a:cs typeface="Tahoma" panose="020B0604030504040204" pitchFamily="34" charset="0"/>
-              </a:rPr>
-              <a:t>full</a:t>
-            </a:r>
-            <a:r>
-              <a:rPr lang="ru-RU" dirty="0">
-                <a:latin typeface="Tahoma" panose="020B0604030504040204" pitchFamily="34" charset="0"/>
-                <a:ea typeface="Tahoma" panose="020B0604030504040204" pitchFamily="34" charset="0"/>
-                <a:cs typeface="Tahoma" panose="020B0604030504040204" pitchFamily="34" charset="0"/>
-              </a:rPr>
-              <a:t>-стека</a:t>
-            </a:r>
-          </a:p>
-        </p:txBody>
-      </p:sp>
-      <p:sp>
-        <p:nvSpPr>
-          <p:cNvPr id="35" name="TextBox 34"/>
-          <p:cNvSpPr txBox="1"/>
-          <p:nvPr/>
-        </p:nvSpPr>
-        <p:spPr>
-          <a:xfrm>
-            <a:off x="3237330" y="5866791"/>
-            <a:ext cx="1095621" cy="369332"/>
-          </a:xfrm>
-          <a:prstGeom prst="rect">
-            <a:avLst/>
-          </a:prstGeom>
-          <a:noFill/>
-        </p:spPr>
-        <p:txBody>
-          <a:bodyPr wrap="none" rtlCol="0">
-            <a:spAutoFit/>
-          </a:bodyPr>
-          <a:lstStyle/>
-          <a:p>
-            <a:r>
-              <a:rPr lang="en-US" dirty="0">
-                <a:latin typeface="Tahoma" panose="020B0604030504040204" pitchFamily="34" charset="0"/>
-                <a:ea typeface="Tahoma" panose="020B0604030504040204" pitchFamily="34" charset="0"/>
-                <a:cs typeface="Tahoma" panose="020B0604030504040204" pitchFamily="34" charset="0"/>
-              </a:rPr>
-              <a:t>Frontend</a:t>
-            </a:r>
-            <a:endParaRPr lang="ru-RU" dirty="0">
-              <a:latin typeface="Tahoma" panose="020B0604030504040204" pitchFamily="34" charset="0"/>
-              <a:ea typeface="Tahoma" panose="020B0604030504040204" pitchFamily="34" charset="0"/>
-              <a:cs typeface="Tahoma" panose="020B0604030504040204" pitchFamily="34" charset="0"/>
-            </a:endParaRPr>
-          </a:p>
-        </p:txBody>
-      </p:sp>
-      <p:sp>
-        <p:nvSpPr>
-          <p:cNvPr id="36" name="TextBox 35"/>
-          <p:cNvSpPr txBox="1"/>
-          <p:nvPr/>
-        </p:nvSpPr>
-        <p:spPr>
-          <a:xfrm>
-            <a:off x="6353386" y="5877985"/>
-            <a:ext cx="2286083" cy="369332"/>
-          </a:xfrm>
-          <a:prstGeom prst="rect">
-            <a:avLst/>
-          </a:prstGeom>
-          <a:noFill/>
-        </p:spPr>
-        <p:txBody>
-          <a:bodyPr wrap="square" rtlCol="0">
-            <a:spAutoFit/>
-          </a:bodyPr>
-          <a:lstStyle/>
-          <a:p>
-            <a:pPr algn="ctr"/>
-            <a:r>
-              <a:rPr lang="ru-RU" dirty="0">
-                <a:latin typeface="Tahoma" panose="020B0604030504040204" pitchFamily="34" charset="0"/>
-                <a:ea typeface="Tahoma" panose="020B0604030504040204" pitchFamily="34" charset="0"/>
-                <a:cs typeface="Tahoma" panose="020B0604030504040204" pitchFamily="34" charset="0"/>
-              </a:rPr>
-              <a:t>Концепция</a:t>
-            </a:r>
-          </a:p>
-        </p:txBody>
-      </p:sp>
-      <p:sp>
-        <p:nvSpPr>
-          <p:cNvPr id="37" name="TextBox 36"/>
-          <p:cNvSpPr txBox="1"/>
-          <p:nvPr/>
-        </p:nvSpPr>
-        <p:spPr>
-          <a:xfrm>
-            <a:off x="384040" y="6281420"/>
-            <a:ext cx="312906" cy="369332"/>
-          </a:xfrm>
-          <a:prstGeom prst="rect">
-            <a:avLst/>
-          </a:prstGeom>
-          <a:noFill/>
-        </p:spPr>
-        <p:txBody>
-          <a:bodyPr wrap="none" rtlCol="0">
-            <a:spAutoFit/>
-          </a:bodyPr>
-          <a:lstStyle/>
-          <a:p>
-            <a:r>
-              <a:rPr lang="ru-RU" dirty="0"/>
-              <a:t>3</a:t>
-            </a:r>
-          </a:p>
-        </p:txBody>
-      </p:sp>
-      <p:sp>
-        <p:nvSpPr>
-          <p:cNvPr id="15" name="PlaceHolder 1"/>
+          <p:cNvPr id="2" name="Заголовок 1"/>
           <p:cNvSpPr>
             <a:spLocks noGrp="1"/>
           </p:cNvSpPr>
@@ -6295,128 +6869,65 @@
         </p:nvSpPr>
         <p:spPr>
           <a:xfrm>
-            <a:off x="371475" y="897463"/>
-            <a:ext cx="7714800" cy="694800"/>
+            <a:off x="371475" y="561531"/>
+            <a:ext cx="10725150" cy="671957"/>
           </a:xfrm>
-          <a:prstGeom prst="rect">
-            <a:avLst/>
-          </a:prstGeom>
-          <a:noFill/>
-          <a:ln w="0">
-            <a:noFill/>
-          </a:ln>
         </p:spPr>
         <p:txBody>
-          <a:bodyPr lIns="91440" tIns="91440" rIns="91440" bIns="91440" anchor="t">
-            <a:normAutofit fontScale="90000"/>
-          </a:bodyPr>
+          <a:bodyPr/>
           <a:lstStyle/>
           <a:p>
-            <a:pPr>
-              <a:lnSpc>
-                <a:spcPct val="100000"/>
-              </a:lnSpc>
-              <a:tabLst>
-                <a:tab pos="0" algn="l"/>
-              </a:tabLst>
-            </a:pPr>
-            <a:r>
-              <a:rPr lang="ru-RU" sz="4000" b="1" dirty="0">
-                <a:solidFill>
-                  <a:schemeClr val="dk1"/>
-                </a:solidFill>
+            <a:r>
+              <a:rPr lang="ru-RU" sz="3600" b="1" dirty="0">
                 <a:latin typeface="Outfit"/>
               </a:rPr>
-              <a:t>Задачи спринта</a:t>
-            </a:r>
-            <a:endParaRPr lang="fr-FR" sz="4000" dirty="0">
-              <a:solidFill>
-                <a:schemeClr val="dk1"/>
-              </a:solidFill>
-              <a:latin typeface="Arial"/>
-            </a:endParaRPr>
+              <a:t>Архитектура системы</a:t>
+            </a:r>
           </a:p>
         </p:txBody>
       </p:sp>
       <p:pic>
         <p:nvPicPr>
-          <p:cNvPr id="7" name="Рисунок 6"/>
-          <p:cNvPicPr>
-            <a:picLocks noChangeAspect="1"/>
-          </p:cNvPicPr>
-          <p:nvPr/>
-        </p:nvPicPr>
-        <p:blipFill>
-          <a:blip r:embed="rId2"/>
-          <a:stretch>
-            <a:fillRect/>
-          </a:stretch>
-        </p:blipFill>
-        <p:spPr>
-          <a:xfrm>
-            <a:off x="2909241" y="4407916"/>
-            <a:ext cx="1751798" cy="1470069"/>
-          </a:xfrm>
-          <a:prstGeom prst="rect">
-            <a:avLst/>
-          </a:prstGeom>
-        </p:spPr>
-      </p:pic>
-      <p:pic>
-        <p:nvPicPr>
-          <p:cNvPr id="8" name="Рисунок 7"/>
-          <p:cNvPicPr>
-            <a:picLocks noChangeAspect="1"/>
-          </p:cNvPicPr>
-          <p:nvPr/>
-        </p:nvPicPr>
-        <p:blipFill>
-          <a:blip r:embed="rId3"/>
-          <a:stretch>
-            <a:fillRect/>
-          </a:stretch>
-        </p:blipFill>
-        <p:spPr>
-          <a:xfrm>
-            <a:off x="6655705" y="4235953"/>
-            <a:ext cx="1681444" cy="1675224"/>
-          </a:xfrm>
-          <a:prstGeom prst="rect">
-            <a:avLst/>
-          </a:prstGeom>
-        </p:spPr>
-      </p:pic>
-      <p:pic>
-        <p:nvPicPr>
-          <p:cNvPr id="1026" name="Picture 2" descr="Picture background">
-            <a:extLst>
-              <a:ext uri="{FF2B5EF4-FFF2-40B4-BE49-F238E27FC236}">
-                <a16:creationId xmlns:a16="http://schemas.microsoft.com/office/drawing/2014/main" id="{1D4D5502-6549-F877-7E68-DB48626BC3E3}"/>
-              </a:ext>
-            </a:extLst>
-          </p:cNvPr>
+          <p:cNvPr id="42" name="Picture 2" descr="Tree leaves Vectors - Download Free High-Quality Vectors | Magnific  (formerly Freepik)"/>
           <p:cNvPicPr>
             <a:picLocks noChangeAspect="1" noChangeArrowheads="1"/>
           </p:cNvPicPr>
           <p:nvPr/>
         </p:nvPicPr>
-        <p:blipFill>
-          <a:blip r:embed="rId4" cstate="print">
+        <p:blipFill rotWithShape="1">
+          <a:blip r:embed="rId2" cstate="print">
             <a:extLst>
+              <a:ext uri="{BEBA8EAE-BF5A-486C-A8C5-ECC9F3942E4B}">
+                <a14:imgProps xmlns:a14="http://schemas.microsoft.com/office/drawing/2010/main">
+                  <a14:imgLayer r:embed="rId3">
+                    <a14:imgEffect>
+                      <a14:backgroundRemoval t="4865" b="48919" l="5270" r="52838">
+                        <a14:backgroundMark x1="24865" y1="22432" x2="24865" y2="22432"/>
+                        <a14:backgroundMark x1="13919" y1="18108" x2="13919" y2="18108"/>
+                        <a14:backgroundMark x1="15811" y1="16486" x2="15811" y2="16486"/>
+                        <a14:backgroundMark x1="23243" y1="19730" x2="23243" y2="19730"/>
+                        <a14:backgroundMark x1="32162" y1="32162" x2="32162" y2="32162"/>
+                        <a14:backgroundMark x1="28108" y1="28649" x2="28108" y2="28649"/>
+                        <a14:backgroundMark x1="27027" y1="28514" x2="27027" y2="28514"/>
+                        <a14:backgroundMark x1="30811" y1="29054" x2="30811" y2="29054"/>
+                        <a14:backgroundMark x1="27703" y1="26216" x2="27703" y2="26216"/>
+                      </a14:backgroundRemoval>
+                    </a14:imgEffect>
+                  </a14:imgLayer>
+                </a14:imgProps>
+              </a:ext>
               <a:ext uri="{28A0092B-C50C-407E-A947-70E740481C1C}">
                 <a14:useLocalDpi xmlns:a14="http://schemas.microsoft.com/office/drawing/2010/main" val="0"/>
               </a:ext>
             </a:extLst>
           </a:blip>
-          <a:srcRect/>
-          <a:stretch>
-            <a:fillRect/>
-          </a:stretch>
+          <a:srcRect l="-1362" t="-3518" r="46702" b="50354"/>
+          <a:stretch/>
         </p:blipFill>
         <p:spPr bwMode="auto">
-          <a:xfrm>
-            <a:off x="4009293" y="1733222"/>
-            <a:ext cx="2844800" cy="1600200"/>
+          <a:xfrm rot="10800000">
+            <a:off x="10986487" y="-137121"/>
+            <a:ext cx="1436651" cy="1397303"/>
           </a:xfrm>
           <a:prstGeom prst="rect">
             <a:avLst/>
@@ -6433,7 +6944,36 @@
           </a:extLst>
         </p:spPr>
       </p:pic>
+      <p:pic>
+        <p:nvPicPr>
+          <p:cNvPr id="6" name="Рисунок 5"/>
+          <p:cNvPicPr>
+            <a:picLocks noChangeAspect="1"/>
+          </p:cNvPicPr>
+          <p:nvPr/>
+        </p:nvPicPr>
+        <p:blipFill>
+          <a:blip r:embed="rId4"/>
+          <a:stretch>
+            <a:fillRect/>
+          </a:stretch>
+        </p:blipFill>
+        <p:spPr>
+          <a:xfrm>
+            <a:off x="1302708" y="1319559"/>
+            <a:ext cx="9462274" cy="5149107"/>
+          </a:xfrm>
+          <a:prstGeom prst="rect">
+            <a:avLst/>
+          </a:prstGeom>
+        </p:spPr>
+      </p:pic>
     </p:spTree>
+    <p:extLst>
+      <p:ext uri="{BB962C8B-B14F-4D97-AF65-F5344CB8AC3E}">
+        <p14:creationId xmlns:p14="http://schemas.microsoft.com/office/powerpoint/2010/main" val="2860607610"/>
+      </p:ext>
+    </p:extLst>
   </p:cSld>
   <p:clrMapOvr>
     <a:masterClrMapping/>
@@ -6460,7 +7000,7 @@
       </p:grpSpPr>
       <p:sp>
         <p:nvSpPr>
-          <p:cNvPr id="5" name="PlaceHolder 1"/>
+          <p:cNvPr id="2" name="Заголовок 1"/>
           <p:cNvSpPr>
             <a:spLocks noGrp="1"/>
           </p:cNvSpPr>
@@ -6470,109 +7010,5349 @@
         </p:nvSpPr>
         <p:spPr>
           <a:xfrm>
-            <a:off x="371475" y="373284"/>
-            <a:ext cx="7714800" cy="694800"/>
+            <a:off x="371475" y="561531"/>
+            <a:ext cx="10725150" cy="671957"/>
+          </a:xfrm>
+        </p:spPr>
+        <p:txBody>
+          <a:bodyPr/>
+          <a:lstStyle/>
+          <a:p>
+            <a:r>
+              <a:rPr lang="ru-RU" sz="3600" b="1" dirty="0">
+                <a:latin typeface="Outfit"/>
+              </a:rPr>
+              <a:t>Датчики и признаки</a:t>
+            </a:r>
+          </a:p>
+        </p:txBody>
+      </p:sp>
+      <p:pic>
+        <p:nvPicPr>
+          <p:cNvPr id="42" name="Picture 2" descr="Tree leaves Vectors - Download Free High-Quality Vectors | Magnific  (formerly Freepik)"/>
+          <p:cNvPicPr>
+            <a:picLocks noChangeAspect="1" noChangeArrowheads="1"/>
+          </p:cNvPicPr>
+          <p:nvPr/>
+        </p:nvPicPr>
+        <p:blipFill rotWithShape="1">
+          <a:blip r:embed="rId2" cstate="print">
+            <a:extLst>
+              <a:ext uri="{BEBA8EAE-BF5A-486C-A8C5-ECC9F3942E4B}">
+                <a14:imgProps xmlns:a14="http://schemas.microsoft.com/office/drawing/2010/main">
+                  <a14:imgLayer r:embed="rId3">
+                    <a14:imgEffect>
+                      <a14:backgroundRemoval t="4865" b="48919" l="5270" r="52838">
+                        <a14:backgroundMark x1="24865" y1="22432" x2="24865" y2="22432"/>
+                        <a14:backgroundMark x1="13919" y1="18108" x2="13919" y2="18108"/>
+                        <a14:backgroundMark x1="15811" y1="16486" x2="15811" y2="16486"/>
+                        <a14:backgroundMark x1="23243" y1="19730" x2="23243" y2="19730"/>
+                        <a14:backgroundMark x1="32162" y1="32162" x2="32162" y2="32162"/>
+                        <a14:backgroundMark x1="28108" y1="28649" x2="28108" y2="28649"/>
+                        <a14:backgroundMark x1="27027" y1="28514" x2="27027" y2="28514"/>
+                        <a14:backgroundMark x1="30811" y1="29054" x2="30811" y2="29054"/>
+                        <a14:backgroundMark x1="27703" y1="26216" x2="27703" y2="26216"/>
+                      </a14:backgroundRemoval>
+                    </a14:imgEffect>
+                  </a14:imgLayer>
+                </a14:imgProps>
+              </a:ext>
+              <a:ext uri="{28A0092B-C50C-407E-A947-70E740481C1C}">
+                <a14:useLocalDpi xmlns:a14="http://schemas.microsoft.com/office/drawing/2010/main" val="0"/>
+              </a:ext>
+            </a:extLst>
+          </a:blip>
+          <a:srcRect l="-1362" t="-3518" r="46702" b="50354"/>
+          <a:stretch/>
+        </p:blipFill>
+        <p:spPr bwMode="auto">
+          <a:xfrm rot="10800000">
+            <a:off x="10986487" y="-137121"/>
+            <a:ext cx="1436651" cy="1397303"/>
           </a:xfrm>
           <a:prstGeom prst="rect">
             <a:avLst/>
           </a:prstGeom>
           <a:noFill/>
-          <a:ln w="0">
-            <a:noFill/>
-          </a:ln>
+          <a:extLst>
+            <a:ext uri="{909E8E84-426E-40DD-AFC4-6F175D3DCCD1}">
+              <a14:hiddenFill xmlns:a14="http://schemas.microsoft.com/office/drawing/2010/main">
+                <a:solidFill>
+                  <a:srgbClr val="FFFFFF"/>
+                </a:solidFill>
+              </a14:hiddenFill>
+            </a:ext>
+          </a:extLst>
         </p:spPr>
-        <p:txBody>
-          <a:bodyPr lIns="91440" tIns="91440" rIns="91440" bIns="91440" anchor="t">
-            <a:normAutofit fontScale="90000"/>
-          </a:bodyPr>
-          <a:lstStyle/>
-          <a:p>
-            <a:pPr>
-              <a:lnSpc>
-                <a:spcPct val="100000"/>
-              </a:lnSpc>
-              <a:tabLst>
-                <a:tab pos="0" algn="l"/>
-              </a:tabLst>
-            </a:pPr>
-            <a:r>
-              <a:rPr lang="ru-RU" sz="4000" b="1" dirty="0">
-                <a:solidFill>
-                  <a:schemeClr val="dk1"/>
-                </a:solidFill>
-                <a:latin typeface="Outfit"/>
-              </a:rPr>
-              <a:t>Итоговая архитектура системы</a:t>
-            </a:r>
-            <a:endParaRPr lang="fr-FR" sz="4000" dirty="0">
-              <a:solidFill>
-                <a:schemeClr val="dk1"/>
-              </a:solidFill>
-              <a:latin typeface="Arial"/>
-            </a:endParaRPr>
-          </a:p>
-        </p:txBody>
-      </p:sp>
-      <p:sp>
-        <p:nvSpPr>
-          <p:cNvPr id="14" name="TextBox 13"/>
-          <p:cNvSpPr txBox="1"/>
-          <p:nvPr/>
-        </p:nvSpPr>
-        <p:spPr>
-          <a:xfrm>
-            <a:off x="384040" y="6281420"/>
-            <a:ext cx="312906" cy="369332"/>
-          </a:xfrm>
-          <a:prstGeom prst="rect">
-            <a:avLst/>
-          </a:prstGeom>
-          <a:noFill/>
-        </p:spPr>
-        <p:txBody>
-          <a:bodyPr wrap="none" rtlCol="0">
-            <a:spAutoFit/>
-          </a:bodyPr>
-          <a:lstStyle/>
-          <a:p>
-            <a:r>
-              <a:rPr lang="ru-RU" dirty="0"/>
-              <a:t>7</a:t>
-            </a:r>
-          </a:p>
-        </p:txBody>
-      </p:sp>
-      <p:pic>
-        <p:nvPicPr>
-          <p:cNvPr id="8" name="Рисунок 7">
+      </p:pic>
+      <p:graphicFrame>
+        <p:nvGraphicFramePr>
+          <p:cNvPr id="3" name="Таблица 2">
             <a:extLst>
               <a:ext uri="{FF2B5EF4-FFF2-40B4-BE49-F238E27FC236}">
-                <a16:creationId xmlns:a16="http://schemas.microsoft.com/office/drawing/2014/main" id="{55232040-3701-A94E-33EF-C3B98E7B1C2F}"/>
+                <a16:creationId xmlns:a16="http://schemas.microsoft.com/office/drawing/2014/main" id="{3A93F476-B751-7AA6-3932-6D341A3AE311}"/>
               </a:ext>
             </a:extLst>
           </p:cNvPr>
-          <p:cNvPicPr>
-            <a:picLocks noChangeAspect="1"/>
-          </p:cNvPicPr>
-          <p:nvPr/>
-        </p:nvPicPr>
-        <p:blipFill>
-          <a:blip r:embed="rId2"/>
-          <a:stretch>
-            <a:fillRect/>
-          </a:stretch>
-        </p:blipFill>
-        <p:spPr>
-          <a:xfrm>
-            <a:off x="1485899" y="1475678"/>
-            <a:ext cx="8409302" cy="4685400"/>
-          </a:xfrm>
-          <a:prstGeom prst="rect">
-            <a:avLst/>
-          </a:prstGeom>
-        </p:spPr>
-      </p:pic>
+          <p:cNvGraphicFramePr>
+            <a:graphicFrameLocks noGrp="1"/>
+          </p:cNvGraphicFramePr>
+          <p:nvPr>
+            <p:extLst>
+              <p:ext uri="{D42A27DB-BD31-4B8C-83A1-F6EECF244321}">
+                <p14:modId xmlns:p14="http://schemas.microsoft.com/office/powerpoint/2010/main" val="461834377"/>
+              </p:ext>
+            </p:extLst>
+          </p:nvPr>
+        </p:nvGraphicFramePr>
+        <p:xfrm>
+          <a:off x="1278467" y="1661936"/>
+          <a:ext cx="9080500" cy="4195237"/>
+        </p:xfrm>
+        <a:graphic>
+          <a:graphicData uri="http://schemas.openxmlformats.org/drawingml/2006/table">
+            <a:tbl>
+              <a:tblPr firstRow="1" bandRow="1">
+                <a:tableStyleId>{7DF18680-E054-41AD-8BC1-D1AEF772440D}</a:tableStyleId>
+              </a:tblPr>
+              <a:tblGrid>
+                <a:gridCol w="1257300">
+                  <a:extLst>
+                    <a:ext uri="{9D8B030D-6E8A-4147-A177-3AD203B41FA5}">
+                      <a16:colId xmlns:a16="http://schemas.microsoft.com/office/drawing/2014/main" val="20000"/>
+                    </a:ext>
+                  </a:extLst>
+                </a:gridCol>
+                <a:gridCol w="3619500">
+                  <a:extLst>
+                    <a:ext uri="{9D8B030D-6E8A-4147-A177-3AD203B41FA5}">
+                      <a16:colId xmlns:a16="http://schemas.microsoft.com/office/drawing/2014/main" val="20001"/>
+                    </a:ext>
+                  </a:extLst>
+                </a:gridCol>
+                <a:gridCol w="2654300">
+                  <a:extLst>
+                    <a:ext uri="{9D8B030D-6E8A-4147-A177-3AD203B41FA5}">
+                      <a16:colId xmlns:a16="http://schemas.microsoft.com/office/drawing/2014/main" val="20002"/>
+                    </a:ext>
+                  </a:extLst>
+                </a:gridCol>
+                <a:gridCol w="1549400">
+                  <a:extLst>
+                    <a:ext uri="{9D8B030D-6E8A-4147-A177-3AD203B41FA5}">
+                      <a16:colId xmlns:a16="http://schemas.microsoft.com/office/drawing/2014/main" val="20003"/>
+                    </a:ext>
+                  </a:extLst>
+                </a:gridCol>
+              </a:tblGrid>
+              <a:tr h="711439">
+                <a:tc>
+                  <a:txBody>
+                    <a:bodyPr/>
+                    <a:lstStyle>
+                      <a:defPPr>
+                        <a:defRPr lang="ru-RU" b="1">
+                          <a:solidFill>
+                            <a:schemeClr val="lt1"/>
+                          </a:solidFill>
+                        </a:defRPr>
+                      </a:defPPr>
+                      <a:lvl1pPr marL="0" algn="l" defTabSz="914400" rtl="0" eaLnBrk="1" latinLnBrk="0" hangingPunct="1">
+                        <a:defRPr sz="1800" b="1" kern="1200">
+                          <a:solidFill>
+                            <a:schemeClr val="lt1"/>
+                          </a:solidFill>
+                          <a:latin typeface="+mn-lt"/>
+                          <a:ea typeface="+mn-ea"/>
+                          <a:cs typeface="+mn-cs"/>
+                        </a:defRPr>
+                      </a:lvl1pPr>
+                      <a:lvl2pPr marL="457200" algn="l" defTabSz="914400" rtl="0" eaLnBrk="1" latinLnBrk="0" hangingPunct="1">
+                        <a:defRPr sz="1800" b="1" kern="1200">
+                          <a:solidFill>
+                            <a:schemeClr val="lt1"/>
+                          </a:solidFill>
+                          <a:latin typeface="+mn-lt"/>
+                          <a:ea typeface="+mn-ea"/>
+                          <a:cs typeface="+mn-cs"/>
+                        </a:defRPr>
+                      </a:lvl2pPr>
+                      <a:lvl3pPr marL="914400" algn="l" defTabSz="914400" rtl="0" eaLnBrk="1" latinLnBrk="0" hangingPunct="1">
+                        <a:defRPr sz="1800" b="1" kern="1200">
+                          <a:solidFill>
+                            <a:schemeClr val="lt1"/>
+                          </a:solidFill>
+                          <a:latin typeface="+mn-lt"/>
+                          <a:ea typeface="+mn-ea"/>
+                          <a:cs typeface="+mn-cs"/>
+                        </a:defRPr>
+                      </a:lvl3pPr>
+                      <a:lvl4pPr marL="1371600" algn="l" defTabSz="914400" rtl="0" eaLnBrk="1" latinLnBrk="0" hangingPunct="1">
+                        <a:defRPr sz="1800" b="1" kern="1200">
+                          <a:solidFill>
+                            <a:schemeClr val="lt1"/>
+                          </a:solidFill>
+                          <a:latin typeface="+mn-lt"/>
+                          <a:ea typeface="+mn-ea"/>
+                          <a:cs typeface="+mn-cs"/>
+                        </a:defRPr>
+                      </a:lvl4pPr>
+                      <a:lvl5pPr marL="1828800" algn="l" defTabSz="914400" rtl="0" eaLnBrk="1" latinLnBrk="0" hangingPunct="1">
+                        <a:defRPr sz="1800" b="1" kern="1200">
+                          <a:solidFill>
+                            <a:schemeClr val="lt1"/>
+                          </a:solidFill>
+                          <a:latin typeface="+mn-lt"/>
+                          <a:ea typeface="+mn-ea"/>
+                          <a:cs typeface="+mn-cs"/>
+                        </a:defRPr>
+                      </a:lvl5pPr>
+                      <a:lvl6pPr marL="2286000" algn="l" defTabSz="914400" rtl="0" eaLnBrk="1" latinLnBrk="0" hangingPunct="1">
+                        <a:defRPr sz="1800" b="1" kern="1200">
+                          <a:solidFill>
+                            <a:schemeClr val="lt1"/>
+                          </a:solidFill>
+                          <a:latin typeface="+mn-lt"/>
+                          <a:ea typeface="+mn-ea"/>
+                          <a:cs typeface="+mn-cs"/>
+                        </a:defRPr>
+                      </a:lvl6pPr>
+                      <a:lvl7pPr marL="2743200" algn="l" defTabSz="914400" rtl="0" eaLnBrk="1" latinLnBrk="0" hangingPunct="1">
+                        <a:defRPr sz="1800" b="1" kern="1200">
+                          <a:solidFill>
+                            <a:schemeClr val="lt1"/>
+                          </a:solidFill>
+                          <a:latin typeface="+mn-lt"/>
+                          <a:ea typeface="+mn-ea"/>
+                          <a:cs typeface="+mn-cs"/>
+                        </a:defRPr>
+                      </a:lvl7pPr>
+                      <a:lvl8pPr marL="3200400" algn="l" defTabSz="914400" rtl="0" eaLnBrk="1" latinLnBrk="0" hangingPunct="1">
+                        <a:defRPr sz="1800" b="1" kern="1200">
+                          <a:solidFill>
+                            <a:schemeClr val="lt1"/>
+                          </a:solidFill>
+                          <a:latin typeface="+mn-lt"/>
+                          <a:ea typeface="+mn-ea"/>
+                          <a:cs typeface="+mn-cs"/>
+                        </a:defRPr>
+                      </a:lvl8pPr>
+                      <a:lvl9pPr marL="3657600" algn="l" defTabSz="914400" rtl="0" eaLnBrk="1" latinLnBrk="0" hangingPunct="1">
+                        <a:defRPr sz="1800" b="1" kern="1200">
+                          <a:solidFill>
+                            <a:schemeClr val="lt1"/>
+                          </a:solidFill>
+                          <a:latin typeface="+mn-lt"/>
+                          <a:ea typeface="+mn-ea"/>
+                          <a:cs typeface="+mn-cs"/>
+                        </a:defRPr>
+                      </a:lvl9pPr>
+                    </a:lstStyle>
+                    <a:p>
+                      <a:r>
+                        <a:rPr lang="ru-RU" dirty="0">
+                          <a:solidFill>
+                            <a:schemeClr val="tx1"/>
+                          </a:solidFill>
+                        </a:rPr>
+                        <a:t>Датчик</a:t>
+                      </a:r>
+                    </a:p>
+                  </a:txBody>
+                  <a:tcPr>
+                    <a:lnL w="38100" cap="flat" cmpd="sng" algn="ctr">
+                      <a:solidFill>
+                        <a:schemeClr val="tx1"/>
+                      </a:solidFill>
+                      <a:prstDash val="solid"/>
+                      <a:round/>
+                      <a:headEnd type="none" w="med" len="med"/>
+                      <a:tailEnd type="none" w="med" len="med"/>
+                    </a:lnL>
+                    <a:lnR w="38100" cap="flat" cmpd="sng" algn="ctr">
+                      <a:solidFill>
+                        <a:schemeClr val="tx1"/>
+                      </a:solidFill>
+                      <a:prstDash val="solid"/>
+                      <a:round/>
+                      <a:headEnd type="none" w="med" len="med"/>
+                      <a:tailEnd type="none" w="med" len="med"/>
+                    </a:lnR>
+                    <a:lnT w="38100" cap="flat" cmpd="sng" algn="ctr">
+                      <a:solidFill>
+                        <a:schemeClr val="tx1"/>
+                      </a:solidFill>
+                      <a:prstDash val="solid"/>
+                      <a:round/>
+                      <a:headEnd type="none" w="med" len="med"/>
+                      <a:tailEnd type="none" w="med" len="med"/>
+                    </a:lnT>
+                    <a:lnB w="38100" cap="flat" cmpd="sng" algn="ctr">
+                      <a:solidFill>
+                        <a:schemeClr val="tx1"/>
+                      </a:solidFill>
+                      <a:prstDash val="solid"/>
+                      <a:round/>
+                      <a:headEnd type="none" w="med" len="med"/>
+                      <a:tailEnd type="none" w="med" len="med"/>
+                    </a:lnB>
+                    <a:lnTlToBr w="12700" cmpd="sng">
+                      <a:noFill/>
+                      <a:prstDash val="solid"/>
+                    </a:lnTlToBr>
+                    <a:lnBlToTr w="12700" cmpd="sng">
+                      <a:noFill/>
+                      <a:prstDash val="solid"/>
+                    </a:lnBlToTr>
+                    <a:solidFill>
+                      <a:schemeClr val="bg1"/>
+                    </a:solidFill>
+                  </a:tcPr>
+                </a:tc>
+                <a:tc>
+                  <a:txBody>
+                    <a:bodyPr/>
+                    <a:lstStyle>
+                      <a:defPPr>
+                        <a:defRPr lang="ru-RU" b="1">
+                          <a:solidFill>
+                            <a:schemeClr val="lt1"/>
+                          </a:solidFill>
+                        </a:defRPr>
+                      </a:defPPr>
+                      <a:lvl1pPr marL="0" algn="l" defTabSz="914400" rtl="0" eaLnBrk="1" latinLnBrk="0" hangingPunct="1">
+                        <a:defRPr sz="1800" b="1" kern="1200">
+                          <a:solidFill>
+                            <a:schemeClr val="lt1"/>
+                          </a:solidFill>
+                          <a:latin typeface="+mn-lt"/>
+                          <a:ea typeface="+mn-ea"/>
+                          <a:cs typeface="+mn-cs"/>
+                        </a:defRPr>
+                      </a:lvl1pPr>
+                      <a:lvl2pPr marL="457200" algn="l" defTabSz="914400" rtl="0" eaLnBrk="1" latinLnBrk="0" hangingPunct="1">
+                        <a:defRPr sz="1800" b="1" kern="1200">
+                          <a:solidFill>
+                            <a:schemeClr val="lt1"/>
+                          </a:solidFill>
+                          <a:latin typeface="+mn-lt"/>
+                          <a:ea typeface="+mn-ea"/>
+                          <a:cs typeface="+mn-cs"/>
+                        </a:defRPr>
+                      </a:lvl2pPr>
+                      <a:lvl3pPr marL="914400" algn="l" defTabSz="914400" rtl="0" eaLnBrk="1" latinLnBrk="0" hangingPunct="1">
+                        <a:defRPr sz="1800" b="1" kern="1200">
+                          <a:solidFill>
+                            <a:schemeClr val="lt1"/>
+                          </a:solidFill>
+                          <a:latin typeface="+mn-lt"/>
+                          <a:ea typeface="+mn-ea"/>
+                          <a:cs typeface="+mn-cs"/>
+                        </a:defRPr>
+                      </a:lvl3pPr>
+                      <a:lvl4pPr marL="1371600" algn="l" defTabSz="914400" rtl="0" eaLnBrk="1" latinLnBrk="0" hangingPunct="1">
+                        <a:defRPr sz="1800" b="1" kern="1200">
+                          <a:solidFill>
+                            <a:schemeClr val="lt1"/>
+                          </a:solidFill>
+                          <a:latin typeface="+mn-lt"/>
+                          <a:ea typeface="+mn-ea"/>
+                          <a:cs typeface="+mn-cs"/>
+                        </a:defRPr>
+                      </a:lvl4pPr>
+                      <a:lvl5pPr marL="1828800" algn="l" defTabSz="914400" rtl="0" eaLnBrk="1" latinLnBrk="0" hangingPunct="1">
+                        <a:defRPr sz="1800" b="1" kern="1200">
+                          <a:solidFill>
+                            <a:schemeClr val="lt1"/>
+                          </a:solidFill>
+                          <a:latin typeface="+mn-lt"/>
+                          <a:ea typeface="+mn-ea"/>
+                          <a:cs typeface="+mn-cs"/>
+                        </a:defRPr>
+                      </a:lvl5pPr>
+                      <a:lvl6pPr marL="2286000" algn="l" defTabSz="914400" rtl="0" eaLnBrk="1" latinLnBrk="0" hangingPunct="1">
+                        <a:defRPr sz="1800" b="1" kern="1200">
+                          <a:solidFill>
+                            <a:schemeClr val="lt1"/>
+                          </a:solidFill>
+                          <a:latin typeface="+mn-lt"/>
+                          <a:ea typeface="+mn-ea"/>
+                          <a:cs typeface="+mn-cs"/>
+                        </a:defRPr>
+                      </a:lvl6pPr>
+                      <a:lvl7pPr marL="2743200" algn="l" defTabSz="914400" rtl="0" eaLnBrk="1" latinLnBrk="0" hangingPunct="1">
+                        <a:defRPr sz="1800" b="1" kern="1200">
+                          <a:solidFill>
+                            <a:schemeClr val="lt1"/>
+                          </a:solidFill>
+                          <a:latin typeface="+mn-lt"/>
+                          <a:ea typeface="+mn-ea"/>
+                          <a:cs typeface="+mn-cs"/>
+                        </a:defRPr>
+                      </a:lvl7pPr>
+                      <a:lvl8pPr marL="3200400" algn="l" defTabSz="914400" rtl="0" eaLnBrk="1" latinLnBrk="0" hangingPunct="1">
+                        <a:defRPr sz="1800" b="1" kern="1200">
+                          <a:solidFill>
+                            <a:schemeClr val="lt1"/>
+                          </a:solidFill>
+                          <a:latin typeface="+mn-lt"/>
+                          <a:ea typeface="+mn-ea"/>
+                          <a:cs typeface="+mn-cs"/>
+                        </a:defRPr>
+                      </a:lvl8pPr>
+                      <a:lvl9pPr marL="3657600" algn="l" defTabSz="914400" rtl="0" eaLnBrk="1" latinLnBrk="0" hangingPunct="1">
+                        <a:defRPr sz="1800" b="1" kern="1200">
+                          <a:solidFill>
+                            <a:schemeClr val="lt1"/>
+                          </a:solidFill>
+                          <a:latin typeface="+mn-lt"/>
+                          <a:ea typeface="+mn-ea"/>
+                          <a:cs typeface="+mn-cs"/>
+                        </a:defRPr>
+                      </a:lvl9pPr>
+                    </a:lstStyle>
+                    <a:p>
+                      <a:r>
+                        <a:rPr lang="ru-RU" dirty="0">
+                          <a:solidFill>
+                            <a:schemeClr val="tx1"/>
+                          </a:solidFill>
+                        </a:rPr>
+                        <a:t>Признак</a:t>
+                      </a:r>
+                    </a:p>
+                  </a:txBody>
+                  <a:tcPr>
+                    <a:lnL w="38100" cap="flat" cmpd="sng" algn="ctr">
+                      <a:solidFill>
+                        <a:schemeClr val="tx1"/>
+                      </a:solidFill>
+                      <a:prstDash val="solid"/>
+                      <a:round/>
+                      <a:headEnd type="none" w="med" len="med"/>
+                      <a:tailEnd type="none" w="med" len="med"/>
+                    </a:lnL>
+                    <a:lnR w="38100" cap="flat" cmpd="sng" algn="ctr">
+                      <a:solidFill>
+                        <a:schemeClr val="tx1"/>
+                      </a:solidFill>
+                      <a:prstDash val="solid"/>
+                      <a:round/>
+                      <a:headEnd type="none" w="med" len="med"/>
+                      <a:tailEnd type="none" w="med" len="med"/>
+                    </a:lnR>
+                    <a:lnT w="38100" cap="flat" cmpd="sng" algn="ctr">
+                      <a:solidFill>
+                        <a:schemeClr val="tx1"/>
+                      </a:solidFill>
+                      <a:prstDash val="solid"/>
+                      <a:round/>
+                      <a:headEnd type="none" w="med" len="med"/>
+                      <a:tailEnd type="none" w="med" len="med"/>
+                    </a:lnT>
+                    <a:lnB w="38100" cap="flat" cmpd="sng" algn="ctr">
+                      <a:solidFill>
+                        <a:schemeClr val="tx1"/>
+                      </a:solidFill>
+                      <a:prstDash val="solid"/>
+                      <a:round/>
+                      <a:headEnd type="none" w="med" len="med"/>
+                      <a:tailEnd type="none" w="med" len="med"/>
+                    </a:lnB>
+                    <a:lnTlToBr w="12700" cmpd="sng">
+                      <a:noFill/>
+                      <a:prstDash val="solid"/>
+                    </a:lnTlToBr>
+                    <a:lnBlToTr w="12700" cmpd="sng">
+                      <a:noFill/>
+                      <a:prstDash val="solid"/>
+                    </a:lnBlToTr>
+                    <a:solidFill>
+                      <a:schemeClr val="bg1"/>
+                    </a:solidFill>
+                  </a:tcPr>
+                </a:tc>
+                <a:tc>
+                  <a:txBody>
+                    <a:bodyPr/>
+                    <a:lstStyle>
+                      <a:defPPr>
+                        <a:defRPr lang="ru-RU" b="1">
+                          <a:solidFill>
+                            <a:schemeClr val="lt1"/>
+                          </a:solidFill>
+                        </a:defRPr>
+                      </a:defPPr>
+                      <a:lvl1pPr marL="0" algn="l" defTabSz="914400" rtl="0" eaLnBrk="1" latinLnBrk="0" hangingPunct="1">
+                        <a:defRPr sz="1800" b="1" kern="1200">
+                          <a:solidFill>
+                            <a:schemeClr val="lt1"/>
+                          </a:solidFill>
+                          <a:latin typeface="+mn-lt"/>
+                          <a:ea typeface="+mn-ea"/>
+                          <a:cs typeface="+mn-cs"/>
+                        </a:defRPr>
+                      </a:lvl1pPr>
+                      <a:lvl2pPr marL="457200" algn="l" defTabSz="914400" rtl="0" eaLnBrk="1" latinLnBrk="0" hangingPunct="1">
+                        <a:defRPr sz="1800" b="1" kern="1200">
+                          <a:solidFill>
+                            <a:schemeClr val="lt1"/>
+                          </a:solidFill>
+                          <a:latin typeface="+mn-lt"/>
+                          <a:ea typeface="+mn-ea"/>
+                          <a:cs typeface="+mn-cs"/>
+                        </a:defRPr>
+                      </a:lvl2pPr>
+                      <a:lvl3pPr marL="914400" algn="l" defTabSz="914400" rtl="0" eaLnBrk="1" latinLnBrk="0" hangingPunct="1">
+                        <a:defRPr sz="1800" b="1" kern="1200">
+                          <a:solidFill>
+                            <a:schemeClr val="lt1"/>
+                          </a:solidFill>
+                          <a:latin typeface="+mn-lt"/>
+                          <a:ea typeface="+mn-ea"/>
+                          <a:cs typeface="+mn-cs"/>
+                        </a:defRPr>
+                      </a:lvl3pPr>
+                      <a:lvl4pPr marL="1371600" algn="l" defTabSz="914400" rtl="0" eaLnBrk="1" latinLnBrk="0" hangingPunct="1">
+                        <a:defRPr sz="1800" b="1" kern="1200">
+                          <a:solidFill>
+                            <a:schemeClr val="lt1"/>
+                          </a:solidFill>
+                          <a:latin typeface="+mn-lt"/>
+                          <a:ea typeface="+mn-ea"/>
+                          <a:cs typeface="+mn-cs"/>
+                        </a:defRPr>
+                      </a:lvl4pPr>
+                      <a:lvl5pPr marL="1828800" algn="l" defTabSz="914400" rtl="0" eaLnBrk="1" latinLnBrk="0" hangingPunct="1">
+                        <a:defRPr sz="1800" b="1" kern="1200">
+                          <a:solidFill>
+                            <a:schemeClr val="lt1"/>
+                          </a:solidFill>
+                          <a:latin typeface="+mn-lt"/>
+                          <a:ea typeface="+mn-ea"/>
+                          <a:cs typeface="+mn-cs"/>
+                        </a:defRPr>
+                      </a:lvl5pPr>
+                      <a:lvl6pPr marL="2286000" algn="l" defTabSz="914400" rtl="0" eaLnBrk="1" latinLnBrk="0" hangingPunct="1">
+                        <a:defRPr sz="1800" b="1" kern="1200">
+                          <a:solidFill>
+                            <a:schemeClr val="lt1"/>
+                          </a:solidFill>
+                          <a:latin typeface="+mn-lt"/>
+                          <a:ea typeface="+mn-ea"/>
+                          <a:cs typeface="+mn-cs"/>
+                        </a:defRPr>
+                      </a:lvl6pPr>
+                      <a:lvl7pPr marL="2743200" algn="l" defTabSz="914400" rtl="0" eaLnBrk="1" latinLnBrk="0" hangingPunct="1">
+                        <a:defRPr sz="1800" b="1" kern="1200">
+                          <a:solidFill>
+                            <a:schemeClr val="lt1"/>
+                          </a:solidFill>
+                          <a:latin typeface="+mn-lt"/>
+                          <a:ea typeface="+mn-ea"/>
+                          <a:cs typeface="+mn-cs"/>
+                        </a:defRPr>
+                      </a:lvl7pPr>
+                      <a:lvl8pPr marL="3200400" algn="l" defTabSz="914400" rtl="0" eaLnBrk="1" latinLnBrk="0" hangingPunct="1">
+                        <a:defRPr sz="1800" b="1" kern="1200">
+                          <a:solidFill>
+                            <a:schemeClr val="lt1"/>
+                          </a:solidFill>
+                          <a:latin typeface="+mn-lt"/>
+                          <a:ea typeface="+mn-ea"/>
+                          <a:cs typeface="+mn-cs"/>
+                        </a:defRPr>
+                      </a:lvl8pPr>
+                      <a:lvl9pPr marL="3657600" algn="l" defTabSz="914400" rtl="0" eaLnBrk="1" latinLnBrk="0" hangingPunct="1">
+                        <a:defRPr sz="1800" b="1" kern="1200">
+                          <a:solidFill>
+                            <a:schemeClr val="lt1"/>
+                          </a:solidFill>
+                          <a:latin typeface="+mn-lt"/>
+                          <a:ea typeface="+mn-ea"/>
+                          <a:cs typeface="+mn-cs"/>
+                        </a:defRPr>
+                      </a:lvl9pPr>
+                    </a:lstStyle>
+                    <a:p>
+                      <a:r>
+                        <a:rPr lang="ru-RU" dirty="0">
+                          <a:solidFill>
+                            <a:schemeClr val="tx1"/>
+                          </a:solidFill>
+                        </a:rPr>
+                        <a:t>Диапазон измерений</a:t>
+                      </a:r>
+                    </a:p>
+                  </a:txBody>
+                  <a:tcPr>
+                    <a:lnL w="38100" cap="flat" cmpd="sng" algn="ctr">
+                      <a:solidFill>
+                        <a:schemeClr val="tx1"/>
+                      </a:solidFill>
+                      <a:prstDash val="solid"/>
+                      <a:round/>
+                      <a:headEnd type="none" w="med" len="med"/>
+                      <a:tailEnd type="none" w="med" len="med"/>
+                    </a:lnL>
+                    <a:lnR w="38100" cap="flat" cmpd="sng" algn="ctr">
+                      <a:solidFill>
+                        <a:schemeClr val="tx1"/>
+                      </a:solidFill>
+                      <a:prstDash val="solid"/>
+                      <a:round/>
+                      <a:headEnd type="none" w="med" len="med"/>
+                      <a:tailEnd type="none" w="med" len="med"/>
+                    </a:lnR>
+                    <a:lnT w="38100" cap="flat" cmpd="sng" algn="ctr">
+                      <a:solidFill>
+                        <a:schemeClr val="tx1"/>
+                      </a:solidFill>
+                      <a:prstDash val="solid"/>
+                      <a:round/>
+                      <a:headEnd type="none" w="med" len="med"/>
+                      <a:tailEnd type="none" w="med" len="med"/>
+                    </a:lnT>
+                    <a:lnB w="38100" cap="flat" cmpd="sng" algn="ctr">
+                      <a:solidFill>
+                        <a:schemeClr val="tx1"/>
+                      </a:solidFill>
+                      <a:prstDash val="solid"/>
+                      <a:round/>
+                      <a:headEnd type="none" w="med" len="med"/>
+                      <a:tailEnd type="none" w="med" len="med"/>
+                    </a:lnB>
+                    <a:lnTlToBr w="12700" cmpd="sng">
+                      <a:noFill/>
+                      <a:prstDash val="solid"/>
+                    </a:lnTlToBr>
+                    <a:lnBlToTr w="12700" cmpd="sng">
+                      <a:noFill/>
+                      <a:prstDash val="solid"/>
+                    </a:lnBlToTr>
+                    <a:solidFill>
+                      <a:schemeClr val="bg1"/>
+                    </a:solidFill>
+                  </a:tcPr>
+                </a:tc>
+                <a:tc>
+                  <a:txBody>
+                    <a:bodyPr/>
+                    <a:lstStyle>
+                      <a:defPPr>
+                        <a:defRPr lang="ru-RU" b="1">
+                          <a:solidFill>
+                            <a:schemeClr val="lt1"/>
+                          </a:solidFill>
+                        </a:defRPr>
+                      </a:defPPr>
+                      <a:lvl1pPr marL="0" algn="l" defTabSz="914400" rtl="0" eaLnBrk="1" latinLnBrk="0" hangingPunct="1">
+                        <a:defRPr sz="1800" b="1" kern="1200">
+                          <a:solidFill>
+                            <a:schemeClr val="lt1"/>
+                          </a:solidFill>
+                          <a:latin typeface="+mn-lt"/>
+                          <a:ea typeface="+mn-ea"/>
+                          <a:cs typeface="+mn-cs"/>
+                        </a:defRPr>
+                      </a:lvl1pPr>
+                      <a:lvl2pPr marL="457200" algn="l" defTabSz="914400" rtl="0" eaLnBrk="1" latinLnBrk="0" hangingPunct="1">
+                        <a:defRPr sz="1800" b="1" kern="1200">
+                          <a:solidFill>
+                            <a:schemeClr val="lt1"/>
+                          </a:solidFill>
+                          <a:latin typeface="+mn-lt"/>
+                          <a:ea typeface="+mn-ea"/>
+                          <a:cs typeface="+mn-cs"/>
+                        </a:defRPr>
+                      </a:lvl2pPr>
+                      <a:lvl3pPr marL="914400" algn="l" defTabSz="914400" rtl="0" eaLnBrk="1" latinLnBrk="0" hangingPunct="1">
+                        <a:defRPr sz="1800" b="1" kern="1200">
+                          <a:solidFill>
+                            <a:schemeClr val="lt1"/>
+                          </a:solidFill>
+                          <a:latin typeface="+mn-lt"/>
+                          <a:ea typeface="+mn-ea"/>
+                          <a:cs typeface="+mn-cs"/>
+                        </a:defRPr>
+                      </a:lvl3pPr>
+                      <a:lvl4pPr marL="1371600" algn="l" defTabSz="914400" rtl="0" eaLnBrk="1" latinLnBrk="0" hangingPunct="1">
+                        <a:defRPr sz="1800" b="1" kern="1200">
+                          <a:solidFill>
+                            <a:schemeClr val="lt1"/>
+                          </a:solidFill>
+                          <a:latin typeface="+mn-lt"/>
+                          <a:ea typeface="+mn-ea"/>
+                          <a:cs typeface="+mn-cs"/>
+                        </a:defRPr>
+                      </a:lvl4pPr>
+                      <a:lvl5pPr marL="1828800" algn="l" defTabSz="914400" rtl="0" eaLnBrk="1" latinLnBrk="0" hangingPunct="1">
+                        <a:defRPr sz="1800" b="1" kern="1200">
+                          <a:solidFill>
+                            <a:schemeClr val="lt1"/>
+                          </a:solidFill>
+                          <a:latin typeface="+mn-lt"/>
+                          <a:ea typeface="+mn-ea"/>
+                          <a:cs typeface="+mn-cs"/>
+                        </a:defRPr>
+                      </a:lvl5pPr>
+                      <a:lvl6pPr marL="2286000" algn="l" defTabSz="914400" rtl="0" eaLnBrk="1" latinLnBrk="0" hangingPunct="1">
+                        <a:defRPr sz="1800" b="1" kern="1200">
+                          <a:solidFill>
+                            <a:schemeClr val="lt1"/>
+                          </a:solidFill>
+                          <a:latin typeface="+mn-lt"/>
+                          <a:ea typeface="+mn-ea"/>
+                          <a:cs typeface="+mn-cs"/>
+                        </a:defRPr>
+                      </a:lvl6pPr>
+                      <a:lvl7pPr marL="2743200" algn="l" defTabSz="914400" rtl="0" eaLnBrk="1" latinLnBrk="0" hangingPunct="1">
+                        <a:defRPr sz="1800" b="1" kern="1200">
+                          <a:solidFill>
+                            <a:schemeClr val="lt1"/>
+                          </a:solidFill>
+                          <a:latin typeface="+mn-lt"/>
+                          <a:ea typeface="+mn-ea"/>
+                          <a:cs typeface="+mn-cs"/>
+                        </a:defRPr>
+                      </a:lvl7pPr>
+                      <a:lvl8pPr marL="3200400" algn="l" defTabSz="914400" rtl="0" eaLnBrk="1" latinLnBrk="0" hangingPunct="1">
+                        <a:defRPr sz="1800" b="1" kern="1200">
+                          <a:solidFill>
+                            <a:schemeClr val="lt1"/>
+                          </a:solidFill>
+                          <a:latin typeface="+mn-lt"/>
+                          <a:ea typeface="+mn-ea"/>
+                          <a:cs typeface="+mn-cs"/>
+                        </a:defRPr>
+                      </a:lvl8pPr>
+                      <a:lvl9pPr marL="3657600" algn="l" defTabSz="914400" rtl="0" eaLnBrk="1" latinLnBrk="0" hangingPunct="1">
+                        <a:defRPr sz="1800" b="1" kern="1200">
+                          <a:solidFill>
+                            <a:schemeClr val="lt1"/>
+                          </a:solidFill>
+                          <a:latin typeface="+mn-lt"/>
+                          <a:ea typeface="+mn-ea"/>
+                          <a:cs typeface="+mn-cs"/>
+                        </a:defRPr>
+                      </a:lvl9pPr>
+                    </a:lstStyle>
+                    <a:p>
+                      <a:r>
+                        <a:rPr lang="ru-RU" dirty="0">
+                          <a:solidFill>
+                            <a:schemeClr val="tx1"/>
+                          </a:solidFill>
+                        </a:rPr>
+                        <a:t>Единица измерений</a:t>
+                      </a:r>
+                    </a:p>
+                  </a:txBody>
+                  <a:tcPr>
+                    <a:lnL w="38100" cap="flat" cmpd="sng" algn="ctr">
+                      <a:solidFill>
+                        <a:schemeClr val="tx1"/>
+                      </a:solidFill>
+                      <a:prstDash val="solid"/>
+                      <a:round/>
+                      <a:headEnd type="none" w="med" len="med"/>
+                      <a:tailEnd type="none" w="med" len="med"/>
+                    </a:lnL>
+                    <a:lnR w="38100" cap="flat" cmpd="sng" algn="ctr">
+                      <a:solidFill>
+                        <a:schemeClr val="tx1"/>
+                      </a:solidFill>
+                      <a:prstDash val="solid"/>
+                      <a:round/>
+                      <a:headEnd type="none" w="med" len="med"/>
+                      <a:tailEnd type="none" w="med" len="med"/>
+                    </a:lnR>
+                    <a:lnT w="38100" cap="flat" cmpd="sng" algn="ctr">
+                      <a:solidFill>
+                        <a:schemeClr val="tx1"/>
+                      </a:solidFill>
+                      <a:prstDash val="solid"/>
+                      <a:round/>
+                      <a:headEnd type="none" w="med" len="med"/>
+                      <a:tailEnd type="none" w="med" len="med"/>
+                    </a:lnT>
+                    <a:lnB w="38100" cap="flat" cmpd="sng" algn="ctr">
+                      <a:solidFill>
+                        <a:schemeClr val="tx1"/>
+                      </a:solidFill>
+                      <a:prstDash val="solid"/>
+                      <a:round/>
+                      <a:headEnd type="none" w="med" len="med"/>
+                      <a:tailEnd type="none" w="med" len="med"/>
+                    </a:lnB>
+                    <a:lnTlToBr w="12700" cmpd="sng">
+                      <a:noFill/>
+                      <a:prstDash val="solid"/>
+                    </a:lnTlToBr>
+                    <a:lnBlToTr w="12700" cmpd="sng">
+                      <a:noFill/>
+                      <a:prstDash val="solid"/>
+                    </a:lnBlToTr>
+                    <a:solidFill>
+                      <a:schemeClr val="bg1"/>
+                    </a:solidFill>
+                  </a:tcPr>
+                </a:tc>
+                <a:extLst>
+                  <a:ext uri="{0D108BD9-81ED-4DB2-BD59-A6C34878D82A}">
+                    <a16:rowId xmlns:a16="http://schemas.microsoft.com/office/drawing/2014/main" val="10000"/>
+                  </a:ext>
+                </a:extLst>
+              </a:tr>
+              <a:tr h="412184">
+                <a:tc rowSpan="3">
+                  <a:txBody>
+                    <a:bodyPr/>
+                    <a:lstStyle>
+                      <a:defPPr>
+                        <a:defRPr lang="ru-RU">
+                          <a:solidFill>
+                            <a:schemeClr val="dk1"/>
+                          </a:solidFill>
+                        </a:defRPr>
+                      </a:defPPr>
+                      <a:lvl1pPr marL="0" algn="l" defTabSz="914400" rtl="0" eaLnBrk="1" latinLnBrk="0" hangingPunct="1">
+                        <a:defRPr sz="1800" kern="1200">
+                          <a:solidFill>
+                            <a:schemeClr val="dk1"/>
+                          </a:solidFill>
+                          <a:latin typeface="+mn-lt"/>
+                          <a:ea typeface="+mn-ea"/>
+                          <a:cs typeface="+mn-cs"/>
+                        </a:defRPr>
+                      </a:lvl1pPr>
+                      <a:lvl2pPr marL="457200" algn="l" defTabSz="914400" rtl="0" eaLnBrk="1" latinLnBrk="0" hangingPunct="1">
+                        <a:defRPr sz="1800" kern="1200">
+                          <a:solidFill>
+                            <a:schemeClr val="dk1"/>
+                          </a:solidFill>
+                          <a:latin typeface="+mn-lt"/>
+                          <a:ea typeface="+mn-ea"/>
+                          <a:cs typeface="+mn-cs"/>
+                        </a:defRPr>
+                      </a:lvl2pPr>
+                      <a:lvl3pPr marL="914400" algn="l" defTabSz="914400" rtl="0" eaLnBrk="1" latinLnBrk="0" hangingPunct="1">
+                        <a:defRPr sz="1800" kern="1200">
+                          <a:solidFill>
+                            <a:schemeClr val="dk1"/>
+                          </a:solidFill>
+                          <a:latin typeface="+mn-lt"/>
+                          <a:ea typeface="+mn-ea"/>
+                          <a:cs typeface="+mn-cs"/>
+                        </a:defRPr>
+                      </a:lvl3pPr>
+                      <a:lvl4pPr marL="1371600" algn="l" defTabSz="914400" rtl="0" eaLnBrk="1" latinLnBrk="0" hangingPunct="1">
+                        <a:defRPr sz="1800" kern="1200">
+                          <a:solidFill>
+                            <a:schemeClr val="dk1"/>
+                          </a:solidFill>
+                          <a:latin typeface="+mn-lt"/>
+                          <a:ea typeface="+mn-ea"/>
+                          <a:cs typeface="+mn-cs"/>
+                        </a:defRPr>
+                      </a:lvl4pPr>
+                      <a:lvl5pPr marL="1828800" algn="l" defTabSz="914400" rtl="0" eaLnBrk="1" latinLnBrk="0" hangingPunct="1">
+                        <a:defRPr sz="1800" kern="1200">
+                          <a:solidFill>
+                            <a:schemeClr val="dk1"/>
+                          </a:solidFill>
+                          <a:latin typeface="+mn-lt"/>
+                          <a:ea typeface="+mn-ea"/>
+                          <a:cs typeface="+mn-cs"/>
+                        </a:defRPr>
+                      </a:lvl5pPr>
+                      <a:lvl6pPr marL="2286000" algn="l" defTabSz="914400" rtl="0" eaLnBrk="1" latinLnBrk="0" hangingPunct="1">
+                        <a:defRPr sz="1800" kern="1200">
+                          <a:solidFill>
+                            <a:schemeClr val="dk1"/>
+                          </a:solidFill>
+                          <a:latin typeface="+mn-lt"/>
+                          <a:ea typeface="+mn-ea"/>
+                          <a:cs typeface="+mn-cs"/>
+                        </a:defRPr>
+                      </a:lvl6pPr>
+                      <a:lvl7pPr marL="2743200" algn="l" defTabSz="914400" rtl="0" eaLnBrk="1" latinLnBrk="0" hangingPunct="1">
+                        <a:defRPr sz="1800" kern="1200">
+                          <a:solidFill>
+                            <a:schemeClr val="dk1"/>
+                          </a:solidFill>
+                          <a:latin typeface="+mn-lt"/>
+                          <a:ea typeface="+mn-ea"/>
+                          <a:cs typeface="+mn-cs"/>
+                        </a:defRPr>
+                      </a:lvl7pPr>
+                      <a:lvl8pPr marL="3200400" algn="l" defTabSz="914400" rtl="0" eaLnBrk="1" latinLnBrk="0" hangingPunct="1">
+                        <a:defRPr sz="1800" kern="1200">
+                          <a:solidFill>
+                            <a:schemeClr val="dk1"/>
+                          </a:solidFill>
+                          <a:latin typeface="+mn-lt"/>
+                          <a:ea typeface="+mn-ea"/>
+                          <a:cs typeface="+mn-cs"/>
+                        </a:defRPr>
+                      </a:lvl8pPr>
+                      <a:lvl9pPr marL="3657600" algn="l" defTabSz="914400" rtl="0" eaLnBrk="1" latinLnBrk="0" hangingPunct="1">
+                        <a:defRPr sz="1800" kern="1200">
+                          <a:solidFill>
+                            <a:schemeClr val="dk1"/>
+                          </a:solidFill>
+                          <a:latin typeface="+mn-lt"/>
+                          <a:ea typeface="+mn-ea"/>
+                          <a:cs typeface="+mn-cs"/>
+                        </a:defRPr>
+                      </a:lvl9pPr>
+                    </a:lstStyle>
+                    <a:p>
+                      <a:r>
+                        <a:rPr lang="en-US" dirty="0">
+                          <a:solidFill>
+                            <a:schemeClr val="tx1"/>
+                          </a:solidFill>
+                        </a:rPr>
+                        <a:t>ENS160</a:t>
+                      </a:r>
+                      <a:endParaRPr lang="ru-RU" dirty="0">
+                        <a:solidFill>
+                          <a:schemeClr val="tx1"/>
+                        </a:solidFill>
+                      </a:endParaRPr>
+                    </a:p>
+                  </a:txBody>
+                  <a:tcPr>
+                    <a:lnL w="38100" cap="flat" cmpd="sng" algn="ctr">
+                      <a:solidFill>
+                        <a:schemeClr val="tx1"/>
+                      </a:solidFill>
+                      <a:prstDash val="solid"/>
+                      <a:round/>
+                      <a:headEnd type="none" w="med" len="med"/>
+                      <a:tailEnd type="none" w="med" len="med"/>
+                    </a:lnL>
+                    <a:lnR w="38100" cap="flat" cmpd="sng" algn="ctr">
+                      <a:solidFill>
+                        <a:schemeClr val="tx1"/>
+                      </a:solidFill>
+                      <a:prstDash val="solid"/>
+                      <a:round/>
+                      <a:headEnd type="none" w="med" len="med"/>
+                      <a:tailEnd type="none" w="med" len="med"/>
+                    </a:lnR>
+                    <a:lnT w="38100" cap="flat" cmpd="sng" algn="ctr">
+                      <a:solidFill>
+                        <a:schemeClr val="tx1"/>
+                      </a:solidFill>
+                      <a:prstDash val="solid"/>
+                      <a:round/>
+                      <a:headEnd type="none" w="med" len="med"/>
+                      <a:tailEnd type="none" w="med" len="med"/>
+                    </a:lnT>
+                    <a:lnB w="38100" cap="flat" cmpd="sng" algn="ctr">
+                      <a:solidFill>
+                        <a:schemeClr val="tx1"/>
+                      </a:solidFill>
+                      <a:prstDash val="solid"/>
+                      <a:round/>
+                      <a:headEnd type="none" w="med" len="med"/>
+                      <a:tailEnd type="none" w="med" len="med"/>
+                    </a:lnB>
+                    <a:lnTlToBr w="12700" cmpd="sng">
+                      <a:noFill/>
+                      <a:prstDash val="solid"/>
+                    </a:lnTlToBr>
+                    <a:lnBlToTr w="12700" cmpd="sng">
+                      <a:noFill/>
+                      <a:prstDash val="solid"/>
+                    </a:lnBlToTr>
+                    <a:solidFill>
+                      <a:schemeClr val="bg1"/>
+                    </a:solidFill>
+                  </a:tcPr>
+                </a:tc>
+                <a:tc>
+                  <a:txBody>
+                    <a:bodyPr/>
+                    <a:lstStyle>
+                      <a:defPPr>
+                        <a:defRPr lang="ru-RU">
+                          <a:solidFill>
+                            <a:schemeClr val="dk1"/>
+                          </a:solidFill>
+                        </a:defRPr>
+                      </a:defPPr>
+                      <a:lvl1pPr marL="0" algn="l" defTabSz="914400" rtl="0" eaLnBrk="1" latinLnBrk="0" hangingPunct="1">
+                        <a:defRPr sz="1800" kern="1200">
+                          <a:solidFill>
+                            <a:schemeClr val="dk1"/>
+                          </a:solidFill>
+                          <a:latin typeface="+mn-lt"/>
+                          <a:ea typeface="+mn-ea"/>
+                          <a:cs typeface="+mn-cs"/>
+                        </a:defRPr>
+                      </a:lvl1pPr>
+                      <a:lvl2pPr marL="457200" algn="l" defTabSz="914400" rtl="0" eaLnBrk="1" latinLnBrk="0" hangingPunct="1">
+                        <a:defRPr sz="1800" kern="1200">
+                          <a:solidFill>
+                            <a:schemeClr val="dk1"/>
+                          </a:solidFill>
+                          <a:latin typeface="+mn-lt"/>
+                          <a:ea typeface="+mn-ea"/>
+                          <a:cs typeface="+mn-cs"/>
+                        </a:defRPr>
+                      </a:lvl2pPr>
+                      <a:lvl3pPr marL="914400" algn="l" defTabSz="914400" rtl="0" eaLnBrk="1" latinLnBrk="0" hangingPunct="1">
+                        <a:defRPr sz="1800" kern="1200">
+                          <a:solidFill>
+                            <a:schemeClr val="dk1"/>
+                          </a:solidFill>
+                          <a:latin typeface="+mn-lt"/>
+                          <a:ea typeface="+mn-ea"/>
+                          <a:cs typeface="+mn-cs"/>
+                        </a:defRPr>
+                      </a:lvl3pPr>
+                      <a:lvl4pPr marL="1371600" algn="l" defTabSz="914400" rtl="0" eaLnBrk="1" latinLnBrk="0" hangingPunct="1">
+                        <a:defRPr sz="1800" kern="1200">
+                          <a:solidFill>
+                            <a:schemeClr val="dk1"/>
+                          </a:solidFill>
+                          <a:latin typeface="+mn-lt"/>
+                          <a:ea typeface="+mn-ea"/>
+                          <a:cs typeface="+mn-cs"/>
+                        </a:defRPr>
+                      </a:lvl4pPr>
+                      <a:lvl5pPr marL="1828800" algn="l" defTabSz="914400" rtl="0" eaLnBrk="1" latinLnBrk="0" hangingPunct="1">
+                        <a:defRPr sz="1800" kern="1200">
+                          <a:solidFill>
+                            <a:schemeClr val="dk1"/>
+                          </a:solidFill>
+                          <a:latin typeface="+mn-lt"/>
+                          <a:ea typeface="+mn-ea"/>
+                          <a:cs typeface="+mn-cs"/>
+                        </a:defRPr>
+                      </a:lvl5pPr>
+                      <a:lvl6pPr marL="2286000" algn="l" defTabSz="914400" rtl="0" eaLnBrk="1" latinLnBrk="0" hangingPunct="1">
+                        <a:defRPr sz="1800" kern="1200">
+                          <a:solidFill>
+                            <a:schemeClr val="dk1"/>
+                          </a:solidFill>
+                          <a:latin typeface="+mn-lt"/>
+                          <a:ea typeface="+mn-ea"/>
+                          <a:cs typeface="+mn-cs"/>
+                        </a:defRPr>
+                      </a:lvl6pPr>
+                      <a:lvl7pPr marL="2743200" algn="l" defTabSz="914400" rtl="0" eaLnBrk="1" latinLnBrk="0" hangingPunct="1">
+                        <a:defRPr sz="1800" kern="1200">
+                          <a:solidFill>
+                            <a:schemeClr val="dk1"/>
+                          </a:solidFill>
+                          <a:latin typeface="+mn-lt"/>
+                          <a:ea typeface="+mn-ea"/>
+                          <a:cs typeface="+mn-cs"/>
+                        </a:defRPr>
+                      </a:lvl7pPr>
+                      <a:lvl8pPr marL="3200400" algn="l" defTabSz="914400" rtl="0" eaLnBrk="1" latinLnBrk="0" hangingPunct="1">
+                        <a:defRPr sz="1800" kern="1200">
+                          <a:solidFill>
+                            <a:schemeClr val="dk1"/>
+                          </a:solidFill>
+                          <a:latin typeface="+mn-lt"/>
+                          <a:ea typeface="+mn-ea"/>
+                          <a:cs typeface="+mn-cs"/>
+                        </a:defRPr>
+                      </a:lvl8pPr>
+                      <a:lvl9pPr marL="3657600" algn="l" defTabSz="914400" rtl="0" eaLnBrk="1" latinLnBrk="0" hangingPunct="1">
+                        <a:defRPr sz="1800" kern="1200">
+                          <a:solidFill>
+                            <a:schemeClr val="dk1"/>
+                          </a:solidFill>
+                          <a:latin typeface="+mn-lt"/>
+                          <a:ea typeface="+mn-ea"/>
+                          <a:cs typeface="+mn-cs"/>
+                        </a:defRPr>
+                      </a:lvl9pPr>
+                    </a:lstStyle>
+                    <a:p>
+                      <a:r>
+                        <a:rPr lang="en-US" dirty="0">
+                          <a:solidFill>
+                            <a:schemeClr val="tx1"/>
+                          </a:solidFill>
+                        </a:rPr>
+                        <a:t>TVOC (</a:t>
+                      </a:r>
+                      <a:r>
+                        <a:rPr lang="ru-RU" dirty="0">
+                          <a:solidFill>
+                            <a:schemeClr val="tx1"/>
+                          </a:solidFill>
+                        </a:rPr>
+                        <a:t>Содержание</a:t>
+                      </a:r>
+                      <a:r>
+                        <a:rPr lang="ru-RU" baseline="0" dirty="0">
+                          <a:solidFill>
+                            <a:schemeClr val="tx1"/>
+                          </a:solidFill>
+                        </a:rPr>
+                        <a:t> органики</a:t>
+                      </a:r>
+                      <a:r>
+                        <a:rPr lang="en-US" dirty="0">
+                          <a:solidFill>
+                            <a:schemeClr val="tx1"/>
+                          </a:solidFill>
+                        </a:rPr>
+                        <a:t>)</a:t>
+                      </a:r>
+                      <a:endParaRPr lang="ru-RU" dirty="0">
+                        <a:solidFill>
+                          <a:schemeClr val="tx1"/>
+                        </a:solidFill>
+                      </a:endParaRPr>
+                    </a:p>
+                  </a:txBody>
+                  <a:tcPr>
+                    <a:lnL w="38100" cap="flat" cmpd="sng" algn="ctr">
+                      <a:solidFill>
+                        <a:schemeClr val="tx1"/>
+                      </a:solidFill>
+                      <a:prstDash val="solid"/>
+                      <a:round/>
+                      <a:headEnd type="none" w="med" len="med"/>
+                      <a:tailEnd type="none" w="med" len="med"/>
+                    </a:lnL>
+                    <a:lnR w="38100" cap="flat" cmpd="sng" algn="ctr">
+                      <a:solidFill>
+                        <a:schemeClr val="tx1"/>
+                      </a:solidFill>
+                      <a:prstDash val="solid"/>
+                      <a:round/>
+                      <a:headEnd type="none" w="med" len="med"/>
+                      <a:tailEnd type="none" w="med" len="med"/>
+                    </a:lnR>
+                    <a:lnT w="38100" cap="flat" cmpd="sng" algn="ctr">
+                      <a:solidFill>
+                        <a:schemeClr val="tx1"/>
+                      </a:solidFill>
+                      <a:prstDash val="solid"/>
+                      <a:round/>
+                      <a:headEnd type="none" w="med" len="med"/>
+                      <a:tailEnd type="none" w="med" len="med"/>
+                    </a:lnT>
+                    <a:lnB w="38100" cap="flat" cmpd="sng" algn="ctr">
+                      <a:solidFill>
+                        <a:schemeClr val="tx1"/>
+                      </a:solidFill>
+                      <a:prstDash val="solid"/>
+                      <a:round/>
+                      <a:headEnd type="none" w="med" len="med"/>
+                      <a:tailEnd type="none" w="med" len="med"/>
+                    </a:lnB>
+                    <a:lnTlToBr w="12700" cmpd="sng">
+                      <a:noFill/>
+                      <a:prstDash val="solid"/>
+                    </a:lnTlToBr>
+                    <a:lnBlToTr w="12700" cmpd="sng">
+                      <a:noFill/>
+                      <a:prstDash val="solid"/>
+                    </a:lnBlToTr>
+                    <a:solidFill>
+                      <a:schemeClr val="bg1"/>
+                    </a:solidFill>
+                  </a:tcPr>
+                </a:tc>
+                <a:tc>
+                  <a:txBody>
+                    <a:bodyPr/>
+                    <a:lstStyle>
+                      <a:defPPr>
+                        <a:defRPr lang="ru-RU">
+                          <a:solidFill>
+                            <a:schemeClr val="dk1"/>
+                          </a:solidFill>
+                        </a:defRPr>
+                      </a:defPPr>
+                      <a:lvl1pPr marL="0" algn="l" defTabSz="914400" rtl="0" eaLnBrk="1" latinLnBrk="0" hangingPunct="1">
+                        <a:defRPr sz="1800" kern="1200">
+                          <a:solidFill>
+                            <a:schemeClr val="dk1"/>
+                          </a:solidFill>
+                          <a:latin typeface="+mn-lt"/>
+                          <a:ea typeface="+mn-ea"/>
+                          <a:cs typeface="+mn-cs"/>
+                        </a:defRPr>
+                      </a:lvl1pPr>
+                      <a:lvl2pPr marL="457200" algn="l" defTabSz="914400" rtl="0" eaLnBrk="1" latinLnBrk="0" hangingPunct="1">
+                        <a:defRPr sz="1800" kern="1200">
+                          <a:solidFill>
+                            <a:schemeClr val="dk1"/>
+                          </a:solidFill>
+                          <a:latin typeface="+mn-lt"/>
+                          <a:ea typeface="+mn-ea"/>
+                          <a:cs typeface="+mn-cs"/>
+                        </a:defRPr>
+                      </a:lvl2pPr>
+                      <a:lvl3pPr marL="914400" algn="l" defTabSz="914400" rtl="0" eaLnBrk="1" latinLnBrk="0" hangingPunct="1">
+                        <a:defRPr sz="1800" kern="1200">
+                          <a:solidFill>
+                            <a:schemeClr val="dk1"/>
+                          </a:solidFill>
+                          <a:latin typeface="+mn-lt"/>
+                          <a:ea typeface="+mn-ea"/>
+                          <a:cs typeface="+mn-cs"/>
+                        </a:defRPr>
+                      </a:lvl3pPr>
+                      <a:lvl4pPr marL="1371600" algn="l" defTabSz="914400" rtl="0" eaLnBrk="1" latinLnBrk="0" hangingPunct="1">
+                        <a:defRPr sz="1800" kern="1200">
+                          <a:solidFill>
+                            <a:schemeClr val="dk1"/>
+                          </a:solidFill>
+                          <a:latin typeface="+mn-lt"/>
+                          <a:ea typeface="+mn-ea"/>
+                          <a:cs typeface="+mn-cs"/>
+                        </a:defRPr>
+                      </a:lvl4pPr>
+                      <a:lvl5pPr marL="1828800" algn="l" defTabSz="914400" rtl="0" eaLnBrk="1" latinLnBrk="0" hangingPunct="1">
+                        <a:defRPr sz="1800" kern="1200">
+                          <a:solidFill>
+                            <a:schemeClr val="dk1"/>
+                          </a:solidFill>
+                          <a:latin typeface="+mn-lt"/>
+                          <a:ea typeface="+mn-ea"/>
+                          <a:cs typeface="+mn-cs"/>
+                        </a:defRPr>
+                      </a:lvl5pPr>
+                      <a:lvl6pPr marL="2286000" algn="l" defTabSz="914400" rtl="0" eaLnBrk="1" latinLnBrk="0" hangingPunct="1">
+                        <a:defRPr sz="1800" kern="1200">
+                          <a:solidFill>
+                            <a:schemeClr val="dk1"/>
+                          </a:solidFill>
+                          <a:latin typeface="+mn-lt"/>
+                          <a:ea typeface="+mn-ea"/>
+                          <a:cs typeface="+mn-cs"/>
+                        </a:defRPr>
+                      </a:lvl6pPr>
+                      <a:lvl7pPr marL="2743200" algn="l" defTabSz="914400" rtl="0" eaLnBrk="1" latinLnBrk="0" hangingPunct="1">
+                        <a:defRPr sz="1800" kern="1200">
+                          <a:solidFill>
+                            <a:schemeClr val="dk1"/>
+                          </a:solidFill>
+                          <a:latin typeface="+mn-lt"/>
+                          <a:ea typeface="+mn-ea"/>
+                          <a:cs typeface="+mn-cs"/>
+                        </a:defRPr>
+                      </a:lvl7pPr>
+                      <a:lvl8pPr marL="3200400" algn="l" defTabSz="914400" rtl="0" eaLnBrk="1" latinLnBrk="0" hangingPunct="1">
+                        <a:defRPr sz="1800" kern="1200">
+                          <a:solidFill>
+                            <a:schemeClr val="dk1"/>
+                          </a:solidFill>
+                          <a:latin typeface="+mn-lt"/>
+                          <a:ea typeface="+mn-ea"/>
+                          <a:cs typeface="+mn-cs"/>
+                        </a:defRPr>
+                      </a:lvl8pPr>
+                      <a:lvl9pPr marL="3657600" algn="l" defTabSz="914400" rtl="0" eaLnBrk="1" latinLnBrk="0" hangingPunct="1">
+                        <a:defRPr sz="1800" kern="1200">
+                          <a:solidFill>
+                            <a:schemeClr val="dk1"/>
+                          </a:solidFill>
+                          <a:latin typeface="+mn-lt"/>
+                          <a:ea typeface="+mn-ea"/>
+                          <a:cs typeface="+mn-cs"/>
+                        </a:defRPr>
+                      </a:lvl9pPr>
+                    </a:lstStyle>
+                    <a:p>
+                      <a:r>
+                        <a:rPr lang="en-US" dirty="0">
+                          <a:solidFill>
+                            <a:schemeClr val="tx1"/>
+                          </a:solidFill>
+                        </a:rPr>
+                        <a:t>0-65535</a:t>
+                      </a:r>
+                      <a:endParaRPr lang="ru-RU" dirty="0">
+                        <a:solidFill>
+                          <a:schemeClr val="tx1"/>
+                        </a:solidFill>
+                      </a:endParaRPr>
+                    </a:p>
+                  </a:txBody>
+                  <a:tcPr>
+                    <a:lnL w="38100" cap="flat" cmpd="sng" algn="ctr">
+                      <a:solidFill>
+                        <a:schemeClr val="tx1"/>
+                      </a:solidFill>
+                      <a:prstDash val="solid"/>
+                      <a:round/>
+                      <a:headEnd type="none" w="med" len="med"/>
+                      <a:tailEnd type="none" w="med" len="med"/>
+                    </a:lnL>
+                    <a:lnR w="38100" cap="flat" cmpd="sng" algn="ctr">
+                      <a:solidFill>
+                        <a:schemeClr val="tx1"/>
+                      </a:solidFill>
+                      <a:prstDash val="solid"/>
+                      <a:round/>
+                      <a:headEnd type="none" w="med" len="med"/>
+                      <a:tailEnd type="none" w="med" len="med"/>
+                    </a:lnR>
+                    <a:lnT w="38100" cap="flat" cmpd="sng" algn="ctr">
+                      <a:solidFill>
+                        <a:schemeClr val="tx1"/>
+                      </a:solidFill>
+                      <a:prstDash val="solid"/>
+                      <a:round/>
+                      <a:headEnd type="none" w="med" len="med"/>
+                      <a:tailEnd type="none" w="med" len="med"/>
+                    </a:lnT>
+                    <a:lnB w="38100" cap="flat" cmpd="sng" algn="ctr">
+                      <a:solidFill>
+                        <a:schemeClr val="tx1"/>
+                      </a:solidFill>
+                      <a:prstDash val="solid"/>
+                      <a:round/>
+                      <a:headEnd type="none" w="med" len="med"/>
+                      <a:tailEnd type="none" w="med" len="med"/>
+                    </a:lnB>
+                    <a:lnTlToBr w="12700" cmpd="sng">
+                      <a:noFill/>
+                      <a:prstDash val="solid"/>
+                    </a:lnTlToBr>
+                    <a:lnBlToTr w="12700" cmpd="sng">
+                      <a:noFill/>
+                      <a:prstDash val="solid"/>
+                    </a:lnBlToTr>
+                    <a:solidFill>
+                      <a:schemeClr val="bg1"/>
+                    </a:solidFill>
+                  </a:tcPr>
+                </a:tc>
+                <a:tc>
+                  <a:txBody>
+                    <a:bodyPr/>
+                    <a:lstStyle>
+                      <a:defPPr>
+                        <a:defRPr lang="ru-RU">
+                          <a:solidFill>
+                            <a:schemeClr val="dk1"/>
+                          </a:solidFill>
+                        </a:defRPr>
+                      </a:defPPr>
+                      <a:lvl1pPr marL="0" algn="l" defTabSz="914400" rtl="0" eaLnBrk="1" latinLnBrk="0" hangingPunct="1">
+                        <a:defRPr sz="1800" kern="1200">
+                          <a:solidFill>
+                            <a:schemeClr val="dk1"/>
+                          </a:solidFill>
+                          <a:latin typeface="+mn-lt"/>
+                          <a:ea typeface="+mn-ea"/>
+                          <a:cs typeface="+mn-cs"/>
+                        </a:defRPr>
+                      </a:lvl1pPr>
+                      <a:lvl2pPr marL="457200" algn="l" defTabSz="914400" rtl="0" eaLnBrk="1" latinLnBrk="0" hangingPunct="1">
+                        <a:defRPr sz="1800" kern="1200">
+                          <a:solidFill>
+                            <a:schemeClr val="dk1"/>
+                          </a:solidFill>
+                          <a:latin typeface="+mn-lt"/>
+                          <a:ea typeface="+mn-ea"/>
+                          <a:cs typeface="+mn-cs"/>
+                        </a:defRPr>
+                      </a:lvl2pPr>
+                      <a:lvl3pPr marL="914400" algn="l" defTabSz="914400" rtl="0" eaLnBrk="1" latinLnBrk="0" hangingPunct="1">
+                        <a:defRPr sz="1800" kern="1200">
+                          <a:solidFill>
+                            <a:schemeClr val="dk1"/>
+                          </a:solidFill>
+                          <a:latin typeface="+mn-lt"/>
+                          <a:ea typeface="+mn-ea"/>
+                          <a:cs typeface="+mn-cs"/>
+                        </a:defRPr>
+                      </a:lvl3pPr>
+                      <a:lvl4pPr marL="1371600" algn="l" defTabSz="914400" rtl="0" eaLnBrk="1" latinLnBrk="0" hangingPunct="1">
+                        <a:defRPr sz="1800" kern="1200">
+                          <a:solidFill>
+                            <a:schemeClr val="dk1"/>
+                          </a:solidFill>
+                          <a:latin typeface="+mn-lt"/>
+                          <a:ea typeface="+mn-ea"/>
+                          <a:cs typeface="+mn-cs"/>
+                        </a:defRPr>
+                      </a:lvl4pPr>
+                      <a:lvl5pPr marL="1828800" algn="l" defTabSz="914400" rtl="0" eaLnBrk="1" latinLnBrk="0" hangingPunct="1">
+                        <a:defRPr sz="1800" kern="1200">
+                          <a:solidFill>
+                            <a:schemeClr val="dk1"/>
+                          </a:solidFill>
+                          <a:latin typeface="+mn-lt"/>
+                          <a:ea typeface="+mn-ea"/>
+                          <a:cs typeface="+mn-cs"/>
+                        </a:defRPr>
+                      </a:lvl5pPr>
+                      <a:lvl6pPr marL="2286000" algn="l" defTabSz="914400" rtl="0" eaLnBrk="1" latinLnBrk="0" hangingPunct="1">
+                        <a:defRPr sz="1800" kern="1200">
+                          <a:solidFill>
+                            <a:schemeClr val="dk1"/>
+                          </a:solidFill>
+                          <a:latin typeface="+mn-lt"/>
+                          <a:ea typeface="+mn-ea"/>
+                          <a:cs typeface="+mn-cs"/>
+                        </a:defRPr>
+                      </a:lvl6pPr>
+                      <a:lvl7pPr marL="2743200" algn="l" defTabSz="914400" rtl="0" eaLnBrk="1" latinLnBrk="0" hangingPunct="1">
+                        <a:defRPr sz="1800" kern="1200">
+                          <a:solidFill>
+                            <a:schemeClr val="dk1"/>
+                          </a:solidFill>
+                          <a:latin typeface="+mn-lt"/>
+                          <a:ea typeface="+mn-ea"/>
+                          <a:cs typeface="+mn-cs"/>
+                        </a:defRPr>
+                      </a:lvl7pPr>
+                      <a:lvl8pPr marL="3200400" algn="l" defTabSz="914400" rtl="0" eaLnBrk="1" latinLnBrk="0" hangingPunct="1">
+                        <a:defRPr sz="1800" kern="1200">
+                          <a:solidFill>
+                            <a:schemeClr val="dk1"/>
+                          </a:solidFill>
+                          <a:latin typeface="+mn-lt"/>
+                          <a:ea typeface="+mn-ea"/>
+                          <a:cs typeface="+mn-cs"/>
+                        </a:defRPr>
+                      </a:lvl8pPr>
+                      <a:lvl9pPr marL="3657600" algn="l" defTabSz="914400" rtl="0" eaLnBrk="1" latinLnBrk="0" hangingPunct="1">
+                        <a:defRPr sz="1800" kern="1200">
+                          <a:solidFill>
+                            <a:schemeClr val="dk1"/>
+                          </a:solidFill>
+                          <a:latin typeface="+mn-lt"/>
+                          <a:ea typeface="+mn-ea"/>
+                          <a:cs typeface="+mn-cs"/>
+                        </a:defRPr>
+                      </a:lvl9pPr>
+                    </a:lstStyle>
+                    <a:p>
+                      <a:r>
+                        <a:rPr lang="en-US" dirty="0">
+                          <a:solidFill>
+                            <a:schemeClr val="tx1"/>
+                          </a:solidFill>
+                        </a:rPr>
+                        <a:t>ppb</a:t>
+                      </a:r>
+                      <a:endParaRPr lang="ru-RU" dirty="0">
+                        <a:solidFill>
+                          <a:schemeClr val="tx1"/>
+                        </a:solidFill>
+                      </a:endParaRPr>
+                    </a:p>
+                  </a:txBody>
+                  <a:tcPr>
+                    <a:lnL w="38100" cap="flat" cmpd="sng" algn="ctr">
+                      <a:solidFill>
+                        <a:schemeClr val="tx1"/>
+                      </a:solidFill>
+                      <a:prstDash val="solid"/>
+                      <a:round/>
+                      <a:headEnd type="none" w="med" len="med"/>
+                      <a:tailEnd type="none" w="med" len="med"/>
+                    </a:lnL>
+                    <a:lnR w="38100" cap="flat" cmpd="sng" algn="ctr">
+                      <a:solidFill>
+                        <a:schemeClr val="tx1"/>
+                      </a:solidFill>
+                      <a:prstDash val="solid"/>
+                      <a:round/>
+                      <a:headEnd type="none" w="med" len="med"/>
+                      <a:tailEnd type="none" w="med" len="med"/>
+                    </a:lnR>
+                    <a:lnT w="38100" cap="flat" cmpd="sng" algn="ctr">
+                      <a:solidFill>
+                        <a:schemeClr val="tx1"/>
+                      </a:solidFill>
+                      <a:prstDash val="solid"/>
+                      <a:round/>
+                      <a:headEnd type="none" w="med" len="med"/>
+                      <a:tailEnd type="none" w="med" len="med"/>
+                    </a:lnT>
+                    <a:lnB w="38100" cap="flat" cmpd="sng" algn="ctr">
+                      <a:solidFill>
+                        <a:schemeClr val="tx1"/>
+                      </a:solidFill>
+                      <a:prstDash val="solid"/>
+                      <a:round/>
+                      <a:headEnd type="none" w="med" len="med"/>
+                      <a:tailEnd type="none" w="med" len="med"/>
+                    </a:lnB>
+                    <a:lnTlToBr w="12700" cmpd="sng">
+                      <a:noFill/>
+                      <a:prstDash val="solid"/>
+                    </a:lnTlToBr>
+                    <a:lnBlToTr w="12700" cmpd="sng">
+                      <a:noFill/>
+                      <a:prstDash val="solid"/>
+                    </a:lnBlToTr>
+                    <a:solidFill>
+                      <a:schemeClr val="bg1"/>
+                    </a:solidFill>
+                  </a:tcPr>
+                </a:tc>
+                <a:extLst>
+                  <a:ext uri="{0D108BD9-81ED-4DB2-BD59-A6C34878D82A}">
+                    <a16:rowId xmlns:a16="http://schemas.microsoft.com/office/drawing/2014/main" val="10001"/>
+                  </a:ext>
+                </a:extLst>
+              </a:tr>
+              <a:tr h="412184">
+                <a:tc vMerge="1">
+                  <a:txBody>
+                    <a:bodyPr/>
+                    <a:lstStyle/>
+                    <a:p>
+                      <a:endParaRPr lang="ru-RU"/>
+                    </a:p>
+                  </a:txBody>
+                  <a:tcPr>
+                    <a:lnL w="38100" cap="flat" cmpd="sng" algn="ctr">
+                      <a:solidFill>
+                        <a:schemeClr val="tx1"/>
+                      </a:solidFill>
+                      <a:prstDash val="solid"/>
+                      <a:round/>
+                      <a:headEnd type="none" w="med" len="med"/>
+                      <a:tailEnd type="none" w="med" len="med"/>
+                    </a:lnL>
+                    <a:lnR w="38100" cap="flat" cmpd="sng" algn="ctr">
+                      <a:solidFill>
+                        <a:schemeClr val="tx1"/>
+                      </a:solidFill>
+                      <a:prstDash val="solid"/>
+                      <a:round/>
+                      <a:headEnd type="none" w="med" len="med"/>
+                      <a:tailEnd type="none" w="med" len="med"/>
+                    </a:lnR>
+                    <a:lnT w="38100" cap="flat" cmpd="sng" algn="ctr">
+                      <a:solidFill>
+                        <a:schemeClr val="tx1"/>
+                      </a:solidFill>
+                      <a:prstDash val="solid"/>
+                      <a:round/>
+                      <a:headEnd type="none" w="med" len="med"/>
+                      <a:tailEnd type="none" w="med" len="med"/>
+                    </a:lnT>
+                    <a:lnB w="38100" cap="flat" cmpd="sng" algn="ctr">
+                      <a:solidFill>
+                        <a:schemeClr val="tx1"/>
+                      </a:solidFill>
+                      <a:prstDash val="solid"/>
+                      <a:round/>
+                      <a:headEnd type="none" w="med" len="med"/>
+                      <a:tailEnd type="none" w="med" len="med"/>
+                    </a:lnB>
+                    <a:lnTlToBr w="12700" cmpd="sng">
+                      <a:noFill/>
+                      <a:prstDash val="solid"/>
+                    </a:lnTlToBr>
+                    <a:lnBlToTr w="12700" cmpd="sng">
+                      <a:noFill/>
+                      <a:prstDash val="solid"/>
+                    </a:lnBlToTr>
+                    <a:solidFill>
+                      <a:schemeClr val="bg1"/>
+                    </a:solidFill>
+                  </a:tcPr>
+                </a:tc>
+                <a:tc>
+                  <a:txBody>
+                    <a:bodyPr/>
+                    <a:lstStyle>
+                      <a:defPPr>
+                        <a:defRPr lang="ru-RU">
+                          <a:solidFill>
+                            <a:schemeClr val="dk1"/>
+                          </a:solidFill>
+                        </a:defRPr>
+                      </a:defPPr>
+                      <a:lvl1pPr marL="0" algn="l" defTabSz="914400" rtl="0" eaLnBrk="1" latinLnBrk="0" hangingPunct="1">
+                        <a:defRPr sz="1800" kern="1200">
+                          <a:solidFill>
+                            <a:schemeClr val="dk1"/>
+                          </a:solidFill>
+                          <a:latin typeface="+mn-lt"/>
+                          <a:ea typeface="+mn-ea"/>
+                          <a:cs typeface="+mn-cs"/>
+                        </a:defRPr>
+                      </a:lvl1pPr>
+                      <a:lvl2pPr marL="457200" algn="l" defTabSz="914400" rtl="0" eaLnBrk="1" latinLnBrk="0" hangingPunct="1">
+                        <a:defRPr sz="1800" kern="1200">
+                          <a:solidFill>
+                            <a:schemeClr val="dk1"/>
+                          </a:solidFill>
+                          <a:latin typeface="+mn-lt"/>
+                          <a:ea typeface="+mn-ea"/>
+                          <a:cs typeface="+mn-cs"/>
+                        </a:defRPr>
+                      </a:lvl2pPr>
+                      <a:lvl3pPr marL="914400" algn="l" defTabSz="914400" rtl="0" eaLnBrk="1" latinLnBrk="0" hangingPunct="1">
+                        <a:defRPr sz="1800" kern="1200">
+                          <a:solidFill>
+                            <a:schemeClr val="dk1"/>
+                          </a:solidFill>
+                          <a:latin typeface="+mn-lt"/>
+                          <a:ea typeface="+mn-ea"/>
+                          <a:cs typeface="+mn-cs"/>
+                        </a:defRPr>
+                      </a:lvl3pPr>
+                      <a:lvl4pPr marL="1371600" algn="l" defTabSz="914400" rtl="0" eaLnBrk="1" latinLnBrk="0" hangingPunct="1">
+                        <a:defRPr sz="1800" kern="1200">
+                          <a:solidFill>
+                            <a:schemeClr val="dk1"/>
+                          </a:solidFill>
+                          <a:latin typeface="+mn-lt"/>
+                          <a:ea typeface="+mn-ea"/>
+                          <a:cs typeface="+mn-cs"/>
+                        </a:defRPr>
+                      </a:lvl4pPr>
+                      <a:lvl5pPr marL="1828800" algn="l" defTabSz="914400" rtl="0" eaLnBrk="1" latinLnBrk="0" hangingPunct="1">
+                        <a:defRPr sz="1800" kern="1200">
+                          <a:solidFill>
+                            <a:schemeClr val="dk1"/>
+                          </a:solidFill>
+                          <a:latin typeface="+mn-lt"/>
+                          <a:ea typeface="+mn-ea"/>
+                          <a:cs typeface="+mn-cs"/>
+                        </a:defRPr>
+                      </a:lvl5pPr>
+                      <a:lvl6pPr marL="2286000" algn="l" defTabSz="914400" rtl="0" eaLnBrk="1" latinLnBrk="0" hangingPunct="1">
+                        <a:defRPr sz="1800" kern="1200">
+                          <a:solidFill>
+                            <a:schemeClr val="dk1"/>
+                          </a:solidFill>
+                          <a:latin typeface="+mn-lt"/>
+                          <a:ea typeface="+mn-ea"/>
+                          <a:cs typeface="+mn-cs"/>
+                        </a:defRPr>
+                      </a:lvl6pPr>
+                      <a:lvl7pPr marL="2743200" algn="l" defTabSz="914400" rtl="0" eaLnBrk="1" latinLnBrk="0" hangingPunct="1">
+                        <a:defRPr sz="1800" kern="1200">
+                          <a:solidFill>
+                            <a:schemeClr val="dk1"/>
+                          </a:solidFill>
+                          <a:latin typeface="+mn-lt"/>
+                          <a:ea typeface="+mn-ea"/>
+                          <a:cs typeface="+mn-cs"/>
+                        </a:defRPr>
+                      </a:lvl7pPr>
+                      <a:lvl8pPr marL="3200400" algn="l" defTabSz="914400" rtl="0" eaLnBrk="1" latinLnBrk="0" hangingPunct="1">
+                        <a:defRPr sz="1800" kern="1200">
+                          <a:solidFill>
+                            <a:schemeClr val="dk1"/>
+                          </a:solidFill>
+                          <a:latin typeface="+mn-lt"/>
+                          <a:ea typeface="+mn-ea"/>
+                          <a:cs typeface="+mn-cs"/>
+                        </a:defRPr>
+                      </a:lvl8pPr>
+                      <a:lvl9pPr marL="3657600" algn="l" defTabSz="914400" rtl="0" eaLnBrk="1" latinLnBrk="0" hangingPunct="1">
+                        <a:defRPr sz="1800" kern="1200">
+                          <a:solidFill>
+                            <a:schemeClr val="dk1"/>
+                          </a:solidFill>
+                          <a:latin typeface="+mn-lt"/>
+                          <a:ea typeface="+mn-ea"/>
+                          <a:cs typeface="+mn-cs"/>
+                        </a:defRPr>
+                      </a:lvl9pPr>
+                    </a:lstStyle>
+                    <a:p>
+                      <a:r>
+                        <a:rPr lang="en-US" dirty="0">
+                          <a:solidFill>
+                            <a:schemeClr val="tx1"/>
+                          </a:solidFill>
+                        </a:rPr>
+                        <a:t>eCO2</a:t>
+                      </a:r>
+                      <a:r>
+                        <a:rPr lang="ru-RU" baseline="0" dirty="0">
+                          <a:solidFill>
+                            <a:schemeClr val="tx1"/>
+                          </a:solidFill>
+                        </a:rPr>
+                        <a:t> (эквивалент </a:t>
+                      </a:r>
+                      <a:r>
+                        <a:rPr lang="en-US" baseline="0" dirty="0">
+                          <a:solidFill>
+                            <a:schemeClr val="tx1"/>
+                          </a:solidFill>
+                        </a:rPr>
+                        <a:t>CO2</a:t>
+                      </a:r>
+                      <a:r>
+                        <a:rPr lang="ru-RU" baseline="0" dirty="0">
+                          <a:solidFill>
+                            <a:schemeClr val="tx1"/>
+                          </a:solidFill>
+                        </a:rPr>
+                        <a:t>)</a:t>
+                      </a:r>
+                      <a:endParaRPr lang="ru-RU" dirty="0">
+                        <a:solidFill>
+                          <a:schemeClr val="tx1"/>
+                        </a:solidFill>
+                      </a:endParaRPr>
+                    </a:p>
+                  </a:txBody>
+                  <a:tcPr>
+                    <a:lnL w="38100" cap="flat" cmpd="sng" algn="ctr">
+                      <a:solidFill>
+                        <a:schemeClr val="tx1"/>
+                      </a:solidFill>
+                      <a:prstDash val="solid"/>
+                      <a:round/>
+                      <a:headEnd type="none" w="med" len="med"/>
+                      <a:tailEnd type="none" w="med" len="med"/>
+                    </a:lnL>
+                    <a:lnR w="38100" cap="flat" cmpd="sng" algn="ctr">
+                      <a:solidFill>
+                        <a:schemeClr val="tx1"/>
+                      </a:solidFill>
+                      <a:prstDash val="solid"/>
+                      <a:round/>
+                      <a:headEnd type="none" w="med" len="med"/>
+                      <a:tailEnd type="none" w="med" len="med"/>
+                    </a:lnR>
+                    <a:lnT w="38100" cap="flat" cmpd="sng" algn="ctr">
+                      <a:solidFill>
+                        <a:schemeClr val="tx1"/>
+                      </a:solidFill>
+                      <a:prstDash val="solid"/>
+                      <a:round/>
+                      <a:headEnd type="none" w="med" len="med"/>
+                      <a:tailEnd type="none" w="med" len="med"/>
+                    </a:lnT>
+                    <a:lnB w="38100" cap="flat" cmpd="sng" algn="ctr">
+                      <a:solidFill>
+                        <a:schemeClr val="tx1"/>
+                      </a:solidFill>
+                      <a:prstDash val="solid"/>
+                      <a:round/>
+                      <a:headEnd type="none" w="med" len="med"/>
+                      <a:tailEnd type="none" w="med" len="med"/>
+                    </a:lnB>
+                    <a:lnTlToBr w="12700" cmpd="sng">
+                      <a:noFill/>
+                      <a:prstDash val="solid"/>
+                    </a:lnTlToBr>
+                    <a:lnBlToTr w="12700" cmpd="sng">
+                      <a:noFill/>
+                      <a:prstDash val="solid"/>
+                    </a:lnBlToTr>
+                    <a:solidFill>
+                      <a:schemeClr val="bg1"/>
+                    </a:solidFill>
+                  </a:tcPr>
+                </a:tc>
+                <a:tc>
+                  <a:txBody>
+                    <a:bodyPr/>
+                    <a:lstStyle>
+                      <a:defPPr>
+                        <a:defRPr lang="ru-RU">
+                          <a:solidFill>
+                            <a:schemeClr val="dk1"/>
+                          </a:solidFill>
+                        </a:defRPr>
+                      </a:defPPr>
+                      <a:lvl1pPr marL="0" algn="l" defTabSz="914400" rtl="0" eaLnBrk="1" latinLnBrk="0" hangingPunct="1">
+                        <a:defRPr sz="1800" kern="1200">
+                          <a:solidFill>
+                            <a:schemeClr val="dk1"/>
+                          </a:solidFill>
+                          <a:latin typeface="+mn-lt"/>
+                          <a:ea typeface="+mn-ea"/>
+                          <a:cs typeface="+mn-cs"/>
+                        </a:defRPr>
+                      </a:lvl1pPr>
+                      <a:lvl2pPr marL="457200" algn="l" defTabSz="914400" rtl="0" eaLnBrk="1" latinLnBrk="0" hangingPunct="1">
+                        <a:defRPr sz="1800" kern="1200">
+                          <a:solidFill>
+                            <a:schemeClr val="dk1"/>
+                          </a:solidFill>
+                          <a:latin typeface="+mn-lt"/>
+                          <a:ea typeface="+mn-ea"/>
+                          <a:cs typeface="+mn-cs"/>
+                        </a:defRPr>
+                      </a:lvl2pPr>
+                      <a:lvl3pPr marL="914400" algn="l" defTabSz="914400" rtl="0" eaLnBrk="1" latinLnBrk="0" hangingPunct="1">
+                        <a:defRPr sz="1800" kern="1200">
+                          <a:solidFill>
+                            <a:schemeClr val="dk1"/>
+                          </a:solidFill>
+                          <a:latin typeface="+mn-lt"/>
+                          <a:ea typeface="+mn-ea"/>
+                          <a:cs typeface="+mn-cs"/>
+                        </a:defRPr>
+                      </a:lvl3pPr>
+                      <a:lvl4pPr marL="1371600" algn="l" defTabSz="914400" rtl="0" eaLnBrk="1" latinLnBrk="0" hangingPunct="1">
+                        <a:defRPr sz="1800" kern="1200">
+                          <a:solidFill>
+                            <a:schemeClr val="dk1"/>
+                          </a:solidFill>
+                          <a:latin typeface="+mn-lt"/>
+                          <a:ea typeface="+mn-ea"/>
+                          <a:cs typeface="+mn-cs"/>
+                        </a:defRPr>
+                      </a:lvl4pPr>
+                      <a:lvl5pPr marL="1828800" algn="l" defTabSz="914400" rtl="0" eaLnBrk="1" latinLnBrk="0" hangingPunct="1">
+                        <a:defRPr sz="1800" kern="1200">
+                          <a:solidFill>
+                            <a:schemeClr val="dk1"/>
+                          </a:solidFill>
+                          <a:latin typeface="+mn-lt"/>
+                          <a:ea typeface="+mn-ea"/>
+                          <a:cs typeface="+mn-cs"/>
+                        </a:defRPr>
+                      </a:lvl5pPr>
+                      <a:lvl6pPr marL="2286000" algn="l" defTabSz="914400" rtl="0" eaLnBrk="1" latinLnBrk="0" hangingPunct="1">
+                        <a:defRPr sz="1800" kern="1200">
+                          <a:solidFill>
+                            <a:schemeClr val="dk1"/>
+                          </a:solidFill>
+                          <a:latin typeface="+mn-lt"/>
+                          <a:ea typeface="+mn-ea"/>
+                          <a:cs typeface="+mn-cs"/>
+                        </a:defRPr>
+                      </a:lvl6pPr>
+                      <a:lvl7pPr marL="2743200" algn="l" defTabSz="914400" rtl="0" eaLnBrk="1" latinLnBrk="0" hangingPunct="1">
+                        <a:defRPr sz="1800" kern="1200">
+                          <a:solidFill>
+                            <a:schemeClr val="dk1"/>
+                          </a:solidFill>
+                          <a:latin typeface="+mn-lt"/>
+                          <a:ea typeface="+mn-ea"/>
+                          <a:cs typeface="+mn-cs"/>
+                        </a:defRPr>
+                      </a:lvl7pPr>
+                      <a:lvl8pPr marL="3200400" algn="l" defTabSz="914400" rtl="0" eaLnBrk="1" latinLnBrk="0" hangingPunct="1">
+                        <a:defRPr sz="1800" kern="1200">
+                          <a:solidFill>
+                            <a:schemeClr val="dk1"/>
+                          </a:solidFill>
+                          <a:latin typeface="+mn-lt"/>
+                          <a:ea typeface="+mn-ea"/>
+                          <a:cs typeface="+mn-cs"/>
+                        </a:defRPr>
+                      </a:lvl8pPr>
+                      <a:lvl9pPr marL="3657600" algn="l" defTabSz="914400" rtl="0" eaLnBrk="1" latinLnBrk="0" hangingPunct="1">
+                        <a:defRPr sz="1800" kern="1200">
+                          <a:solidFill>
+                            <a:schemeClr val="dk1"/>
+                          </a:solidFill>
+                          <a:latin typeface="+mn-lt"/>
+                          <a:ea typeface="+mn-ea"/>
+                          <a:cs typeface="+mn-cs"/>
+                        </a:defRPr>
+                      </a:lvl9pPr>
+                    </a:lstStyle>
+                    <a:p>
+                      <a:r>
+                        <a:rPr lang="en-US" dirty="0">
+                          <a:solidFill>
+                            <a:schemeClr val="tx1"/>
+                          </a:solidFill>
+                        </a:rPr>
+                        <a:t>400-65535</a:t>
+                      </a:r>
+                      <a:endParaRPr lang="ru-RU" dirty="0">
+                        <a:solidFill>
+                          <a:schemeClr val="tx1"/>
+                        </a:solidFill>
+                      </a:endParaRPr>
+                    </a:p>
+                  </a:txBody>
+                  <a:tcPr>
+                    <a:lnL w="38100" cap="flat" cmpd="sng" algn="ctr">
+                      <a:solidFill>
+                        <a:schemeClr val="tx1"/>
+                      </a:solidFill>
+                      <a:prstDash val="solid"/>
+                      <a:round/>
+                      <a:headEnd type="none" w="med" len="med"/>
+                      <a:tailEnd type="none" w="med" len="med"/>
+                    </a:lnL>
+                    <a:lnR w="38100" cap="flat" cmpd="sng" algn="ctr">
+                      <a:solidFill>
+                        <a:schemeClr val="tx1"/>
+                      </a:solidFill>
+                      <a:prstDash val="solid"/>
+                      <a:round/>
+                      <a:headEnd type="none" w="med" len="med"/>
+                      <a:tailEnd type="none" w="med" len="med"/>
+                    </a:lnR>
+                    <a:lnT w="38100" cap="flat" cmpd="sng" algn="ctr">
+                      <a:solidFill>
+                        <a:schemeClr val="tx1"/>
+                      </a:solidFill>
+                      <a:prstDash val="solid"/>
+                      <a:round/>
+                      <a:headEnd type="none" w="med" len="med"/>
+                      <a:tailEnd type="none" w="med" len="med"/>
+                    </a:lnT>
+                    <a:lnB w="38100" cap="flat" cmpd="sng" algn="ctr">
+                      <a:solidFill>
+                        <a:schemeClr val="tx1"/>
+                      </a:solidFill>
+                      <a:prstDash val="solid"/>
+                      <a:round/>
+                      <a:headEnd type="none" w="med" len="med"/>
+                      <a:tailEnd type="none" w="med" len="med"/>
+                    </a:lnB>
+                    <a:lnTlToBr w="12700" cmpd="sng">
+                      <a:noFill/>
+                      <a:prstDash val="solid"/>
+                    </a:lnTlToBr>
+                    <a:lnBlToTr w="12700" cmpd="sng">
+                      <a:noFill/>
+                      <a:prstDash val="solid"/>
+                    </a:lnBlToTr>
+                    <a:solidFill>
+                      <a:schemeClr val="bg1"/>
+                    </a:solidFill>
+                  </a:tcPr>
+                </a:tc>
+                <a:tc>
+                  <a:txBody>
+                    <a:bodyPr/>
+                    <a:lstStyle>
+                      <a:defPPr>
+                        <a:defRPr lang="ru-RU">
+                          <a:solidFill>
+                            <a:schemeClr val="dk1"/>
+                          </a:solidFill>
+                        </a:defRPr>
+                      </a:defPPr>
+                      <a:lvl1pPr marL="0" algn="l" defTabSz="914400" rtl="0" eaLnBrk="1" latinLnBrk="0" hangingPunct="1">
+                        <a:defRPr sz="1800" kern="1200">
+                          <a:solidFill>
+                            <a:schemeClr val="dk1"/>
+                          </a:solidFill>
+                          <a:latin typeface="+mn-lt"/>
+                          <a:ea typeface="+mn-ea"/>
+                          <a:cs typeface="+mn-cs"/>
+                        </a:defRPr>
+                      </a:lvl1pPr>
+                      <a:lvl2pPr marL="457200" algn="l" defTabSz="914400" rtl="0" eaLnBrk="1" latinLnBrk="0" hangingPunct="1">
+                        <a:defRPr sz="1800" kern="1200">
+                          <a:solidFill>
+                            <a:schemeClr val="dk1"/>
+                          </a:solidFill>
+                          <a:latin typeface="+mn-lt"/>
+                          <a:ea typeface="+mn-ea"/>
+                          <a:cs typeface="+mn-cs"/>
+                        </a:defRPr>
+                      </a:lvl2pPr>
+                      <a:lvl3pPr marL="914400" algn="l" defTabSz="914400" rtl="0" eaLnBrk="1" latinLnBrk="0" hangingPunct="1">
+                        <a:defRPr sz="1800" kern="1200">
+                          <a:solidFill>
+                            <a:schemeClr val="dk1"/>
+                          </a:solidFill>
+                          <a:latin typeface="+mn-lt"/>
+                          <a:ea typeface="+mn-ea"/>
+                          <a:cs typeface="+mn-cs"/>
+                        </a:defRPr>
+                      </a:lvl3pPr>
+                      <a:lvl4pPr marL="1371600" algn="l" defTabSz="914400" rtl="0" eaLnBrk="1" latinLnBrk="0" hangingPunct="1">
+                        <a:defRPr sz="1800" kern="1200">
+                          <a:solidFill>
+                            <a:schemeClr val="dk1"/>
+                          </a:solidFill>
+                          <a:latin typeface="+mn-lt"/>
+                          <a:ea typeface="+mn-ea"/>
+                          <a:cs typeface="+mn-cs"/>
+                        </a:defRPr>
+                      </a:lvl4pPr>
+                      <a:lvl5pPr marL="1828800" algn="l" defTabSz="914400" rtl="0" eaLnBrk="1" latinLnBrk="0" hangingPunct="1">
+                        <a:defRPr sz="1800" kern="1200">
+                          <a:solidFill>
+                            <a:schemeClr val="dk1"/>
+                          </a:solidFill>
+                          <a:latin typeface="+mn-lt"/>
+                          <a:ea typeface="+mn-ea"/>
+                          <a:cs typeface="+mn-cs"/>
+                        </a:defRPr>
+                      </a:lvl5pPr>
+                      <a:lvl6pPr marL="2286000" algn="l" defTabSz="914400" rtl="0" eaLnBrk="1" latinLnBrk="0" hangingPunct="1">
+                        <a:defRPr sz="1800" kern="1200">
+                          <a:solidFill>
+                            <a:schemeClr val="dk1"/>
+                          </a:solidFill>
+                          <a:latin typeface="+mn-lt"/>
+                          <a:ea typeface="+mn-ea"/>
+                          <a:cs typeface="+mn-cs"/>
+                        </a:defRPr>
+                      </a:lvl6pPr>
+                      <a:lvl7pPr marL="2743200" algn="l" defTabSz="914400" rtl="0" eaLnBrk="1" latinLnBrk="0" hangingPunct="1">
+                        <a:defRPr sz="1800" kern="1200">
+                          <a:solidFill>
+                            <a:schemeClr val="dk1"/>
+                          </a:solidFill>
+                          <a:latin typeface="+mn-lt"/>
+                          <a:ea typeface="+mn-ea"/>
+                          <a:cs typeface="+mn-cs"/>
+                        </a:defRPr>
+                      </a:lvl7pPr>
+                      <a:lvl8pPr marL="3200400" algn="l" defTabSz="914400" rtl="0" eaLnBrk="1" latinLnBrk="0" hangingPunct="1">
+                        <a:defRPr sz="1800" kern="1200">
+                          <a:solidFill>
+                            <a:schemeClr val="dk1"/>
+                          </a:solidFill>
+                          <a:latin typeface="+mn-lt"/>
+                          <a:ea typeface="+mn-ea"/>
+                          <a:cs typeface="+mn-cs"/>
+                        </a:defRPr>
+                      </a:lvl8pPr>
+                      <a:lvl9pPr marL="3657600" algn="l" defTabSz="914400" rtl="0" eaLnBrk="1" latinLnBrk="0" hangingPunct="1">
+                        <a:defRPr sz="1800" kern="1200">
+                          <a:solidFill>
+                            <a:schemeClr val="dk1"/>
+                          </a:solidFill>
+                          <a:latin typeface="+mn-lt"/>
+                          <a:ea typeface="+mn-ea"/>
+                          <a:cs typeface="+mn-cs"/>
+                        </a:defRPr>
+                      </a:lvl9pPr>
+                    </a:lstStyle>
+                    <a:p>
+                      <a:r>
+                        <a:rPr lang="en-US" dirty="0">
+                          <a:solidFill>
+                            <a:schemeClr val="tx1"/>
+                          </a:solidFill>
+                        </a:rPr>
+                        <a:t>ppm</a:t>
+                      </a:r>
+                      <a:endParaRPr lang="ru-RU" dirty="0">
+                        <a:solidFill>
+                          <a:schemeClr val="tx1"/>
+                        </a:solidFill>
+                      </a:endParaRPr>
+                    </a:p>
+                  </a:txBody>
+                  <a:tcPr>
+                    <a:lnL w="38100" cap="flat" cmpd="sng" algn="ctr">
+                      <a:solidFill>
+                        <a:schemeClr val="tx1"/>
+                      </a:solidFill>
+                      <a:prstDash val="solid"/>
+                      <a:round/>
+                      <a:headEnd type="none" w="med" len="med"/>
+                      <a:tailEnd type="none" w="med" len="med"/>
+                    </a:lnL>
+                    <a:lnR w="38100" cap="flat" cmpd="sng" algn="ctr">
+                      <a:solidFill>
+                        <a:schemeClr val="tx1"/>
+                      </a:solidFill>
+                      <a:prstDash val="solid"/>
+                      <a:round/>
+                      <a:headEnd type="none" w="med" len="med"/>
+                      <a:tailEnd type="none" w="med" len="med"/>
+                    </a:lnR>
+                    <a:lnT w="38100" cap="flat" cmpd="sng" algn="ctr">
+                      <a:solidFill>
+                        <a:schemeClr val="tx1"/>
+                      </a:solidFill>
+                      <a:prstDash val="solid"/>
+                      <a:round/>
+                      <a:headEnd type="none" w="med" len="med"/>
+                      <a:tailEnd type="none" w="med" len="med"/>
+                    </a:lnT>
+                    <a:lnB w="38100" cap="flat" cmpd="sng" algn="ctr">
+                      <a:solidFill>
+                        <a:schemeClr val="tx1"/>
+                      </a:solidFill>
+                      <a:prstDash val="solid"/>
+                      <a:round/>
+                      <a:headEnd type="none" w="med" len="med"/>
+                      <a:tailEnd type="none" w="med" len="med"/>
+                    </a:lnB>
+                    <a:lnTlToBr w="12700" cmpd="sng">
+                      <a:noFill/>
+                      <a:prstDash val="solid"/>
+                    </a:lnTlToBr>
+                    <a:lnBlToTr w="12700" cmpd="sng">
+                      <a:noFill/>
+                      <a:prstDash val="solid"/>
+                    </a:lnBlToTr>
+                    <a:solidFill>
+                      <a:schemeClr val="bg1"/>
+                    </a:solidFill>
+                  </a:tcPr>
+                </a:tc>
+                <a:extLst>
+                  <a:ext uri="{0D108BD9-81ED-4DB2-BD59-A6C34878D82A}">
+                    <a16:rowId xmlns:a16="http://schemas.microsoft.com/office/drawing/2014/main" val="10002"/>
+                  </a:ext>
+                </a:extLst>
+              </a:tr>
+              <a:tr h="412184">
+                <a:tc vMerge="1">
+                  <a:txBody>
+                    <a:bodyPr/>
+                    <a:lstStyle/>
+                    <a:p>
+                      <a:endParaRPr lang="ru-RU"/>
+                    </a:p>
+                  </a:txBody>
+                  <a:tcPr>
+                    <a:lnL w="38100" cap="flat" cmpd="sng" algn="ctr">
+                      <a:solidFill>
+                        <a:schemeClr val="tx1"/>
+                      </a:solidFill>
+                      <a:prstDash val="solid"/>
+                      <a:round/>
+                      <a:headEnd type="none" w="med" len="med"/>
+                      <a:tailEnd type="none" w="med" len="med"/>
+                    </a:lnL>
+                    <a:lnR w="38100" cap="flat" cmpd="sng" algn="ctr">
+                      <a:solidFill>
+                        <a:schemeClr val="tx1"/>
+                      </a:solidFill>
+                      <a:prstDash val="solid"/>
+                      <a:round/>
+                      <a:headEnd type="none" w="med" len="med"/>
+                      <a:tailEnd type="none" w="med" len="med"/>
+                    </a:lnR>
+                    <a:lnT w="38100" cap="flat" cmpd="sng" algn="ctr">
+                      <a:solidFill>
+                        <a:schemeClr val="tx1"/>
+                      </a:solidFill>
+                      <a:prstDash val="solid"/>
+                      <a:round/>
+                      <a:headEnd type="none" w="med" len="med"/>
+                      <a:tailEnd type="none" w="med" len="med"/>
+                    </a:lnT>
+                    <a:lnB w="38100" cap="flat" cmpd="sng" algn="ctr">
+                      <a:solidFill>
+                        <a:schemeClr val="tx1"/>
+                      </a:solidFill>
+                      <a:prstDash val="solid"/>
+                      <a:round/>
+                      <a:headEnd type="none" w="med" len="med"/>
+                      <a:tailEnd type="none" w="med" len="med"/>
+                    </a:lnB>
+                    <a:lnTlToBr w="12700" cmpd="sng">
+                      <a:noFill/>
+                      <a:prstDash val="solid"/>
+                    </a:lnTlToBr>
+                    <a:lnBlToTr w="12700" cmpd="sng">
+                      <a:noFill/>
+                      <a:prstDash val="solid"/>
+                    </a:lnBlToTr>
+                    <a:solidFill>
+                      <a:schemeClr val="bg1"/>
+                    </a:solidFill>
+                  </a:tcPr>
+                </a:tc>
+                <a:tc>
+                  <a:txBody>
+                    <a:bodyPr/>
+                    <a:lstStyle>
+                      <a:defPPr>
+                        <a:defRPr lang="ru-RU">
+                          <a:solidFill>
+                            <a:schemeClr val="dk1"/>
+                          </a:solidFill>
+                        </a:defRPr>
+                      </a:defPPr>
+                      <a:lvl1pPr marL="0" algn="l" defTabSz="914400" rtl="0" eaLnBrk="1" latinLnBrk="0" hangingPunct="1">
+                        <a:defRPr sz="1800" kern="1200">
+                          <a:solidFill>
+                            <a:schemeClr val="dk1"/>
+                          </a:solidFill>
+                          <a:latin typeface="+mn-lt"/>
+                          <a:ea typeface="+mn-ea"/>
+                          <a:cs typeface="+mn-cs"/>
+                        </a:defRPr>
+                      </a:lvl1pPr>
+                      <a:lvl2pPr marL="457200" algn="l" defTabSz="914400" rtl="0" eaLnBrk="1" latinLnBrk="0" hangingPunct="1">
+                        <a:defRPr sz="1800" kern="1200">
+                          <a:solidFill>
+                            <a:schemeClr val="dk1"/>
+                          </a:solidFill>
+                          <a:latin typeface="+mn-lt"/>
+                          <a:ea typeface="+mn-ea"/>
+                          <a:cs typeface="+mn-cs"/>
+                        </a:defRPr>
+                      </a:lvl2pPr>
+                      <a:lvl3pPr marL="914400" algn="l" defTabSz="914400" rtl="0" eaLnBrk="1" latinLnBrk="0" hangingPunct="1">
+                        <a:defRPr sz="1800" kern="1200">
+                          <a:solidFill>
+                            <a:schemeClr val="dk1"/>
+                          </a:solidFill>
+                          <a:latin typeface="+mn-lt"/>
+                          <a:ea typeface="+mn-ea"/>
+                          <a:cs typeface="+mn-cs"/>
+                        </a:defRPr>
+                      </a:lvl3pPr>
+                      <a:lvl4pPr marL="1371600" algn="l" defTabSz="914400" rtl="0" eaLnBrk="1" latinLnBrk="0" hangingPunct="1">
+                        <a:defRPr sz="1800" kern="1200">
+                          <a:solidFill>
+                            <a:schemeClr val="dk1"/>
+                          </a:solidFill>
+                          <a:latin typeface="+mn-lt"/>
+                          <a:ea typeface="+mn-ea"/>
+                          <a:cs typeface="+mn-cs"/>
+                        </a:defRPr>
+                      </a:lvl4pPr>
+                      <a:lvl5pPr marL="1828800" algn="l" defTabSz="914400" rtl="0" eaLnBrk="1" latinLnBrk="0" hangingPunct="1">
+                        <a:defRPr sz="1800" kern="1200">
+                          <a:solidFill>
+                            <a:schemeClr val="dk1"/>
+                          </a:solidFill>
+                          <a:latin typeface="+mn-lt"/>
+                          <a:ea typeface="+mn-ea"/>
+                          <a:cs typeface="+mn-cs"/>
+                        </a:defRPr>
+                      </a:lvl5pPr>
+                      <a:lvl6pPr marL="2286000" algn="l" defTabSz="914400" rtl="0" eaLnBrk="1" latinLnBrk="0" hangingPunct="1">
+                        <a:defRPr sz="1800" kern="1200">
+                          <a:solidFill>
+                            <a:schemeClr val="dk1"/>
+                          </a:solidFill>
+                          <a:latin typeface="+mn-lt"/>
+                          <a:ea typeface="+mn-ea"/>
+                          <a:cs typeface="+mn-cs"/>
+                        </a:defRPr>
+                      </a:lvl6pPr>
+                      <a:lvl7pPr marL="2743200" algn="l" defTabSz="914400" rtl="0" eaLnBrk="1" latinLnBrk="0" hangingPunct="1">
+                        <a:defRPr sz="1800" kern="1200">
+                          <a:solidFill>
+                            <a:schemeClr val="dk1"/>
+                          </a:solidFill>
+                          <a:latin typeface="+mn-lt"/>
+                          <a:ea typeface="+mn-ea"/>
+                          <a:cs typeface="+mn-cs"/>
+                        </a:defRPr>
+                      </a:lvl7pPr>
+                      <a:lvl8pPr marL="3200400" algn="l" defTabSz="914400" rtl="0" eaLnBrk="1" latinLnBrk="0" hangingPunct="1">
+                        <a:defRPr sz="1800" kern="1200">
+                          <a:solidFill>
+                            <a:schemeClr val="dk1"/>
+                          </a:solidFill>
+                          <a:latin typeface="+mn-lt"/>
+                          <a:ea typeface="+mn-ea"/>
+                          <a:cs typeface="+mn-cs"/>
+                        </a:defRPr>
+                      </a:lvl8pPr>
+                      <a:lvl9pPr marL="3657600" algn="l" defTabSz="914400" rtl="0" eaLnBrk="1" latinLnBrk="0" hangingPunct="1">
+                        <a:defRPr sz="1800" kern="1200">
+                          <a:solidFill>
+                            <a:schemeClr val="dk1"/>
+                          </a:solidFill>
+                          <a:latin typeface="+mn-lt"/>
+                          <a:ea typeface="+mn-ea"/>
+                          <a:cs typeface="+mn-cs"/>
+                        </a:defRPr>
+                      </a:lvl9pPr>
+                    </a:lstStyle>
+                    <a:p>
+                      <a:r>
+                        <a:rPr lang="ru-RU" dirty="0">
+                          <a:solidFill>
+                            <a:schemeClr val="tx1"/>
+                          </a:solidFill>
+                        </a:rPr>
+                        <a:t>Индекс</a:t>
+                      </a:r>
+                      <a:r>
+                        <a:rPr lang="ru-RU" baseline="0" dirty="0">
+                          <a:solidFill>
+                            <a:schemeClr val="tx1"/>
+                          </a:solidFill>
+                        </a:rPr>
+                        <a:t> качества</a:t>
+                      </a:r>
+                      <a:endParaRPr lang="ru-RU" dirty="0">
+                        <a:solidFill>
+                          <a:schemeClr val="tx1"/>
+                        </a:solidFill>
+                      </a:endParaRPr>
+                    </a:p>
+                  </a:txBody>
+                  <a:tcPr>
+                    <a:lnL w="38100" cap="flat" cmpd="sng" algn="ctr">
+                      <a:solidFill>
+                        <a:schemeClr val="tx1"/>
+                      </a:solidFill>
+                      <a:prstDash val="solid"/>
+                      <a:round/>
+                      <a:headEnd type="none" w="med" len="med"/>
+                      <a:tailEnd type="none" w="med" len="med"/>
+                    </a:lnL>
+                    <a:lnR w="38100" cap="flat" cmpd="sng" algn="ctr">
+                      <a:solidFill>
+                        <a:schemeClr val="tx1"/>
+                      </a:solidFill>
+                      <a:prstDash val="solid"/>
+                      <a:round/>
+                      <a:headEnd type="none" w="med" len="med"/>
+                      <a:tailEnd type="none" w="med" len="med"/>
+                    </a:lnR>
+                    <a:lnT w="38100" cap="flat" cmpd="sng" algn="ctr">
+                      <a:solidFill>
+                        <a:schemeClr val="tx1"/>
+                      </a:solidFill>
+                      <a:prstDash val="solid"/>
+                      <a:round/>
+                      <a:headEnd type="none" w="med" len="med"/>
+                      <a:tailEnd type="none" w="med" len="med"/>
+                    </a:lnT>
+                    <a:lnB w="38100" cap="flat" cmpd="sng" algn="ctr">
+                      <a:solidFill>
+                        <a:schemeClr val="tx1"/>
+                      </a:solidFill>
+                      <a:prstDash val="solid"/>
+                      <a:round/>
+                      <a:headEnd type="none" w="med" len="med"/>
+                      <a:tailEnd type="none" w="med" len="med"/>
+                    </a:lnB>
+                    <a:lnTlToBr w="12700" cmpd="sng">
+                      <a:noFill/>
+                      <a:prstDash val="solid"/>
+                    </a:lnTlToBr>
+                    <a:lnBlToTr w="12700" cmpd="sng">
+                      <a:noFill/>
+                      <a:prstDash val="solid"/>
+                    </a:lnBlToTr>
+                    <a:solidFill>
+                      <a:schemeClr val="bg1"/>
+                    </a:solidFill>
+                  </a:tcPr>
+                </a:tc>
+                <a:tc>
+                  <a:txBody>
+                    <a:bodyPr/>
+                    <a:lstStyle>
+                      <a:defPPr>
+                        <a:defRPr lang="ru-RU">
+                          <a:solidFill>
+                            <a:schemeClr val="dk1"/>
+                          </a:solidFill>
+                        </a:defRPr>
+                      </a:defPPr>
+                      <a:lvl1pPr marL="0" algn="l" defTabSz="914400" rtl="0" eaLnBrk="1" latinLnBrk="0" hangingPunct="1">
+                        <a:defRPr sz="1800" kern="1200">
+                          <a:solidFill>
+                            <a:schemeClr val="dk1"/>
+                          </a:solidFill>
+                          <a:latin typeface="+mn-lt"/>
+                          <a:ea typeface="+mn-ea"/>
+                          <a:cs typeface="+mn-cs"/>
+                        </a:defRPr>
+                      </a:lvl1pPr>
+                      <a:lvl2pPr marL="457200" algn="l" defTabSz="914400" rtl="0" eaLnBrk="1" latinLnBrk="0" hangingPunct="1">
+                        <a:defRPr sz="1800" kern="1200">
+                          <a:solidFill>
+                            <a:schemeClr val="dk1"/>
+                          </a:solidFill>
+                          <a:latin typeface="+mn-lt"/>
+                          <a:ea typeface="+mn-ea"/>
+                          <a:cs typeface="+mn-cs"/>
+                        </a:defRPr>
+                      </a:lvl2pPr>
+                      <a:lvl3pPr marL="914400" algn="l" defTabSz="914400" rtl="0" eaLnBrk="1" latinLnBrk="0" hangingPunct="1">
+                        <a:defRPr sz="1800" kern="1200">
+                          <a:solidFill>
+                            <a:schemeClr val="dk1"/>
+                          </a:solidFill>
+                          <a:latin typeface="+mn-lt"/>
+                          <a:ea typeface="+mn-ea"/>
+                          <a:cs typeface="+mn-cs"/>
+                        </a:defRPr>
+                      </a:lvl3pPr>
+                      <a:lvl4pPr marL="1371600" algn="l" defTabSz="914400" rtl="0" eaLnBrk="1" latinLnBrk="0" hangingPunct="1">
+                        <a:defRPr sz="1800" kern="1200">
+                          <a:solidFill>
+                            <a:schemeClr val="dk1"/>
+                          </a:solidFill>
+                          <a:latin typeface="+mn-lt"/>
+                          <a:ea typeface="+mn-ea"/>
+                          <a:cs typeface="+mn-cs"/>
+                        </a:defRPr>
+                      </a:lvl4pPr>
+                      <a:lvl5pPr marL="1828800" algn="l" defTabSz="914400" rtl="0" eaLnBrk="1" latinLnBrk="0" hangingPunct="1">
+                        <a:defRPr sz="1800" kern="1200">
+                          <a:solidFill>
+                            <a:schemeClr val="dk1"/>
+                          </a:solidFill>
+                          <a:latin typeface="+mn-lt"/>
+                          <a:ea typeface="+mn-ea"/>
+                          <a:cs typeface="+mn-cs"/>
+                        </a:defRPr>
+                      </a:lvl5pPr>
+                      <a:lvl6pPr marL="2286000" algn="l" defTabSz="914400" rtl="0" eaLnBrk="1" latinLnBrk="0" hangingPunct="1">
+                        <a:defRPr sz="1800" kern="1200">
+                          <a:solidFill>
+                            <a:schemeClr val="dk1"/>
+                          </a:solidFill>
+                          <a:latin typeface="+mn-lt"/>
+                          <a:ea typeface="+mn-ea"/>
+                          <a:cs typeface="+mn-cs"/>
+                        </a:defRPr>
+                      </a:lvl6pPr>
+                      <a:lvl7pPr marL="2743200" algn="l" defTabSz="914400" rtl="0" eaLnBrk="1" latinLnBrk="0" hangingPunct="1">
+                        <a:defRPr sz="1800" kern="1200">
+                          <a:solidFill>
+                            <a:schemeClr val="dk1"/>
+                          </a:solidFill>
+                          <a:latin typeface="+mn-lt"/>
+                          <a:ea typeface="+mn-ea"/>
+                          <a:cs typeface="+mn-cs"/>
+                        </a:defRPr>
+                      </a:lvl7pPr>
+                      <a:lvl8pPr marL="3200400" algn="l" defTabSz="914400" rtl="0" eaLnBrk="1" latinLnBrk="0" hangingPunct="1">
+                        <a:defRPr sz="1800" kern="1200">
+                          <a:solidFill>
+                            <a:schemeClr val="dk1"/>
+                          </a:solidFill>
+                          <a:latin typeface="+mn-lt"/>
+                          <a:ea typeface="+mn-ea"/>
+                          <a:cs typeface="+mn-cs"/>
+                        </a:defRPr>
+                      </a:lvl8pPr>
+                      <a:lvl9pPr marL="3657600" algn="l" defTabSz="914400" rtl="0" eaLnBrk="1" latinLnBrk="0" hangingPunct="1">
+                        <a:defRPr sz="1800" kern="1200">
+                          <a:solidFill>
+                            <a:schemeClr val="dk1"/>
+                          </a:solidFill>
+                          <a:latin typeface="+mn-lt"/>
+                          <a:ea typeface="+mn-ea"/>
+                          <a:cs typeface="+mn-cs"/>
+                        </a:defRPr>
+                      </a:lvl9pPr>
+                    </a:lstStyle>
+                    <a:p>
+                      <a:r>
+                        <a:rPr lang="en-US" dirty="0">
+                          <a:solidFill>
+                            <a:schemeClr val="tx1"/>
+                          </a:solidFill>
+                        </a:rPr>
+                        <a:t>0-500</a:t>
+                      </a:r>
+                      <a:endParaRPr lang="ru-RU" dirty="0">
+                        <a:solidFill>
+                          <a:schemeClr val="tx1"/>
+                        </a:solidFill>
+                      </a:endParaRPr>
+                    </a:p>
+                  </a:txBody>
+                  <a:tcPr>
+                    <a:lnL w="38100" cap="flat" cmpd="sng" algn="ctr">
+                      <a:solidFill>
+                        <a:schemeClr val="tx1"/>
+                      </a:solidFill>
+                      <a:prstDash val="solid"/>
+                      <a:round/>
+                      <a:headEnd type="none" w="med" len="med"/>
+                      <a:tailEnd type="none" w="med" len="med"/>
+                    </a:lnL>
+                    <a:lnR w="38100" cap="flat" cmpd="sng" algn="ctr">
+                      <a:solidFill>
+                        <a:schemeClr val="tx1"/>
+                      </a:solidFill>
+                      <a:prstDash val="solid"/>
+                      <a:round/>
+                      <a:headEnd type="none" w="med" len="med"/>
+                      <a:tailEnd type="none" w="med" len="med"/>
+                    </a:lnR>
+                    <a:lnT w="38100" cap="flat" cmpd="sng" algn="ctr">
+                      <a:solidFill>
+                        <a:schemeClr val="tx1"/>
+                      </a:solidFill>
+                      <a:prstDash val="solid"/>
+                      <a:round/>
+                      <a:headEnd type="none" w="med" len="med"/>
+                      <a:tailEnd type="none" w="med" len="med"/>
+                    </a:lnT>
+                    <a:lnB w="38100" cap="flat" cmpd="sng" algn="ctr">
+                      <a:solidFill>
+                        <a:schemeClr val="tx1"/>
+                      </a:solidFill>
+                      <a:prstDash val="solid"/>
+                      <a:round/>
+                      <a:headEnd type="none" w="med" len="med"/>
+                      <a:tailEnd type="none" w="med" len="med"/>
+                    </a:lnB>
+                    <a:lnTlToBr w="12700" cmpd="sng">
+                      <a:noFill/>
+                      <a:prstDash val="solid"/>
+                    </a:lnTlToBr>
+                    <a:lnBlToTr w="12700" cmpd="sng">
+                      <a:noFill/>
+                      <a:prstDash val="solid"/>
+                    </a:lnBlToTr>
+                    <a:solidFill>
+                      <a:schemeClr val="bg1"/>
+                    </a:solidFill>
+                  </a:tcPr>
+                </a:tc>
+                <a:tc>
+                  <a:txBody>
+                    <a:bodyPr/>
+                    <a:lstStyle>
+                      <a:defPPr>
+                        <a:defRPr lang="ru-RU">
+                          <a:solidFill>
+                            <a:schemeClr val="dk1"/>
+                          </a:solidFill>
+                        </a:defRPr>
+                      </a:defPPr>
+                      <a:lvl1pPr marL="0" algn="l" defTabSz="914400" rtl="0" eaLnBrk="1" latinLnBrk="0" hangingPunct="1">
+                        <a:defRPr sz="1800" kern="1200">
+                          <a:solidFill>
+                            <a:schemeClr val="dk1"/>
+                          </a:solidFill>
+                          <a:latin typeface="+mn-lt"/>
+                          <a:ea typeface="+mn-ea"/>
+                          <a:cs typeface="+mn-cs"/>
+                        </a:defRPr>
+                      </a:lvl1pPr>
+                      <a:lvl2pPr marL="457200" algn="l" defTabSz="914400" rtl="0" eaLnBrk="1" latinLnBrk="0" hangingPunct="1">
+                        <a:defRPr sz="1800" kern="1200">
+                          <a:solidFill>
+                            <a:schemeClr val="dk1"/>
+                          </a:solidFill>
+                          <a:latin typeface="+mn-lt"/>
+                          <a:ea typeface="+mn-ea"/>
+                          <a:cs typeface="+mn-cs"/>
+                        </a:defRPr>
+                      </a:lvl2pPr>
+                      <a:lvl3pPr marL="914400" algn="l" defTabSz="914400" rtl="0" eaLnBrk="1" latinLnBrk="0" hangingPunct="1">
+                        <a:defRPr sz="1800" kern="1200">
+                          <a:solidFill>
+                            <a:schemeClr val="dk1"/>
+                          </a:solidFill>
+                          <a:latin typeface="+mn-lt"/>
+                          <a:ea typeface="+mn-ea"/>
+                          <a:cs typeface="+mn-cs"/>
+                        </a:defRPr>
+                      </a:lvl3pPr>
+                      <a:lvl4pPr marL="1371600" algn="l" defTabSz="914400" rtl="0" eaLnBrk="1" latinLnBrk="0" hangingPunct="1">
+                        <a:defRPr sz="1800" kern="1200">
+                          <a:solidFill>
+                            <a:schemeClr val="dk1"/>
+                          </a:solidFill>
+                          <a:latin typeface="+mn-lt"/>
+                          <a:ea typeface="+mn-ea"/>
+                          <a:cs typeface="+mn-cs"/>
+                        </a:defRPr>
+                      </a:lvl4pPr>
+                      <a:lvl5pPr marL="1828800" algn="l" defTabSz="914400" rtl="0" eaLnBrk="1" latinLnBrk="0" hangingPunct="1">
+                        <a:defRPr sz="1800" kern="1200">
+                          <a:solidFill>
+                            <a:schemeClr val="dk1"/>
+                          </a:solidFill>
+                          <a:latin typeface="+mn-lt"/>
+                          <a:ea typeface="+mn-ea"/>
+                          <a:cs typeface="+mn-cs"/>
+                        </a:defRPr>
+                      </a:lvl5pPr>
+                      <a:lvl6pPr marL="2286000" algn="l" defTabSz="914400" rtl="0" eaLnBrk="1" latinLnBrk="0" hangingPunct="1">
+                        <a:defRPr sz="1800" kern="1200">
+                          <a:solidFill>
+                            <a:schemeClr val="dk1"/>
+                          </a:solidFill>
+                          <a:latin typeface="+mn-lt"/>
+                          <a:ea typeface="+mn-ea"/>
+                          <a:cs typeface="+mn-cs"/>
+                        </a:defRPr>
+                      </a:lvl6pPr>
+                      <a:lvl7pPr marL="2743200" algn="l" defTabSz="914400" rtl="0" eaLnBrk="1" latinLnBrk="0" hangingPunct="1">
+                        <a:defRPr sz="1800" kern="1200">
+                          <a:solidFill>
+                            <a:schemeClr val="dk1"/>
+                          </a:solidFill>
+                          <a:latin typeface="+mn-lt"/>
+                          <a:ea typeface="+mn-ea"/>
+                          <a:cs typeface="+mn-cs"/>
+                        </a:defRPr>
+                      </a:lvl7pPr>
+                      <a:lvl8pPr marL="3200400" algn="l" defTabSz="914400" rtl="0" eaLnBrk="1" latinLnBrk="0" hangingPunct="1">
+                        <a:defRPr sz="1800" kern="1200">
+                          <a:solidFill>
+                            <a:schemeClr val="dk1"/>
+                          </a:solidFill>
+                          <a:latin typeface="+mn-lt"/>
+                          <a:ea typeface="+mn-ea"/>
+                          <a:cs typeface="+mn-cs"/>
+                        </a:defRPr>
+                      </a:lvl8pPr>
+                      <a:lvl9pPr marL="3657600" algn="l" defTabSz="914400" rtl="0" eaLnBrk="1" latinLnBrk="0" hangingPunct="1">
+                        <a:defRPr sz="1800" kern="1200">
+                          <a:solidFill>
+                            <a:schemeClr val="dk1"/>
+                          </a:solidFill>
+                          <a:latin typeface="+mn-lt"/>
+                          <a:ea typeface="+mn-ea"/>
+                          <a:cs typeface="+mn-cs"/>
+                        </a:defRPr>
+                      </a:lvl9pPr>
+                    </a:lstStyle>
+                    <a:p>
+                      <a:r>
+                        <a:rPr lang="en-US" dirty="0">
+                          <a:solidFill>
+                            <a:schemeClr val="tx1"/>
+                          </a:solidFill>
+                        </a:rPr>
+                        <a:t>-</a:t>
+                      </a:r>
+                      <a:endParaRPr lang="ru-RU" dirty="0">
+                        <a:solidFill>
+                          <a:schemeClr val="tx1"/>
+                        </a:solidFill>
+                      </a:endParaRPr>
+                    </a:p>
+                  </a:txBody>
+                  <a:tcPr>
+                    <a:lnL w="38100" cap="flat" cmpd="sng" algn="ctr">
+                      <a:solidFill>
+                        <a:schemeClr val="tx1"/>
+                      </a:solidFill>
+                      <a:prstDash val="solid"/>
+                      <a:round/>
+                      <a:headEnd type="none" w="med" len="med"/>
+                      <a:tailEnd type="none" w="med" len="med"/>
+                    </a:lnL>
+                    <a:lnR w="38100" cap="flat" cmpd="sng" algn="ctr">
+                      <a:solidFill>
+                        <a:schemeClr val="tx1"/>
+                      </a:solidFill>
+                      <a:prstDash val="solid"/>
+                      <a:round/>
+                      <a:headEnd type="none" w="med" len="med"/>
+                      <a:tailEnd type="none" w="med" len="med"/>
+                    </a:lnR>
+                    <a:lnT w="38100" cap="flat" cmpd="sng" algn="ctr">
+                      <a:solidFill>
+                        <a:schemeClr val="tx1"/>
+                      </a:solidFill>
+                      <a:prstDash val="solid"/>
+                      <a:round/>
+                      <a:headEnd type="none" w="med" len="med"/>
+                      <a:tailEnd type="none" w="med" len="med"/>
+                    </a:lnT>
+                    <a:lnB w="38100" cap="flat" cmpd="sng" algn="ctr">
+                      <a:solidFill>
+                        <a:schemeClr val="tx1"/>
+                      </a:solidFill>
+                      <a:prstDash val="solid"/>
+                      <a:round/>
+                      <a:headEnd type="none" w="med" len="med"/>
+                      <a:tailEnd type="none" w="med" len="med"/>
+                    </a:lnB>
+                    <a:lnTlToBr w="12700" cmpd="sng">
+                      <a:noFill/>
+                      <a:prstDash val="solid"/>
+                    </a:lnTlToBr>
+                    <a:lnBlToTr w="12700" cmpd="sng">
+                      <a:noFill/>
+                      <a:prstDash val="solid"/>
+                    </a:lnBlToTr>
+                    <a:solidFill>
+                      <a:schemeClr val="bg1"/>
+                    </a:solidFill>
+                  </a:tcPr>
+                </a:tc>
+                <a:extLst>
+                  <a:ext uri="{0D108BD9-81ED-4DB2-BD59-A6C34878D82A}">
+                    <a16:rowId xmlns:a16="http://schemas.microsoft.com/office/drawing/2014/main" val="10003"/>
+                  </a:ext>
+                </a:extLst>
+              </a:tr>
+              <a:tr h="412184">
+                <a:tc rowSpan="2">
+                  <a:txBody>
+                    <a:bodyPr/>
+                    <a:lstStyle>
+                      <a:defPPr>
+                        <a:defRPr lang="ru-RU">
+                          <a:solidFill>
+                            <a:schemeClr val="dk1"/>
+                          </a:solidFill>
+                        </a:defRPr>
+                      </a:defPPr>
+                      <a:lvl1pPr marL="0" algn="l" defTabSz="914400" rtl="0" eaLnBrk="1" latinLnBrk="0" hangingPunct="1">
+                        <a:defRPr sz="1800" kern="1200">
+                          <a:solidFill>
+                            <a:schemeClr val="dk1"/>
+                          </a:solidFill>
+                          <a:latin typeface="+mn-lt"/>
+                          <a:ea typeface="+mn-ea"/>
+                          <a:cs typeface="+mn-cs"/>
+                        </a:defRPr>
+                      </a:lvl1pPr>
+                      <a:lvl2pPr marL="457200" algn="l" defTabSz="914400" rtl="0" eaLnBrk="1" latinLnBrk="0" hangingPunct="1">
+                        <a:defRPr sz="1800" kern="1200">
+                          <a:solidFill>
+                            <a:schemeClr val="dk1"/>
+                          </a:solidFill>
+                          <a:latin typeface="+mn-lt"/>
+                          <a:ea typeface="+mn-ea"/>
+                          <a:cs typeface="+mn-cs"/>
+                        </a:defRPr>
+                      </a:lvl2pPr>
+                      <a:lvl3pPr marL="914400" algn="l" defTabSz="914400" rtl="0" eaLnBrk="1" latinLnBrk="0" hangingPunct="1">
+                        <a:defRPr sz="1800" kern="1200">
+                          <a:solidFill>
+                            <a:schemeClr val="dk1"/>
+                          </a:solidFill>
+                          <a:latin typeface="+mn-lt"/>
+                          <a:ea typeface="+mn-ea"/>
+                          <a:cs typeface="+mn-cs"/>
+                        </a:defRPr>
+                      </a:lvl3pPr>
+                      <a:lvl4pPr marL="1371600" algn="l" defTabSz="914400" rtl="0" eaLnBrk="1" latinLnBrk="0" hangingPunct="1">
+                        <a:defRPr sz="1800" kern="1200">
+                          <a:solidFill>
+                            <a:schemeClr val="dk1"/>
+                          </a:solidFill>
+                          <a:latin typeface="+mn-lt"/>
+                          <a:ea typeface="+mn-ea"/>
+                          <a:cs typeface="+mn-cs"/>
+                        </a:defRPr>
+                      </a:lvl4pPr>
+                      <a:lvl5pPr marL="1828800" algn="l" defTabSz="914400" rtl="0" eaLnBrk="1" latinLnBrk="0" hangingPunct="1">
+                        <a:defRPr sz="1800" kern="1200">
+                          <a:solidFill>
+                            <a:schemeClr val="dk1"/>
+                          </a:solidFill>
+                          <a:latin typeface="+mn-lt"/>
+                          <a:ea typeface="+mn-ea"/>
+                          <a:cs typeface="+mn-cs"/>
+                        </a:defRPr>
+                      </a:lvl5pPr>
+                      <a:lvl6pPr marL="2286000" algn="l" defTabSz="914400" rtl="0" eaLnBrk="1" latinLnBrk="0" hangingPunct="1">
+                        <a:defRPr sz="1800" kern="1200">
+                          <a:solidFill>
+                            <a:schemeClr val="dk1"/>
+                          </a:solidFill>
+                          <a:latin typeface="+mn-lt"/>
+                          <a:ea typeface="+mn-ea"/>
+                          <a:cs typeface="+mn-cs"/>
+                        </a:defRPr>
+                      </a:lvl6pPr>
+                      <a:lvl7pPr marL="2743200" algn="l" defTabSz="914400" rtl="0" eaLnBrk="1" latinLnBrk="0" hangingPunct="1">
+                        <a:defRPr sz="1800" kern="1200">
+                          <a:solidFill>
+                            <a:schemeClr val="dk1"/>
+                          </a:solidFill>
+                          <a:latin typeface="+mn-lt"/>
+                          <a:ea typeface="+mn-ea"/>
+                          <a:cs typeface="+mn-cs"/>
+                        </a:defRPr>
+                      </a:lvl7pPr>
+                      <a:lvl8pPr marL="3200400" algn="l" defTabSz="914400" rtl="0" eaLnBrk="1" latinLnBrk="0" hangingPunct="1">
+                        <a:defRPr sz="1800" kern="1200">
+                          <a:solidFill>
+                            <a:schemeClr val="dk1"/>
+                          </a:solidFill>
+                          <a:latin typeface="+mn-lt"/>
+                          <a:ea typeface="+mn-ea"/>
+                          <a:cs typeface="+mn-cs"/>
+                        </a:defRPr>
+                      </a:lvl8pPr>
+                      <a:lvl9pPr marL="3657600" algn="l" defTabSz="914400" rtl="0" eaLnBrk="1" latinLnBrk="0" hangingPunct="1">
+                        <a:defRPr sz="1800" kern="1200">
+                          <a:solidFill>
+                            <a:schemeClr val="dk1"/>
+                          </a:solidFill>
+                          <a:latin typeface="+mn-lt"/>
+                          <a:ea typeface="+mn-ea"/>
+                          <a:cs typeface="+mn-cs"/>
+                        </a:defRPr>
+                      </a:lvl9pPr>
+                    </a:lstStyle>
+                    <a:p>
+                      <a:r>
+                        <a:rPr lang="ru-RU" dirty="0">
+                          <a:solidFill>
+                            <a:schemeClr val="tx1"/>
+                          </a:solidFill>
+                        </a:rPr>
+                        <a:t>АНТ-21</a:t>
+                      </a:r>
+                    </a:p>
+                  </a:txBody>
+                  <a:tcPr>
+                    <a:lnL w="38100" cap="flat" cmpd="sng" algn="ctr">
+                      <a:solidFill>
+                        <a:schemeClr val="tx1"/>
+                      </a:solidFill>
+                      <a:prstDash val="solid"/>
+                      <a:round/>
+                      <a:headEnd type="none" w="med" len="med"/>
+                      <a:tailEnd type="none" w="med" len="med"/>
+                    </a:lnL>
+                    <a:lnR w="38100" cap="flat" cmpd="sng" algn="ctr">
+                      <a:solidFill>
+                        <a:schemeClr val="tx1"/>
+                      </a:solidFill>
+                      <a:prstDash val="solid"/>
+                      <a:round/>
+                      <a:headEnd type="none" w="med" len="med"/>
+                      <a:tailEnd type="none" w="med" len="med"/>
+                    </a:lnR>
+                    <a:lnT w="38100" cap="flat" cmpd="sng" algn="ctr">
+                      <a:solidFill>
+                        <a:schemeClr val="tx1"/>
+                      </a:solidFill>
+                      <a:prstDash val="solid"/>
+                      <a:round/>
+                      <a:headEnd type="none" w="med" len="med"/>
+                      <a:tailEnd type="none" w="med" len="med"/>
+                    </a:lnT>
+                    <a:lnB w="38100" cap="flat" cmpd="sng" algn="ctr">
+                      <a:solidFill>
+                        <a:schemeClr val="tx1"/>
+                      </a:solidFill>
+                      <a:prstDash val="solid"/>
+                      <a:round/>
+                      <a:headEnd type="none" w="med" len="med"/>
+                      <a:tailEnd type="none" w="med" len="med"/>
+                    </a:lnB>
+                    <a:lnTlToBr w="12700" cmpd="sng">
+                      <a:noFill/>
+                      <a:prstDash val="solid"/>
+                    </a:lnTlToBr>
+                    <a:lnBlToTr w="12700" cmpd="sng">
+                      <a:noFill/>
+                      <a:prstDash val="solid"/>
+                    </a:lnBlToTr>
+                    <a:solidFill>
+                      <a:schemeClr val="bg1"/>
+                    </a:solidFill>
+                  </a:tcPr>
+                </a:tc>
+                <a:tc>
+                  <a:txBody>
+                    <a:bodyPr/>
+                    <a:lstStyle>
+                      <a:defPPr>
+                        <a:defRPr lang="ru-RU">
+                          <a:solidFill>
+                            <a:schemeClr val="dk1"/>
+                          </a:solidFill>
+                        </a:defRPr>
+                      </a:defPPr>
+                      <a:lvl1pPr marL="0" algn="l" defTabSz="914400" rtl="0" eaLnBrk="1" latinLnBrk="0" hangingPunct="1">
+                        <a:defRPr sz="1800" kern="1200">
+                          <a:solidFill>
+                            <a:schemeClr val="dk1"/>
+                          </a:solidFill>
+                          <a:latin typeface="+mn-lt"/>
+                          <a:ea typeface="+mn-ea"/>
+                          <a:cs typeface="+mn-cs"/>
+                        </a:defRPr>
+                      </a:lvl1pPr>
+                      <a:lvl2pPr marL="457200" algn="l" defTabSz="914400" rtl="0" eaLnBrk="1" latinLnBrk="0" hangingPunct="1">
+                        <a:defRPr sz="1800" kern="1200">
+                          <a:solidFill>
+                            <a:schemeClr val="dk1"/>
+                          </a:solidFill>
+                          <a:latin typeface="+mn-lt"/>
+                          <a:ea typeface="+mn-ea"/>
+                          <a:cs typeface="+mn-cs"/>
+                        </a:defRPr>
+                      </a:lvl2pPr>
+                      <a:lvl3pPr marL="914400" algn="l" defTabSz="914400" rtl="0" eaLnBrk="1" latinLnBrk="0" hangingPunct="1">
+                        <a:defRPr sz="1800" kern="1200">
+                          <a:solidFill>
+                            <a:schemeClr val="dk1"/>
+                          </a:solidFill>
+                          <a:latin typeface="+mn-lt"/>
+                          <a:ea typeface="+mn-ea"/>
+                          <a:cs typeface="+mn-cs"/>
+                        </a:defRPr>
+                      </a:lvl3pPr>
+                      <a:lvl4pPr marL="1371600" algn="l" defTabSz="914400" rtl="0" eaLnBrk="1" latinLnBrk="0" hangingPunct="1">
+                        <a:defRPr sz="1800" kern="1200">
+                          <a:solidFill>
+                            <a:schemeClr val="dk1"/>
+                          </a:solidFill>
+                          <a:latin typeface="+mn-lt"/>
+                          <a:ea typeface="+mn-ea"/>
+                          <a:cs typeface="+mn-cs"/>
+                        </a:defRPr>
+                      </a:lvl4pPr>
+                      <a:lvl5pPr marL="1828800" algn="l" defTabSz="914400" rtl="0" eaLnBrk="1" latinLnBrk="0" hangingPunct="1">
+                        <a:defRPr sz="1800" kern="1200">
+                          <a:solidFill>
+                            <a:schemeClr val="dk1"/>
+                          </a:solidFill>
+                          <a:latin typeface="+mn-lt"/>
+                          <a:ea typeface="+mn-ea"/>
+                          <a:cs typeface="+mn-cs"/>
+                        </a:defRPr>
+                      </a:lvl5pPr>
+                      <a:lvl6pPr marL="2286000" algn="l" defTabSz="914400" rtl="0" eaLnBrk="1" latinLnBrk="0" hangingPunct="1">
+                        <a:defRPr sz="1800" kern="1200">
+                          <a:solidFill>
+                            <a:schemeClr val="dk1"/>
+                          </a:solidFill>
+                          <a:latin typeface="+mn-lt"/>
+                          <a:ea typeface="+mn-ea"/>
+                          <a:cs typeface="+mn-cs"/>
+                        </a:defRPr>
+                      </a:lvl6pPr>
+                      <a:lvl7pPr marL="2743200" algn="l" defTabSz="914400" rtl="0" eaLnBrk="1" latinLnBrk="0" hangingPunct="1">
+                        <a:defRPr sz="1800" kern="1200">
+                          <a:solidFill>
+                            <a:schemeClr val="dk1"/>
+                          </a:solidFill>
+                          <a:latin typeface="+mn-lt"/>
+                          <a:ea typeface="+mn-ea"/>
+                          <a:cs typeface="+mn-cs"/>
+                        </a:defRPr>
+                      </a:lvl7pPr>
+                      <a:lvl8pPr marL="3200400" algn="l" defTabSz="914400" rtl="0" eaLnBrk="1" latinLnBrk="0" hangingPunct="1">
+                        <a:defRPr sz="1800" kern="1200">
+                          <a:solidFill>
+                            <a:schemeClr val="dk1"/>
+                          </a:solidFill>
+                          <a:latin typeface="+mn-lt"/>
+                          <a:ea typeface="+mn-ea"/>
+                          <a:cs typeface="+mn-cs"/>
+                        </a:defRPr>
+                      </a:lvl8pPr>
+                      <a:lvl9pPr marL="3657600" algn="l" defTabSz="914400" rtl="0" eaLnBrk="1" latinLnBrk="0" hangingPunct="1">
+                        <a:defRPr sz="1800" kern="1200">
+                          <a:solidFill>
+                            <a:schemeClr val="dk1"/>
+                          </a:solidFill>
+                          <a:latin typeface="+mn-lt"/>
+                          <a:ea typeface="+mn-ea"/>
+                          <a:cs typeface="+mn-cs"/>
+                        </a:defRPr>
+                      </a:lvl9pPr>
+                    </a:lstStyle>
+                    <a:p>
+                      <a:r>
+                        <a:rPr lang="ru-RU" dirty="0">
+                          <a:solidFill>
+                            <a:schemeClr val="tx1"/>
+                          </a:solidFill>
+                        </a:rPr>
+                        <a:t>Температура</a:t>
+                      </a:r>
+                    </a:p>
+                  </a:txBody>
+                  <a:tcPr>
+                    <a:lnL w="38100" cap="flat" cmpd="sng" algn="ctr">
+                      <a:solidFill>
+                        <a:schemeClr val="tx1"/>
+                      </a:solidFill>
+                      <a:prstDash val="solid"/>
+                      <a:round/>
+                      <a:headEnd type="none" w="med" len="med"/>
+                      <a:tailEnd type="none" w="med" len="med"/>
+                    </a:lnL>
+                    <a:lnR w="38100" cap="flat" cmpd="sng" algn="ctr">
+                      <a:solidFill>
+                        <a:schemeClr val="tx1"/>
+                      </a:solidFill>
+                      <a:prstDash val="solid"/>
+                      <a:round/>
+                      <a:headEnd type="none" w="med" len="med"/>
+                      <a:tailEnd type="none" w="med" len="med"/>
+                    </a:lnR>
+                    <a:lnT w="38100" cap="flat" cmpd="sng" algn="ctr">
+                      <a:solidFill>
+                        <a:schemeClr val="tx1"/>
+                      </a:solidFill>
+                      <a:prstDash val="solid"/>
+                      <a:round/>
+                      <a:headEnd type="none" w="med" len="med"/>
+                      <a:tailEnd type="none" w="med" len="med"/>
+                    </a:lnT>
+                    <a:lnB w="38100" cap="flat" cmpd="sng" algn="ctr">
+                      <a:solidFill>
+                        <a:schemeClr val="tx1"/>
+                      </a:solidFill>
+                      <a:prstDash val="solid"/>
+                      <a:round/>
+                      <a:headEnd type="none" w="med" len="med"/>
+                      <a:tailEnd type="none" w="med" len="med"/>
+                    </a:lnB>
+                    <a:lnTlToBr w="12700" cmpd="sng">
+                      <a:noFill/>
+                      <a:prstDash val="solid"/>
+                    </a:lnTlToBr>
+                    <a:lnBlToTr w="12700" cmpd="sng">
+                      <a:noFill/>
+                      <a:prstDash val="solid"/>
+                    </a:lnBlToTr>
+                    <a:solidFill>
+                      <a:schemeClr val="bg1"/>
+                    </a:solidFill>
+                  </a:tcPr>
+                </a:tc>
+                <a:tc>
+                  <a:txBody>
+                    <a:bodyPr/>
+                    <a:lstStyle>
+                      <a:defPPr>
+                        <a:defRPr lang="ru-RU">
+                          <a:solidFill>
+                            <a:schemeClr val="dk1"/>
+                          </a:solidFill>
+                        </a:defRPr>
+                      </a:defPPr>
+                      <a:lvl1pPr marL="0" algn="l" defTabSz="914400" rtl="0" eaLnBrk="1" latinLnBrk="0" hangingPunct="1">
+                        <a:defRPr sz="1800" kern="1200">
+                          <a:solidFill>
+                            <a:schemeClr val="dk1"/>
+                          </a:solidFill>
+                          <a:latin typeface="+mn-lt"/>
+                          <a:ea typeface="+mn-ea"/>
+                          <a:cs typeface="+mn-cs"/>
+                        </a:defRPr>
+                      </a:lvl1pPr>
+                      <a:lvl2pPr marL="457200" algn="l" defTabSz="914400" rtl="0" eaLnBrk="1" latinLnBrk="0" hangingPunct="1">
+                        <a:defRPr sz="1800" kern="1200">
+                          <a:solidFill>
+                            <a:schemeClr val="dk1"/>
+                          </a:solidFill>
+                          <a:latin typeface="+mn-lt"/>
+                          <a:ea typeface="+mn-ea"/>
+                          <a:cs typeface="+mn-cs"/>
+                        </a:defRPr>
+                      </a:lvl2pPr>
+                      <a:lvl3pPr marL="914400" algn="l" defTabSz="914400" rtl="0" eaLnBrk="1" latinLnBrk="0" hangingPunct="1">
+                        <a:defRPr sz="1800" kern="1200">
+                          <a:solidFill>
+                            <a:schemeClr val="dk1"/>
+                          </a:solidFill>
+                          <a:latin typeface="+mn-lt"/>
+                          <a:ea typeface="+mn-ea"/>
+                          <a:cs typeface="+mn-cs"/>
+                        </a:defRPr>
+                      </a:lvl3pPr>
+                      <a:lvl4pPr marL="1371600" algn="l" defTabSz="914400" rtl="0" eaLnBrk="1" latinLnBrk="0" hangingPunct="1">
+                        <a:defRPr sz="1800" kern="1200">
+                          <a:solidFill>
+                            <a:schemeClr val="dk1"/>
+                          </a:solidFill>
+                          <a:latin typeface="+mn-lt"/>
+                          <a:ea typeface="+mn-ea"/>
+                          <a:cs typeface="+mn-cs"/>
+                        </a:defRPr>
+                      </a:lvl4pPr>
+                      <a:lvl5pPr marL="1828800" algn="l" defTabSz="914400" rtl="0" eaLnBrk="1" latinLnBrk="0" hangingPunct="1">
+                        <a:defRPr sz="1800" kern="1200">
+                          <a:solidFill>
+                            <a:schemeClr val="dk1"/>
+                          </a:solidFill>
+                          <a:latin typeface="+mn-lt"/>
+                          <a:ea typeface="+mn-ea"/>
+                          <a:cs typeface="+mn-cs"/>
+                        </a:defRPr>
+                      </a:lvl5pPr>
+                      <a:lvl6pPr marL="2286000" algn="l" defTabSz="914400" rtl="0" eaLnBrk="1" latinLnBrk="0" hangingPunct="1">
+                        <a:defRPr sz="1800" kern="1200">
+                          <a:solidFill>
+                            <a:schemeClr val="dk1"/>
+                          </a:solidFill>
+                          <a:latin typeface="+mn-lt"/>
+                          <a:ea typeface="+mn-ea"/>
+                          <a:cs typeface="+mn-cs"/>
+                        </a:defRPr>
+                      </a:lvl6pPr>
+                      <a:lvl7pPr marL="2743200" algn="l" defTabSz="914400" rtl="0" eaLnBrk="1" latinLnBrk="0" hangingPunct="1">
+                        <a:defRPr sz="1800" kern="1200">
+                          <a:solidFill>
+                            <a:schemeClr val="dk1"/>
+                          </a:solidFill>
+                          <a:latin typeface="+mn-lt"/>
+                          <a:ea typeface="+mn-ea"/>
+                          <a:cs typeface="+mn-cs"/>
+                        </a:defRPr>
+                      </a:lvl7pPr>
+                      <a:lvl8pPr marL="3200400" algn="l" defTabSz="914400" rtl="0" eaLnBrk="1" latinLnBrk="0" hangingPunct="1">
+                        <a:defRPr sz="1800" kern="1200">
+                          <a:solidFill>
+                            <a:schemeClr val="dk1"/>
+                          </a:solidFill>
+                          <a:latin typeface="+mn-lt"/>
+                          <a:ea typeface="+mn-ea"/>
+                          <a:cs typeface="+mn-cs"/>
+                        </a:defRPr>
+                      </a:lvl8pPr>
+                      <a:lvl9pPr marL="3657600" algn="l" defTabSz="914400" rtl="0" eaLnBrk="1" latinLnBrk="0" hangingPunct="1">
+                        <a:defRPr sz="1800" kern="1200">
+                          <a:solidFill>
+                            <a:schemeClr val="dk1"/>
+                          </a:solidFill>
+                          <a:latin typeface="+mn-lt"/>
+                          <a:ea typeface="+mn-ea"/>
+                          <a:cs typeface="+mn-cs"/>
+                        </a:defRPr>
+                      </a:lvl9pPr>
+                    </a:lstStyle>
+                    <a:p>
+                      <a:r>
+                        <a:rPr lang="en-US" dirty="0">
+                          <a:solidFill>
+                            <a:schemeClr val="tx1"/>
+                          </a:solidFill>
+                        </a:rPr>
+                        <a:t>40-120</a:t>
+                      </a:r>
+                      <a:endParaRPr lang="ru-RU" dirty="0">
+                        <a:solidFill>
+                          <a:schemeClr val="tx1"/>
+                        </a:solidFill>
+                      </a:endParaRPr>
+                    </a:p>
+                  </a:txBody>
+                  <a:tcPr>
+                    <a:lnL w="38100" cap="flat" cmpd="sng" algn="ctr">
+                      <a:solidFill>
+                        <a:schemeClr val="tx1"/>
+                      </a:solidFill>
+                      <a:prstDash val="solid"/>
+                      <a:round/>
+                      <a:headEnd type="none" w="med" len="med"/>
+                      <a:tailEnd type="none" w="med" len="med"/>
+                    </a:lnL>
+                    <a:lnR w="38100" cap="flat" cmpd="sng" algn="ctr">
+                      <a:solidFill>
+                        <a:schemeClr val="tx1"/>
+                      </a:solidFill>
+                      <a:prstDash val="solid"/>
+                      <a:round/>
+                      <a:headEnd type="none" w="med" len="med"/>
+                      <a:tailEnd type="none" w="med" len="med"/>
+                    </a:lnR>
+                    <a:lnT w="38100" cap="flat" cmpd="sng" algn="ctr">
+                      <a:solidFill>
+                        <a:schemeClr val="tx1"/>
+                      </a:solidFill>
+                      <a:prstDash val="solid"/>
+                      <a:round/>
+                      <a:headEnd type="none" w="med" len="med"/>
+                      <a:tailEnd type="none" w="med" len="med"/>
+                    </a:lnT>
+                    <a:lnB w="38100" cap="flat" cmpd="sng" algn="ctr">
+                      <a:solidFill>
+                        <a:schemeClr val="tx1"/>
+                      </a:solidFill>
+                      <a:prstDash val="solid"/>
+                      <a:round/>
+                      <a:headEnd type="none" w="med" len="med"/>
+                      <a:tailEnd type="none" w="med" len="med"/>
+                    </a:lnB>
+                    <a:lnTlToBr w="12700" cmpd="sng">
+                      <a:noFill/>
+                      <a:prstDash val="solid"/>
+                    </a:lnTlToBr>
+                    <a:lnBlToTr w="12700" cmpd="sng">
+                      <a:noFill/>
+                      <a:prstDash val="solid"/>
+                    </a:lnBlToTr>
+                    <a:solidFill>
+                      <a:schemeClr val="bg1"/>
+                    </a:solidFill>
+                  </a:tcPr>
+                </a:tc>
+                <a:tc>
+                  <a:txBody>
+                    <a:bodyPr/>
+                    <a:lstStyle>
+                      <a:defPPr>
+                        <a:defRPr lang="ru-RU">
+                          <a:solidFill>
+                            <a:schemeClr val="dk1"/>
+                          </a:solidFill>
+                        </a:defRPr>
+                      </a:defPPr>
+                      <a:lvl1pPr marL="0" algn="l" defTabSz="914400" rtl="0" eaLnBrk="1" latinLnBrk="0" hangingPunct="1">
+                        <a:defRPr sz="1800" kern="1200">
+                          <a:solidFill>
+                            <a:schemeClr val="dk1"/>
+                          </a:solidFill>
+                          <a:latin typeface="+mn-lt"/>
+                          <a:ea typeface="+mn-ea"/>
+                          <a:cs typeface="+mn-cs"/>
+                        </a:defRPr>
+                      </a:lvl1pPr>
+                      <a:lvl2pPr marL="457200" algn="l" defTabSz="914400" rtl="0" eaLnBrk="1" latinLnBrk="0" hangingPunct="1">
+                        <a:defRPr sz="1800" kern="1200">
+                          <a:solidFill>
+                            <a:schemeClr val="dk1"/>
+                          </a:solidFill>
+                          <a:latin typeface="+mn-lt"/>
+                          <a:ea typeface="+mn-ea"/>
+                          <a:cs typeface="+mn-cs"/>
+                        </a:defRPr>
+                      </a:lvl2pPr>
+                      <a:lvl3pPr marL="914400" algn="l" defTabSz="914400" rtl="0" eaLnBrk="1" latinLnBrk="0" hangingPunct="1">
+                        <a:defRPr sz="1800" kern="1200">
+                          <a:solidFill>
+                            <a:schemeClr val="dk1"/>
+                          </a:solidFill>
+                          <a:latin typeface="+mn-lt"/>
+                          <a:ea typeface="+mn-ea"/>
+                          <a:cs typeface="+mn-cs"/>
+                        </a:defRPr>
+                      </a:lvl3pPr>
+                      <a:lvl4pPr marL="1371600" algn="l" defTabSz="914400" rtl="0" eaLnBrk="1" latinLnBrk="0" hangingPunct="1">
+                        <a:defRPr sz="1800" kern="1200">
+                          <a:solidFill>
+                            <a:schemeClr val="dk1"/>
+                          </a:solidFill>
+                          <a:latin typeface="+mn-lt"/>
+                          <a:ea typeface="+mn-ea"/>
+                          <a:cs typeface="+mn-cs"/>
+                        </a:defRPr>
+                      </a:lvl4pPr>
+                      <a:lvl5pPr marL="1828800" algn="l" defTabSz="914400" rtl="0" eaLnBrk="1" latinLnBrk="0" hangingPunct="1">
+                        <a:defRPr sz="1800" kern="1200">
+                          <a:solidFill>
+                            <a:schemeClr val="dk1"/>
+                          </a:solidFill>
+                          <a:latin typeface="+mn-lt"/>
+                          <a:ea typeface="+mn-ea"/>
+                          <a:cs typeface="+mn-cs"/>
+                        </a:defRPr>
+                      </a:lvl5pPr>
+                      <a:lvl6pPr marL="2286000" algn="l" defTabSz="914400" rtl="0" eaLnBrk="1" latinLnBrk="0" hangingPunct="1">
+                        <a:defRPr sz="1800" kern="1200">
+                          <a:solidFill>
+                            <a:schemeClr val="dk1"/>
+                          </a:solidFill>
+                          <a:latin typeface="+mn-lt"/>
+                          <a:ea typeface="+mn-ea"/>
+                          <a:cs typeface="+mn-cs"/>
+                        </a:defRPr>
+                      </a:lvl6pPr>
+                      <a:lvl7pPr marL="2743200" algn="l" defTabSz="914400" rtl="0" eaLnBrk="1" latinLnBrk="0" hangingPunct="1">
+                        <a:defRPr sz="1800" kern="1200">
+                          <a:solidFill>
+                            <a:schemeClr val="dk1"/>
+                          </a:solidFill>
+                          <a:latin typeface="+mn-lt"/>
+                          <a:ea typeface="+mn-ea"/>
+                          <a:cs typeface="+mn-cs"/>
+                        </a:defRPr>
+                      </a:lvl7pPr>
+                      <a:lvl8pPr marL="3200400" algn="l" defTabSz="914400" rtl="0" eaLnBrk="1" latinLnBrk="0" hangingPunct="1">
+                        <a:defRPr sz="1800" kern="1200">
+                          <a:solidFill>
+                            <a:schemeClr val="dk1"/>
+                          </a:solidFill>
+                          <a:latin typeface="+mn-lt"/>
+                          <a:ea typeface="+mn-ea"/>
+                          <a:cs typeface="+mn-cs"/>
+                        </a:defRPr>
+                      </a:lvl8pPr>
+                      <a:lvl9pPr marL="3657600" algn="l" defTabSz="914400" rtl="0" eaLnBrk="1" latinLnBrk="0" hangingPunct="1">
+                        <a:defRPr sz="1800" kern="1200">
+                          <a:solidFill>
+                            <a:schemeClr val="dk1"/>
+                          </a:solidFill>
+                          <a:latin typeface="+mn-lt"/>
+                          <a:ea typeface="+mn-ea"/>
+                          <a:cs typeface="+mn-cs"/>
+                        </a:defRPr>
+                      </a:lvl9pPr>
+                    </a:lstStyle>
+                    <a:p>
+                      <a:r>
+                        <a:rPr lang="ru-RU" dirty="0">
+                          <a:solidFill>
+                            <a:schemeClr val="tx1"/>
+                          </a:solidFill>
+                        </a:rPr>
+                        <a:t>С</a:t>
+                      </a:r>
+                      <a:r>
+                        <a:rPr lang="ru-RU" baseline="30000" dirty="0">
+                          <a:solidFill>
+                            <a:schemeClr val="tx1"/>
+                          </a:solidFill>
+                        </a:rPr>
+                        <a:t>о</a:t>
+                      </a:r>
+                      <a:endParaRPr lang="ru-RU" dirty="0">
+                        <a:solidFill>
+                          <a:schemeClr val="tx1"/>
+                        </a:solidFill>
+                      </a:endParaRPr>
+                    </a:p>
+                  </a:txBody>
+                  <a:tcPr>
+                    <a:lnL w="38100" cap="flat" cmpd="sng" algn="ctr">
+                      <a:solidFill>
+                        <a:schemeClr val="tx1"/>
+                      </a:solidFill>
+                      <a:prstDash val="solid"/>
+                      <a:round/>
+                      <a:headEnd type="none" w="med" len="med"/>
+                      <a:tailEnd type="none" w="med" len="med"/>
+                    </a:lnL>
+                    <a:lnR w="38100" cap="flat" cmpd="sng" algn="ctr">
+                      <a:solidFill>
+                        <a:schemeClr val="tx1"/>
+                      </a:solidFill>
+                      <a:prstDash val="solid"/>
+                      <a:round/>
+                      <a:headEnd type="none" w="med" len="med"/>
+                      <a:tailEnd type="none" w="med" len="med"/>
+                    </a:lnR>
+                    <a:lnT w="38100" cap="flat" cmpd="sng" algn="ctr">
+                      <a:solidFill>
+                        <a:schemeClr val="tx1"/>
+                      </a:solidFill>
+                      <a:prstDash val="solid"/>
+                      <a:round/>
+                      <a:headEnd type="none" w="med" len="med"/>
+                      <a:tailEnd type="none" w="med" len="med"/>
+                    </a:lnT>
+                    <a:lnB w="38100" cap="flat" cmpd="sng" algn="ctr">
+                      <a:solidFill>
+                        <a:schemeClr val="tx1"/>
+                      </a:solidFill>
+                      <a:prstDash val="solid"/>
+                      <a:round/>
+                      <a:headEnd type="none" w="med" len="med"/>
+                      <a:tailEnd type="none" w="med" len="med"/>
+                    </a:lnB>
+                    <a:lnTlToBr w="12700" cmpd="sng">
+                      <a:noFill/>
+                      <a:prstDash val="solid"/>
+                    </a:lnTlToBr>
+                    <a:lnBlToTr w="12700" cmpd="sng">
+                      <a:noFill/>
+                      <a:prstDash val="solid"/>
+                    </a:lnBlToTr>
+                    <a:solidFill>
+                      <a:schemeClr val="bg1"/>
+                    </a:solidFill>
+                  </a:tcPr>
+                </a:tc>
+                <a:extLst>
+                  <a:ext uri="{0D108BD9-81ED-4DB2-BD59-A6C34878D82A}">
+                    <a16:rowId xmlns:a16="http://schemas.microsoft.com/office/drawing/2014/main" val="10004"/>
+                  </a:ext>
+                </a:extLst>
+              </a:tr>
+              <a:tr h="412184">
+                <a:tc vMerge="1">
+                  <a:txBody>
+                    <a:bodyPr/>
+                    <a:lstStyle/>
+                    <a:p>
+                      <a:endParaRPr lang="ru-RU"/>
+                    </a:p>
+                  </a:txBody>
+                  <a:tcPr>
+                    <a:lnL w="38100" cap="flat" cmpd="sng" algn="ctr">
+                      <a:solidFill>
+                        <a:schemeClr val="tx1"/>
+                      </a:solidFill>
+                      <a:prstDash val="solid"/>
+                      <a:round/>
+                      <a:headEnd type="none" w="med" len="med"/>
+                      <a:tailEnd type="none" w="med" len="med"/>
+                    </a:lnL>
+                    <a:lnR w="38100" cap="flat" cmpd="sng" algn="ctr">
+                      <a:solidFill>
+                        <a:schemeClr val="tx1"/>
+                      </a:solidFill>
+                      <a:prstDash val="solid"/>
+                      <a:round/>
+                      <a:headEnd type="none" w="med" len="med"/>
+                      <a:tailEnd type="none" w="med" len="med"/>
+                    </a:lnR>
+                    <a:lnT w="38100" cap="flat" cmpd="sng" algn="ctr">
+                      <a:solidFill>
+                        <a:schemeClr val="tx1"/>
+                      </a:solidFill>
+                      <a:prstDash val="solid"/>
+                      <a:round/>
+                      <a:headEnd type="none" w="med" len="med"/>
+                      <a:tailEnd type="none" w="med" len="med"/>
+                    </a:lnT>
+                    <a:lnB w="38100" cap="flat" cmpd="sng" algn="ctr">
+                      <a:solidFill>
+                        <a:schemeClr val="tx1"/>
+                      </a:solidFill>
+                      <a:prstDash val="solid"/>
+                      <a:round/>
+                      <a:headEnd type="none" w="med" len="med"/>
+                      <a:tailEnd type="none" w="med" len="med"/>
+                    </a:lnB>
+                    <a:lnTlToBr w="12700" cmpd="sng">
+                      <a:noFill/>
+                      <a:prstDash val="solid"/>
+                    </a:lnTlToBr>
+                    <a:lnBlToTr w="12700" cmpd="sng">
+                      <a:noFill/>
+                      <a:prstDash val="solid"/>
+                    </a:lnBlToTr>
+                    <a:solidFill>
+                      <a:schemeClr val="bg1"/>
+                    </a:solidFill>
+                  </a:tcPr>
+                </a:tc>
+                <a:tc>
+                  <a:txBody>
+                    <a:bodyPr/>
+                    <a:lstStyle>
+                      <a:defPPr>
+                        <a:defRPr lang="ru-RU">
+                          <a:solidFill>
+                            <a:schemeClr val="dk1"/>
+                          </a:solidFill>
+                        </a:defRPr>
+                      </a:defPPr>
+                      <a:lvl1pPr marL="0" algn="l" defTabSz="914400" rtl="0" eaLnBrk="1" latinLnBrk="0" hangingPunct="1">
+                        <a:defRPr sz="1800" kern="1200">
+                          <a:solidFill>
+                            <a:schemeClr val="dk1"/>
+                          </a:solidFill>
+                          <a:latin typeface="+mn-lt"/>
+                          <a:ea typeface="+mn-ea"/>
+                          <a:cs typeface="+mn-cs"/>
+                        </a:defRPr>
+                      </a:lvl1pPr>
+                      <a:lvl2pPr marL="457200" algn="l" defTabSz="914400" rtl="0" eaLnBrk="1" latinLnBrk="0" hangingPunct="1">
+                        <a:defRPr sz="1800" kern="1200">
+                          <a:solidFill>
+                            <a:schemeClr val="dk1"/>
+                          </a:solidFill>
+                          <a:latin typeface="+mn-lt"/>
+                          <a:ea typeface="+mn-ea"/>
+                          <a:cs typeface="+mn-cs"/>
+                        </a:defRPr>
+                      </a:lvl2pPr>
+                      <a:lvl3pPr marL="914400" algn="l" defTabSz="914400" rtl="0" eaLnBrk="1" latinLnBrk="0" hangingPunct="1">
+                        <a:defRPr sz="1800" kern="1200">
+                          <a:solidFill>
+                            <a:schemeClr val="dk1"/>
+                          </a:solidFill>
+                          <a:latin typeface="+mn-lt"/>
+                          <a:ea typeface="+mn-ea"/>
+                          <a:cs typeface="+mn-cs"/>
+                        </a:defRPr>
+                      </a:lvl3pPr>
+                      <a:lvl4pPr marL="1371600" algn="l" defTabSz="914400" rtl="0" eaLnBrk="1" latinLnBrk="0" hangingPunct="1">
+                        <a:defRPr sz="1800" kern="1200">
+                          <a:solidFill>
+                            <a:schemeClr val="dk1"/>
+                          </a:solidFill>
+                          <a:latin typeface="+mn-lt"/>
+                          <a:ea typeface="+mn-ea"/>
+                          <a:cs typeface="+mn-cs"/>
+                        </a:defRPr>
+                      </a:lvl4pPr>
+                      <a:lvl5pPr marL="1828800" algn="l" defTabSz="914400" rtl="0" eaLnBrk="1" latinLnBrk="0" hangingPunct="1">
+                        <a:defRPr sz="1800" kern="1200">
+                          <a:solidFill>
+                            <a:schemeClr val="dk1"/>
+                          </a:solidFill>
+                          <a:latin typeface="+mn-lt"/>
+                          <a:ea typeface="+mn-ea"/>
+                          <a:cs typeface="+mn-cs"/>
+                        </a:defRPr>
+                      </a:lvl5pPr>
+                      <a:lvl6pPr marL="2286000" algn="l" defTabSz="914400" rtl="0" eaLnBrk="1" latinLnBrk="0" hangingPunct="1">
+                        <a:defRPr sz="1800" kern="1200">
+                          <a:solidFill>
+                            <a:schemeClr val="dk1"/>
+                          </a:solidFill>
+                          <a:latin typeface="+mn-lt"/>
+                          <a:ea typeface="+mn-ea"/>
+                          <a:cs typeface="+mn-cs"/>
+                        </a:defRPr>
+                      </a:lvl6pPr>
+                      <a:lvl7pPr marL="2743200" algn="l" defTabSz="914400" rtl="0" eaLnBrk="1" latinLnBrk="0" hangingPunct="1">
+                        <a:defRPr sz="1800" kern="1200">
+                          <a:solidFill>
+                            <a:schemeClr val="dk1"/>
+                          </a:solidFill>
+                          <a:latin typeface="+mn-lt"/>
+                          <a:ea typeface="+mn-ea"/>
+                          <a:cs typeface="+mn-cs"/>
+                        </a:defRPr>
+                      </a:lvl7pPr>
+                      <a:lvl8pPr marL="3200400" algn="l" defTabSz="914400" rtl="0" eaLnBrk="1" latinLnBrk="0" hangingPunct="1">
+                        <a:defRPr sz="1800" kern="1200">
+                          <a:solidFill>
+                            <a:schemeClr val="dk1"/>
+                          </a:solidFill>
+                          <a:latin typeface="+mn-lt"/>
+                          <a:ea typeface="+mn-ea"/>
+                          <a:cs typeface="+mn-cs"/>
+                        </a:defRPr>
+                      </a:lvl8pPr>
+                      <a:lvl9pPr marL="3657600" algn="l" defTabSz="914400" rtl="0" eaLnBrk="1" latinLnBrk="0" hangingPunct="1">
+                        <a:defRPr sz="1800" kern="1200">
+                          <a:solidFill>
+                            <a:schemeClr val="dk1"/>
+                          </a:solidFill>
+                          <a:latin typeface="+mn-lt"/>
+                          <a:ea typeface="+mn-ea"/>
+                          <a:cs typeface="+mn-cs"/>
+                        </a:defRPr>
+                      </a:lvl9pPr>
+                    </a:lstStyle>
+                    <a:p>
+                      <a:r>
+                        <a:rPr lang="ru-RU" dirty="0">
+                          <a:solidFill>
+                            <a:schemeClr val="tx1"/>
+                          </a:solidFill>
+                        </a:rPr>
+                        <a:t>Относительная влажность</a:t>
+                      </a:r>
+                    </a:p>
+                  </a:txBody>
+                  <a:tcPr>
+                    <a:lnL w="38100" cap="flat" cmpd="sng" algn="ctr">
+                      <a:solidFill>
+                        <a:schemeClr val="tx1"/>
+                      </a:solidFill>
+                      <a:prstDash val="solid"/>
+                      <a:round/>
+                      <a:headEnd type="none" w="med" len="med"/>
+                      <a:tailEnd type="none" w="med" len="med"/>
+                    </a:lnL>
+                    <a:lnR w="38100" cap="flat" cmpd="sng" algn="ctr">
+                      <a:solidFill>
+                        <a:schemeClr val="tx1"/>
+                      </a:solidFill>
+                      <a:prstDash val="solid"/>
+                      <a:round/>
+                      <a:headEnd type="none" w="med" len="med"/>
+                      <a:tailEnd type="none" w="med" len="med"/>
+                    </a:lnR>
+                    <a:lnT w="38100" cap="flat" cmpd="sng" algn="ctr">
+                      <a:solidFill>
+                        <a:schemeClr val="tx1"/>
+                      </a:solidFill>
+                      <a:prstDash val="solid"/>
+                      <a:round/>
+                      <a:headEnd type="none" w="med" len="med"/>
+                      <a:tailEnd type="none" w="med" len="med"/>
+                    </a:lnT>
+                    <a:lnB w="38100" cap="flat" cmpd="sng" algn="ctr">
+                      <a:solidFill>
+                        <a:schemeClr val="tx1"/>
+                      </a:solidFill>
+                      <a:prstDash val="solid"/>
+                      <a:round/>
+                      <a:headEnd type="none" w="med" len="med"/>
+                      <a:tailEnd type="none" w="med" len="med"/>
+                    </a:lnB>
+                    <a:lnTlToBr w="12700" cmpd="sng">
+                      <a:noFill/>
+                      <a:prstDash val="solid"/>
+                    </a:lnTlToBr>
+                    <a:lnBlToTr w="12700" cmpd="sng">
+                      <a:noFill/>
+                      <a:prstDash val="solid"/>
+                    </a:lnBlToTr>
+                    <a:solidFill>
+                      <a:schemeClr val="bg1"/>
+                    </a:solidFill>
+                  </a:tcPr>
+                </a:tc>
+                <a:tc>
+                  <a:txBody>
+                    <a:bodyPr/>
+                    <a:lstStyle>
+                      <a:defPPr>
+                        <a:defRPr lang="ru-RU">
+                          <a:solidFill>
+                            <a:schemeClr val="dk1"/>
+                          </a:solidFill>
+                        </a:defRPr>
+                      </a:defPPr>
+                      <a:lvl1pPr marL="0" algn="l" defTabSz="914400" rtl="0" eaLnBrk="1" latinLnBrk="0" hangingPunct="1">
+                        <a:defRPr sz="1800" kern="1200">
+                          <a:solidFill>
+                            <a:schemeClr val="dk1"/>
+                          </a:solidFill>
+                          <a:latin typeface="+mn-lt"/>
+                          <a:ea typeface="+mn-ea"/>
+                          <a:cs typeface="+mn-cs"/>
+                        </a:defRPr>
+                      </a:lvl1pPr>
+                      <a:lvl2pPr marL="457200" algn="l" defTabSz="914400" rtl="0" eaLnBrk="1" latinLnBrk="0" hangingPunct="1">
+                        <a:defRPr sz="1800" kern="1200">
+                          <a:solidFill>
+                            <a:schemeClr val="dk1"/>
+                          </a:solidFill>
+                          <a:latin typeface="+mn-lt"/>
+                          <a:ea typeface="+mn-ea"/>
+                          <a:cs typeface="+mn-cs"/>
+                        </a:defRPr>
+                      </a:lvl2pPr>
+                      <a:lvl3pPr marL="914400" algn="l" defTabSz="914400" rtl="0" eaLnBrk="1" latinLnBrk="0" hangingPunct="1">
+                        <a:defRPr sz="1800" kern="1200">
+                          <a:solidFill>
+                            <a:schemeClr val="dk1"/>
+                          </a:solidFill>
+                          <a:latin typeface="+mn-lt"/>
+                          <a:ea typeface="+mn-ea"/>
+                          <a:cs typeface="+mn-cs"/>
+                        </a:defRPr>
+                      </a:lvl3pPr>
+                      <a:lvl4pPr marL="1371600" algn="l" defTabSz="914400" rtl="0" eaLnBrk="1" latinLnBrk="0" hangingPunct="1">
+                        <a:defRPr sz="1800" kern="1200">
+                          <a:solidFill>
+                            <a:schemeClr val="dk1"/>
+                          </a:solidFill>
+                          <a:latin typeface="+mn-lt"/>
+                          <a:ea typeface="+mn-ea"/>
+                          <a:cs typeface="+mn-cs"/>
+                        </a:defRPr>
+                      </a:lvl4pPr>
+                      <a:lvl5pPr marL="1828800" algn="l" defTabSz="914400" rtl="0" eaLnBrk="1" latinLnBrk="0" hangingPunct="1">
+                        <a:defRPr sz="1800" kern="1200">
+                          <a:solidFill>
+                            <a:schemeClr val="dk1"/>
+                          </a:solidFill>
+                          <a:latin typeface="+mn-lt"/>
+                          <a:ea typeface="+mn-ea"/>
+                          <a:cs typeface="+mn-cs"/>
+                        </a:defRPr>
+                      </a:lvl5pPr>
+                      <a:lvl6pPr marL="2286000" algn="l" defTabSz="914400" rtl="0" eaLnBrk="1" latinLnBrk="0" hangingPunct="1">
+                        <a:defRPr sz="1800" kern="1200">
+                          <a:solidFill>
+                            <a:schemeClr val="dk1"/>
+                          </a:solidFill>
+                          <a:latin typeface="+mn-lt"/>
+                          <a:ea typeface="+mn-ea"/>
+                          <a:cs typeface="+mn-cs"/>
+                        </a:defRPr>
+                      </a:lvl6pPr>
+                      <a:lvl7pPr marL="2743200" algn="l" defTabSz="914400" rtl="0" eaLnBrk="1" latinLnBrk="0" hangingPunct="1">
+                        <a:defRPr sz="1800" kern="1200">
+                          <a:solidFill>
+                            <a:schemeClr val="dk1"/>
+                          </a:solidFill>
+                          <a:latin typeface="+mn-lt"/>
+                          <a:ea typeface="+mn-ea"/>
+                          <a:cs typeface="+mn-cs"/>
+                        </a:defRPr>
+                      </a:lvl7pPr>
+                      <a:lvl8pPr marL="3200400" algn="l" defTabSz="914400" rtl="0" eaLnBrk="1" latinLnBrk="0" hangingPunct="1">
+                        <a:defRPr sz="1800" kern="1200">
+                          <a:solidFill>
+                            <a:schemeClr val="dk1"/>
+                          </a:solidFill>
+                          <a:latin typeface="+mn-lt"/>
+                          <a:ea typeface="+mn-ea"/>
+                          <a:cs typeface="+mn-cs"/>
+                        </a:defRPr>
+                      </a:lvl8pPr>
+                      <a:lvl9pPr marL="3657600" algn="l" defTabSz="914400" rtl="0" eaLnBrk="1" latinLnBrk="0" hangingPunct="1">
+                        <a:defRPr sz="1800" kern="1200">
+                          <a:solidFill>
+                            <a:schemeClr val="dk1"/>
+                          </a:solidFill>
+                          <a:latin typeface="+mn-lt"/>
+                          <a:ea typeface="+mn-ea"/>
+                          <a:cs typeface="+mn-cs"/>
+                        </a:defRPr>
+                      </a:lvl9pPr>
+                    </a:lstStyle>
+                    <a:p>
+                      <a:r>
+                        <a:rPr lang="en-US" dirty="0">
+                          <a:solidFill>
+                            <a:schemeClr val="tx1"/>
+                          </a:solidFill>
+                        </a:rPr>
+                        <a:t>0-100</a:t>
+                      </a:r>
+                      <a:endParaRPr lang="ru-RU" dirty="0">
+                        <a:solidFill>
+                          <a:schemeClr val="tx1"/>
+                        </a:solidFill>
+                      </a:endParaRPr>
+                    </a:p>
+                  </a:txBody>
+                  <a:tcPr>
+                    <a:lnL w="38100" cap="flat" cmpd="sng" algn="ctr">
+                      <a:solidFill>
+                        <a:schemeClr val="tx1"/>
+                      </a:solidFill>
+                      <a:prstDash val="solid"/>
+                      <a:round/>
+                      <a:headEnd type="none" w="med" len="med"/>
+                      <a:tailEnd type="none" w="med" len="med"/>
+                    </a:lnL>
+                    <a:lnR w="38100" cap="flat" cmpd="sng" algn="ctr">
+                      <a:solidFill>
+                        <a:schemeClr val="tx1"/>
+                      </a:solidFill>
+                      <a:prstDash val="solid"/>
+                      <a:round/>
+                      <a:headEnd type="none" w="med" len="med"/>
+                      <a:tailEnd type="none" w="med" len="med"/>
+                    </a:lnR>
+                    <a:lnT w="38100" cap="flat" cmpd="sng" algn="ctr">
+                      <a:solidFill>
+                        <a:schemeClr val="tx1"/>
+                      </a:solidFill>
+                      <a:prstDash val="solid"/>
+                      <a:round/>
+                      <a:headEnd type="none" w="med" len="med"/>
+                      <a:tailEnd type="none" w="med" len="med"/>
+                    </a:lnT>
+                    <a:lnB w="38100" cap="flat" cmpd="sng" algn="ctr">
+                      <a:solidFill>
+                        <a:schemeClr val="tx1"/>
+                      </a:solidFill>
+                      <a:prstDash val="solid"/>
+                      <a:round/>
+                      <a:headEnd type="none" w="med" len="med"/>
+                      <a:tailEnd type="none" w="med" len="med"/>
+                    </a:lnB>
+                    <a:lnTlToBr w="12700" cmpd="sng">
+                      <a:noFill/>
+                      <a:prstDash val="solid"/>
+                    </a:lnTlToBr>
+                    <a:lnBlToTr w="12700" cmpd="sng">
+                      <a:noFill/>
+                      <a:prstDash val="solid"/>
+                    </a:lnBlToTr>
+                    <a:solidFill>
+                      <a:schemeClr val="bg1"/>
+                    </a:solidFill>
+                  </a:tcPr>
+                </a:tc>
+                <a:tc>
+                  <a:txBody>
+                    <a:bodyPr/>
+                    <a:lstStyle>
+                      <a:defPPr>
+                        <a:defRPr lang="ru-RU">
+                          <a:solidFill>
+                            <a:schemeClr val="dk1"/>
+                          </a:solidFill>
+                        </a:defRPr>
+                      </a:defPPr>
+                      <a:lvl1pPr marL="0" algn="l" defTabSz="914400" rtl="0" eaLnBrk="1" latinLnBrk="0" hangingPunct="1">
+                        <a:defRPr sz="1800" kern="1200">
+                          <a:solidFill>
+                            <a:schemeClr val="dk1"/>
+                          </a:solidFill>
+                          <a:latin typeface="+mn-lt"/>
+                          <a:ea typeface="+mn-ea"/>
+                          <a:cs typeface="+mn-cs"/>
+                        </a:defRPr>
+                      </a:lvl1pPr>
+                      <a:lvl2pPr marL="457200" algn="l" defTabSz="914400" rtl="0" eaLnBrk="1" latinLnBrk="0" hangingPunct="1">
+                        <a:defRPr sz="1800" kern="1200">
+                          <a:solidFill>
+                            <a:schemeClr val="dk1"/>
+                          </a:solidFill>
+                          <a:latin typeface="+mn-lt"/>
+                          <a:ea typeface="+mn-ea"/>
+                          <a:cs typeface="+mn-cs"/>
+                        </a:defRPr>
+                      </a:lvl2pPr>
+                      <a:lvl3pPr marL="914400" algn="l" defTabSz="914400" rtl="0" eaLnBrk="1" latinLnBrk="0" hangingPunct="1">
+                        <a:defRPr sz="1800" kern="1200">
+                          <a:solidFill>
+                            <a:schemeClr val="dk1"/>
+                          </a:solidFill>
+                          <a:latin typeface="+mn-lt"/>
+                          <a:ea typeface="+mn-ea"/>
+                          <a:cs typeface="+mn-cs"/>
+                        </a:defRPr>
+                      </a:lvl3pPr>
+                      <a:lvl4pPr marL="1371600" algn="l" defTabSz="914400" rtl="0" eaLnBrk="1" latinLnBrk="0" hangingPunct="1">
+                        <a:defRPr sz="1800" kern="1200">
+                          <a:solidFill>
+                            <a:schemeClr val="dk1"/>
+                          </a:solidFill>
+                          <a:latin typeface="+mn-lt"/>
+                          <a:ea typeface="+mn-ea"/>
+                          <a:cs typeface="+mn-cs"/>
+                        </a:defRPr>
+                      </a:lvl4pPr>
+                      <a:lvl5pPr marL="1828800" algn="l" defTabSz="914400" rtl="0" eaLnBrk="1" latinLnBrk="0" hangingPunct="1">
+                        <a:defRPr sz="1800" kern="1200">
+                          <a:solidFill>
+                            <a:schemeClr val="dk1"/>
+                          </a:solidFill>
+                          <a:latin typeface="+mn-lt"/>
+                          <a:ea typeface="+mn-ea"/>
+                          <a:cs typeface="+mn-cs"/>
+                        </a:defRPr>
+                      </a:lvl5pPr>
+                      <a:lvl6pPr marL="2286000" algn="l" defTabSz="914400" rtl="0" eaLnBrk="1" latinLnBrk="0" hangingPunct="1">
+                        <a:defRPr sz="1800" kern="1200">
+                          <a:solidFill>
+                            <a:schemeClr val="dk1"/>
+                          </a:solidFill>
+                          <a:latin typeface="+mn-lt"/>
+                          <a:ea typeface="+mn-ea"/>
+                          <a:cs typeface="+mn-cs"/>
+                        </a:defRPr>
+                      </a:lvl6pPr>
+                      <a:lvl7pPr marL="2743200" algn="l" defTabSz="914400" rtl="0" eaLnBrk="1" latinLnBrk="0" hangingPunct="1">
+                        <a:defRPr sz="1800" kern="1200">
+                          <a:solidFill>
+                            <a:schemeClr val="dk1"/>
+                          </a:solidFill>
+                          <a:latin typeface="+mn-lt"/>
+                          <a:ea typeface="+mn-ea"/>
+                          <a:cs typeface="+mn-cs"/>
+                        </a:defRPr>
+                      </a:lvl7pPr>
+                      <a:lvl8pPr marL="3200400" algn="l" defTabSz="914400" rtl="0" eaLnBrk="1" latinLnBrk="0" hangingPunct="1">
+                        <a:defRPr sz="1800" kern="1200">
+                          <a:solidFill>
+                            <a:schemeClr val="dk1"/>
+                          </a:solidFill>
+                          <a:latin typeface="+mn-lt"/>
+                          <a:ea typeface="+mn-ea"/>
+                          <a:cs typeface="+mn-cs"/>
+                        </a:defRPr>
+                      </a:lvl8pPr>
+                      <a:lvl9pPr marL="3657600" algn="l" defTabSz="914400" rtl="0" eaLnBrk="1" latinLnBrk="0" hangingPunct="1">
+                        <a:defRPr sz="1800" kern="1200">
+                          <a:solidFill>
+                            <a:schemeClr val="dk1"/>
+                          </a:solidFill>
+                          <a:latin typeface="+mn-lt"/>
+                          <a:ea typeface="+mn-ea"/>
+                          <a:cs typeface="+mn-cs"/>
+                        </a:defRPr>
+                      </a:lvl9pPr>
+                    </a:lstStyle>
+                    <a:p>
+                      <a:r>
+                        <a:rPr lang="en-US" dirty="0">
+                          <a:solidFill>
+                            <a:schemeClr val="tx1"/>
+                          </a:solidFill>
+                        </a:rPr>
+                        <a:t>%</a:t>
+                      </a:r>
+                      <a:endParaRPr lang="ru-RU" dirty="0">
+                        <a:solidFill>
+                          <a:schemeClr val="tx1"/>
+                        </a:solidFill>
+                      </a:endParaRPr>
+                    </a:p>
+                  </a:txBody>
+                  <a:tcPr>
+                    <a:lnL w="38100" cap="flat" cmpd="sng" algn="ctr">
+                      <a:solidFill>
+                        <a:schemeClr val="tx1"/>
+                      </a:solidFill>
+                      <a:prstDash val="solid"/>
+                      <a:round/>
+                      <a:headEnd type="none" w="med" len="med"/>
+                      <a:tailEnd type="none" w="med" len="med"/>
+                    </a:lnL>
+                    <a:lnR w="38100" cap="flat" cmpd="sng" algn="ctr">
+                      <a:solidFill>
+                        <a:schemeClr val="tx1"/>
+                      </a:solidFill>
+                      <a:prstDash val="solid"/>
+                      <a:round/>
+                      <a:headEnd type="none" w="med" len="med"/>
+                      <a:tailEnd type="none" w="med" len="med"/>
+                    </a:lnR>
+                    <a:lnT w="38100" cap="flat" cmpd="sng" algn="ctr">
+                      <a:solidFill>
+                        <a:schemeClr val="tx1"/>
+                      </a:solidFill>
+                      <a:prstDash val="solid"/>
+                      <a:round/>
+                      <a:headEnd type="none" w="med" len="med"/>
+                      <a:tailEnd type="none" w="med" len="med"/>
+                    </a:lnT>
+                    <a:lnB w="38100" cap="flat" cmpd="sng" algn="ctr">
+                      <a:solidFill>
+                        <a:schemeClr val="tx1"/>
+                      </a:solidFill>
+                      <a:prstDash val="solid"/>
+                      <a:round/>
+                      <a:headEnd type="none" w="med" len="med"/>
+                      <a:tailEnd type="none" w="med" len="med"/>
+                    </a:lnB>
+                    <a:lnTlToBr w="12700" cmpd="sng">
+                      <a:noFill/>
+                      <a:prstDash val="solid"/>
+                    </a:lnTlToBr>
+                    <a:lnBlToTr w="12700" cmpd="sng">
+                      <a:noFill/>
+                      <a:prstDash val="solid"/>
+                    </a:lnBlToTr>
+                    <a:solidFill>
+                      <a:schemeClr val="bg1"/>
+                    </a:solidFill>
+                  </a:tcPr>
+                </a:tc>
+                <a:extLst>
+                  <a:ext uri="{0D108BD9-81ED-4DB2-BD59-A6C34878D82A}">
+                    <a16:rowId xmlns:a16="http://schemas.microsoft.com/office/drawing/2014/main" val="10005"/>
+                  </a:ext>
+                </a:extLst>
+              </a:tr>
+              <a:tr h="711439">
+                <a:tc>
+                  <a:txBody>
+                    <a:bodyPr/>
+                    <a:lstStyle>
+                      <a:defPPr>
+                        <a:defRPr lang="ru-RU">
+                          <a:solidFill>
+                            <a:schemeClr val="dk1"/>
+                          </a:solidFill>
+                        </a:defRPr>
+                      </a:defPPr>
+                      <a:lvl1pPr marL="0" algn="l" defTabSz="914400" rtl="0" eaLnBrk="1" latinLnBrk="0" hangingPunct="1">
+                        <a:defRPr sz="1800" kern="1200">
+                          <a:solidFill>
+                            <a:schemeClr val="dk1"/>
+                          </a:solidFill>
+                          <a:latin typeface="+mn-lt"/>
+                          <a:ea typeface="+mn-ea"/>
+                          <a:cs typeface="+mn-cs"/>
+                        </a:defRPr>
+                      </a:lvl1pPr>
+                      <a:lvl2pPr marL="457200" algn="l" defTabSz="914400" rtl="0" eaLnBrk="1" latinLnBrk="0" hangingPunct="1">
+                        <a:defRPr sz="1800" kern="1200">
+                          <a:solidFill>
+                            <a:schemeClr val="dk1"/>
+                          </a:solidFill>
+                          <a:latin typeface="+mn-lt"/>
+                          <a:ea typeface="+mn-ea"/>
+                          <a:cs typeface="+mn-cs"/>
+                        </a:defRPr>
+                      </a:lvl2pPr>
+                      <a:lvl3pPr marL="914400" algn="l" defTabSz="914400" rtl="0" eaLnBrk="1" latinLnBrk="0" hangingPunct="1">
+                        <a:defRPr sz="1800" kern="1200">
+                          <a:solidFill>
+                            <a:schemeClr val="dk1"/>
+                          </a:solidFill>
+                          <a:latin typeface="+mn-lt"/>
+                          <a:ea typeface="+mn-ea"/>
+                          <a:cs typeface="+mn-cs"/>
+                        </a:defRPr>
+                      </a:lvl3pPr>
+                      <a:lvl4pPr marL="1371600" algn="l" defTabSz="914400" rtl="0" eaLnBrk="1" latinLnBrk="0" hangingPunct="1">
+                        <a:defRPr sz="1800" kern="1200">
+                          <a:solidFill>
+                            <a:schemeClr val="dk1"/>
+                          </a:solidFill>
+                          <a:latin typeface="+mn-lt"/>
+                          <a:ea typeface="+mn-ea"/>
+                          <a:cs typeface="+mn-cs"/>
+                        </a:defRPr>
+                      </a:lvl4pPr>
+                      <a:lvl5pPr marL="1828800" algn="l" defTabSz="914400" rtl="0" eaLnBrk="1" latinLnBrk="0" hangingPunct="1">
+                        <a:defRPr sz="1800" kern="1200">
+                          <a:solidFill>
+                            <a:schemeClr val="dk1"/>
+                          </a:solidFill>
+                          <a:latin typeface="+mn-lt"/>
+                          <a:ea typeface="+mn-ea"/>
+                          <a:cs typeface="+mn-cs"/>
+                        </a:defRPr>
+                      </a:lvl5pPr>
+                      <a:lvl6pPr marL="2286000" algn="l" defTabSz="914400" rtl="0" eaLnBrk="1" latinLnBrk="0" hangingPunct="1">
+                        <a:defRPr sz="1800" kern="1200">
+                          <a:solidFill>
+                            <a:schemeClr val="dk1"/>
+                          </a:solidFill>
+                          <a:latin typeface="+mn-lt"/>
+                          <a:ea typeface="+mn-ea"/>
+                          <a:cs typeface="+mn-cs"/>
+                        </a:defRPr>
+                      </a:lvl6pPr>
+                      <a:lvl7pPr marL="2743200" algn="l" defTabSz="914400" rtl="0" eaLnBrk="1" latinLnBrk="0" hangingPunct="1">
+                        <a:defRPr sz="1800" kern="1200">
+                          <a:solidFill>
+                            <a:schemeClr val="dk1"/>
+                          </a:solidFill>
+                          <a:latin typeface="+mn-lt"/>
+                          <a:ea typeface="+mn-ea"/>
+                          <a:cs typeface="+mn-cs"/>
+                        </a:defRPr>
+                      </a:lvl7pPr>
+                      <a:lvl8pPr marL="3200400" algn="l" defTabSz="914400" rtl="0" eaLnBrk="1" latinLnBrk="0" hangingPunct="1">
+                        <a:defRPr sz="1800" kern="1200">
+                          <a:solidFill>
+                            <a:schemeClr val="dk1"/>
+                          </a:solidFill>
+                          <a:latin typeface="+mn-lt"/>
+                          <a:ea typeface="+mn-ea"/>
+                          <a:cs typeface="+mn-cs"/>
+                        </a:defRPr>
+                      </a:lvl8pPr>
+                      <a:lvl9pPr marL="3657600" algn="l" defTabSz="914400" rtl="0" eaLnBrk="1" latinLnBrk="0" hangingPunct="1">
+                        <a:defRPr sz="1800" kern="1200">
+                          <a:solidFill>
+                            <a:schemeClr val="dk1"/>
+                          </a:solidFill>
+                          <a:latin typeface="+mn-lt"/>
+                          <a:ea typeface="+mn-ea"/>
+                          <a:cs typeface="+mn-cs"/>
+                        </a:defRPr>
+                      </a:lvl9pPr>
+                    </a:lstStyle>
+                    <a:p>
+                      <a:r>
+                        <a:rPr lang="en-US" dirty="0">
+                          <a:solidFill>
+                            <a:schemeClr val="tx1"/>
+                          </a:solidFill>
+                        </a:rPr>
+                        <a:t>MQ-135</a:t>
+                      </a:r>
+                      <a:endParaRPr lang="ru-RU" dirty="0">
+                        <a:solidFill>
+                          <a:schemeClr val="tx1"/>
+                        </a:solidFill>
+                      </a:endParaRPr>
+                    </a:p>
+                  </a:txBody>
+                  <a:tcPr>
+                    <a:lnL w="38100" cap="flat" cmpd="sng" algn="ctr">
+                      <a:solidFill>
+                        <a:schemeClr val="tx1"/>
+                      </a:solidFill>
+                      <a:prstDash val="solid"/>
+                      <a:round/>
+                      <a:headEnd type="none" w="med" len="med"/>
+                      <a:tailEnd type="none" w="med" len="med"/>
+                    </a:lnL>
+                    <a:lnR w="38100" cap="flat" cmpd="sng" algn="ctr">
+                      <a:solidFill>
+                        <a:schemeClr val="tx1"/>
+                      </a:solidFill>
+                      <a:prstDash val="solid"/>
+                      <a:round/>
+                      <a:headEnd type="none" w="med" len="med"/>
+                      <a:tailEnd type="none" w="med" len="med"/>
+                    </a:lnR>
+                    <a:lnT w="38100" cap="flat" cmpd="sng" algn="ctr">
+                      <a:solidFill>
+                        <a:schemeClr val="tx1"/>
+                      </a:solidFill>
+                      <a:prstDash val="solid"/>
+                      <a:round/>
+                      <a:headEnd type="none" w="med" len="med"/>
+                      <a:tailEnd type="none" w="med" len="med"/>
+                    </a:lnT>
+                    <a:lnB w="38100" cap="flat" cmpd="sng" algn="ctr">
+                      <a:solidFill>
+                        <a:schemeClr val="tx1"/>
+                      </a:solidFill>
+                      <a:prstDash val="solid"/>
+                      <a:round/>
+                      <a:headEnd type="none" w="med" len="med"/>
+                      <a:tailEnd type="none" w="med" len="med"/>
+                    </a:lnB>
+                    <a:lnTlToBr w="12700" cmpd="sng">
+                      <a:noFill/>
+                      <a:prstDash val="solid"/>
+                    </a:lnTlToBr>
+                    <a:lnBlToTr w="12700" cmpd="sng">
+                      <a:noFill/>
+                      <a:prstDash val="solid"/>
+                    </a:lnBlToTr>
+                    <a:solidFill>
+                      <a:schemeClr val="bg1"/>
+                    </a:solidFill>
+                  </a:tcPr>
+                </a:tc>
+                <a:tc>
+                  <a:txBody>
+                    <a:bodyPr/>
+                    <a:lstStyle>
+                      <a:defPPr>
+                        <a:defRPr lang="ru-RU">
+                          <a:solidFill>
+                            <a:schemeClr val="dk1"/>
+                          </a:solidFill>
+                        </a:defRPr>
+                      </a:defPPr>
+                      <a:lvl1pPr marL="0" algn="l" defTabSz="914400" rtl="0" eaLnBrk="1" latinLnBrk="0" hangingPunct="1">
+                        <a:defRPr sz="1800" kern="1200">
+                          <a:solidFill>
+                            <a:schemeClr val="dk1"/>
+                          </a:solidFill>
+                          <a:latin typeface="+mn-lt"/>
+                          <a:ea typeface="+mn-ea"/>
+                          <a:cs typeface="+mn-cs"/>
+                        </a:defRPr>
+                      </a:lvl1pPr>
+                      <a:lvl2pPr marL="457200" algn="l" defTabSz="914400" rtl="0" eaLnBrk="1" latinLnBrk="0" hangingPunct="1">
+                        <a:defRPr sz="1800" kern="1200">
+                          <a:solidFill>
+                            <a:schemeClr val="dk1"/>
+                          </a:solidFill>
+                          <a:latin typeface="+mn-lt"/>
+                          <a:ea typeface="+mn-ea"/>
+                          <a:cs typeface="+mn-cs"/>
+                        </a:defRPr>
+                      </a:lvl2pPr>
+                      <a:lvl3pPr marL="914400" algn="l" defTabSz="914400" rtl="0" eaLnBrk="1" latinLnBrk="0" hangingPunct="1">
+                        <a:defRPr sz="1800" kern="1200">
+                          <a:solidFill>
+                            <a:schemeClr val="dk1"/>
+                          </a:solidFill>
+                          <a:latin typeface="+mn-lt"/>
+                          <a:ea typeface="+mn-ea"/>
+                          <a:cs typeface="+mn-cs"/>
+                        </a:defRPr>
+                      </a:lvl3pPr>
+                      <a:lvl4pPr marL="1371600" algn="l" defTabSz="914400" rtl="0" eaLnBrk="1" latinLnBrk="0" hangingPunct="1">
+                        <a:defRPr sz="1800" kern="1200">
+                          <a:solidFill>
+                            <a:schemeClr val="dk1"/>
+                          </a:solidFill>
+                          <a:latin typeface="+mn-lt"/>
+                          <a:ea typeface="+mn-ea"/>
+                          <a:cs typeface="+mn-cs"/>
+                        </a:defRPr>
+                      </a:lvl4pPr>
+                      <a:lvl5pPr marL="1828800" algn="l" defTabSz="914400" rtl="0" eaLnBrk="1" latinLnBrk="0" hangingPunct="1">
+                        <a:defRPr sz="1800" kern="1200">
+                          <a:solidFill>
+                            <a:schemeClr val="dk1"/>
+                          </a:solidFill>
+                          <a:latin typeface="+mn-lt"/>
+                          <a:ea typeface="+mn-ea"/>
+                          <a:cs typeface="+mn-cs"/>
+                        </a:defRPr>
+                      </a:lvl5pPr>
+                      <a:lvl6pPr marL="2286000" algn="l" defTabSz="914400" rtl="0" eaLnBrk="1" latinLnBrk="0" hangingPunct="1">
+                        <a:defRPr sz="1800" kern="1200">
+                          <a:solidFill>
+                            <a:schemeClr val="dk1"/>
+                          </a:solidFill>
+                          <a:latin typeface="+mn-lt"/>
+                          <a:ea typeface="+mn-ea"/>
+                          <a:cs typeface="+mn-cs"/>
+                        </a:defRPr>
+                      </a:lvl6pPr>
+                      <a:lvl7pPr marL="2743200" algn="l" defTabSz="914400" rtl="0" eaLnBrk="1" latinLnBrk="0" hangingPunct="1">
+                        <a:defRPr sz="1800" kern="1200">
+                          <a:solidFill>
+                            <a:schemeClr val="dk1"/>
+                          </a:solidFill>
+                          <a:latin typeface="+mn-lt"/>
+                          <a:ea typeface="+mn-ea"/>
+                          <a:cs typeface="+mn-cs"/>
+                        </a:defRPr>
+                      </a:lvl7pPr>
+                      <a:lvl8pPr marL="3200400" algn="l" defTabSz="914400" rtl="0" eaLnBrk="1" latinLnBrk="0" hangingPunct="1">
+                        <a:defRPr sz="1800" kern="1200">
+                          <a:solidFill>
+                            <a:schemeClr val="dk1"/>
+                          </a:solidFill>
+                          <a:latin typeface="+mn-lt"/>
+                          <a:ea typeface="+mn-ea"/>
+                          <a:cs typeface="+mn-cs"/>
+                        </a:defRPr>
+                      </a:lvl8pPr>
+                      <a:lvl9pPr marL="3657600" algn="l" defTabSz="914400" rtl="0" eaLnBrk="1" latinLnBrk="0" hangingPunct="1">
+                        <a:defRPr sz="1800" kern="1200">
+                          <a:solidFill>
+                            <a:schemeClr val="dk1"/>
+                          </a:solidFill>
+                          <a:latin typeface="+mn-lt"/>
+                          <a:ea typeface="+mn-ea"/>
+                          <a:cs typeface="+mn-cs"/>
+                        </a:defRPr>
+                      </a:lvl9pPr>
+                    </a:lstStyle>
+                    <a:p>
+                      <a:r>
+                        <a:rPr lang="ru-RU" dirty="0">
+                          <a:solidFill>
+                            <a:schemeClr val="tx1"/>
+                          </a:solidFill>
+                        </a:rPr>
+                        <a:t>Концентрация газа (</a:t>
+                      </a:r>
+                      <a:r>
+                        <a:rPr lang="en-US" dirty="0">
+                          <a:solidFill>
+                            <a:schemeClr val="tx1"/>
+                          </a:solidFill>
+                        </a:rPr>
+                        <a:t>NH3,</a:t>
+                      </a:r>
+                      <a:r>
+                        <a:rPr lang="en-US" baseline="0" dirty="0">
+                          <a:solidFill>
+                            <a:schemeClr val="tx1"/>
+                          </a:solidFill>
+                        </a:rPr>
+                        <a:t> NOx, CO2, </a:t>
+                      </a:r>
+                      <a:r>
+                        <a:rPr lang="en-US" baseline="0" dirty="0" err="1">
+                          <a:solidFill>
+                            <a:schemeClr val="tx1"/>
+                          </a:solidFill>
+                        </a:rPr>
+                        <a:t>SOx</a:t>
+                      </a:r>
+                      <a:r>
+                        <a:rPr lang="en-US" baseline="0" dirty="0">
+                          <a:solidFill>
+                            <a:schemeClr val="tx1"/>
+                          </a:solidFill>
+                        </a:rPr>
+                        <a:t>, etc…</a:t>
+                      </a:r>
+                      <a:r>
+                        <a:rPr lang="ru-RU" dirty="0">
+                          <a:solidFill>
+                            <a:schemeClr val="tx1"/>
+                          </a:solidFill>
+                        </a:rPr>
+                        <a:t>)</a:t>
+                      </a:r>
+                    </a:p>
+                  </a:txBody>
+                  <a:tcPr>
+                    <a:lnL w="38100" cap="flat" cmpd="sng" algn="ctr">
+                      <a:solidFill>
+                        <a:schemeClr val="tx1"/>
+                      </a:solidFill>
+                      <a:prstDash val="solid"/>
+                      <a:round/>
+                      <a:headEnd type="none" w="med" len="med"/>
+                      <a:tailEnd type="none" w="med" len="med"/>
+                    </a:lnL>
+                    <a:lnR w="38100" cap="flat" cmpd="sng" algn="ctr">
+                      <a:solidFill>
+                        <a:schemeClr val="tx1"/>
+                      </a:solidFill>
+                      <a:prstDash val="solid"/>
+                      <a:round/>
+                      <a:headEnd type="none" w="med" len="med"/>
+                      <a:tailEnd type="none" w="med" len="med"/>
+                    </a:lnR>
+                    <a:lnT w="38100" cap="flat" cmpd="sng" algn="ctr">
+                      <a:solidFill>
+                        <a:schemeClr val="tx1"/>
+                      </a:solidFill>
+                      <a:prstDash val="solid"/>
+                      <a:round/>
+                      <a:headEnd type="none" w="med" len="med"/>
+                      <a:tailEnd type="none" w="med" len="med"/>
+                    </a:lnT>
+                    <a:lnB w="38100" cap="flat" cmpd="sng" algn="ctr">
+                      <a:solidFill>
+                        <a:schemeClr val="tx1"/>
+                      </a:solidFill>
+                      <a:prstDash val="solid"/>
+                      <a:round/>
+                      <a:headEnd type="none" w="med" len="med"/>
+                      <a:tailEnd type="none" w="med" len="med"/>
+                    </a:lnB>
+                    <a:lnTlToBr w="12700" cmpd="sng">
+                      <a:noFill/>
+                      <a:prstDash val="solid"/>
+                    </a:lnTlToBr>
+                    <a:lnBlToTr w="12700" cmpd="sng">
+                      <a:noFill/>
+                      <a:prstDash val="solid"/>
+                    </a:lnBlToTr>
+                    <a:solidFill>
+                      <a:schemeClr val="bg1"/>
+                    </a:solidFill>
+                  </a:tcPr>
+                </a:tc>
+                <a:tc>
+                  <a:txBody>
+                    <a:bodyPr/>
+                    <a:lstStyle>
+                      <a:defPPr>
+                        <a:defRPr lang="ru-RU">
+                          <a:solidFill>
+                            <a:schemeClr val="dk1"/>
+                          </a:solidFill>
+                        </a:defRPr>
+                      </a:defPPr>
+                      <a:lvl1pPr marL="0" algn="l" defTabSz="914400" rtl="0" eaLnBrk="1" latinLnBrk="0" hangingPunct="1">
+                        <a:defRPr sz="1800" kern="1200">
+                          <a:solidFill>
+                            <a:schemeClr val="dk1"/>
+                          </a:solidFill>
+                          <a:latin typeface="+mn-lt"/>
+                          <a:ea typeface="+mn-ea"/>
+                          <a:cs typeface="+mn-cs"/>
+                        </a:defRPr>
+                      </a:lvl1pPr>
+                      <a:lvl2pPr marL="457200" algn="l" defTabSz="914400" rtl="0" eaLnBrk="1" latinLnBrk="0" hangingPunct="1">
+                        <a:defRPr sz="1800" kern="1200">
+                          <a:solidFill>
+                            <a:schemeClr val="dk1"/>
+                          </a:solidFill>
+                          <a:latin typeface="+mn-lt"/>
+                          <a:ea typeface="+mn-ea"/>
+                          <a:cs typeface="+mn-cs"/>
+                        </a:defRPr>
+                      </a:lvl2pPr>
+                      <a:lvl3pPr marL="914400" algn="l" defTabSz="914400" rtl="0" eaLnBrk="1" latinLnBrk="0" hangingPunct="1">
+                        <a:defRPr sz="1800" kern="1200">
+                          <a:solidFill>
+                            <a:schemeClr val="dk1"/>
+                          </a:solidFill>
+                          <a:latin typeface="+mn-lt"/>
+                          <a:ea typeface="+mn-ea"/>
+                          <a:cs typeface="+mn-cs"/>
+                        </a:defRPr>
+                      </a:lvl3pPr>
+                      <a:lvl4pPr marL="1371600" algn="l" defTabSz="914400" rtl="0" eaLnBrk="1" latinLnBrk="0" hangingPunct="1">
+                        <a:defRPr sz="1800" kern="1200">
+                          <a:solidFill>
+                            <a:schemeClr val="dk1"/>
+                          </a:solidFill>
+                          <a:latin typeface="+mn-lt"/>
+                          <a:ea typeface="+mn-ea"/>
+                          <a:cs typeface="+mn-cs"/>
+                        </a:defRPr>
+                      </a:lvl4pPr>
+                      <a:lvl5pPr marL="1828800" algn="l" defTabSz="914400" rtl="0" eaLnBrk="1" latinLnBrk="0" hangingPunct="1">
+                        <a:defRPr sz="1800" kern="1200">
+                          <a:solidFill>
+                            <a:schemeClr val="dk1"/>
+                          </a:solidFill>
+                          <a:latin typeface="+mn-lt"/>
+                          <a:ea typeface="+mn-ea"/>
+                          <a:cs typeface="+mn-cs"/>
+                        </a:defRPr>
+                      </a:lvl5pPr>
+                      <a:lvl6pPr marL="2286000" algn="l" defTabSz="914400" rtl="0" eaLnBrk="1" latinLnBrk="0" hangingPunct="1">
+                        <a:defRPr sz="1800" kern="1200">
+                          <a:solidFill>
+                            <a:schemeClr val="dk1"/>
+                          </a:solidFill>
+                          <a:latin typeface="+mn-lt"/>
+                          <a:ea typeface="+mn-ea"/>
+                          <a:cs typeface="+mn-cs"/>
+                        </a:defRPr>
+                      </a:lvl6pPr>
+                      <a:lvl7pPr marL="2743200" algn="l" defTabSz="914400" rtl="0" eaLnBrk="1" latinLnBrk="0" hangingPunct="1">
+                        <a:defRPr sz="1800" kern="1200">
+                          <a:solidFill>
+                            <a:schemeClr val="dk1"/>
+                          </a:solidFill>
+                          <a:latin typeface="+mn-lt"/>
+                          <a:ea typeface="+mn-ea"/>
+                          <a:cs typeface="+mn-cs"/>
+                        </a:defRPr>
+                      </a:lvl7pPr>
+                      <a:lvl8pPr marL="3200400" algn="l" defTabSz="914400" rtl="0" eaLnBrk="1" latinLnBrk="0" hangingPunct="1">
+                        <a:defRPr sz="1800" kern="1200">
+                          <a:solidFill>
+                            <a:schemeClr val="dk1"/>
+                          </a:solidFill>
+                          <a:latin typeface="+mn-lt"/>
+                          <a:ea typeface="+mn-ea"/>
+                          <a:cs typeface="+mn-cs"/>
+                        </a:defRPr>
+                      </a:lvl8pPr>
+                      <a:lvl9pPr marL="3657600" algn="l" defTabSz="914400" rtl="0" eaLnBrk="1" latinLnBrk="0" hangingPunct="1">
+                        <a:defRPr sz="1800" kern="1200">
+                          <a:solidFill>
+                            <a:schemeClr val="dk1"/>
+                          </a:solidFill>
+                          <a:latin typeface="+mn-lt"/>
+                          <a:ea typeface="+mn-ea"/>
+                          <a:cs typeface="+mn-cs"/>
+                        </a:defRPr>
+                      </a:lvl9pPr>
+                    </a:lstStyle>
+                    <a:p>
+                      <a:r>
+                        <a:rPr lang="en-US" dirty="0">
+                          <a:solidFill>
+                            <a:schemeClr val="tx1"/>
+                          </a:solidFill>
+                        </a:rPr>
+                        <a:t>0-10000</a:t>
+                      </a:r>
+                      <a:endParaRPr lang="ru-RU" dirty="0">
+                        <a:solidFill>
+                          <a:schemeClr val="tx1"/>
+                        </a:solidFill>
+                      </a:endParaRPr>
+                    </a:p>
+                  </a:txBody>
+                  <a:tcPr>
+                    <a:lnL w="38100" cap="flat" cmpd="sng" algn="ctr">
+                      <a:solidFill>
+                        <a:schemeClr val="tx1"/>
+                      </a:solidFill>
+                      <a:prstDash val="solid"/>
+                      <a:round/>
+                      <a:headEnd type="none" w="med" len="med"/>
+                      <a:tailEnd type="none" w="med" len="med"/>
+                    </a:lnL>
+                    <a:lnR w="38100" cap="flat" cmpd="sng" algn="ctr">
+                      <a:solidFill>
+                        <a:schemeClr val="tx1"/>
+                      </a:solidFill>
+                      <a:prstDash val="solid"/>
+                      <a:round/>
+                      <a:headEnd type="none" w="med" len="med"/>
+                      <a:tailEnd type="none" w="med" len="med"/>
+                    </a:lnR>
+                    <a:lnT w="38100" cap="flat" cmpd="sng" algn="ctr">
+                      <a:solidFill>
+                        <a:schemeClr val="tx1"/>
+                      </a:solidFill>
+                      <a:prstDash val="solid"/>
+                      <a:round/>
+                      <a:headEnd type="none" w="med" len="med"/>
+                      <a:tailEnd type="none" w="med" len="med"/>
+                    </a:lnT>
+                    <a:lnB w="38100" cap="flat" cmpd="sng" algn="ctr">
+                      <a:solidFill>
+                        <a:schemeClr val="tx1"/>
+                      </a:solidFill>
+                      <a:prstDash val="solid"/>
+                      <a:round/>
+                      <a:headEnd type="none" w="med" len="med"/>
+                      <a:tailEnd type="none" w="med" len="med"/>
+                    </a:lnB>
+                    <a:lnTlToBr w="12700" cmpd="sng">
+                      <a:noFill/>
+                      <a:prstDash val="solid"/>
+                    </a:lnTlToBr>
+                    <a:lnBlToTr w="12700" cmpd="sng">
+                      <a:noFill/>
+                      <a:prstDash val="solid"/>
+                    </a:lnBlToTr>
+                    <a:solidFill>
+                      <a:schemeClr val="bg1"/>
+                    </a:solidFill>
+                  </a:tcPr>
+                </a:tc>
+                <a:tc>
+                  <a:txBody>
+                    <a:bodyPr/>
+                    <a:lstStyle>
+                      <a:defPPr>
+                        <a:defRPr lang="ru-RU">
+                          <a:solidFill>
+                            <a:schemeClr val="dk1"/>
+                          </a:solidFill>
+                        </a:defRPr>
+                      </a:defPPr>
+                      <a:lvl1pPr marL="0" algn="l" defTabSz="914400" rtl="0" eaLnBrk="1" latinLnBrk="0" hangingPunct="1">
+                        <a:defRPr sz="1800" kern="1200">
+                          <a:solidFill>
+                            <a:schemeClr val="dk1"/>
+                          </a:solidFill>
+                          <a:latin typeface="+mn-lt"/>
+                          <a:ea typeface="+mn-ea"/>
+                          <a:cs typeface="+mn-cs"/>
+                        </a:defRPr>
+                      </a:lvl1pPr>
+                      <a:lvl2pPr marL="457200" algn="l" defTabSz="914400" rtl="0" eaLnBrk="1" latinLnBrk="0" hangingPunct="1">
+                        <a:defRPr sz="1800" kern="1200">
+                          <a:solidFill>
+                            <a:schemeClr val="dk1"/>
+                          </a:solidFill>
+                          <a:latin typeface="+mn-lt"/>
+                          <a:ea typeface="+mn-ea"/>
+                          <a:cs typeface="+mn-cs"/>
+                        </a:defRPr>
+                      </a:lvl2pPr>
+                      <a:lvl3pPr marL="914400" algn="l" defTabSz="914400" rtl="0" eaLnBrk="1" latinLnBrk="0" hangingPunct="1">
+                        <a:defRPr sz="1800" kern="1200">
+                          <a:solidFill>
+                            <a:schemeClr val="dk1"/>
+                          </a:solidFill>
+                          <a:latin typeface="+mn-lt"/>
+                          <a:ea typeface="+mn-ea"/>
+                          <a:cs typeface="+mn-cs"/>
+                        </a:defRPr>
+                      </a:lvl3pPr>
+                      <a:lvl4pPr marL="1371600" algn="l" defTabSz="914400" rtl="0" eaLnBrk="1" latinLnBrk="0" hangingPunct="1">
+                        <a:defRPr sz="1800" kern="1200">
+                          <a:solidFill>
+                            <a:schemeClr val="dk1"/>
+                          </a:solidFill>
+                          <a:latin typeface="+mn-lt"/>
+                          <a:ea typeface="+mn-ea"/>
+                          <a:cs typeface="+mn-cs"/>
+                        </a:defRPr>
+                      </a:lvl4pPr>
+                      <a:lvl5pPr marL="1828800" algn="l" defTabSz="914400" rtl="0" eaLnBrk="1" latinLnBrk="0" hangingPunct="1">
+                        <a:defRPr sz="1800" kern="1200">
+                          <a:solidFill>
+                            <a:schemeClr val="dk1"/>
+                          </a:solidFill>
+                          <a:latin typeface="+mn-lt"/>
+                          <a:ea typeface="+mn-ea"/>
+                          <a:cs typeface="+mn-cs"/>
+                        </a:defRPr>
+                      </a:lvl5pPr>
+                      <a:lvl6pPr marL="2286000" algn="l" defTabSz="914400" rtl="0" eaLnBrk="1" latinLnBrk="0" hangingPunct="1">
+                        <a:defRPr sz="1800" kern="1200">
+                          <a:solidFill>
+                            <a:schemeClr val="dk1"/>
+                          </a:solidFill>
+                          <a:latin typeface="+mn-lt"/>
+                          <a:ea typeface="+mn-ea"/>
+                          <a:cs typeface="+mn-cs"/>
+                        </a:defRPr>
+                      </a:lvl6pPr>
+                      <a:lvl7pPr marL="2743200" algn="l" defTabSz="914400" rtl="0" eaLnBrk="1" latinLnBrk="0" hangingPunct="1">
+                        <a:defRPr sz="1800" kern="1200">
+                          <a:solidFill>
+                            <a:schemeClr val="dk1"/>
+                          </a:solidFill>
+                          <a:latin typeface="+mn-lt"/>
+                          <a:ea typeface="+mn-ea"/>
+                          <a:cs typeface="+mn-cs"/>
+                        </a:defRPr>
+                      </a:lvl7pPr>
+                      <a:lvl8pPr marL="3200400" algn="l" defTabSz="914400" rtl="0" eaLnBrk="1" latinLnBrk="0" hangingPunct="1">
+                        <a:defRPr sz="1800" kern="1200">
+                          <a:solidFill>
+                            <a:schemeClr val="dk1"/>
+                          </a:solidFill>
+                          <a:latin typeface="+mn-lt"/>
+                          <a:ea typeface="+mn-ea"/>
+                          <a:cs typeface="+mn-cs"/>
+                        </a:defRPr>
+                      </a:lvl8pPr>
+                      <a:lvl9pPr marL="3657600" algn="l" defTabSz="914400" rtl="0" eaLnBrk="1" latinLnBrk="0" hangingPunct="1">
+                        <a:defRPr sz="1800" kern="1200">
+                          <a:solidFill>
+                            <a:schemeClr val="dk1"/>
+                          </a:solidFill>
+                          <a:latin typeface="+mn-lt"/>
+                          <a:ea typeface="+mn-ea"/>
+                          <a:cs typeface="+mn-cs"/>
+                        </a:defRPr>
+                      </a:lvl9pPr>
+                    </a:lstStyle>
+                    <a:p>
+                      <a:r>
+                        <a:rPr lang="en-US" dirty="0">
+                          <a:solidFill>
+                            <a:schemeClr val="tx1"/>
+                          </a:solidFill>
+                        </a:rPr>
+                        <a:t>ppm</a:t>
+                      </a:r>
+                      <a:r>
+                        <a:rPr lang="en-US" baseline="0" dirty="0">
+                          <a:solidFill>
+                            <a:schemeClr val="tx1"/>
+                          </a:solidFill>
+                        </a:rPr>
+                        <a:t> </a:t>
+                      </a:r>
+                      <a:endParaRPr lang="ru-RU" dirty="0">
+                        <a:solidFill>
+                          <a:schemeClr val="tx1"/>
+                        </a:solidFill>
+                      </a:endParaRPr>
+                    </a:p>
+                  </a:txBody>
+                  <a:tcPr>
+                    <a:lnL w="38100" cap="flat" cmpd="sng" algn="ctr">
+                      <a:solidFill>
+                        <a:schemeClr val="tx1"/>
+                      </a:solidFill>
+                      <a:prstDash val="solid"/>
+                      <a:round/>
+                      <a:headEnd type="none" w="med" len="med"/>
+                      <a:tailEnd type="none" w="med" len="med"/>
+                    </a:lnL>
+                    <a:lnR w="38100" cap="flat" cmpd="sng" algn="ctr">
+                      <a:solidFill>
+                        <a:schemeClr val="tx1"/>
+                      </a:solidFill>
+                      <a:prstDash val="solid"/>
+                      <a:round/>
+                      <a:headEnd type="none" w="med" len="med"/>
+                      <a:tailEnd type="none" w="med" len="med"/>
+                    </a:lnR>
+                    <a:lnT w="38100" cap="flat" cmpd="sng" algn="ctr">
+                      <a:solidFill>
+                        <a:schemeClr val="tx1"/>
+                      </a:solidFill>
+                      <a:prstDash val="solid"/>
+                      <a:round/>
+                      <a:headEnd type="none" w="med" len="med"/>
+                      <a:tailEnd type="none" w="med" len="med"/>
+                    </a:lnT>
+                    <a:lnB w="38100" cap="flat" cmpd="sng" algn="ctr">
+                      <a:solidFill>
+                        <a:schemeClr val="tx1"/>
+                      </a:solidFill>
+                      <a:prstDash val="solid"/>
+                      <a:round/>
+                      <a:headEnd type="none" w="med" len="med"/>
+                      <a:tailEnd type="none" w="med" len="med"/>
+                    </a:lnB>
+                    <a:lnTlToBr w="12700" cmpd="sng">
+                      <a:noFill/>
+                      <a:prstDash val="solid"/>
+                    </a:lnTlToBr>
+                    <a:lnBlToTr w="12700" cmpd="sng">
+                      <a:noFill/>
+                      <a:prstDash val="solid"/>
+                    </a:lnBlToTr>
+                    <a:solidFill>
+                      <a:schemeClr val="bg1"/>
+                    </a:solidFill>
+                  </a:tcPr>
+                </a:tc>
+                <a:extLst>
+                  <a:ext uri="{0D108BD9-81ED-4DB2-BD59-A6C34878D82A}">
+                    <a16:rowId xmlns:a16="http://schemas.microsoft.com/office/drawing/2014/main" val="10006"/>
+                  </a:ext>
+                </a:extLst>
+              </a:tr>
+              <a:tr h="711439">
+                <a:tc>
+                  <a:txBody>
+                    <a:bodyPr/>
+                    <a:lstStyle>
+                      <a:defPPr>
+                        <a:defRPr lang="ru-RU">
+                          <a:solidFill>
+                            <a:schemeClr val="dk1"/>
+                          </a:solidFill>
+                        </a:defRPr>
+                      </a:defPPr>
+                      <a:lvl1pPr marL="0" algn="l" defTabSz="914400" rtl="0" eaLnBrk="1" latinLnBrk="0" hangingPunct="1">
+                        <a:defRPr sz="1800" kern="1200">
+                          <a:solidFill>
+                            <a:schemeClr val="dk1"/>
+                          </a:solidFill>
+                          <a:latin typeface="+mn-lt"/>
+                          <a:ea typeface="+mn-ea"/>
+                          <a:cs typeface="+mn-cs"/>
+                        </a:defRPr>
+                      </a:lvl1pPr>
+                      <a:lvl2pPr marL="457200" algn="l" defTabSz="914400" rtl="0" eaLnBrk="1" latinLnBrk="0" hangingPunct="1">
+                        <a:defRPr sz="1800" kern="1200">
+                          <a:solidFill>
+                            <a:schemeClr val="dk1"/>
+                          </a:solidFill>
+                          <a:latin typeface="+mn-lt"/>
+                          <a:ea typeface="+mn-ea"/>
+                          <a:cs typeface="+mn-cs"/>
+                        </a:defRPr>
+                      </a:lvl2pPr>
+                      <a:lvl3pPr marL="914400" algn="l" defTabSz="914400" rtl="0" eaLnBrk="1" latinLnBrk="0" hangingPunct="1">
+                        <a:defRPr sz="1800" kern="1200">
+                          <a:solidFill>
+                            <a:schemeClr val="dk1"/>
+                          </a:solidFill>
+                          <a:latin typeface="+mn-lt"/>
+                          <a:ea typeface="+mn-ea"/>
+                          <a:cs typeface="+mn-cs"/>
+                        </a:defRPr>
+                      </a:lvl3pPr>
+                      <a:lvl4pPr marL="1371600" algn="l" defTabSz="914400" rtl="0" eaLnBrk="1" latinLnBrk="0" hangingPunct="1">
+                        <a:defRPr sz="1800" kern="1200">
+                          <a:solidFill>
+                            <a:schemeClr val="dk1"/>
+                          </a:solidFill>
+                          <a:latin typeface="+mn-lt"/>
+                          <a:ea typeface="+mn-ea"/>
+                          <a:cs typeface="+mn-cs"/>
+                        </a:defRPr>
+                      </a:lvl4pPr>
+                      <a:lvl5pPr marL="1828800" algn="l" defTabSz="914400" rtl="0" eaLnBrk="1" latinLnBrk="0" hangingPunct="1">
+                        <a:defRPr sz="1800" kern="1200">
+                          <a:solidFill>
+                            <a:schemeClr val="dk1"/>
+                          </a:solidFill>
+                          <a:latin typeface="+mn-lt"/>
+                          <a:ea typeface="+mn-ea"/>
+                          <a:cs typeface="+mn-cs"/>
+                        </a:defRPr>
+                      </a:lvl5pPr>
+                      <a:lvl6pPr marL="2286000" algn="l" defTabSz="914400" rtl="0" eaLnBrk="1" latinLnBrk="0" hangingPunct="1">
+                        <a:defRPr sz="1800" kern="1200">
+                          <a:solidFill>
+                            <a:schemeClr val="dk1"/>
+                          </a:solidFill>
+                          <a:latin typeface="+mn-lt"/>
+                          <a:ea typeface="+mn-ea"/>
+                          <a:cs typeface="+mn-cs"/>
+                        </a:defRPr>
+                      </a:lvl6pPr>
+                      <a:lvl7pPr marL="2743200" algn="l" defTabSz="914400" rtl="0" eaLnBrk="1" latinLnBrk="0" hangingPunct="1">
+                        <a:defRPr sz="1800" kern="1200">
+                          <a:solidFill>
+                            <a:schemeClr val="dk1"/>
+                          </a:solidFill>
+                          <a:latin typeface="+mn-lt"/>
+                          <a:ea typeface="+mn-ea"/>
+                          <a:cs typeface="+mn-cs"/>
+                        </a:defRPr>
+                      </a:lvl7pPr>
+                      <a:lvl8pPr marL="3200400" algn="l" defTabSz="914400" rtl="0" eaLnBrk="1" latinLnBrk="0" hangingPunct="1">
+                        <a:defRPr sz="1800" kern="1200">
+                          <a:solidFill>
+                            <a:schemeClr val="dk1"/>
+                          </a:solidFill>
+                          <a:latin typeface="+mn-lt"/>
+                          <a:ea typeface="+mn-ea"/>
+                          <a:cs typeface="+mn-cs"/>
+                        </a:defRPr>
+                      </a:lvl8pPr>
+                      <a:lvl9pPr marL="3657600" algn="l" defTabSz="914400" rtl="0" eaLnBrk="1" latinLnBrk="0" hangingPunct="1">
+                        <a:defRPr sz="1800" kern="1200">
+                          <a:solidFill>
+                            <a:schemeClr val="dk1"/>
+                          </a:solidFill>
+                          <a:latin typeface="+mn-lt"/>
+                          <a:ea typeface="+mn-ea"/>
+                          <a:cs typeface="+mn-cs"/>
+                        </a:defRPr>
+                      </a:lvl9pPr>
+                    </a:lstStyle>
+                    <a:p>
+                      <a:r>
+                        <a:rPr lang="en-US" dirty="0">
+                          <a:solidFill>
+                            <a:schemeClr val="tx1"/>
+                          </a:solidFill>
+                        </a:rPr>
+                        <a:t>MQ-7</a:t>
+                      </a:r>
+                      <a:endParaRPr lang="ru-RU" dirty="0">
+                        <a:solidFill>
+                          <a:schemeClr val="tx1"/>
+                        </a:solidFill>
+                      </a:endParaRPr>
+                    </a:p>
+                  </a:txBody>
+                  <a:tcPr>
+                    <a:lnL w="38100" cap="flat" cmpd="sng" algn="ctr">
+                      <a:solidFill>
+                        <a:schemeClr val="tx1"/>
+                      </a:solidFill>
+                      <a:prstDash val="solid"/>
+                      <a:round/>
+                      <a:headEnd type="none" w="med" len="med"/>
+                      <a:tailEnd type="none" w="med" len="med"/>
+                    </a:lnL>
+                    <a:lnR w="38100" cap="flat" cmpd="sng" algn="ctr">
+                      <a:solidFill>
+                        <a:schemeClr val="tx1"/>
+                      </a:solidFill>
+                      <a:prstDash val="solid"/>
+                      <a:round/>
+                      <a:headEnd type="none" w="med" len="med"/>
+                      <a:tailEnd type="none" w="med" len="med"/>
+                    </a:lnR>
+                    <a:lnT w="38100" cap="flat" cmpd="sng" algn="ctr">
+                      <a:solidFill>
+                        <a:schemeClr val="tx1"/>
+                      </a:solidFill>
+                      <a:prstDash val="solid"/>
+                      <a:round/>
+                      <a:headEnd type="none" w="med" len="med"/>
+                      <a:tailEnd type="none" w="med" len="med"/>
+                    </a:lnT>
+                    <a:lnB w="38100" cap="flat" cmpd="sng" algn="ctr">
+                      <a:solidFill>
+                        <a:schemeClr val="tx1"/>
+                      </a:solidFill>
+                      <a:prstDash val="solid"/>
+                      <a:round/>
+                      <a:headEnd type="none" w="med" len="med"/>
+                      <a:tailEnd type="none" w="med" len="med"/>
+                    </a:lnB>
+                    <a:lnTlToBr w="12700" cmpd="sng">
+                      <a:noFill/>
+                      <a:prstDash val="solid"/>
+                    </a:lnTlToBr>
+                    <a:lnBlToTr w="12700" cmpd="sng">
+                      <a:noFill/>
+                      <a:prstDash val="solid"/>
+                    </a:lnBlToTr>
+                    <a:solidFill>
+                      <a:schemeClr val="bg1"/>
+                    </a:solidFill>
+                  </a:tcPr>
+                </a:tc>
+                <a:tc>
+                  <a:txBody>
+                    <a:bodyPr/>
+                    <a:lstStyle>
+                      <a:defPPr>
+                        <a:defRPr lang="ru-RU">
+                          <a:solidFill>
+                            <a:schemeClr val="dk1"/>
+                          </a:solidFill>
+                        </a:defRPr>
+                      </a:defPPr>
+                      <a:lvl1pPr marL="0" algn="l" defTabSz="914400" rtl="0" eaLnBrk="1" latinLnBrk="0" hangingPunct="1">
+                        <a:defRPr sz="1800" kern="1200">
+                          <a:solidFill>
+                            <a:schemeClr val="dk1"/>
+                          </a:solidFill>
+                          <a:latin typeface="+mn-lt"/>
+                          <a:ea typeface="+mn-ea"/>
+                          <a:cs typeface="+mn-cs"/>
+                        </a:defRPr>
+                      </a:lvl1pPr>
+                      <a:lvl2pPr marL="457200" algn="l" defTabSz="914400" rtl="0" eaLnBrk="1" latinLnBrk="0" hangingPunct="1">
+                        <a:defRPr sz="1800" kern="1200">
+                          <a:solidFill>
+                            <a:schemeClr val="dk1"/>
+                          </a:solidFill>
+                          <a:latin typeface="+mn-lt"/>
+                          <a:ea typeface="+mn-ea"/>
+                          <a:cs typeface="+mn-cs"/>
+                        </a:defRPr>
+                      </a:lvl2pPr>
+                      <a:lvl3pPr marL="914400" algn="l" defTabSz="914400" rtl="0" eaLnBrk="1" latinLnBrk="0" hangingPunct="1">
+                        <a:defRPr sz="1800" kern="1200">
+                          <a:solidFill>
+                            <a:schemeClr val="dk1"/>
+                          </a:solidFill>
+                          <a:latin typeface="+mn-lt"/>
+                          <a:ea typeface="+mn-ea"/>
+                          <a:cs typeface="+mn-cs"/>
+                        </a:defRPr>
+                      </a:lvl3pPr>
+                      <a:lvl4pPr marL="1371600" algn="l" defTabSz="914400" rtl="0" eaLnBrk="1" latinLnBrk="0" hangingPunct="1">
+                        <a:defRPr sz="1800" kern="1200">
+                          <a:solidFill>
+                            <a:schemeClr val="dk1"/>
+                          </a:solidFill>
+                          <a:latin typeface="+mn-lt"/>
+                          <a:ea typeface="+mn-ea"/>
+                          <a:cs typeface="+mn-cs"/>
+                        </a:defRPr>
+                      </a:lvl4pPr>
+                      <a:lvl5pPr marL="1828800" algn="l" defTabSz="914400" rtl="0" eaLnBrk="1" latinLnBrk="0" hangingPunct="1">
+                        <a:defRPr sz="1800" kern="1200">
+                          <a:solidFill>
+                            <a:schemeClr val="dk1"/>
+                          </a:solidFill>
+                          <a:latin typeface="+mn-lt"/>
+                          <a:ea typeface="+mn-ea"/>
+                          <a:cs typeface="+mn-cs"/>
+                        </a:defRPr>
+                      </a:lvl5pPr>
+                      <a:lvl6pPr marL="2286000" algn="l" defTabSz="914400" rtl="0" eaLnBrk="1" latinLnBrk="0" hangingPunct="1">
+                        <a:defRPr sz="1800" kern="1200">
+                          <a:solidFill>
+                            <a:schemeClr val="dk1"/>
+                          </a:solidFill>
+                          <a:latin typeface="+mn-lt"/>
+                          <a:ea typeface="+mn-ea"/>
+                          <a:cs typeface="+mn-cs"/>
+                        </a:defRPr>
+                      </a:lvl6pPr>
+                      <a:lvl7pPr marL="2743200" algn="l" defTabSz="914400" rtl="0" eaLnBrk="1" latinLnBrk="0" hangingPunct="1">
+                        <a:defRPr sz="1800" kern="1200">
+                          <a:solidFill>
+                            <a:schemeClr val="dk1"/>
+                          </a:solidFill>
+                          <a:latin typeface="+mn-lt"/>
+                          <a:ea typeface="+mn-ea"/>
+                          <a:cs typeface="+mn-cs"/>
+                        </a:defRPr>
+                      </a:lvl7pPr>
+                      <a:lvl8pPr marL="3200400" algn="l" defTabSz="914400" rtl="0" eaLnBrk="1" latinLnBrk="0" hangingPunct="1">
+                        <a:defRPr sz="1800" kern="1200">
+                          <a:solidFill>
+                            <a:schemeClr val="dk1"/>
+                          </a:solidFill>
+                          <a:latin typeface="+mn-lt"/>
+                          <a:ea typeface="+mn-ea"/>
+                          <a:cs typeface="+mn-cs"/>
+                        </a:defRPr>
+                      </a:lvl8pPr>
+                      <a:lvl9pPr marL="3657600" algn="l" defTabSz="914400" rtl="0" eaLnBrk="1" latinLnBrk="0" hangingPunct="1">
+                        <a:defRPr sz="1800" kern="1200">
+                          <a:solidFill>
+                            <a:schemeClr val="dk1"/>
+                          </a:solidFill>
+                          <a:latin typeface="+mn-lt"/>
+                          <a:ea typeface="+mn-ea"/>
+                          <a:cs typeface="+mn-cs"/>
+                        </a:defRPr>
+                      </a:lvl9pPr>
+                    </a:lstStyle>
+                    <a:p>
+                      <a:r>
+                        <a:rPr lang="ru-RU" dirty="0">
+                          <a:solidFill>
+                            <a:schemeClr val="tx1"/>
+                          </a:solidFill>
+                        </a:rPr>
+                        <a:t>Концентрация газа</a:t>
+                      </a:r>
+                      <a:r>
+                        <a:rPr lang="en-US" dirty="0">
+                          <a:solidFill>
+                            <a:schemeClr val="tx1"/>
+                          </a:solidFill>
+                        </a:rPr>
+                        <a:t> (H2, CO, NH4, C3H8,</a:t>
+                      </a:r>
+                      <a:r>
+                        <a:rPr lang="en-US" baseline="0" dirty="0">
+                          <a:solidFill>
+                            <a:schemeClr val="tx1"/>
+                          </a:solidFill>
+                        </a:rPr>
+                        <a:t> etc…</a:t>
+                      </a:r>
+                      <a:r>
+                        <a:rPr lang="en-US" dirty="0">
+                          <a:solidFill>
+                            <a:schemeClr val="tx1"/>
+                          </a:solidFill>
+                        </a:rPr>
+                        <a:t>)</a:t>
+                      </a:r>
+                      <a:endParaRPr lang="ru-RU" dirty="0">
+                        <a:solidFill>
+                          <a:schemeClr val="tx1"/>
+                        </a:solidFill>
+                      </a:endParaRPr>
+                    </a:p>
+                  </a:txBody>
+                  <a:tcPr>
+                    <a:lnL w="38100" cap="flat" cmpd="sng" algn="ctr">
+                      <a:solidFill>
+                        <a:schemeClr val="tx1"/>
+                      </a:solidFill>
+                      <a:prstDash val="solid"/>
+                      <a:round/>
+                      <a:headEnd type="none" w="med" len="med"/>
+                      <a:tailEnd type="none" w="med" len="med"/>
+                    </a:lnL>
+                    <a:lnR w="38100" cap="flat" cmpd="sng" algn="ctr">
+                      <a:solidFill>
+                        <a:schemeClr val="tx1"/>
+                      </a:solidFill>
+                      <a:prstDash val="solid"/>
+                      <a:round/>
+                      <a:headEnd type="none" w="med" len="med"/>
+                      <a:tailEnd type="none" w="med" len="med"/>
+                    </a:lnR>
+                    <a:lnT w="38100" cap="flat" cmpd="sng" algn="ctr">
+                      <a:solidFill>
+                        <a:schemeClr val="tx1"/>
+                      </a:solidFill>
+                      <a:prstDash val="solid"/>
+                      <a:round/>
+                      <a:headEnd type="none" w="med" len="med"/>
+                      <a:tailEnd type="none" w="med" len="med"/>
+                    </a:lnT>
+                    <a:lnB w="38100" cap="flat" cmpd="sng" algn="ctr">
+                      <a:solidFill>
+                        <a:schemeClr val="tx1"/>
+                      </a:solidFill>
+                      <a:prstDash val="solid"/>
+                      <a:round/>
+                      <a:headEnd type="none" w="med" len="med"/>
+                      <a:tailEnd type="none" w="med" len="med"/>
+                    </a:lnB>
+                    <a:lnTlToBr w="12700" cmpd="sng">
+                      <a:noFill/>
+                      <a:prstDash val="solid"/>
+                    </a:lnTlToBr>
+                    <a:lnBlToTr w="12700" cmpd="sng">
+                      <a:noFill/>
+                      <a:prstDash val="solid"/>
+                    </a:lnBlToTr>
+                    <a:solidFill>
+                      <a:schemeClr val="bg1"/>
+                    </a:solidFill>
+                  </a:tcPr>
+                </a:tc>
+                <a:tc>
+                  <a:txBody>
+                    <a:bodyPr/>
+                    <a:lstStyle>
+                      <a:defPPr>
+                        <a:defRPr lang="ru-RU">
+                          <a:solidFill>
+                            <a:schemeClr val="dk1"/>
+                          </a:solidFill>
+                        </a:defRPr>
+                      </a:defPPr>
+                      <a:lvl1pPr marL="0" algn="l" defTabSz="914400" rtl="0" eaLnBrk="1" latinLnBrk="0" hangingPunct="1">
+                        <a:defRPr sz="1800" kern="1200">
+                          <a:solidFill>
+                            <a:schemeClr val="dk1"/>
+                          </a:solidFill>
+                          <a:latin typeface="+mn-lt"/>
+                          <a:ea typeface="+mn-ea"/>
+                          <a:cs typeface="+mn-cs"/>
+                        </a:defRPr>
+                      </a:lvl1pPr>
+                      <a:lvl2pPr marL="457200" algn="l" defTabSz="914400" rtl="0" eaLnBrk="1" latinLnBrk="0" hangingPunct="1">
+                        <a:defRPr sz="1800" kern="1200">
+                          <a:solidFill>
+                            <a:schemeClr val="dk1"/>
+                          </a:solidFill>
+                          <a:latin typeface="+mn-lt"/>
+                          <a:ea typeface="+mn-ea"/>
+                          <a:cs typeface="+mn-cs"/>
+                        </a:defRPr>
+                      </a:lvl2pPr>
+                      <a:lvl3pPr marL="914400" algn="l" defTabSz="914400" rtl="0" eaLnBrk="1" latinLnBrk="0" hangingPunct="1">
+                        <a:defRPr sz="1800" kern="1200">
+                          <a:solidFill>
+                            <a:schemeClr val="dk1"/>
+                          </a:solidFill>
+                          <a:latin typeface="+mn-lt"/>
+                          <a:ea typeface="+mn-ea"/>
+                          <a:cs typeface="+mn-cs"/>
+                        </a:defRPr>
+                      </a:lvl3pPr>
+                      <a:lvl4pPr marL="1371600" algn="l" defTabSz="914400" rtl="0" eaLnBrk="1" latinLnBrk="0" hangingPunct="1">
+                        <a:defRPr sz="1800" kern="1200">
+                          <a:solidFill>
+                            <a:schemeClr val="dk1"/>
+                          </a:solidFill>
+                          <a:latin typeface="+mn-lt"/>
+                          <a:ea typeface="+mn-ea"/>
+                          <a:cs typeface="+mn-cs"/>
+                        </a:defRPr>
+                      </a:lvl4pPr>
+                      <a:lvl5pPr marL="1828800" algn="l" defTabSz="914400" rtl="0" eaLnBrk="1" latinLnBrk="0" hangingPunct="1">
+                        <a:defRPr sz="1800" kern="1200">
+                          <a:solidFill>
+                            <a:schemeClr val="dk1"/>
+                          </a:solidFill>
+                          <a:latin typeface="+mn-lt"/>
+                          <a:ea typeface="+mn-ea"/>
+                          <a:cs typeface="+mn-cs"/>
+                        </a:defRPr>
+                      </a:lvl5pPr>
+                      <a:lvl6pPr marL="2286000" algn="l" defTabSz="914400" rtl="0" eaLnBrk="1" latinLnBrk="0" hangingPunct="1">
+                        <a:defRPr sz="1800" kern="1200">
+                          <a:solidFill>
+                            <a:schemeClr val="dk1"/>
+                          </a:solidFill>
+                          <a:latin typeface="+mn-lt"/>
+                          <a:ea typeface="+mn-ea"/>
+                          <a:cs typeface="+mn-cs"/>
+                        </a:defRPr>
+                      </a:lvl6pPr>
+                      <a:lvl7pPr marL="2743200" algn="l" defTabSz="914400" rtl="0" eaLnBrk="1" latinLnBrk="0" hangingPunct="1">
+                        <a:defRPr sz="1800" kern="1200">
+                          <a:solidFill>
+                            <a:schemeClr val="dk1"/>
+                          </a:solidFill>
+                          <a:latin typeface="+mn-lt"/>
+                          <a:ea typeface="+mn-ea"/>
+                          <a:cs typeface="+mn-cs"/>
+                        </a:defRPr>
+                      </a:lvl7pPr>
+                      <a:lvl8pPr marL="3200400" algn="l" defTabSz="914400" rtl="0" eaLnBrk="1" latinLnBrk="0" hangingPunct="1">
+                        <a:defRPr sz="1800" kern="1200">
+                          <a:solidFill>
+                            <a:schemeClr val="dk1"/>
+                          </a:solidFill>
+                          <a:latin typeface="+mn-lt"/>
+                          <a:ea typeface="+mn-ea"/>
+                          <a:cs typeface="+mn-cs"/>
+                        </a:defRPr>
+                      </a:lvl8pPr>
+                      <a:lvl9pPr marL="3657600" algn="l" defTabSz="914400" rtl="0" eaLnBrk="1" latinLnBrk="0" hangingPunct="1">
+                        <a:defRPr sz="1800" kern="1200">
+                          <a:solidFill>
+                            <a:schemeClr val="dk1"/>
+                          </a:solidFill>
+                          <a:latin typeface="+mn-lt"/>
+                          <a:ea typeface="+mn-ea"/>
+                          <a:cs typeface="+mn-cs"/>
+                        </a:defRPr>
+                      </a:lvl9pPr>
+                    </a:lstStyle>
+                    <a:p>
+                      <a:r>
+                        <a:rPr lang="en-US" dirty="0">
+                          <a:solidFill>
+                            <a:schemeClr val="tx1"/>
+                          </a:solidFill>
+                        </a:rPr>
+                        <a:t>20-10000</a:t>
+                      </a:r>
+                      <a:endParaRPr lang="ru-RU" dirty="0">
+                        <a:solidFill>
+                          <a:schemeClr val="tx1"/>
+                        </a:solidFill>
+                      </a:endParaRPr>
+                    </a:p>
+                  </a:txBody>
+                  <a:tcPr>
+                    <a:lnL w="38100" cap="flat" cmpd="sng" algn="ctr">
+                      <a:solidFill>
+                        <a:schemeClr val="tx1"/>
+                      </a:solidFill>
+                      <a:prstDash val="solid"/>
+                      <a:round/>
+                      <a:headEnd type="none" w="med" len="med"/>
+                      <a:tailEnd type="none" w="med" len="med"/>
+                    </a:lnL>
+                    <a:lnR w="38100" cap="flat" cmpd="sng" algn="ctr">
+                      <a:solidFill>
+                        <a:schemeClr val="tx1"/>
+                      </a:solidFill>
+                      <a:prstDash val="solid"/>
+                      <a:round/>
+                      <a:headEnd type="none" w="med" len="med"/>
+                      <a:tailEnd type="none" w="med" len="med"/>
+                    </a:lnR>
+                    <a:lnT w="38100" cap="flat" cmpd="sng" algn="ctr">
+                      <a:solidFill>
+                        <a:schemeClr val="tx1"/>
+                      </a:solidFill>
+                      <a:prstDash val="solid"/>
+                      <a:round/>
+                      <a:headEnd type="none" w="med" len="med"/>
+                      <a:tailEnd type="none" w="med" len="med"/>
+                    </a:lnT>
+                    <a:lnB w="38100" cap="flat" cmpd="sng" algn="ctr">
+                      <a:solidFill>
+                        <a:schemeClr val="tx1"/>
+                      </a:solidFill>
+                      <a:prstDash val="solid"/>
+                      <a:round/>
+                      <a:headEnd type="none" w="med" len="med"/>
+                      <a:tailEnd type="none" w="med" len="med"/>
+                    </a:lnB>
+                    <a:lnTlToBr w="12700" cmpd="sng">
+                      <a:noFill/>
+                      <a:prstDash val="solid"/>
+                    </a:lnTlToBr>
+                    <a:lnBlToTr w="12700" cmpd="sng">
+                      <a:noFill/>
+                      <a:prstDash val="solid"/>
+                    </a:lnBlToTr>
+                    <a:solidFill>
+                      <a:schemeClr val="bg1"/>
+                    </a:solidFill>
+                  </a:tcPr>
+                </a:tc>
+                <a:tc>
+                  <a:txBody>
+                    <a:bodyPr/>
+                    <a:lstStyle>
+                      <a:defPPr>
+                        <a:defRPr lang="ru-RU">
+                          <a:solidFill>
+                            <a:schemeClr val="dk1"/>
+                          </a:solidFill>
+                        </a:defRPr>
+                      </a:defPPr>
+                      <a:lvl1pPr marL="0" algn="l" defTabSz="914400" rtl="0" eaLnBrk="1" latinLnBrk="0" hangingPunct="1">
+                        <a:defRPr sz="1800" kern="1200">
+                          <a:solidFill>
+                            <a:schemeClr val="dk1"/>
+                          </a:solidFill>
+                          <a:latin typeface="+mn-lt"/>
+                          <a:ea typeface="+mn-ea"/>
+                          <a:cs typeface="+mn-cs"/>
+                        </a:defRPr>
+                      </a:lvl1pPr>
+                      <a:lvl2pPr marL="457200" algn="l" defTabSz="914400" rtl="0" eaLnBrk="1" latinLnBrk="0" hangingPunct="1">
+                        <a:defRPr sz="1800" kern="1200">
+                          <a:solidFill>
+                            <a:schemeClr val="dk1"/>
+                          </a:solidFill>
+                          <a:latin typeface="+mn-lt"/>
+                          <a:ea typeface="+mn-ea"/>
+                          <a:cs typeface="+mn-cs"/>
+                        </a:defRPr>
+                      </a:lvl2pPr>
+                      <a:lvl3pPr marL="914400" algn="l" defTabSz="914400" rtl="0" eaLnBrk="1" latinLnBrk="0" hangingPunct="1">
+                        <a:defRPr sz="1800" kern="1200">
+                          <a:solidFill>
+                            <a:schemeClr val="dk1"/>
+                          </a:solidFill>
+                          <a:latin typeface="+mn-lt"/>
+                          <a:ea typeface="+mn-ea"/>
+                          <a:cs typeface="+mn-cs"/>
+                        </a:defRPr>
+                      </a:lvl3pPr>
+                      <a:lvl4pPr marL="1371600" algn="l" defTabSz="914400" rtl="0" eaLnBrk="1" latinLnBrk="0" hangingPunct="1">
+                        <a:defRPr sz="1800" kern="1200">
+                          <a:solidFill>
+                            <a:schemeClr val="dk1"/>
+                          </a:solidFill>
+                          <a:latin typeface="+mn-lt"/>
+                          <a:ea typeface="+mn-ea"/>
+                          <a:cs typeface="+mn-cs"/>
+                        </a:defRPr>
+                      </a:lvl4pPr>
+                      <a:lvl5pPr marL="1828800" algn="l" defTabSz="914400" rtl="0" eaLnBrk="1" latinLnBrk="0" hangingPunct="1">
+                        <a:defRPr sz="1800" kern="1200">
+                          <a:solidFill>
+                            <a:schemeClr val="dk1"/>
+                          </a:solidFill>
+                          <a:latin typeface="+mn-lt"/>
+                          <a:ea typeface="+mn-ea"/>
+                          <a:cs typeface="+mn-cs"/>
+                        </a:defRPr>
+                      </a:lvl5pPr>
+                      <a:lvl6pPr marL="2286000" algn="l" defTabSz="914400" rtl="0" eaLnBrk="1" latinLnBrk="0" hangingPunct="1">
+                        <a:defRPr sz="1800" kern="1200">
+                          <a:solidFill>
+                            <a:schemeClr val="dk1"/>
+                          </a:solidFill>
+                          <a:latin typeface="+mn-lt"/>
+                          <a:ea typeface="+mn-ea"/>
+                          <a:cs typeface="+mn-cs"/>
+                        </a:defRPr>
+                      </a:lvl6pPr>
+                      <a:lvl7pPr marL="2743200" algn="l" defTabSz="914400" rtl="0" eaLnBrk="1" latinLnBrk="0" hangingPunct="1">
+                        <a:defRPr sz="1800" kern="1200">
+                          <a:solidFill>
+                            <a:schemeClr val="dk1"/>
+                          </a:solidFill>
+                          <a:latin typeface="+mn-lt"/>
+                          <a:ea typeface="+mn-ea"/>
+                          <a:cs typeface="+mn-cs"/>
+                        </a:defRPr>
+                      </a:lvl7pPr>
+                      <a:lvl8pPr marL="3200400" algn="l" defTabSz="914400" rtl="0" eaLnBrk="1" latinLnBrk="0" hangingPunct="1">
+                        <a:defRPr sz="1800" kern="1200">
+                          <a:solidFill>
+                            <a:schemeClr val="dk1"/>
+                          </a:solidFill>
+                          <a:latin typeface="+mn-lt"/>
+                          <a:ea typeface="+mn-ea"/>
+                          <a:cs typeface="+mn-cs"/>
+                        </a:defRPr>
+                      </a:lvl8pPr>
+                      <a:lvl9pPr marL="3657600" algn="l" defTabSz="914400" rtl="0" eaLnBrk="1" latinLnBrk="0" hangingPunct="1">
+                        <a:defRPr sz="1800" kern="1200">
+                          <a:solidFill>
+                            <a:schemeClr val="dk1"/>
+                          </a:solidFill>
+                          <a:latin typeface="+mn-lt"/>
+                          <a:ea typeface="+mn-ea"/>
+                          <a:cs typeface="+mn-cs"/>
+                        </a:defRPr>
+                      </a:lvl9pPr>
+                    </a:lstStyle>
+                    <a:p>
+                      <a:r>
+                        <a:rPr lang="en-US" dirty="0">
+                          <a:solidFill>
+                            <a:schemeClr val="tx1"/>
+                          </a:solidFill>
+                        </a:rPr>
+                        <a:t>ppm </a:t>
+                      </a:r>
+                      <a:endParaRPr lang="ru-RU" dirty="0">
+                        <a:solidFill>
+                          <a:schemeClr val="tx1"/>
+                        </a:solidFill>
+                      </a:endParaRPr>
+                    </a:p>
+                  </a:txBody>
+                  <a:tcPr>
+                    <a:lnL w="38100" cap="flat" cmpd="sng" algn="ctr">
+                      <a:solidFill>
+                        <a:schemeClr val="tx1"/>
+                      </a:solidFill>
+                      <a:prstDash val="solid"/>
+                      <a:round/>
+                      <a:headEnd type="none" w="med" len="med"/>
+                      <a:tailEnd type="none" w="med" len="med"/>
+                    </a:lnL>
+                    <a:lnR w="38100" cap="flat" cmpd="sng" algn="ctr">
+                      <a:solidFill>
+                        <a:schemeClr val="tx1"/>
+                      </a:solidFill>
+                      <a:prstDash val="solid"/>
+                      <a:round/>
+                      <a:headEnd type="none" w="med" len="med"/>
+                      <a:tailEnd type="none" w="med" len="med"/>
+                    </a:lnR>
+                    <a:lnT w="38100" cap="flat" cmpd="sng" algn="ctr">
+                      <a:solidFill>
+                        <a:schemeClr val="tx1"/>
+                      </a:solidFill>
+                      <a:prstDash val="solid"/>
+                      <a:round/>
+                      <a:headEnd type="none" w="med" len="med"/>
+                      <a:tailEnd type="none" w="med" len="med"/>
+                    </a:lnT>
+                    <a:lnB w="38100" cap="flat" cmpd="sng" algn="ctr">
+                      <a:solidFill>
+                        <a:schemeClr val="tx1"/>
+                      </a:solidFill>
+                      <a:prstDash val="solid"/>
+                      <a:round/>
+                      <a:headEnd type="none" w="med" len="med"/>
+                      <a:tailEnd type="none" w="med" len="med"/>
+                    </a:lnB>
+                    <a:lnTlToBr w="12700" cmpd="sng">
+                      <a:noFill/>
+                      <a:prstDash val="solid"/>
+                    </a:lnTlToBr>
+                    <a:lnBlToTr w="12700" cmpd="sng">
+                      <a:noFill/>
+                      <a:prstDash val="solid"/>
+                    </a:lnBlToTr>
+                    <a:solidFill>
+                      <a:schemeClr val="bg1"/>
+                    </a:solidFill>
+                  </a:tcPr>
+                </a:tc>
+                <a:extLst>
+                  <a:ext uri="{0D108BD9-81ED-4DB2-BD59-A6C34878D82A}">
+                    <a16:rowId xmlns:a16="http://schemas.microsoft.com/office/drawing/2014/main" val="10007"/>
+                  </a:ext>
+                </a:extLst>
+              </a:tr>
+            </a:tbl>
+          </a:graphicData>
+        </a:graphic>
+      </p:graphicFrame>
     </p:spTree>
+    <p:extLst>
+      <p:ext uri="{BB962C8B-B14F-4D97-AF65-F5344CB8AC3E}">
+        <p14:creationId xmlns:p14="http://schemas.microsoft.com/office/powerpoint/2010/main" val="246840765"/>
+      </p:ext>
+    </p:extLst>
   </p:cSld>
   <p:clrMapOvr>
     <a:masterClrMapping/>
@@ -6599,7 +12379,7 @@
       </p:grpSpPr>
       <p:sp>
         <p:nvSpPr>
-          <p:cNvPr id="88" name="PlaceHolder 1"/>
+          <p:cNvPr id="2" name="Заголовок 1"/>
           <p:cNvSpPr>
             <a:spLocks noGrp="1"/>
           </p:cNvSpPr>
@@ -6609,105 +12389,123 @@
         </p:nvSpPr>
         <p:spPr>
           <a:xfrm>
-            <a:off x="371475" y="897463"/>
-            <a:ext cx="11040478" cy="694800"/>
+            <a:off x="371475" y="561531"/>
+            <a:ext cx="10725150" cy="671957"/>
+          </a:xfrm>
+        </p:spPr>
+        <p:txBody>
+          <a:bodyPr/>
+          <a:lstStyle/>
+          <a:p>
+            <a:r>
+              <a:rPr lang="en-US" sz="3600" b="1" dirty="0">
+                <a:latin typeface="Outfit"/>
+              </a:rPr>
+              <a:t>ML-</a:t>
+            </a:r>
+            <a:r>
+              <a:rPr lang="ru-RU" sz="3600" b="1" dirty="0">
+                <a:latin typeface="Outfit"/>
+              </a:rPr>
+              <a:t>модель</a:t>
+            </a:r>
+          </a:p>
+        </p:txBody>
+      </p:sp>
+      <p:pic>
+        <p:nvPicPr>
+          <p:cNvPr id="42" name="Picture 2" descr="Tree leaves Vectors - Download Free High-Quality Vectors | Magnific  (formerly Freepik)"/>
+          <p:cNvPicPr>
+            <a:picLocks noChangeAspect="1" noChangeArrowheads="1"/>
+          </p:cNvPicPr>
+          <p:nvPr/>
+        </p:nvPicPr>
+        <p:blipFill rotWithShape="1">
+          <a:blip r:embed="rId2" cstate="print">
+            <a:extLst>
+              <a:ext uri="{BEBA8EAE-BF5A-486C-A8C5-ECC9F3942E4B}">
+                <a14:imgProps xmlns:a14="http://schemas.microsoft.com/office/drawing/2010/main">
+                  <a14:imgLayer r:embed="rId3">
+                    <a14:imgEffect>
+                      <a14:backgroundRemoval t="4865" b="48919" l="5270" r="52838">
+                        <a14:backgroundMark x1="24865" y1="22432" x2="24865" y2="22432"/>
+                        <a14:backgroundMark x1="13919" y1="18108" x2="13919" y2="18108"/>
+                        <a14:backgroundMark x1="15811" y1="16486" x2="15811" y2="16486"/>
+                        <a14:backgroundMark x1="23243" y1="19730" x2="23243" y2="19730"/>
+                        <a14:backgroundMark x1="32162" y1="32162" x2="32162" y2="32162"/>
+                        <a14:backgroundMark x1="28108" y1="28649" x2="28108" y2="28649"/>
+                        <a14:backgroundMark x1="27027" y1="28514" x2="27027" y2="28514"/>
+                        <a14:backgroundMark x1="30811" y1="29054" x2="30811" y2="29054"/>
+                        <a14:backgroundMark x1="27703" y1="26216" x2="27703" y2="26216"/>
+                      </a14:backgroundRemoval>
+                    </a14:imgEffect>
+                  </a14:imgLayer>
+                </a14:imgProps>
+              </a:ext>
+              <a:ext uri="{28A0092B-C50C-407E-A947-70E740481C1C}">
+                <a14:useLocalDpi xmlns:a14="http://schemas.microsoft.com/office/drawing/2010/main" val="0"/>
+              </a:ext>
+            </a:extLst>
+          </a:blip>
+          <a:srcRect l="-1362" t="-3518" r="46702" b="50354"/>
+          <a:stretch/>
+        </p:blipFill>
+        <p:spPr bwMode="auto">
+          <a:xfrm rot="10800000">
+            <a:off x="10986487" y="-137121"/>
+            <a:ext cx="1436651" cy="1397303"/>
           </a:xfrm>
           <a:prstGeom prst="rect">
             <a:avLst/>
           </a:prstGeom>
           <a:noFill/>
-          <a:ln w="0">
-            <a:noFill/>
-          </a:ln>
+          <a:extLst>
+            <a:ext uri="{909E8E84-426E-40DD-AFC4-6F175D3DCCD1}">
+              <a14:hiddenFill xmlns:a14="http://schemas.microsoft.com/office/drawing/2010/main">
+                <a:solidFill>
+                  <a:srgbClr val="FFFFFF"/>
+                </a:solidFill>
+              </a14:hiddenFill>
+            </a:ext>
+          </a:extLst>
         </p:spPr>
-        <p:txBody>
-          <a:bodyPr lIns="91440" tIns="91440" rIns="91440" bIns="91440" anchor="t">
-            <a:normAutofit fontScale="90000"/>
-          </a:bodyPr>
-          <a:lstStyle/>
-          <a:p>
-            <a:pPr>
-              <a:lnSpc>
-                <a:spcPct val="100000"/>
-              </a:lnSpc>
-              <a:tabLst>
-                <a:tab pos="0" algn="l"/>
-              </a:tabLst>
-            </a:pPr>
-            <a:r>
-              <a:rPr lang="ru-RU" sz="4000" b="1" dirty="0">
-                <a:solidFill>
-                  <a:schemeClr val="dk1"/>
-                </a:solidFill>
-                <a:latin typeface="Outfit"/>
-                <a:ea typeface="Outfit"/>
-              </a:rPr>
-              <a:t>Обоснование применимости </a:t>
-            </a:r>
-            <a:r>
-              <a:rPr lang="en-US" sz="4000" b="1" dirty="0">
-                <a:solidFill>
-                  <a:schemeClr val="dk1"/>
-                </a:solidFill>
-                <a:latin typeface="Outfit"/>
-                <a:ea typeface="Outfit"/>
-              </a:rPr>
-              <a:t>ML</a:t>
-            </a:r>
-            <a:r>
-              <a:rPr lang="ru-RU" sz="4000" b="1" dirty="0">
-                <a:solidFill>
-                  <a:schemeClr val="dk1"/>
-                </a:solidFill>
-                <a:latin typeface="Outfit"/>
-                <a:ea typeface="Outfit"/>
-              </a:rPr>
-              <a:t>-модели</a:t>
-            </a:r>
-            <a:endParaRPr lang="fr-FR" sz="4000" dirty="0">
-              <a:solidFill>
-                <a:schemeClr val="dk1"/>
-              </a:solidFill>
-              <a:latin typeface="Arial"/>
-            </a:endParaRPr>
-          </a:p>
-        </p:txBody>
-      </p:sp>
-      <p:sp>
-        <p:nvSpPr>
-          <p:cNvPr id="13" name="TextBox 12"/>
-          <p:cNvSpPr txBox="1"/>
+      </p:pic>
+      <p:pic>
+        <p:nvPicPr>
+          <p:cNvPr id="4" name="Рисунок 3">
+            <a:extLst>
+              <a:ext uri="{FF2B5EF4-FFF2-40B4-BE49-F238E27FC236}">
+                <a16:creationId xmlns:a16="http://schemas.microsoft.com/office/drawing/2014/main" id="{6BFB0B25-3F0D-0563-27CF-F5EC1A764FFD}"/>
+              </a:ext>
+            </a:extLst>
+          </p:cNvPr>
+          <p:cNvPicPr>
+            <a:picLocks noChangeAspect="1"/>
+          </p:cNvPicPr>
           <p:nvPr/>
-        </p:nvSpPr>
+        </p:nvPicPr>
+        <p:blipFill>
+          <a:blip r:embed="rId4"/>
+          <a:stretch>
+            <a:fillRect/>
+          </a:stretch>
+        </p:blipFill>
         <p:spPr>
           <a:xfrm>
-            <a:off x="384040" y="6281420"/>
-            <a:ext cx="312906" cy="369332"/>
+            <a:off x="565148" y="1606754"/>
+            <a:ext cx="8251473" cy="3464707"/>
           </a:xfrm>
           <a:prstGeom prst="rect">
             <a:avLst/>
           </a:prstGeom>
-          <a:noFill/>
         </p:spPr>
-        <p:txBody>
-          <a:bodyPr wrap="none" rtlCol="0">
-            <a:spAutoFit/>
-          </a:bodyPr>
-          <a:lstStyle/>
-          <a:p>
-            <a:r>
-              <a:rPr lang="ru-RU" dirty="0"/>
-              <a:t>8</a:t>
-            </a:r>
-          </a:p>
-        </p:txBody>
-      </p:sp>
+      </p:pic>
       <p:sp>
         <p:nvSpPr>
-          <p:cNvPr id="4" name="TextBox 3">
+          <p:cNvPr id="6" name="TextBox 5">
             <a:extLst>
               <a:ext uri="{FF2B5EF4-FFF2-40B4-BE49-F238E27FC236}">
-                <a16:creationId xmlns:a16="http://schemas.microsoft.com/office/drawing/2014/main" id="{131F0E47-7ED7-FCE8-C37A-104C59F4334A}"/>
+                <a16:creationId xmlns:a16="http://schemas.microsoft.com/office/drawing/2014/main" id="{4242C273-623A-F1EC-5658-A837BB9767AF}"/>
               </a:ext>
             </a:extLst>
           </p:cNvPr>
@@ -6716,8 +12514,8 @@
         </p:nvSpPr>
         <p:spPr>
           <a:xfrm>
-            <a:off x="371475" y="1843960"/>
-            <a:ext cx="7797338" cy="2616101"/>
+            <a:off x="565148" y="5174777"/>
+            <a:ext cx="10996096" cy="646331"/>
           </a:xfrm>
           <a:prstGeom prst="rect">
             <a:avLst/>
@@ -6730,143 +12528,51 @@
           </a:bodyPr>
           <a:lstStyle/>
           <a:p>
-            <a:pPr marL="285750" indent="-285750">
+            <a:pPr marL="285750" indent="-285750" algn="just">
               <a:buFont typeface="Arial" panose="020B0604020202020204" pitchFamily="34" charset="0"/>
               <a:buChar char="•"/>
             </a:pPr>
             <a:r>
-              <a:rPr lang="ru-RU" b="1" dirty="0">
-                <a:latin typeface="Consolas" panose="020B0609020204030204" pitchFamily="49" charset="0"/>
+              <a:rPr lang="ru-RU" sz="1800" b="1" dirty="0" err="1">
+                <a:effectLst/>
+                <a:latin typeface="Calibri" panose="020F0502020204030204" pitchFamily="34" charset="0"/>
+                <a:ea typeface="Calibri" panose="020F0502020204030204" pitchFamily="34" charset="0"/>
+                <a:cs typeface="Times New Roman" panose="02020603050405020304" pitchFamily="18" charset="0"/>
               </a:rPr>
-              <a:t>Учитывает сложные, нелинейные взаимодействия между множеством факторов</a:t>
-            </a:r>
+              <a:t>RandomizedSearchCV</a:t>
+            </a:r>
+            <a:endParaRPr lang="ru-RU" sz="1800" b="1" dirty="0">
+              <a:effectLst/>
+              <a:latin typeface="Calibri" panose="020F0502020204030204" pitchFamily="34" charset="0"/>
+              <a:ea typeface="Calibri" panose="020F0502020204030204" pitchFamily="34" charset="0"/>
+              <a:cs typeface="Times New Roman" panose="02020603050405020304" pitchFamily="18" charset="0"/>
+            </a:endParaRPr>
           </a:p>
           <a:p>
-            <a:pPr marL="285750" indent="-285750">
+            <a:pPr marL="285750" indent="-285750" algn="just">
               <a:buFont typeface="Arial" panose="020B0604020202020204" pitchFamily="34" charset="0"/>
               <a:buChar char="•"/>
             </a:pPr>
             <a:r>
-              <a:rPr lang="ru-RU" sz="1600" b="1" dirty="0" err="1">
-                <a:latin typeface="Consolas" panose="020B0609020204030204" pitchFamily="49" charset="0"/>
+              <a:rPr lang="en-US" b="1" dirty="0" err="1">
+                <a:latin typeface="Calibri" panose="020F0502020204030204" pitchFamily="34" charset="0"/>
+                <a:ea typeface="Calibri" panose="020F0502020204030204" pitchFamily="34" charset="0"/>
+                <a:cs typeface="Times New Roman" panose="02020603050405020304" pitchFamily="18" charset="0"/>
               </a:rPr>
-              <a:t>Random</a:t>
-            </a:r>
-            <a:r>
-              <a:rPr lang="ru-RU" sz="1600" b="1" dirty="0">
-                <a:latin typeface="Consolas" panose="020B0609020204030204" pitchFamily="49" charset="0"/>
-              </a:rPr>
-              <a:t> </a:t>
-            </a:r>
-            <a:r>
-              <a:rPr lang="ru-RU" sz="1600" b="1" dirty="0" err="1">
-                <a:latin typeface="Consolas" panose="020B0609020204030204" pitchFamily="49" charset="0"/>
-              </a:rPr>
-              <a:t>Forest</a:t>
-            </a:r>
-            <a:r>
-              <a:rPr lang="ru-RU" sz="1600" b="1" dirty="0">
-                <a:latin typeface="Consolas" panose="020B0609020204030204" pitchFamily="49" charset="0"/>
-              </a:rPr>
-              <a:t> — автоматически находит важные признаки и их комбинации без необходимости ручного моделирования</a:t>
-            </a:r>
-          </a:p>
-          <a:p>
-            <a:pPr marL="285750" indent="-285750">
-              <a:buFont typeface="Arial" panose="020B0604020202020204" pitchFamily="34" charset="0"/>
-              <a:buChar char="•"/>
-            </a:pPr>
-            <a:r>
-              <a:rPr lang="ru-RU" sz="1600" b="1" dirty="0">
-                <a:latin typeface="Consolas" panose="020B0609020204030204" pitchFamily="49" charset="0"/>
-              </a:rPr>
-              <a:t>Модель достигает 92.4% </a:t>
-            </a:r>
-            <a:r>
-              <a:rPr lang="ru-RU" sz="1600" b="1" dirty="0" err="1">
-                <a:latin typeface="Consolas" panose="020B0609020204030204" pitchFamily="49" charset="0"/>
-              </a:rPr>
-              <a:t>accuracy</a:t>
-            </a:r>
-            <a:r>
-              <a:rPr lang="ru-RU" sz="1600" b="1" dirty="0">
-                <a:latin typeface="Consolas" panose="020B0609020204030204" pitchFamily="49" charset="0"/>
-              </a:rPr>
-              <a:t> при 5-fold кросс-валидации</a:t>
-            </a:r>
-          </a:p>
-          <a:p>
-            <a:pPr marL="285750" indent="-285750">
-              <a:buFont typeface="Arial" panose="020B0604020202020204" pitchFamily="34" charset="0"/>
-              <a:buChar char="•"/>
-            </a:pPr>
-            <a:r>
-              <a:rPr lang="ru-RU" sz="1600" b="1" dirty="0">
-                <a:latin typeface="Consolas" panose="020B0609020204030204" pitchFamily="49" charset="0"/>
-              </a:rPr>
-              <a:t>Модель автоматически обрабатывает пропущенные значения</a:t>
-            </a:r>
-          </a:p>
-          <a:p>
-            <a:pPr marL="285750" indent="-285750">
-              <a:buFont typeface="Arial" panose="020B0604020202020204" pitchFamily="34" charset="0"/>
-              <a:buChar char="•"/>
-            </a:pPr>
-            <a:r>
-              <a:rPr lang="ru-RU" sz="1600" b="1" dirty="0" err="1">
-                <a:latin typeface="Consolas" panose="020B0609020204030204" pitchFamily="49" charset="0"/>
-              </a:rPr>
-              <a:t>Random</a:t>
-            </a:r>
-            <a:r>
-              <a:rPr lang="ru-RU" sz="1600" b="1" dirty="0">
-                <a:latin typeface="Consolas" panose="020B0609020204030204" pitchFamily="49" charset="0"/>
-              </a:rPr>
-              <a:t> </a:t>
-            </a:r>
-            <a:r>
-              <a:rPr lang="ru-RU" sz="1600" b="1" dirty="0" err="1">
-                <a:latin typeface="Consolas" panose="020B0609020204030204" pitchFamily="49" charset="0"/>
-              </a:rPr>
-              <a:t>Forest</a:t>
-            </a:r>
-            <a:r>
-              <a:rPr lang="ru-RU" sz="1600" b="1" dirty="0">
-                <a:latin typeface="Consolas" panose="020B0609020204030204" pitchFamily="49" charset="0"/>
-              </a:rPr>
-              <a:t> показывает важность признаков</a:t>
-            </a:r>
-          </a:p>
-          <a:p>
-            <a:pPr marL="285750" indent="-285750">
-              <a:buFont typeface="Arial" panose="020B0604020202020204" pitchFamily="34" charset="0"/>
-              <a:buChar char="•"/>
-            </a:pPr>
-            <a:r>
-              <a:rPr lang="ru-RU" sz="1600" b="1" dirty="0">
-                <a:latin typeface="Consolas" panose="020B0609020204030204" pitchFamily="49" charset="0"/>
-              </a:rPr>
-              <a:t>Модель выдает вероятности для всех классов, а не только одно значение. </a:t>
-            </a:r>
-          </a:p>
-          <a:p>
-            <a:pPr marL="285750" indent="-285750">
-              <a:buFont typeface="Arial" panose="020B0604020202020204" pitchFamily="34" charset="0"/>
-              <a:buChar char="•"/>
-            </a:pPr>
-            <a:r>
-              <a:rPr lang="ru-RU" sz="1600" b="1" dirty="0">
-                <a:latin typeface="Consolas" panose="020B0609020204030204" pitchFamily="49" charset="0"/>
-              </a:rPr>
-              <a:t>Масштабируемость и адаптация</a:t>
-            </a:r>
+              <a:t>MLflow</a:t>
+            </a:r>
+            <a:endParaRPr lang="ru-RU" b="1" dirty="0">
+              <a:latin typeface="Consolas" panose="020B0609020204030204" pitchFamily="49" charset="0"/>
+              <a:ea typeface="Tahoma" panose="020B0604030504040204" pitchFamily="34" charset="0"/>
+              <a:cs typeface="Tahoma" panose="020B0604030504040204" pitchFamily="34" charset="0"/>
+            </a:endParaRPr>
           </a:p>
         </p:txBody>
       </p:sp>
     </p:spTree>
     <p:extLst>
       <p:ext uri="{BB962C8B-B14F-4D97-AF65-F5344CB8AC3E}">
-        <p14:creationId xmlns:p14="http://schemas.microsoft.com/office/powerpoint/2010/main" val="1992759816"/>
+        <p14:creationId xmlns:p14="http://schemas.microsoft.com/office/powerpoint/2010/main" val="3635502012"/>
       </p:ext>
     </p:extLst>
   </p:cSld>
@@ -6895,7 +12601,7 @@
       </p:grpSpPr>
       <p:sp>
         <p:nvSpPr>
-          <p:cNvPr id="88" name="PlaceHolder 1"/>
+          <p:cNvPr id="2" name="Заголовок 1"/>
           <p:cNvSpPr>
             <a:spLocks noGrp="1"/>
           </p:cNvSpPr>
@@ -6905,117 +12611,79 @@
         </p:nvSpPr>
         <p:spPr>
           <a:xfrm>
-            <a:off x="371475" y="897463"/>
-            <a:ext cx="11040478" cy="694800"/>
+            <a:off x="371475" y="561531"/>
+            <a:ext cx="10725150" cy="671957"/>
           </a:xfrm>
-          <a:prstGeom prst="rect">
-            <a:avLst/>
-          </a:prstGeom>
-          <a:noFill/>
-          <a:ln w="0">
-            <a:noFill/>
-          </a:ln>
         </p:spPr>
         <p:txBody>
-          <a:bodyPr lIns="91440" tIns="91440" rIns="91440" bIns="91440" anchor="t">
-            <a:normAutofit fontScale="90000"/>
-          </a:bodyPr>
+          <a:bodyPr/>
           <a:lstStyle/>
           <a:p>
-            <a:pPr>
-              <a:lnSpc>
-                <a:spcPct val="100000"/>
-              </a:lnSpc>
-              <a:tabLst>
-                <a:tab pos="0" algn="l"/>
-              </a:tabLst>
-            </a:pPr>
-            <a:r>
-              <a:rPr lang="ru-RU" sz="4000" b="1" dirty="0">
-                <a:solidFill>
-                  <a:schemeClr val="dk1"/>
-                </a:solidFill>
+            <a:r>
+              <a:rPr lang="ru-RU" sz="3600" b="1" dirty="0">
                 <a:latin typeface="Outfit"/>
-                <a:ea typeface="Outfit"/>
               </a:rPr>
-              <a:t>Сравнение </a:t>
-            </a:r>
-            <a:r>
-              <a:rPr lang="en-US" sz="4000" b="1" dirty="0">
-                <a:solidFill>
-                  <a:schemeClr val="dk1"/>
-                </a:solidFill>
-                <a:latin typeface="Outfit"/>
-                <a:ea typeface="Outfit"/>
-              </a:rPr>
-              <a:t>ML</a:t>
-            </a:r>
-            <a:r>
-              <a:rPr lang="ru-RU" sz="4000" b="1" dirty="0">
-                <a:solidFill>
-                  <a:schemeClr val="dk1"/>
-                </a:solidFill>
-                <a:latin typeface="Outfit"/>
-                <a:ea typeface="Outfit"/>
-              </a:rPr>
-              <a:t>-моделей</a:t>
-            </a:r>
-            <a:endParaRPr lang="fr-FR" sz="4000" dirty="0">
-              <a:solidFill>
-                <a:schemeClr val="dk1"/>
-              </a:solidFill>
-              <a:latin typeface="Arial"/>
-            </a:endParaRPr>
+              <a:t>Экономическая эффективность</a:t>
+            </a:r>
           </a:p>
         </p:txBody>
       </p:sp>
-      <p:sp>
-        <p:nvSpPr>
-          <p:cNvPr id="13" name="TextBox 12"/>
-          <p:cNvSpPr txBox="1"/>
+      <p:pic>
+        <p:nvPicPr>
+          <p:cNvPr id="6146" name="Picture 2" descr="Tree leaves Vectors - Download Free High-Quality Vectors | Magnific  (formerly Freepik)"/>
+          <p:cNvPicPr>
+            <a:picLocks noChangeAspect="1" noChangeArrowheads="1"/>
+          </p:cNvPicPr>
           <p:nvPr/>
-        </p:nvSpPr>
-        <p:spPr>
-          <a:xfrm>
-            <a:off x="384040" y="6281420"/>
-            <a:ext cx="312906" cy="369332"/>
-          </a:xfrm>
-          <a:prstGeom prst="rect">
-            <a:avLst/>
-          </a:prstGeom>
-          <a:noFill/>
-        </p:spPr>
-        <p:txBody>
-          <a:bodyPr wrap="none" rtlCol="0">
-            <a:spAutoFit/>
-          </a:bodyPr>
-          <a:lstStyle/>
-          <a:p>
-            <a:r>
-              <a:rPr lang="ru-RU" dirty="0"/>
-              <a:t>8</a:t>
-            </a:r>
-          </a:p>
-        </p:txBody>
-      </p:sp>
-      <p:sp>
-        <p:nvSpPr>
-          <p:cNvPr id="2" name="AutoShape 2">
+        </p:nvPicPr>
+        <p:blipFill rotWithShape="1">
+          <a:blip r:embed="rId2">
             <a:extLst>
-              <a:ext uri="{FF2B5EF4-FFF2-40B4-BE49-F238E27FC236}">
-                <a16:creationId xmlns:a16="http://schemas.microsoft.com/office/drawing/2014/main" id="{B20C7E59-EF9E-3712-765E-070EB44EAF3A}"/>
+              <a:ext uri="{BEBA8EAE-BF5A-486C-A8C5-ECC9F3942E4B}">
+                <a14:imgProps xmlns:a14="http://schemas.microsoft.com/office/drawing/2010/main">
+                  <a14:imgLayer r:embed="rId3">
+                    <a14:imgEffect>
+                      <a14:backgroundRemoval t="3243" b="54324" l="47838" r="94324">
+                        <a14:foregroundMark x1="57973" y1="13919" x2="57973" y2="13919"/>
+                        <a14:foregroundMark x1="59189" y1="14865" x2="59189" y2="14865"/>
+                        <a14:foregroundMark x1="60270" y1="13919" x2="60270" y2="13919"/>
+                        <a14:foregroundMark x1="56622" y1="14865" x2="56622" y2="14865"/>
+                        <a14:foregroundMark x1="75270" y1="33108" x2="75270" y2="33108"/>
+                        <a14:foregroundMark x1="75000" y1="31757" x2="75000" y2="31757"/>
+                        <a14:foregroundMark x1="72432" y1="32432" x2="72432" y2="32432"/>
+                        <a14:foregroundMark x1="70676" y1="34595" x2="70676" y2="34595"/>
+                        <a14:foregroundMark x1="69595" y1="20946" x2="69595" y2="20946"/>
+                        <a14:foregroundMark x1="69459" y1="22703" x2="69459" y2="22703"/>
+                        <a14:foregroundMark x1="82703" y1="42027" x2="82703" y2="42027"/>
+                        <a14:backgroundMark x1="61216" y1="13243" x2="61216" y2="13243"/>
+                        <a14:backgroundMark x1="55541" y1="11081" x2="55541" y2="11081"/>
+                        <a14:backgroundMark x1="56622" y1="14054" x2="56622" y2="14054"/>
+                        <a14:backgroundMark x1="57432" y1="12838" x2="57432" y2="12838"/>
+                        <a14:backgroundMark x1="60946" y1="15541" x2="60946" y2="15541"/>
+                        <a14:backgroundMark x1="63784" y1="15000" x2="63784" y2="15000"/>
+                        <a14:backgroundMark x1="79865" y1="31892" x2="79865" y2="31892"/>
+                        <a14:backgroundMark x1="81351" y1="31622" x2="81351" y2="31622"/>
+                        <a14:backgroundMark x1="75135" y1="39595" x2="75135" y2="39595"/>
+                        <a14:backgroundMark x1="57162" y1="15135" x2="57162" y2="15135"/>
+                        <a14:backgroundMark x1="57973" y1="13378" x2="57973" y2="13378"/>
+                        <a14:backgroundMark x1="60405" y1="9189" x2="60405" y2="9189"/>
+                      </a14:backgroundRemoval>
+                    </a14:imgEffect>
+                  </a14:imgLayer>
+                </a14:imgProps>
+              </a:ext>
+              <a:ext uri="{28A0092B-C50C-407E-A947-70E740481C1C}">
+                <a14:useLocalDpi xmlns:a14="http://schemas.microsoft.com/office/drawing/2010/main" val="0"/>
               </a:ext>
             </a:extLst>
-          </p:cNvPr>
-          <p:cNvSpPr>
-            <a:spLocks noChangeAspect="1" noChangeArrowheads="1"/>
-          </p:cNvSpPr>
-          <p:nvPr/>
-        </p:nvSpPr>
+          </a:blip>
+          <a:srcRect l="45566" b="43974"/>
+          <a:stretch/>
+        </p:blipFill>
         <p:spPr bwMode="auto">
-          <a:xfrm>
-            <a:off x="5943600" y="3276600"/>
-            <a:ext cx="304800" cy="304800"/>
+          <a:xfrm rot="16976911">
+            <a:off x="10045537" y="4883772"/>
+            <a:ext cx="2290107" cy="2357113"/>
           </a:xfrm>
           <a:prstGeom prst="rect">
             <a:avLst/>
@@ -7031,36 +12699,38 @@
             </a:ext>
           </a:extLst>
         </p:spPr>
-        <p:txBody>
-          <a:bodyPr vert="horz" wrap="square" lIns="91440" tIns="45720" rIns="91440" bIns="45720" numCol="1" anchor="t" anchorCtr="0" compatLnSpc="1">
-            <a:prstTxWarp prst="textNoShape">
-              <a:avLst/>
-            </a:prstTxWarp>
-          </a:bodyPr>
-          <a:lstStyle/>
-          <a:p>
-            <a:endParaRPr lang="ru-RU"/>
-          </a:p>
-        </p:txBody>
-      </p:sp>
-      <p:sp>
-        <p:nvSpPr>
-          <p:cNvPr id="3" name="AutoShape 4">
+      </p:pic>
+      <p:pic>
+        <p:nvPicPr>
+          <p:cNvPr id="1026" name="Picture 2" descr="screenshot">
             <a:extLst>
               <a:ext uri="{FF2B5EF4-FFF2-40B4-BE49-F238E27FC236}">
-                <a16:creationId xmlns:a16="http://schemas.microsoft.com/office/drawing/2014/main" id="{E80B9114-A595-DE1D-85A6-088C4BEA75A3}"/>
+                <a16:creationId xmlns:a16="http://schemas.microsoft.com/office/drawing/2014/main" id="{EE0CDCEF-F167-AF51-438E-505E8F9ACE44}"/>
               </a:ext>
             </a:extLst>
           </p:cNvPr>
-          <p:cNvSpPr>
-            <a:spLocks noChangeAspect="1" noChangeArrowheads="1"/>
-          </p:cNvSpPr>
+          <p:cNvPicPr>
+            <a:picLocks noChangeAspect="1" noChangeArrowheads="1"/>
+          </p:cNvPicPr>
           <p:nvPr/>
-        </p:nvSpPr>
+        </p:nvPicPr>
+        <p:blipFill>
+          <a:blip r:embed="rId4">
+            <a:extLst>
+              <a:ext uri="{28A0092B-C50C-407E-A947-70E740481C1C}">
+                <a14:useLocalDpi xmlns:a14="http://schemas.microsoft.com/office/drawing/2010/main" val="0"/>
+              </a:ext>
+            </a:extLst>
+          </a:blip>
+          <a:srcRect/>
+          <a:stretch>
+            <a:fillRect/>
+          </a:stretch>
+        </p:blipFill>
         <p:spPr bwMode="auto">
           <a:xfrm>
-            <a:off x="6096000" y="3429000"/>
-            <a:ext cx="304800" cy="304800"/>
+            <a:off x="877005" y="1583444"/>
+            <a:ext cx="4705427" cy="2421290"/>
           </a:xfrm>
           <a:prstGeom prst="rect">
             <a:avLst/>
@@ -7076,24 +12746,13 @@
             </a:ext>
           </a:extLst>
         </p:spPr>
-        <p:txBody>
-          <a:bodyPr vert="horz" wrap="square" lIns="91440" tIns="45720" rIns="91440" bIns="45720" numCol="1" anchor="t" anchorCtr="0" compatLnSpc="1">
-            <a:prstTxWarp prst="textNoShape">
-              <a:avLst/>
-            </a:prstTxWarp>
-          </a:bodyPr>
-          <a:lstStyle/>
-          <a:p>
-            <a:endParaRPr lang="ru-RU"/>
-          </a:p>
-        </p:txBody>
-      </p:sp>
+      </p:pic>
       <p:pic>
         <p:nvPicPr>
-          <p:cNvPr id="6" name="Рисунок 5">
+          <p:cNvPr id="7" name="Рисунок 6">
             <a:extLst>
               <a:ext uri="{FF2B5EF4-FFF2-40B4-BE49-F238E27FC236}">
-                <a16:creationId xmlns:a16="http://schemas.microsoft.com/office/drawing/2014/main" id="{F24DECBC-468C-F4BC-E7AD-2A61C85255BE}"/>
+                <a16:creationId xmlns:a16="http://schemas.microsoft.com/office/drawing/2014/main" id="{97470530-42F3-4401-0825-A35C2B2751CB}"/>
               </a:ext>
             </a:extLst>
           </p:cNvPr>
@@ -7103,15 +12762,15 @@
           <p:nvPr/>
         </p:nvPicPr>
         <p:blipFill>
-          <a:blip r:embed="rId2"/>
+          <a:blip r:embed="rId5"/>
           <a:stretch>
             <a:fillRect/>
           </a:stretch>
         </p:blipFill>
         <p:spPr>
           <a:xfrm>
-            <a:off x="649358" y="2194026"/>
-            <a:ext cx="10694504" cy="2251034"/>
+            <a:off x="5640081" y="1583444"/>
+            <a:ext cx="5228391" cy="2421290"/>
           </a:xfrm>
           <a:prstGeom prst="rect">
             <a:avLst/>
@@ -7119,6 +12778,11 @@
         </p:spPr>
       </p:pic>
     </p:spTree>
+    <p:extLst>
+      <p:ext uri="{BB962C8B-B14F-4D97-AF65-F5344CB8AC3E}">
+        <p14:creationId xmlns:p14="http://schemas.microsoft.com/office/powerpoint/2010/main" val="2935996293"/>
+      </p:ext>
+    </p:extLst>
   </p:cSld>
   <p:clrMapOvr>
     <a:masterClrMapping/>
@@ -7145,43 +12809,71 @@
       </p:grpSpPr>
       <p:sp>
         <p:nvSpPr>
-          <p:cNvPr id="2" name="Заголовок 1"/>
-          <p:cNvSpPr>
-            <a:spLocks noGrp="1"/>
-          </p:cNvSpPr>
-          <p:nvPr>
-            <p:ph type="title"/>
-          </p:nvPr>
+          <p:cNvPr id="74" name="Прямоугольник 73"/>
+          <p:cNvSpPr/>
+          <p:nvPr/>
         </p:nvSpPr>
         <p:spPr>
           <a:xfrm>
-            <a:off x="371475" y="920306"/>
-            <a:ext cx="8468539" cy="671957"/>
+            <a:off x="381733" y="577881"/>
+            <a:ext cx="8598354" cy="655607"/>
           </a:xfrm>
+          <a:prstGeom prst="rect">
+            <a:avLst/>
+          </a:prstGeom>
+          <a:noFill/>
+          <a:ln w="0">
+            <a:noFill/>
+          </a:ln>
         </p:spPr>
+        <p:style>
+          <a:lnRef idx="0">
+            <a:scrgbClr r="0" g="0" b="0"/>
+          </a:lnRef>
+          <a:fillRef idx="0">
+            <a:scrgbClr r="0" g="0" b="0"/>
+          </a:fillRef>
+          <a:effectRef idx="0">
+            <a:scrgbClr r="0" g="0" b="0"/>
+          </a:effectRef>
+          <a:fontRef idx="minor"/>
+        </p:style>
         <p:txBody>
-          <a:bodyPr/>
+          <a:bodyPr anchor="t">
+            <a:noAutofit/>
+          </a:bodyPr>
           <a:lstStyle/>
           <a:p>
+            <a:pPr>
+              <a:tabLst>
+                <a:tab pos="0" algn="l"/>
+              </a:tabLst>
+            </a:pPr>
             <a:r>
               <a:rPr lang="ru-RU" sz="3600" b="1" dirty="0">
                 <a:latin typeface="Outfit"/>
               </a:rPr>
-              <a:t>Экономическая эффективность</a:t>
-            </a:r>
+              <a:t>Ключевые выводы для бизнеса</a:t>
+            </a:r>
+            <a:endParaRPr lang="en-US" sz="3200" b="1" dirty="0">
+              <a:solidFill>
+                <a:srgbClr val="000000"/>
+              </a:solidFill>
+              <a:latin typeface="Outfit"/>
+            </a:endParaRPr>
           </a:p>
         </p:txBody>
       </p:sp>
       <p:sp>
         <p:nvSpPr>
-          <p:cNvPr id="7" name="TextBox 6"/>
+          <p:cNvPr id="28" name="TextBox 27"/>
           <p:cNvSpPr txBox="1"/>
           <p:nvPr/>
         </p:nvSpPr>
         <p:spPr>
           <a:xfrm>
-            <a:off x="384040" y="6281420"/>
-            <a:ext cx="441146" cy="369332"/>
+            <a:off x="381733" y="1458527"/>
+            <a:ext cx="8905875" cy="369332"/>
           </a:xfrm>
           <a:prstGeom prst="rect">
             <a:avLst/>
@@ -7189,34 +12881,38 @@
           <a:noFill/>
         </p:spPr>
         <p:txBody>
-          <a:bodyPr wrap="none" rtlCol="0">
+          <a:bodyPr wrap="square" rtlCol="0">
             <a:spAutoFit/>
           </a:bodyPr>
           <a:lstStyle/>
           <a:p>
-            <a:r>
-              <a:rPr lang="ru-RU" dirty="0"/>
-              <a:t>14</a:t>
-            </a:r>
+            <a:pPr algn="just"/>
+            <a:r>
+              <a:rPr lang="ru-RU" dirty="0">
+                <a:latin typeface="Consolas" panose="020B0609020204030204" pitchFamily="49" charset="0"/>
+                <a:ea typeface="Tahoma" panose="020B0604030504040204" pitchFamily="34" charset="0"/>
+                <a:cs typeface="Tahoma" panose="020B0604030504040204" pitchFamily="34" charset="0"/>
+              </a:rPr>
+              <a:t>Модель работает по заявленным характеристикам и опробована в железе</a:t>
+            </a:r>
+            <a:endParaRPr lang="ru-RU" b="1" dirty="0">
+              <a:latin typeface="Consolas" panose="020B0609020204030204" pitchFamily="49" charset="0"/>
+              <a:ea typeface="Tahoma" panose="020B0604030504040204" pitchFamily="34" charset="0"/>
+              <a:cs typeface="Tahoma" panose="020B0604030504040204" pitchFamily="34" charset="0"/>
+            </a:endParaRPr>
           </a:p>
         </p:txBody>
       </p:sp>
       <p:sp>
         <p:nvSpPr>
-          <p:cNvPr id="3" name="TextBox 2">
-            <a:extLst>
-              <a:ext uri="{FF2B5EF4-FFF2-40B4-BE49-F238E27FC236}">
-                <a16:creationId xmlns:a16="http://schemas.microsoft.com/office/drawing/2014/main" id="{50F14DBF-4F50-FCF3-98A0-A1ADB4C52400}"/>
-              </a:ext>
-            </a:extLst>
-          </p:cNvPr>
+          <p:cNvPr id="29" name="TextBox 28"/>
           <p:cNvSpPr txBox="1"/>
           <p:nvPr/>
         </p:nvSpPr>
         <p:spPr>
           <a:xfrm>
-            <a:off x="694944" y="1729579"/>
-            <a:ext cx="4963410" cy="816314"/>
+            <a:off x="381733" y="1916638"/>
+            <a:ext cx="8905875" cy="369332"/>
           </a:xfrm>
           <a:prstGeom prst="rect">
             <a:avLst/>
@@ -7224,81 +12920,33 @@
           <a:noFill/>
         </p:spPr>
         <p:txBody>
-          <a:bodyPr wrap="none" rtlCol="0">
+          <a:bodyPr wrap="square" rtlCol="0">
             <a:spAutoFit/>
           </a:bodyPr>
           <a:lstStyle/>
           <a:p>
-            <a:pPr>
-              <a:lnSpc>
-                <a:spcPct val="115000"/>
-              </a:lnSpc>
-              <a:spcAft>
-                <a:spcPts val="800"/>
-              </a:spcAft>
-            </a:pPr>
-            <a:r>
-              <a:rPr lang="ru-RU" sz="1800" b="1" kern="100" dirty="0">
-                <a:effectLst/>
-                <a:latin typeface="Aptos" panose="020B0004020202020204" pitchFamily="34" charset="0"/>
-                <a:ea typeface="Aptos" panose="020B0004020202020204" pitchFamily="34" charset="0"/>
-                <a:cs typeface="Times New Roman" panose="02020603050405020304" pitchFamily="18" charset="0"/>
+            <a:pPr algn="just"/>
+            <a:r>
+              <a:rPr lang="ru-RU" dirty="0">
+                <a:latin typeface="Consolas" panose="020B0609020204030204" pitchFamily="49" charset="0"/>
+                <a:ea typeface="Tahoma" panose="020B0604030504040204" pitchFamily="34" charset="0"/>
+                <a:cs typeface="Tahoma" panose="020B0604030504040204" pitchFamily="34" charset="0"/>
               </a:rPr>
-              <a:t>Основной фактор эффективности:</a:t>
-            </a:r>
-          </a:p>
-          <a:p>
-            <a:pPr>
-              <a:lnSpc>
-                <a:spcPct val="115000"/>
-              </a:lnSpc>
-              <a:spcAft>
-                <a:spcPts val="800"/>
-              </a:spcAft>
-            </a:pPr>
-            <a:r>
-              <a:rPr lang="ru-RU" sz="1800" kern="100" dirty="0">
-                <a:effectLst/>
-                <a:latin typeface="Aptos" panose="020B0004020202020204" pitchFamily="34" charset="0"/>
-                <a:ea typeface="Aptos" panose="020B0004020202020204" pitchFamily="34" charset="0"/>
-                <a:cs typeface="Times New Roman" panose="02020603050405020304" pitchFamily="18" charset="0"/>
-              </a:rPr>
-              <a:t>Нагрузка включается только когда падает </a:t>
-            </a:r>
-            <a:r>
-              <a:rPr lang="en-US" sz="1800" kern="100" dirty="0">
-                <a:effectLst/>
-                <a:latin typeface="Aptos" panose="020B0004020202020204" pitchFamily="34" charset="0"/>
-                <a:ea typeface="Aptos" panose="020B0004020202020204" pitchFamily="34" charset="0"/>
-                <a:cs typeface="Times New Roman" panose="02020603050405020304" pitchFamily="18" charset="0"/>
-              </a:rPr>
-              <a:t>IAQ</a:t>
-            </a:r>
-            <a:endParaRPr lang="ru-RU" sz="1800" kern="100" dirty="0">
-              <a:effectLst/>
-              <a:latin typeface="Aptos" panose="020B0004020202020204" pitchFamily="34" charset="0"/>
-              <a:ea typeface="Aptos" panose="020B0004020202020204" pitchFamily="34" charset="0"/>
-              <a:cs typeface="Times New Roman" panose="02020603050405020304" pitchFamily="18" charset="0"/>
-            </a:endParaRPr>
+              <a:t>Модель способна адаптироваться к уникальным условиям</a:t>
+            </a:r>
           </a:p>
         </p:txBody>
       </p:sp>
       <p:sp>
         <p:nvSpPr>
-          <p:cNvPr id="4" name="TextBox 3">
-            <a:extLst>
-              <a:ext uri="{FF2B5EF4-FFF2-40B4-BE49-F238E27FC236}">
-                <a16:creationId xmlns:a16="http://schemas.microsoft.com/office/drawing/2014/main" id="{A9CE154B-D4A2-2DD9-A55D-BE061F2FAFF5}"/>
-              </a:ext>
-            </a:extLst>
-          </p:cNvPr>
+          <p:cNvPr id="30" name="TextBox 29"/>
           <p:cNvSpPr txBox="1"/>
           <p:nvPr/>
         </p:nvSpPr>
         <p:spPr>
           <a:xfrm>
-            <a:off x="694944" y="2643712"/>
-            <a:ext cx="3890809" cy="2500877"/>
+            <a:off x="381733" y="2368493"/>
+            <a:ext cx="8905875" cy="369332"/>
           </a:xfrm>
           <a:prstGeom prst="rect">
             <a:avLst/>
@@ -7306,195 +12954,33 @@
           <a:noFill/>
         </p:spPr>
         <p:txBody>
-          <a:bodyPr wrap="none" rtlCol="0">
+          <a:bodyPr wrap="square" rtlCol="0">
             <a:spAutoFit/>
           </a:bodyPr>
           <a:lstStyle/>
           <a:p>
-            <a:pPr>
-              <a:lnSpc>
-                <a:spcPct val="115000"/>
-              </a:lnSpc>
-              <a:spcAft>
-                <a:spcPts val="800"/>
-              </a:spcAft>
-            </a:pPr>
-            <a:r>
-              <a:rPr lang="ru-RU" sz="1800" b="1" kern="100" dirty="0">
-                <a:effectLst/>
-                <a:latin typeface="Aptos" panose="020B0004020202020204" pitchFamily="34" charset="0"/>
-                <a:ea typeface="Aptos" panose="020B0004020202020204" pitchFamily="34" charset="0"/>
-                <a:cs typeface="Times New Roman" panose="02020603050405020304" pitchFamily="18" charset="0"/>
+            <a:pPr algn="just"/>
+            <a:r>
+              <a:rPr lang="ru-RU" dirty="0">
+                <a:latin typeface="Consolas" panose="020B0609020204030204" pitchFamily="49" charset="0"/>
+                <a:ea typeface="Tahoma" panose="020B0604030504040204" pitchFamily="34" charset="0"/>
+                <a:cs typeface="Tahoma" panose="020B0604030504040204" pitchFamily="34" charset="0"/>
               </a:rPr>
-              <a:t>Следствия:</a:t>
-            </a:r>
-          </a:p>
-          <a:p>
-            <a:pPr marL="285750" indent="-285750">
-              <a:lnSpc>
-                <a:spcPct val="115000"/>
-              </a:lnSpc>
-              <a:spcAft>
-                <a:spcPts val="800"/>
-              </a:spcAft>
-              <a:buFont typeface="Arial" panose="020B0604020202020204" pitchFamily="34" charset="0"/>
-              <a:buChar char="•"/>
-            </a:pPr>
-            <a:r>
-              <a:rPr lang="ru-RU" sz="1800" kern="100" dirty="0">
-                <a:effectLst/>
-                <a:latin typeface="Aptos" panose="020B0004020202020204" pitchFamily="34" charset="0"/>
-                <a:ea typeface="Aptos" panose="020B0004020202020204" pitchFamily="34" charset="0"/>
-                <a:cs typeface="Times New Roman" panose="02020603050405020304" pitchFamily="18" charset="0"/>
-              </a:rPr>
-              <a:t>Издержки хранения и нехватки</a:t>
-            </a:r>
-          </a:p>
-          <a:p>
-            <a:pPr marL="285750" indent="-285750">
-              <a:lnSpc>
-                <a:spcPct val="115000"/>
-              </a:lnSpc>
-              <a:spcAft>
-                <a:spcPts val="800"/>
-              </a:spcAft>
-              <a:buFont typeface="Arial" panose="020B0604020202020204" pitchFamily="34" charset="0"/>
-              <a:buChar char="•"/>
-            </a:pPr>
-            <a:r>
-              <a:rPr lang="ru-RU" kern="100" dirty="0">
-                <a:latin typeface="Aptos" panose="020B0004020202020204" pitchFamily="34" charset="0"/>
-                <a:ea typeface="Aptos" panose="020B0004020202020204" pitchFamily="34" charset="0"/>
-                <a:cs typeface="Times New Roman" panose="02020603050405020304" pitchFamily="18" charset="0"/>
-              </a:rPr>
-              <a:t>Издержки износа оборудования</a:t>
-            </a:r>
-          </a:p>
-          <a:p>
-            <a:pPr marL="285750" indent="-285750">
-              <a:lnSpc>
-                <a:spcPct val="115000"/>
-              </a:lnSpc>
-              <a:spcAft>
-                <a:spcPts val="800"/>
-              </a:spcAft>
-              <a:buFont typeface="Arial" panose="020B0604020202020204" pitchFamily="34" charset="0"/>
-              <a:buChar char="•"/>
-            </a:pPr>
-            <a:r>
-              <a:rPr lang="ru-RU" kern="100" dirty="0">
-                <a:latin typeface="Aptos" panose="020B0004020202020204" pitchFamily="34" charset="0"/>
-                <a:ea typeface="Aptos" panose="020B0004020202020204" pitchFamily="34" charset="0"/>
-                <a:cs typeface="Times New Roman" panose="02020603050405020304" pitchFamily="18" charset="0"/>
-              </a:rPr>
-              <a:t>Улучшение микроклимата</a:t>
-            </a:r>
-          </a:p>
-          <a:p>
-            <a:pPr marL="285750" indent="-285750">
-              <a:lnSpc>
-                <a:spcPct val="115000"/>
-              </a:lnSpc>
-              <a:spcAft>
-                <a:spcPts val="800"/>
-              </a:spcAft>
-              <a:buFont typeface="Arial" panose="020B0604020202020204" pitchFamily="34" charset="0"/>
-              <a:buChar char="•"/>
-            </a:pPr>
-            <a:endParaRPr lang="ru-RU" sz="1800" kern="100" dirty="0">
-              <a:effectLst/>
-              <a:latin typeface="Aptos" panose="020B0004020202020204" pitchFamily="34" charset="0"/>
-              <a:ea typeface="Aptos" panose="020B0004020202020204" pitchFamily="34" charset="0"/>
-              <a:cs typeface="Times New Roman" panose="02020603050405020304" pitchFamily="18" charset="0"/>
-            </a:endParaRPr>
-          </a:p>
-          <a:p>
-            <a:pPr>
-              <a:lnSpc>
-                <a:spcPct val="115000"/>
-              </a:lnSpc>
-              <a:spcAft>
-                <a:spcPts val="800"/>
-              </a:spcAft>
-            </a:pPr>
-            <a:endParaRPr lang="ru-RU" sz="1800" kern="100" dirty="0">
-              <a:effectLst/>
-              <a:latin typeface="Aptos" panose="020B0004020202020204" pitchFamily="34" charset="0"/>
-              <a:ea typeface="Aptos" panose="020B0004020202020204" pitchFamily="34" charset="0"/>
-              <a:cs typeface="Times New Roman" panose="02020603050405020304" pitchFamily="18" charset="0"/>
-            </a:endParaRPr>
-          </a:p>
-        </p:txBody>
-      </p:sp>
-    </p:spTree>
-    <p:extLst>
-      <p:ext uri="{BB962C8B-B14F-4D97-AF65-F5344CB8AC3E}">
-        <p14:creationId xmlns:p14="http://schemas.microsoft.com/office/powerpoint/2010/main" val="175295161"/>
-      </p:ext>
-    </p:extLst>
-  </p:cSld>
-  <p:clrMapOvr>
-    <a:masterClrMapping/>
-  </p:clrMapOvr>
-</p:sld>
-</file>
-
-<file path=ppt/slides/slide8.xml><?xml version="1.0" encoding="utf-8"?>
-<p:sld xmlns:a="http://schemas.openxmlformats.org/drawingml/2006/main" xmlns:r="http://schemas.openxmlformats.org/officeDocument/2006/relationships" xmlns:p="http://schemas.openxmlformats.org/presentationml/2006/main">
-  <p:cSld>
-    <p:spTree>
-      <p:nvGrpSpPr>
-        <p:cNvPr id="1" name=""/>
-        <p:cNvGrpSpPr/>
-        <p:nvPr/>
-      </p:nvGrpSpPr>
-      <p:grpSpPr>
-        <a:xfrm>
-          <a:off x="0" y="0"/>
-          <a:ext cx="0" cy="0"/>
-          <a:chOff x="0" y="0"/>
-          <a:chExt cx="0" cy="0"/>
-        </a:xfrm>
-      </p:grpSpPr>
-      <p:sp>
-        <p:nvSpPr>
-          <p:cNvPr id="2" name="Заголовок 1"/>
-          <p:cNvSpPr>
-            <a:spLocks noGrp="1"/>
-          </p:cNvSpPr>
-          <p:nvPr>
-            <p:ph type="title"/>
-          </p:nvPr>
-        </p:nvSpPr>
-        <p:spPr>
-          <a:xfrm>
-            <a:off x="371475" y="920306"/>
-            <a:ext cx="9604629" cy="671957"/>
-          </a:xfrm>
-        </p:spPr>
-        <p:txBody>
-          <a:bodyPr/>
-          <a:lstStyle/>
-          <a:p>
-            <a:r>
-              <a:rPr lang="ru-RU" sz="3600" b="1" dirty="0">
-                <a:latin typeface="Outfit"/>
-              </a:rPr>
-              <a:t>Показатели экономической эффективности</a:t>
+              <a:t>Принцип работы системы понятен и легко изменяем</a:t>
             </a:r>
           </a:p>
         </p:txBody>
       </p:sp>
       <p:sp>
         <p:nvSpPr>
-          <p:cNvPr id="7" name="TextBox 6"/>
+          <p:cNvPr id="31" name="TextBox 30"/>
           <p:cNvSpPr txBox="1"/>
           <p:nvPr/>
         </p:nvSpPr>
         <p:spPr>
           <a:xfrm>
-            <a:off x="384040" y="6281420"/>
-            <a:ext cx="441146" cy="369332"/>
+            <a:off x="381733" y="2820348"/>
+            <a:ext cx="8905875" cy="369332"/>
           </a:xfrm>
           <a:prstGeom prst="rect">
             <a:avLst/>
@@ -7502,34 +12988,33 @@
           <a:noFill/>
         </p:spPr>
         <p:txBody>
-          <a:bodyPr wrap="none" rtlCol="0">
+          <a:bodyPr wrap="square" rtlCol="0">
             <a:spAutoFit/>
           </a:bodyPr>
           <a:lstStyle/>
           <a:p>
-            <a:r>
-              <a:rPr lang="ru-RU" dirty="0"/>
-              <a:t>14</a:t>
+            <a:pPr algn="just"/>
+            <a:r>
+              <a:rPr lang="ru-RU" dirty="0">
+                <a:latin typeface="Consolas" panose="020B0609020204030204" pitchFamily="49" charset="0"/>
+                <a:ea typeface="Tahoma" panose="020B0604030504040204" pitchFamily="34" charset="0"/>
+                <a:cs typeface="Tahoma" panose="020B0604030504040204" pitchFamily="34" charset="0"/>
+              </a:rPr>
+              <a:t>Легкое внедрение и обслуживание</a:t>
             </a:r>
           </a:p>
         </p:txBody>
       </p:sp>
       <p:sp>
         <p:nvSpPr>
-          <p:cNvPr id="3" name="TextBox 2">
-            <a:extLst>
-              <a:ext uri="{FF2B5EF4-FFF2-40B4-BE49-F238E27FC236}">
-                <a16:creationId xmlns:a16="http://schemas.microsoft.com/office/drawing/2014/main" id="{50F14DBF-4F50-FCF3-98A0-A1ADB4C52400}"/>
-              </a:ext>
-            </a:extLst>
-          </p:cNvPr>
+          <p:cNvPr id="32" name="TextBox 31"/>
           <p:cNvSpPr txBox="1"/>
           <p:nvPr/>
         </p:nvSpPr>
         <p:spPr>
           <a:xfrm>
-            <a:off x="694944" y="1729579"/>
-            <a:ext cx="7173310" cy="3342453"/>
+            <a:off x="381733" y="3275758"/>
+            <a:ext cx="8905875" cy="369332"/>
           </a:xfrm>
           <a:prstGeom prst="rect">
             <a:avLst/>
@@ -7537,270 +13022,565 @@
           <a:noFill/>
         </p:spPr>
         <p:txBody>
-          <a:bodyPr wrap="none" rtlCol="0">
+          <a:bodyPr wrap="square" rtlCol="0">
             <a:spAutoFit/>
           </a:bodyPr>
           <a:lstStyle/>
           <a:p>
-            <a:pPr marL="285750" indent="-285750">
-              <a:lnSpc>
-                <a:spcPct val="115000"/>
-              </a:lnSpc>
-              <a:spcAft>
-                <a:spcPts val="800"/>
-              </a:spcAft>
-              <a:buFont typeface="Arial" panose="020B0604020202020204" pitchFamily="34" charset="0"/>
-              <a:buChar char="•"/>
-            </a:pPr>
-            <a:r>
-              <a:rPr lang="ru-RU" sz="1800" b="1" kern="100" dirty="0">
-                <a:effectLst/>
-                <a:latin typeface="Aptos" panose="020B0004020202020204" pitchFamily="34" charset="0"/>
-                <a:ea typeface="Aptos" panose="020B0004020202020204" pitchFamily="34" charset="0"/>
-                <a:cs typeface="Times New Roman" panose="02020603050405020304" pitchFamily="18" charset="0"/>
+            <a:pPr algn="just"/>
+            <a:r>
+              <a:rPr lang="ru-RU" dirty="0">
+                <a:latin typeface="Consolas" panose="020B0609020204030204" pitchFamily="49" charset="0"/>
+                <a:ea typeface="Tahoma" panose="020B0604030504040204" pitchFamily="34" charset="0"/>
+                <a:cs typeface="Tahoma" panose="020B0604030504040204" pitchFamily="34" charset="0"/>
               </a:rPr>
-              <a:t>Сокращение затрат на электроэнергию на 3,67 млн </a:t>
-            </a:r>
-            <a:r>
-              <a:rPr lang="ru-RU" b="1" i="0" dirty="0">
-                <a:solidFill>
-                  <a:srgbClr val="333333"/>
-                </a:solidFill>
-                <a:effectLst/>
-                <a:latin typeface="YS Text"/>
-              </a:rPr>
-              <a:t>₽ в год</a:t>
-            </a:r>
-          </a:p>
-          <a:p>
-            <a:pPr marL="285750" indent="-285750">
-              <a:lnSpc>
-                <a:spcPct val="115000"/>
-              </a:lnSpc>
-              <a:spcAft>
-                <a:spcPts val="800"/>
-              </a:spcAft>
-              <a:buFont typeface="Arial" panose="020B0604020202020204" pitchFamily="34" charset="0"/>
-              <a:buChar char="•"/>
-            </a:pPr>
-            <a:r>
-              <a:rPr lang="ru-RU" sz="1800" b="1" kern="100" dirty="0">
-                <a:solidFill>
-                  <a:srgbClr val="333333"/>
-                </a:solidFill>
-                <a:latin typeface="YS Text"/>
-                <a:ea typeface="Aptos" panose="020B0004020202020204" pitchFamily="34" charset="0"/>
-                <a:cs typeface="Times New Roman" panose="02020603050405020304" pitchFamily="18" charset="0"/>
-              </a:rPr>
-              <a:t>Снижение издержек </a:t>
-            </a:r>
-            <a:r>
-              <a:rPr lang="ru-RU" b="1" kern="100" dirty="0">
-                <a:solidFill>
-                  <a:srgbClr val="333333"/>
-                </a:solidFill>
-                <a:latin typeface="YS Text"/>
-                <a:ea typeface="Aptos" panose="020B0004020202020204" pitchFamily="34" charset="0"/>
-                <a:cs typeface="Times New Roman" panose="02020603050405020304" pitchFamily="18" charset="0"/>
-              </a:rPr>
-              <a:t>хранения товаров 200 000 </a:t>
-            </a:r>
-            <a:r>
-              <a:rPr lang="ru-RU" b="0" i="0" dirty="0">
-                <a:solidFill>
-                  <a:srgbClr val="333333"/>
-                </a:solidFill>
-                <a:effectLst/>
-                <a:latin typeface="YS Text"/>
-              </a:rPr>
-              <a:t> </a:t>
-            </a:r>
-            <a:r>
-              <a:rPr lang="ru-RU" b="1" i="0" dirty="0">
-                <a:solidFill>
-                  <a:srgbClr val="333333"/>
-                </a:solidFill>
-                <a:effectLst/>
-                <a:latin typeface="YS Text"/>
-              </a:rPr>
-              <a:t>₽ в год</a:t>
-            </a:r>
-          </a:p>
-          <a:p>
-            <a:pPr marL="285750" indent="-285750">
-              <a:lnSpc>
-                <a:spcPct val="115000"/>
-              </a:lnSpc>
-              <a:spcAft>
-                <a:spcPts val="800"/>
-              </a:spcAft>
-              <a:buFont typeface="Arial" panose="020B0604020202020204" pitchFamily="34" charset="0"/>
-              <a:buChar char="•"/>
-            </a:pPr>
-            <a:r>
-              <a:rPr lang="ru-RU" sz="1800" b="1" kern="100" dirty="0">
-                <a:solidFill>
-                  <a:srgbClr val="333333"/>
-                </a:solidFill>
-                <a:latin typeface="YS Text"/>
-                <a:ea typeface="Aptos" panose="020B0004020202020204" pitchFamily="34" charset="0"/>
-                <a:cs typeface="Times New Roman" panose="02020603050405020304" pitchFamily="18" charset="0"/>
-              </a:rPr>
-              <a:t>Снижение эксплуатационных затрат 300 000 </a:t>
-            </a:r>
-            <a:r>
-              <a:rPr lang="ru-RU" b="0" i="0" dirty="0">
-                <a:solidFill>
-                  <a:srgbClr val="333333"/>
-                </a:solidFill>
-                <a:effectLst/>
-                <a:latin typeface="YS Text"/>
-              </a:rPr>
-              <a:t> </a:t>
-            </a:r>
-            <a:r>
-              <a:rPr lang="ru-RU" b="1" i="0" dirty="0">
-                <a:solidFill>
-                  <a:srgbClr val="333333"/>
-                </a:solidFill>
-                <a:effectLst/>
-                <a:latin typeface="YS Text"/>
-              </a:rPr>
-              <a:t>₽</a:t>
-            </a:r>
-            <a:r>
-              <a:rPr lang="ru-RU" b="1" dirty="0">
-                <a:solidFill>
-                  <a:srgbClr val="333333"/>
-                </a:solidFill>
-                <a:latin typeface="YS Text"/>
-              </a:rPr>
-              <a:t> в год</a:t>
-            </a:r>
-          </a:p>
-          <a:p>
-            <a:pPr marL="285750" indent="-285750">
-              <a:lnSpc>
-                <a:spcPct val="115000"/>
-              </a:lnSpc>
-              <a:spcAft>
-                <a:spcPts val="800"/>
-              </a:spcAft>
-              <a:buFont typeface="Arial" panose="020B0604020202020204" pitchFamily="34" charset="0"/>
-              <a:buChar char="•"/>
-            </a:pPr>
-            <a:r>
-              <a:rPr lang="ru-RU" sz="1800" b="1" kern="100" dirty="0">
-                <a:solidFill>
-                  <a:srgbClr val="333333"/>
-                </a:solidFill>
-                <a:effectLst/>
-                <a:latin typeface="YS Text"/>
-                <a:ea typeface="Aptos" panose="020B0004020202020204" pitchFamily="34" charset="0"/>
-                <a:cs typeface="Times New Roman" panose="02020603050405020304" pitchFamily="18" charset="0"/>
-              </a:rPr>
-              <a:t>Окупаемость 26 дней</a:t>
-            </a:r>
-          </a:p>
-          <a:p>
-            <a:pPr marL="285750" indent="-285750">
-              <a:lnSpc>
-                <a:spcPct val="115000"/>
-              </a:lnSpc>
-              <a:spcAft>
-                <a:spcPts val="800"/>
-              </a:spcAft>
-              <a:buFont typeface="Arial" panose="020B0604020202020204" pitchFamily="34" charset="0"/>
-              <a:buChar char="•"/>
-            </a:pPr>
-            <a:r>
-              <a:rPr lang="ru-RU" b="1" kern="100" dirty="0">
-                <a:solidFill>
-                  <a:srgbClr val="333333"/>
-                </a:solidFill>
-                <a:latin typeface="YS Text"/>
-                <a:ea typeface="Aptos" panose="020B0004020202020204" pitchFamily="34" charset="0"/>
-                <a:cs typeface="Times New Roman" panose="02020603050405020304" pitchFamily="18" charset="0"/>
-              </a:rPr>
-              <a:t>Повышение выручки и удовлетворенности клиентов</a:t>
-            </a:r>
-          </a:p>
-          <a:p>
-            <a:pPr marL="285750" indent="-285750">
-              <a:lnSpc>
-                <a:spcPct val="115000"/>
-              </a:lnSpc>
-              <a:spcAft>
-                <a:spcPts val="800"/>
-              </a:spcAft>
-              <a:buFont typeface="Arial" panose="020B0604020202020204" pitchFamily="34" charset="0"/>
-              <a:buChar char="•"/>
-            </a:pPr>
-            <a:endParaRPr lang="ru-RU" sz="1800" b="1" kern="100" dirty="0">
-              <a:solidFill>
-                <a:srgbClr val="333333"/>
-              </a:solidFill>
-              <a:effectLst/>
-              <a:latin typeface="YS Text"/>
-              <a:ea typeface="Aptos" panose="020B0004020202020204" pitchFamily="34" charset="0"/>
-              <a:cs typeface="Times New Roman" panose="02020603050405020304" pitchFamily="18" charset="0"/>
-            </a:endParaRPr>
-          </a:p>
-          <a:p>
-            <a:pPr>
-              <a:lnSpc>
-                <a:spcPct val="115000"/>
-              </a:lnSpc>
-              <a:spcAft>
-                <a:spcPts val="800"/>
-              </a:spcAft>
-            </a:pPr>
-            <a:r>
-              <a:rPr lang="ru-RU" b="1" kern="100" dirty="0">
-                <a:solidFill>
-                  <a:srgbClr val="333333"/>
-                </a:solidFill>
-                <a:latin typeface="YS Text"/>
-                <a:ea typeface="Aptos" panose="020B0004020202020204" pitchFamily="34" charset="0"/>
-                <a:cs typeface="Times New Roman" panose="02020603050405020304" pitchFamily="18" charset="0"/>
-              </a:rPr>
-              <a:t>Итог:</a:t>
-            </a:r>
-          </a:p>
-          <a:p>
-            <a:pPr>
-              <a:lnSpc>
-                <a:spcPct val="115000"/>
-              </a:lnSpc>
-              <a:spcAft>
-                <a:spcPts val="800"/>
-              </a:spcAft>
-            </a:pPr>
-            <a:r>
-              <a:rPr lang="ru-RU" sz="1800" b="1" kern="100" dirty="0">
-                <a:solidFill>
-                  <a:srgbClr val="333333"/>
-                </a:solidFill>
-                <a:effectLst/>
-                <a:latin typeface="YS Text"/>
-                <a:ea typeface="Aptos" panose="020B0004020202020204" pitchFamily="34" charset="0"/>
-                <a:cs typeface="Times New Roman" panose="02020603050405020304" pitchFamily="18" charset="0"/>
-              </a:rPr>
-              <a:t>Эффективнее и выгоднее централизованной постоянной вентиляции</a:t>
-            </a:r>
-            <a:endParaRPr lang="ru-RU" sz="1800" b="1" kern="100" dirty="0">
-              <a:effectLst/>
-              <a:latin typeface="Aptos" panose="020B0004020202020204" pitchFamily="34" charset="0"/>
-              <a:ea typeface="Aptos" panose="020B0004020202020204" pitchFamily="34" charset="0"/>
-              <a:cs typeface="Times New Roman" panose="02020603050405020304" pitchFamily="18" charset="0"/>
-            </a:endParaRPr>
+              <a:t>Существенная экономия в короткие сроки</a:t>
+            </a:r>
           </a:p>
         </p:txBody>
       </p:sp>
+      <p:pic>
+        <p:nvPicPr>
+          <p:cNvPr id="7170" name="Picture 2" descr="Product Management - Free shipping and delivery icons"/>
+          <p:cNvPicPr>
+            <a:picLocks noChangeAspect="1" noChangeArrowheads="1"/>
+          </p:cNvPicPr>
+          <p:nvPr/>
+        </p:nvPicPr>
+        <p:blipFill>
+          <a:blip r:embed="rId2" cstate="print">
+            <a:extLst>
+              <a:ext uri="{28A0092B-C50C-407E-A947-70E740481C1C}">
+                <a14:useLocalDpi xmlns:a14="http://schemas.microsoft.com/office/drawing/2010/main" val="0"/>
+              </a:ext>
+            </a:extLst>
+          </a:blip>
+          <a:srcRect/>
+          <a:stretch>
+            <a:fillRect/>
+          </a:stretch>
+        </p:blipFill>
+        <p:spPr bwMode="auto">
+          <a:xfrm flipH="1">
+            <a:off x="3464366" y="4167571"/>
+            <a:ext cx="1702721" cy="1702721"/>
+          </a:xfrm>
+          <a:prstGeom prst="rect">
+            <a:avLst/>
+          </a:prstGeom>
+          <a:noFill/>
+          <a:extLst>
+            <a:ext uri="{909E8E84-426E-40DD-AFC4-6F175D3DCCD1}">
+              <a14:hiddenFill xmlns:a14="http://schemas.microsoft.com/office/drawing/2010/main">
+                <a:solidFill>
+                  <a:srgbClr val="FFFFFF"/>
+                </a:solidFill>
+              </a14:hiddenFill>
+            </a:ext>
+          </a:extLst>
+        </p:spPr>
+      </p:pic>
+      <p:pic>
+        <p:nvPicPr>
+          <p:cNvPr id="7172" name="Picture 4" descr="Economic - Free business icons"/>
+          <p:cNvPicPr>
+            <a:picLocks noChangeAspect="1" noChangeArrowheads="1"/>
+          </p:cNvPicPr>
+          <p:nvPr/>
+        </p:nvPicPr>
+        <p:blipFill>
+          <a:blip r:embed="rId3">
+            <a:extLst>
+              <a:ext uri="{28A0092B-C50C-407E-A947-70E740481C1C}">
+                <a14:useLocalDpi xmlns:a14="http://schemas.microsoft.com/office/drawing/2010/main" val="0"/>
+              </a:ext>
+            </a:extLst>
+          </a:blip>
+          <a:srcRect/>
+          <a:stretch>
+            <a:fillRect/>
+          </a:stretch>
+        </p:blipFill>
+        <p:spPr bwMode="auto">
+          <a:xfrm>
+            <a:off x="9287608" y="4083840"/>
+            <a:ext cx="1685516" cy="1685516"/>
+          </a:xfrm>
+          <a:prstGeom prst="rect">
+            <a:avLst/>
+          </a:prstGeom>
+          <a:noFill/>
+          <a:extLst>
+            <a:ext uri="{909E8E84-426E-40DD-AFC4-6F175D3DCCD1}">
+              <a14:hiddenFill xmlns:a14="http://schemas.microsoft.com/office/drawing/2010/main">
+                <a:solidFill>
+                  <a:srgbClr val="FFFFFF"/>
+                </a:solidFill>
+              </a14:hiddenFill>
+            </a:ext>
+          </a:extLst>
+        </p:spPr>
+      </p:pic>
+      <p:sp>
+        <p:nvSpPr>
+          <p:cNvPr id="33" name="TextBox 32"/>
+          <p:cNvSpPr txBox="1"/>
+          <p:nvPr/>
+        </p:nvSpPr>
+        <p:spPr>
+          <a:xfrm>
+            <a:off x="415677" y="4603432"/>
+            <a:ext cx="2819615" cy="830997"/>
+          </a:xfrm>
+          <a:prstGeom prst="rect">
+            <a:avLst/>
+          </a:prstGeom>
+          <a:noFill/>
+        </p:spPr>
+        <p:txBody>
+          <a:bodyPr wrap="square" rtlCol="0">
+            <a:spAutoFit/>
+          </a:bodyPr>
+          <a:lstStyle/>
+          <a:p>
+            <a:pPr algn="just"/>
+            <a:r>
+              <a:rPr lang="ru-RU" sz="2400" dirty="0">
+                <a:latin typeface="Consolas" panose="020B0609020204030204" pitchFamily="49" charset="0"/>
+                <a:ea typeface="Tahoma" panose="020B0604030504040204" pitchFamily="34" charset="0"/>
+                <a:cs typeface="Tahoma" panose="020B0604030504040204" pitchFamily="34" charset="0"/>
+              </a:rPr>
+              <a:t>Мы даем вам рабочий продукт</a:t>
+            </a:r>
+          </a:p>
+        </p:txBody>
+      </p:sp>
+      <p:sp>
+        <p:nvSpPr>
+          <p:cNvPr id="34" name="TextBox 33"/>
+          <p:cNvSpPr txBox="1"/>
+          <p:nvPr/>
+        </p:nvSpPr>
+        <p:spPr>
+          <a:xfrm>
+            <a:off x="6315873" y="4199696"/>
+            <a:ext cx="2664214" cy="1569660"/>
+          </a:xfrm>
+          <a:prstGeom prst="rect">
+            <a:avLst/>
+          </a:prstGeom>
+          <a:noFill/>
+        </p:spPr>
+        <p:txBody>
+          <a:bodyPr wrap="square" rtlCol="0">
+            <a:spAutoFit/>
+          </a:bodyPr>
+          <a:lstStyle/>
+          <a:p>
+            <a:pPr algn="just"/>
+            <a:r>
+              <a:rPr lang="ru-RU" sz="2400" dirty="0">
+                <a:latin typeface="Consolas" panose="020B0609020204030204" pitchFamily="49" charset="0"/>
+                <a:ea typeface="Tahoma" panose="020B0604030504040204" pitchFamily="34" charset="0"/>
+                <a:cs typeface="Tahoma" panose="020B0604030504040204" pitchFamily="34" charset="0"/>
+              </a:rPr>
+              <a:t>Вы получаете экономию и заботу о вашем микроклимате</a:t>
+            </a:r>
+          </a:p>
+        </p:txBody>
+      </p:sp>
+      <p:pic>
+        <p:nvPicPr>
+          <p:cNvPr id="7176" name="Picture 8" descr="Green leaves Vectors - Download Free High-Quality Vectors | Magnific  (formerly Freepik)"/>
+          <p:cNvPicPr>
+            <a:picLocks noChangeAspect="1" noChangeArrowheads="1"/>
+          </p:cNvPicPr>
+          <p:nvPr/>
+        </p:nvPicPr>
+        <p:blipFill>
+          <a:blip r:embed="rId4" cstate="print">
+            <a:extLst>
+              <a:ext uri="{BEBA8EAE-BF5A-486C-A8C5-ECC9F3942E4B}">
+                <a14:imgProps xmlns:a14="http://schemas.microsoft.com/office/drawing/2010/main">
+                  <a14:imgLayer r:embed="rId5">
+                    <a14:imgEffect>
+                      <a14:backgroundRemoval t="0" b="75811" l="0" r="100000">
+                        <a14:foregroundMark x1="72162" y1="17162" x2="72162" y2="17162"/>
+                        <a14:foregroundMark x1="85676" y1="5000" x2="85676" y2="5000"/>
+                        <a14:foregroundMark x1="23378" y1="5000" x2="23378" y2="5000"/>
+                        <a14:foregroundMark x1="25135" y1="33378" x2="25135" y2="33378"/>
+                        <a14:foregroundMark x1="40270" y1="43649" x2="40270" y2="43649"/>
+                        <a14:foregroundMark x1="42432" y1="34595" x2="42432" y2="34595"/>
+                        <a14:foregroundMark x1="33649" y1="25541" x2="33649" y2="25541"/>
+                        <a14:foregroundMark x1="24595" y1="22027" x2="24595" y2="22027"/>
+                        <a14:foregroundMark x1="22297" y1="13243" x2="22297" y2="13243"/>
+                        <a14:foregroundMark x1="16081" y1="11757" x2="16081" y2="11757"/>
+                        <a14:foregroundMark x1="5000" y1="11351" x2="5000" y2="11351"/>
+                        <a14:foregroundMark x1="9054" y1="31486" x2="9054" y2="31486"/>
+                        <a14:foregroundMark x1="17162" y1="42703" x2="17162" y2="42703"/>
+                        <a14:foregroundMark x1="25811" y1="47162" x2="25811" y2="47162"/>
+                        <a14:foregroundMark x1="32568" y1="46622" x2="32568" y2="46622"/>
+                        <a14:foregroundMark x1="37162" y1="61757" x2="37162" y2="61757"/>
+                        <a14:foregroundMark x1="53784" y1="56216" x2="53784" y2="56216"/>
+                        <a14:foregroundMark x1="70270" y1="57297" x2="70270" y2="57297"/>
+                        <a14:foregroundMark x1="71351" y1="36486" x2="71351" y2="36486"/>
+                        <a14:foregroundMark x1="78108" y1="42838" x2="78108" y2="42838"/>
+                        <a14:foregroundMark x1="79730" y1="29054" x2="79730" y2="29054"/>
+                        <a14:foregroundMark x1="90405" y1="36216" x2="90405" y2="36216"/>
+                        <a14:foregroundMark x1="95000" y1="23514" x2="95000" y2="23514"/>
+                        <a14:foregroundMark x1="73919" y1="8919" x2="73919" y2="8919"/>
+                        <a14:foregroundMark x1="75405" y1="3514" x2="75405" y2="3514"/>
+                        <a14:foregroundMark x1="68784" y1="5000" x2="68784" y2="5000"/>
+                        <a14:foregroundMark x1="64324" y1="7432" x2="64324" y2="7432"/>
+                        <a14:foregroundMark x1="60541" y1="3784" x2="60541" y2="3784"/>
+                        <a14:foregroundMark x1="92703" y1="7432" x2="92703" y2="7432"/>
+                        <a14:foregroundMark x1="48649" y1="36486" x2="48649" y2="36486"/>
+                        <a14:foregroundMark x1="28649" y1="35000" x2="28649" y2="35000"/>
+                        <a14:foregroundMark x1="29324" y1="12432" x2="29324" y2="12432"/>
+                        <a14:backgroundMark x1="27027" y1="1081" x2="27027" y2="1081"/>
+                        <a14:backgroundMark x1="44595" y1="13649" x2="44595" y2="13649"/>
+                        <a14:backgroundMark x1="36351" y1="11351" x2="36351" y2="11351"/>
+                        <a14:backgroundMark x1="58919" y1="36216" x2="58919" y2="36216"/>
+                        <a14:backgroundMark x1="57973" y1="27027" x2="57973" y2="27027"/>
+                      </a14:backgroundRemoval>
+                    </a14:imgEffect>
+                  </a14:imgLayer>
+                </a14:imgProps>
+              </a:ext>
+              <a:ext uri="{28A0092B-C50C-407E-A947-70E740481C1C}">
+                <a14:useLocalDpi xmlns:a14="http://schemas.microsoft.com/office/drawing/2010/main" val="0"/>
+              </a:ext>
+            </a:extLst>
+          </a:blip>
+          <a:srcRect/>
+          <a:stretch>
+            <a:fillRect/>
+          </a:stretch>
+        </p:blipFill>
+        <p:spPr bwMode="auto">
+          <a:xfrm rot="5400000">
+            <a:off x="9618951" y="1063712"/>
+            <a:ext cx="2573048" cy="2573049"/>
+          </a:xfrm>
+          <a:prstGeom prst="rect">
+            <a:avLst/>
+          </a:prstGeom>
+          <a:noFill/>
+          <a:extLst>
+            <a:ext uri="{909E8E84-426E-40DD-AFC4-6F175D3DCCD1}">
+              <a14:hiddenFill xmlns:a14="http://schemas.microsoft.com/office/drawing/2010/main">
+                <a:solidFill>
+                  <a:srgbClr val="FFFFFF"/>
+                </a:solidFill>
+              </a14:hiddenFill>
+            </a:ext>
+          </a:extLst>
+        </p:spPr>
+      </p:pic>
+      <p:pic>
+        <p:nvPicPr>
+          <p:cNvPr id="37" name="Picture 8" descr="Green leaves Vectors - Download Free High-Quality Vectors | Magnific  (formerly Freepik)"/>
+          <p:cNvPicPr>
+            <a:picLocks noChangeAspect="1" noChangeArrowheads="1"/>
+          </p:cNvPicPr>
+          <p:nvPr/>
+        </p:nvPicPr>
+        <p:blipFill>
+          <a:blip r:embed="rId6" cstate="print">
+            <a:extLst>
+              <a:ext uri="{BEBA8EAE-BF5A-486C-A8C5-ECC9F3942E4B}">
+                <a14:imgProps xmlns:a14="http://schemas.microsoft.com/office/drawing/2010/main">
+                  <a14:imgLayer r:embed="rId5">
+                    <a14:imgEffect>
+                      <a14:backgroundRemoval t="65946" b="100000" l="0" r="100000">
+                        <a14:foregroundMark x1="12297" y1="99189" x2="12297" y2="99189"/>
+                        <a14:foregroundMark x1="22838" y1="86351" x2="22838" y2="86351"/>
+                        <a14:foregroundMark x1="12703" y1="84865" x2="12703" y2="84865"/>
+                        <a14:foregroundMark x1="40000" y1="84730" x2="40000" y2="84730"/>
+                        <a14:backgroundMark x1="33378" y1="94595" x2="33378" y2="94595"/>
+                        <a14:backgroundMark x1="65541" y1="94054" x2="65541" y2="94054"/>
+                        <a14:backgroundMark x1="64730" y1="93378" x2="64730" y2="93378"/>
+                        <a14:backgroundMark x1="66757" y1="92703" x2="66757" y2="92703"/>
+                        <a14:backgroundMark x1="86081" y1="88649" x2="86081" y2="88649"/>
+                      </a14:backgroundRemoval>
+                    </a14:imgEffect>
+                  </a14:imgLayer>
+                </a14:imgProps>
+              </a:ext>
+              <a:ext uri="{28A0092B-C50C-407E-A947-70E740481C1C}">
+                <a14:useLocalDpi xmlns:a14="http://schemas.microsoft.com/office/drawing/2010/main" val="0"/>
+              </a:ext>
+            </a:extLst>
+          </a:blip>
+          <a:srcRect/>
+          <a:stretch>
+            <a:fillRect/>
+          </a:stretch>
+        </p:blipFill>
+        <p:spPr bwMode="auto">
+          <a:xfrm>
+            <a:off x="2574466" y="4292372"/>
+            <a:ext cx="2573048" cy="2573049"/>
+          </a:xfrm>
+          <a:prstGeom prst="rect">
+            <a:avLst/>
+          </a:prstGeom>
+          <a:noFill/>
+          <a:extLst>
+            <a:ext uri="{909E8E84-426E-40DD-AFC4-6F175D3DCCD1}">
+              <a14:hiddenFill xmlns:a14="http://schemas.microsoft.com/office/drawing/2010/main">
+                <a:solidFill>
+                  <a:srgbClr val="FFFFFF"/>
+                </a:solidFill>
+              </a14:hiddenFill>
+            </a:ext>
+          </a:extLst>
+        </p:spPr>
+      </p:pic>
+      <p:pic>
+        <p:nvPicPr>
+          <p:cNvPr id="38" name="Picture 8" descr="Green leaves Vectors - Download Free High-Quality Vectors | Magnific  (formerly Freepik)"/>
+          <p:cNvPicPr>
+            <a:picLocks noChangeAspect="1" noChangeArrowheads="1"/>
+          </p:cNvPicPr>
+          <p:nvPr/>
+        </p:nvPicPr>
+        <p:blipFill>
+          <a:blip r:embed="rId7" cstate="print">
+            <a:extLst>
+              <a:ext uri="{BEBA8EAE-BF5A-486C-A8C5-ECC9F3942E4B}">
+                <a14:imgProps xmlns:a14="http://schemas.microsoft.com/office/drawing/2010/main">
+                  <a14:imgLayer r:embed="rId8">
+                    <a14:imgEffect>
+                      <a14:backgroundRemoval t="65946" b="100000" l="0" r="100000">
+                        <a14:foregroundMark x1="12297" y1="99189" x2="12297" y2="99189"/>
+                        <a14:foregroundMark x1="22838" y1="86351" x2="22838" y2="86351"/>
+                        <a14:foregroundMark x1="12703" y1="84865" x2="12703" y2="84865"/>
+                        <a14:foregroundMark x1="40000" y1="84730" x2="40000" y2="84730"/>
+                        <a14:backgroundMark x1="33378" y1="94595" x2="33378" y2="94595"/>
+                        <a14:backgroundMark x1="65541" y1="94054" x2="65541" y2="94054"/>
+                        <a14:backgroundMark x1="64730" y1="93378" x2="64730" y2="93378"/>
+                        <a14:backgroundMark x1="66757" y1="92703" x2="66757" y2="92703"/>
+                        <a14:backgroundMark x1="86081" y1="88649" x2="86081" y2="88649"/>
+                      </a14:backgroundRemoval>
+                    </a14:imgEffect>
+                  </a14:imgLayer>
+                </a14:imgProps>
+              </a:ext>
+              <a:ext uri="{28A0092B-C50C-407E-A947-70E740481C1C}">
+                <a14:useLocalDpi xmlns:a14="http://schemas.microsoft.com/office/drawing/2010/main" val="0"/>
+              </a:ext>
+            </a:extLst>
+          </a:blip>
+          <a:srcRect/>
+          <a:stretch>
+            <a:fillRect/>
+          </a:stretch>
+        </p:blipFill>
+        <p:spPr bwMode="auto">
+          <a:xfrm>
+            <a:off x="-85725" y="4284949"/>
+            <a:ext cx="2713297" cy="2573049"/>
+          </a:xfrm>
+          <a:prstGeom prst="rect">
+            <a:avLst/>
+          </a:prstGeom>
+          <a:noFill/>
+          <a:extLst>
+            <a:ext uri="{909E8E84-426E-40DD-AFC4-6F175D3DCCD1}">
+              <a14:hiddenFill xmlns:a14="http://schemas.microsoft.com/office/drawing/2010/main">
+                <a:solidFill>
+                  <a:srgbClr val="FFFFFF"/>
+                </a:solidFill>
+              </a14:hiddenFill>
+            </a:ext>
+          </a:extLst>
+        </p:spPr>
+      </p:pic>
+      <p:pic>
+        <p:nvPicPr>
+          <p:cNvPr id="39" name="Picture 8" descr="Green leaves Vectors - Download Free High-Quality Vectors | Magnific  (formerly Freepik)"/>
+          <p:cNvPicPr>
+            <a:picLocks noChangeAspect="1" noChangeArrowheads="1"/>
+          </p:cNvPicPr>
+          <p:nvPr/>
+        </p:nvPicPr>
+        <p:blipFill>
+          <a:blip r:embed="rId6" cstate="print">
+            <a:extLst>
+              <a:ext uri="{BEBA8EAE-BF5A-486C-A8C5-ECC9F3942E4B}">
+                <a14:imgProps xmlns:a14="http://schemas.microsoft.com/office/drawing/2010/main">
+                  <a14:imgLayer r:embed="rId5">
+                    <a14:imgEffect>
+                      <a14:backgroundRemoval t="65946" b="100000" l="0" r="100000">
+                        <a14:foregroundMark x1="12297" y1="99189" x2="12297" y2="99189"/>
+                        <a14:foregroundMark x1="22838" y1="86351" x2="22838" y2="86351"/>
+                        <a14:foregroundMark x1="12703" y1="84865" x2="12703" y2="84865"/>
+                        <a14:foregroundMark x1="40000" y1="84730" x2="40000" y2="84730"/>
+                        <a14:backgroundMark x1="33378" y1="94595" x2="33378" y2="94595"/>
+                        <a14:backgroundMark x1="65541" y1="94054" x2="65541" y2="94054"/>
+                        <a14:backgroundMark x1="64730" y1="93378" x2="64730" y2="93378"/>
+                        <a14:backgroundMark x1="66757" y1="92703" x2="66757" y2="92703"/>
+                        <a14:backgroundMark x1="86081" y1="88649" x2="86081" y2="88649"/>
+                      </a14:backgroundRemoval>
+                    </a14:imgEffect>
+                  </a14:imgLayer>
+                </a14:imgProps>
+              </a:ext>
+              <a:ext uri="{28A0092B-C50C-407E-A947-70E740481C1C}">
+                <a14:useLocalDpi xmlns:a14="http://schemas.microsoft.com/office/drawing/2010/main" val="0"/>
+              </a:ext>
+            </a:extLst>
+          </a:blip>
+          <a:srcRect/>
+          <a:stretch>
+            <a:fillRect/>
+          </a:stretch>
+        </p:blipFill>
+        <p:spPr bwMode="auto">
+          <a:xfrm>
+            <a:off x="7004364" y="4284950"/>
+            <a:ext cx="2573048" cy="2573049"/>
+          </a:xfrm>
+          <a:prstGeom prst="rect">
+            <a:avLst/>
+          </a:prstGeom>
+          <a:noFill/>
+          <a:extLst>
+            <a:ext uri="{909E8E84-426E-40DD-AFC4-6F175D3DCCD1}">
+              <a14:hiddenFill xmlns:a14="http://schemas.microsoft.com/office/drawing/2010/main">
+                <a:solidFill>
+                  <a:srgbClr val="FFFFFF"/>
+                </a:solidFill>
+              </a14:hiddenFill>
+            </a:ext>
+          </a:extLst>
+        </p:spPr>
+      </p:pic>
+      <p:pic>
+        <p:nvPicPr>
+          <p:cNvPr id="40" name="Picture 8" descr="Green leaves Vectors - Download Free High-Quality Vectors | Magnific  (formerly Freepik)"/>
+          <p:cNvPicPr>
+            <a:picLocks noChangeAspect="1" noChangeArrowheads="1"/>
+          </p:cNvPicPr>
+          <p:nvPr/>
+        </p:nvPicPr>
+        <p:blipFill>
+          <a:blip r:embed="rId6" cstate="print">
+            <a:extLst>
+              <a:ext uri="{BEBA8EAE-BF5A-486C-A8C5-ECC9F3942E4B}">
+                <a14:imgProps xmlns:a14="http://schemas.microsoft.com/office/drawing/2010/main">
+                  <a14:imgLayer r:embed="rId5">
+                    <a14:imgEffect>
+                      <a14:backgroundRemoval t="65946" b="100000" l="0" r="100000">
+                        <a14:foregroundMark x1="12297" y1="99189" x2="12297" y2="99189"/>
+                        <a14:foregroundMark x1="22838" y1="86351" x2="22838" y2="86351"/>
+                        <a14:foregroundMark x1="12703" y1="84865" x2="12703" y2="84865"/>
+                        <a14:foregroundMark x1="40000" y1="84730" x2="40000" y2="84730"/>
+                        <a14:backgroundMark x1="33378" y1="94595" x2="33378" y2="94595"/>
+                        <a14:backgroundMark x1="65541" y1="94054" x2="65541" y2="94054"/>
+                        <a14:backgroundMark x1="64730" y1="93378" x2="64730" y2="93378"/>
+                        <a14:backgroundMark x1="66757" y1="92703" x2="66757" y2="92703"/>
+                        <a14:backgroundMark x1="86081" y1="88649" x2="86081" y2="88649"/>
+                      </a14:backgroundRemoval>
+                    </a14:imgEffect>
+                  </a14:imgLayer>
+                </a14:imgProps>
+              </a:ext>
+              <a:ext uri="{28A0092B-C50C-407E-A947-70E740481C1C}">
+                <a14:useLocalDpi xmlns:a14="http://schemas.microsoft.com/office/drawing/2010/main" val="0"/>
+              </a:ext>
+            </a:extLst>
+          </a:blip>
+          <a:srcRect/>
+          <a:stretch>
+            <a:fillRect/>
+          </a:stretch>
+        </p:blipFill>
+        <p:spPr bwMode="auto">
+          <a:xfrm flipH="1">
+            <a:off x="4875589" y="4284951"/>
+            <a:ext cx="2573048" cy="2573049"/>
+          </a:xfrm>
+          <a:prstGeom prst="rect">
+            <a:avLst/>
+          </a:prstGeom>
+          <a:noFill/>
+          <a:extLst>
+            <a:ext uri="{909E8E84-426E-40DD-AFC4-6F175D3DCCD1}">
+              <a14:hiddenFill xmlns:a14="http://schemas.microsoft.com/office/drawing/2010/main">
+                <a:solidFill>
+                  <a:srgbClr val="FFFFFF"/>
+                </a:solidFill>
+              </a14:hiddenFill>
+            </a:ext>
+          </a:extLst>
+        </p:spPr>
+      </p:pic>
+      <p:pic>
+        <p:nvPicPr>
+          <p:cNvPr id="41" name="Picture 8" descr="Green leaves Vectors - Download Free High-Quality Vectors | Magnific  (formerly Freepik)"/>
+          <p:cNvPicPr>
+            <a:picLocks noChangeAspect="1" noChangeArrowheads="1"/>
+          </p:cNvPicPr>
+          <p:nvPr/>
+        </p:nvPicPr>
+        <p:blipFill>
+          <a:blip r:embed="rId9" cstate="print">
+            <a:extLst>
+              <a:ext uri="{BEBA8EAE-BF5A-486C-A8C5-ECC9F3942E4B}">
+                <a14:imgProps xmlns:a14="http://schemas.microsoft.com/office/drawing/2010/main">
+                  <a14:imgLayer r:embed="rId10">
+                    <a14:imgEffect>
+                      <a14:backgroundRemoval t="65946" b="100000" l="0" r="100000">
+                        <a14:foregroundMark x1="12297" y1="99189" x2="12297" y2="99189"/>
+                        <a14:foregroundMark x1="22838" y1="86351" x2="22838" y2="86351"/>
+                        <a14:foregroundMark x1="12703" y1="84865" x2="12703" y2="84865"/>
+                        <a14:foregroundMark x1="40000" y1="84730" x2="40000" y2="84730"/>
+                        <a14:backgroundMark x1="33378" y1="94595" x2="33378" y2="94595"/>
+                        <a14:backgroundMark x1="65541" y1="94054" x2="65541" y2="94054"/>
+                        <a14:backgroundMark x1="64730" y1="93378" x2="64730" y2="93378"/>
+                        <a14:backgroundMark x1="66757" y1="92703" x2="66757" y2="92703"/>
+                        <a14:backgroundMark x1="86081" y1="88649" x2="86081" y2="88649"/>
+                      </a14:backgroundRemoval>
+                    </a14:imgEffect>
+                  </a14:imgLayer>
+                </a14:imgProps>
+              </a:ext>
+              <a:ext uri="{28A0092B-C50C-407E-A947-70E740481C1C}">
+                <a14:useLocalDpi xmlns:a14="http://schemas.microsoft.com/office/drawing/2010/main" val="0"/>
+              </a:ext>
+            </a:extLst>
+          </a:blip>
+          <a:srcRect/>
+          <a:stretch>
+            <a:fillRect/>
+          </a:stretch>
+        </p:blipFill>
+        <p:spPr bwMode="auto">
+          <a:xfrm flipH="1">
+            <a:off x="9571954" y="4284951"/>
+            <a:ext cx="2620045" cy="2573049"/>
+          </a:xfrm>
+          <a:prstGeom prst="rect">
+            <a:avLst/>
+          </a:prstGeom>
+          <a:noFill/>
+          <a:extLst>
+            <a:ext uri="{909E8E84-426E-40DD-AFC4-6F175D3DCCD1}">
+              <a14:hiddenFill xmlns:a14="http://schemas.microsoft.com/office/drawing/2010/main">
+                <a:solidFill>
+                  <a:srgbClr val="FFFFFF"/>
+                </a:solidFill>
+              </a14:hiddenFill>
+            </a:ext>
+          </a:extLst>
+        </p:spPr>
+      </p:pic>
     </p:spTree>
     <p:extLst>
       <p:ext uri="{BB962C8B-B14F-4D97-AF65-F5344CB8AC3E}">
-        <p14:creationId xmlns:p14="http://schemas.microsoft.com/office/powerpoint/2010/main" val="1955822432"/>
+        <p14:creationId xmlns:p14="http://schemas.microsoft.com/office/powerpoint/2010/main" val="2070954628"/>
       </p:ext>
     </p:extLst>
   </p:cSld>
